--- a/Du An/A Tuan Dan So/Bai 1. Nhap mon DSH - Light.pptx
+++ b/Du An/A Tuan Dan So/Bai 1. Nhap mon DSH - Light.pptx
@@ -142,7 +142,7 @@
           <p:cNvPr id="2" name="Title 1">
             <a:extLst>
               <a:ext uri="{FF2B5EF4-FFF2-40B4-BE49-F238E27FC236}">
-                <a16:creationId xmlns:a16="http://schemas.microsoft.com/office/drawing/2014/main" id="{2AB6A121-7B67-80E7-E574-BC011C908382}"/>
+                <a16:creationId xmlns:a16="http://schemas.microsoft.com/office/drawing/2014/main" id="{792371E5-A925-BD7B-8F1C-4129482B1324}"/>
               </a:ext>
             </a:extLst>
           </p:cNvPr>
@@ -179,7 +179,7 @@
           <p:cNvPr id="3" name="Subtitle 2">
             <a:extLst>
               <a:ext uri="{FF2B5EF4-FFF2-40B4-BE49-F238E27FC236}">
-                <a16:creationId xmlns:a16="http://schemas.microsoft.com/office/drawing/2014/main" id="{6DF9E4F6-0F4A-6B54-DCB4-710368793FCF}"/>
+                <a16:creationId xmlns:a16="http://schemas.microsoft.com/office/drawing/2014/main" id="{A125B9E2-19D3-8FDD-572C-7A327C02AB95}"/>
               </a:ext>
             </a:extLst>
           </p:cNvPr>
@@ -249,7 +249,7 @@
           <p:cNvPr id="4" name="Date Placeholder 3">
             <a:extLst>
               <a:ext uri="{FF2B5EF4-FFF2-40B4-BE49-F238E27FC236}">
-                <a16:creationId xmlns:a16="http://schemas.microsoft.com/office/drawing/2014/main" id="{DABFFDE9-27E8-FEE8-34E0-8538196686B1}"/>
+                <a16:creationId xmlns:a16="http://schemas.microsoft.com/office/drawing/2014/main" id="{67B06FD4-FE46-B616-10DE-28C50CF7F846}"/>
               </a:ext>
             </a:extLst>
           </p:cNvPr>
@@ -265,7 +265,7 @@
           <a:bodyPr/>
           <a:lstStyle/>
           <a:p>
-            <a:fld id="{465FAC82-013A-458C-9679-24EC42713681}" type="datetimeFigureOut">
+            <a:fld id="{F614FA87-28C6-4ACF-86AE-679368991B93}" type="datetimeFigureOut">
               <a:rPr lang="en-US" smtClean="0"/>
               <a:t>9/18/2026</a:t>
             </a:fld>
@@ -278,7 +278,7 @@
           <p:cNvPr id="5" name="Footer Placeholder 4">
             <a:extLst>
               <a:ext uri="{FF2B5EF4-FFF2-40B4-BE49-F238E27FC236}">
-                <a16:creationId xmlns:a16="http://schemas.microsoft.com/office/drawing/2014/main" id="{2A42E7E3-C796-71AF-6CA2-B569C16FD5F5}"/>
+                <a16:creationId xmlns:a16="http://schemas.microsoft.com/office/drawing/2014/main" id="{FD316FDB-206D-8095-2021-0ECFEE531846}"/>
               </a:ext>
             </a:extLst>
           </p:cNvPr>
@@ -303,7 +303,7 @@
           <p:cNvPr id="6" name="Slide Number Placeholder 5">
             <a:extLst>
               <a:ext uri="{FF2B5EF4-FFF2-40B4-BE49-F238E27FC236}">
-                <a16:creationId xmlns:a16="http://schemas.microsoft.com/office/drawing/2014/main" id="{6A8AE717-9A0D-B6B9-D0A7-2CCD66931F47}"/>
+                <a16:creationId xmlns:a16="http://schemas.microsoft.com/office/drawing/2014/main" id="{D750BAD0-B564-666E-ED0D-F7F0C4C111E8}"/>
               </a:ext>
             </a:extLst>
           </p:cNvPr>
@@ -319,7 +319,7 @@
           <a:bodyPr/>
           <a:lstStyle/>
           <a:p>
-            <a:fld id="{1F5A4FA1-965A-4F54-B98C-0E86DEFBD244}" type="slidenum">
+            <a:fld id="{478463AA-DF53-4948-AF28-EAEE1C209794}" type="slidenum">
               <a:rPr lang="en-US" smtClean="0"/>
               <a:t>‹#›</a:t>
             </a:fld>
@@ -330,7 +330,7 @@
     </p:spTree>
     <p:extLst>
       <p:ext uri="{BB962C8B-B14F-4D97-AF65-F5344CB8AC3E}">
-        <p14:creationId xmlns:p14="http://schemas.microsoft.com/office/powerpoint/2010/main" val="1566536877"/>
+        <p14:creationId xmlns:p14="http://schemas.microsoft.com/office/powerpoint/2010/main" val="4074666989"/>
       </p:ext>
     </p:extLst>
   </p:cSld>
@@ -362,7 +362,7 @@
           <p:cNvPr id="2" name="Title 1">
             <a:extLst>
               <a:ext uri="{FF2B5EF4-FFF2-40B4-BE49-F238E27FC236}">
-                <a16:creationId xmlns:a16="http://schemas.microsoft.com/office/drawing/2014/main" id="{7762D4DC-CECC-1424-518F-19244AEC84DC}"/>
+                <a16:creationId xmlns:a16="http://schemas.microsoft.com/office/drawing/2014/main" id="{BF37A08A-BA9C-7C03-7C1D-9A889DE05068}"/>
               </a:ext>
             </a:extLst>
           </p:cNvPr>
@@ -390,7 +390,7 @@
           <p:cNvPr id="3" name="Vertical Text Placeholder 2">
             <a:extLst>
               <a:ext uri="{FF2B5EF4-FFF2-40B4-BE49-F238E27FC236}">
-                <a16:creationId xmlns:a16="http://schemas.microsoft.com/office/drawing/2014/main" id="{3B27CF21-2332-2122-524E-E05EC375305F}"/>
+                <a16:creationId xmlns:a16="http://schemas.microsoft.com/office/drawing/2014/main" id="{9C7E5182-2EB9-9BA7-7DD2-B3BA73C18F8A}"/>
               </a:ext>
             </a:extLst>
           </p:cNvPr>
@@ -447,7 +447,7 @@
           <p:cNvPr id="4" name="Date Placeholder 3">
             <a:extLst>
               <a:ext uri="{FF2B5EF4-FFF2-40B4-BE49-F238E27FC236}">
-                <a16:creationId xmlns:a16="http://schemas.microsoft.com/office/drawing/2014/main" id="{B7DEB5B8-E7BF-3FA0-CF28-FA77DA395849}"/>
+                <a16:creationId xmlns:a16="http://schemas.microsoft.com/office/drawing/2014/main" id="{3086442E-4D5E-E3A5-E944-AACBD4CBFABD}"/>
               </a:ext>
             </a:extLst>
           </p:cNvPr>
@@ -463,7 +463,7 @@
           <a:bodyPr/>
           <a:lstStyle/>
           <a:p>
-            <a:fld id="{465FAC82-013A-458C-9679-24EC42713681}" type="datetimeFigureOut">
+            <a:fld id="{F614FA87-28C6-4ACF-86AE-679368991B93}" type="datetimeFigureOut">
               <a:rPr lang="en-US" smtClean="0"/>
               <a:t>9/18/2026</a:t>
             </a:fld>
@@ -476,7 +476,7 @@
           <p:cNvPr id="5" name="Footer Placeholder 4">
             <a:extLst>
               <a:ext uri="{FF2B5EF4-FFF2-40B4-BE49-F238E27FC236}">
-                <a16:creationId xmlns:a16="http://schemas.microsoft.com/office/drawing/2014/main" id="{CD5ED966-A92A-05BE-B07F-DD5936465F98}"/>
+                <a16:creationId xmlns:a16="http://schemas.microsoft.com/office/drawing/2014/main" id="{03A9197E-0A27-6F79-B002-A57FF54152D8}"/>
               </a:ext>
             </a:extLst>
           </p:cNvPr>
@@ -501,7 +501,7 @@
           <p:cNvPr id="6" name="Slide Number Placeholder 5">
             <a:extLst>
               <a:ext uri="{FF2B5EF4-FFF2-40B4-BE49-F238E27FC236}">
-                <a16:creationId xmlns:a16="http://schemas.microsoft.com/office/drawing/2014/main" id="{86287DFD-D805-DC66-C624-8B5145B9A2A4}"/>
+                <a16:creationId xmlns:a16="http://schemas.microsoft.com/office/drawing/2014/main" id="{949EB915-9C60-3813-78E5-5E3750185E74}"/>
               </a:ext>
             </a:extLst>
           </p:cNvPr>
@@ -517,7 +517,7 @@
           <a:bodyPr/>
           <a:lstStyle/>
           <a:p>
-            <a:fld id="{1F5A4FA1-965A-4F54-B98C-0E86DEFBD244}" type="slidenum">
+            <a:fld id="{478463AA-DF53-4948-AF28-EAEE1C209794}" type="slidenum">
               <a:rPr lang="en-US" smtClean="0"/>
               <a:t>‹#›</a:t>
             </a:fld>
@@ -528,7 +528,7 @@
     </p:spTree>
     <p:extLst>
       <p:ext uri="{BB962C8B-B14F-4D97-AF65-F5344CB8AC3E}">
-        <p14:creationId xmlns:p14="http://schemas.microsoft.com/office/powerpoint/2010/main" val="970926204"/>
+        <p14:creationId xmlns:p14="http://schemas.microsoft.com/office/powerpoint/2010/main" val="3598986447"/>
       </p:ext>
     </p:extLst>
   </p:cSld>
@@ -560,7 +560,7 @@
           <p:cNvPr id="2" name="Vertical Title 1">
             <a:extLst>
               <a:ext uri="{FF2B5EF4-FFF2-40B4-BE49-F238E27FC236}">
-                <a16:creationId xmlns:a16="http://schemas.microsoft.com/office/drawing/2014/main" id="{01967892-6A02-4165-B89A-22CF8A087921}"/>
+                <a16:creationId xmlns:a16="http://schemas.microsoft.com/office/drawing/2014/main" id="{446C58CE-3C89-F514-54B4-F77C3FB48C7D}"/>
               </a:ext>
             </a:extLst>
           </p:cNvPr>
@@ -593,7 +593,7 @@
           <p:cNvPr id="3" name="Vertical Text Placeholder 2">
             <a:extLst>
               <a:ext uri="{FF2B5EF4-FFF2-40B4-BE49-F238E27FC236}">
-                <a16:creationId xmlns:a16="http://schemas.microsoft.com/office/drawing/2014/main" id="{C9F1D7B8-4741-3D46-B2A0-BF004E0D2944}"/>
+                <a16:creationId xmlns:a16="http://schemas.microsoft.com/office/drawing/2014/main" id="{6AABBFD7-13C9-44DA-E139-E80D3035AC27}"/>
               </a:ext>
             </a:extLst>
           </p:cNvPr>
@@ -655,7 +655,7 @@
           <p:cNvPr id="4" name="Date Placeholder 3">
             <a:extLst>
               <a:ext uri="{FF2B5EF4-FFF2-40B4-BE49-F238E27FC236}">
-                <a16:creationId xmlns:a16="http://schemas.microsoft.com/office/drawing/2014/main" id="{2FF0DD48-D719-1780-6606-56C07517F7BD}"/>
+                <a16:creationId xmlns:a16="http://schemas.microsoft.com/office/drawing/2014/main" id="{84D64BD9-55F2-88FC-6C1E-43D79D8877F6}"/>
               </a:ext>
             </a:extLst>
           </p:cNvPr>
@@ -671,7 +671,7 @@
           <a:bodyPr/>
           <a:lstStyle/>
           <a:p>
-            <a:fld id="{465FAC82-013A-458C-9679-24EC42713681}" type="datetimeFigureOut">
+            <a:fld id="{F614FA87-28C6-4ACF-86AE-679368991B93}" type="datetimeFigureOut">
               <a:rPr lang="en-US" smtClean="0"/>
               <a:t>9/18/2026</a:t>
             </a:fld>
@@ -684,7 +684,7 @@
           <p:cNvPr id="5" name="Footer Placeholder 4">
             <a:extLst>
               <a:ext uri="{FF2B5EF4-FFF2-40B4-BE49-F238E27FC236}">
-                <a16:creationId xmlns:a16="http://schemas.microsoft.com/office/drawing/2014/main" id="{791A3D61-B8E8-AAAD-4A81-B7F3B4DD79E2}"/>
+                <a16:creationId xmlns:a16="http://schemas.microsoft.com/office/drawing/2014/main" id="{19B22649-6317-CFB9-34FB-AF0B348E071F}"/>
               </a:ext>
             </a:extLst>
           </p:cNvPr>
@@ -709,7 +709,7 @@
           <p:cNvPr id="6" name="Slide Number Placeholder 5">
             <a:extLst>
               <a:ext uri="{FF2B5EF4-FFF2-40B4-BE49-F238E27FC236}">
-                <a16:creationId xmlns:a16="http://schemas.microsoft.com/office/drawing/2014/main" id="{1960C49E-E08A-5D93-D700-FF6FEE0E9007}"/>
+                <a16:creationId xmlns:a16="http://schemas.microsoft.com/office/drawing/2014/main" id="{154D7610-71C6-B655-9322-F3D272815F43}"/>
               </a:ext>
             </a:extLst>
           </p:cNvPr>
@@ -725,7 +725,7 @@
           <a:bodyPr/>
           <a:lstStyle/>
           <a:p>
-            <a:fld id="{1F5A4FA1-965A-4F54-B98C-0E86DEFBD244}" type="slidenum">
+            <a:fld id="{478463AA-DF53-4948-AF28-EAEE1C209794}" type="slidenum">
               <a:rPr lang="en-US" smtClean="0"/>
               <a:t>‹#›</a:t>
             </a:fld>
@@ -736,7 +736,7 @@
     </p:spTree>
     <p:extLst>
       <p:ext uri="{BB962C8B-B14F-4D97-AF65-F5344CB8AC3E}">
-        <p14:creationId xmlns:p14="http://schemas.microsoft.com/office/powerpoint/2010/main" val="3154106428"/>
+        <p14:creationId xmlns:p14="http://schemas.microsoft.com/office/powerpoint/2010/main" val="1396256139"/>
       </p:ext>
     </p:extLst>
   </p:cSld>
@@ -768,7 +768,7 @@
           <p:cNvPr id="2" name="Title 1">
             <a:extLst>
               <a:ext uri="{FF2B5EF4-FFF2-40B4-BE49-F238E27FC236}">
-                <a16:creationId xmlns:a16="http://schemas.microsoft.com/office/drawing/2014/main" id="{F5023535-3802-1ABB-5C24-21996AC3B948}"/>
+                <a16:creationId xmlns:a16="http://schemas.microsoft.com/office/drawing/2014/main" id="{FE387F97-2C04-00F0-68FF-22520703909E}"/>
               </a:ext>
             </a:extLst>
           </p:cNvPr>
@@ -796,7 +796,7 @@
           <p:cNvPr id="3" name="Content Placeholder 2">
             <a:extLst>
               <a:ext uri="{FF2B5EF4-FFF2-40B4-BE49-F238E27FC236}">
-                <a16:creationId xmlns:a16="http://schemas.microsoft.com/office/drawing/2014/main" id="{A9E044C4-41B5-928A-1946-B1A6EE9CB386}"/>
+                <a16:creationId xmlns:a16="http://schemas.microsoft.com/office/drawing/2014/main" id="{CB36A552-3597-3409-481B-D33B884B024F}"/>
               </a:ext>
             </a:extLst>
           </p:cNvPr>
@@ -853,7 +853,7 @@
           <p:cNvPr id="4" name="Date Placeholder 3">
             <a:extLst>
               <a:ext uri="{FF2B5EF4-FFF2-40B4-BE49-F238E27FC236}">
-                <a16:creationId xmlns:a16="http://schemas.microsoft.com/office/drawing/2014/main" id="{4D1A6110-97AF-504D-6658-3955145773FB}"/>
+                <a16:creationId xmlns:a16="http://schemas.microsoft.com/office/drawing/2014/main" id="{0EAC7EE1-959E-42DA-E0F3-5FB35F42370C}"/>
               </a:ext>
             </a:extLst>
           </p:cNvPr>
@@ -869,7 +869,7 @@
           <a:bodyPr/>
           <a:lstStyle/>
           <a:p>
-            <a:fld id="{465FAC82-013A-458C-9679-24EC42713681}" type="datetimeFigureOut">
+            <a:fld id="{F614FA87-28C6-4ACF-86AE-679368991B93}" type="datetimeFigureOut">
               <a:rPr lang="en-US" smtClean="0"/>
               <a:t>9/18/2026</a:t>
             </a:fld>
@@ -882,7 +882,7 @@
           <p:cNvPr id="5" name="Footer Placeholder 4">
             <a:extLst>
               <a:ext uri="{FF2B5EF4-FFF2-40B4-BE49-F238E27FC236}">
-                <a16:creationId xmlns:a16="http://schemas.microsoft.com/office/drawing/2014/main" id="{0C692EA8-58DF-BC1B-75CE-CBBC05070D8A}"/>
+                <a16:creationId xmlns:a16="http://schemas.microsoft.com/office/drawing/2014/main" id="{0C73BCD9-7017-9566-3B55-97613449DA5B}"/>
               </a:ext>
             </a:extLst>
           </p:cNvPr>
@@ -907,7 +907,7 @@
           <p:cNvPr id="6" name="Slide Number Placeholder 5">
             <a:extLst>
               <a:ext uri="{FF2B5EF4-FFF2-40B4-BE49-F238E27FC236}">
-                <a16:creationId xmlns:a16="http://schemas.microsoft.com/office/drawing/2014/main" id="{6370BA74-6B72-9DD1-2BB8-9FEA34D70704}"/>
+                <a16:creationId xmlns:a16="http://schemas.microsoft.com/office/drawing/2014/main" id="{9E834D4F-7BC7-B8E5-89F4-3DA03FE475D3}"/>
               </a:ext>
             </a:extLst>
           </p:cNvPr>
@@ -923,7 +923,7 @@
           <a:bodyPr/>
           <a:lstStyle/>
           <a:p>
-            <a:fld id="{1F5A4FA1-965A-4F54-B98C-0E86DEFBD244}" type="slidenum">
+            <a:fld id="{478463AA-DF53-4948-AF28-EAEE1C209794}" type="slidenum">
               <a:rPr lang="en-US" smtClean="0"/>
               <a:t>‹#›</a:t>
             </a:fld>
@@ -934,7 +934,7 @@
     </p:spTree>
     <p:extLst>
       <p:ext uri="{BB962C8B-B14F-4D97-AF65-F5344CB8AC3E}">
-        <p14:creationId xmlns:p14="http://schemas.microsoft.com/office/powerpoint/2010/main" val="2063712236"/>
+        <p14:creationId xmlns:p14="http://schemas.microsoft.com/office/powerpoint/2010/main" val="1391743402"/>
       </p:ext>
     </p:extLst>
   </p:cSld>
@@ -966,7 +966,7 @@
           <p:cNvPr id="2" name="Title 1">
             <a:extLst>
               <a:ext uri="{FF2B5EF4-FFF2-40B4-BE49-F238E27FC236}">
-                <a16:creationId xmlns:a16="http://schemas.microsoft.com/office/drawing/2014/main" id="{4A242CA6-F4B2-808C-8B4D-198BF02BD09F}"/>
+                <a16:creationId xmlns:a16="http://schemas.microsoft.com/office/drawing/2014/main" id="{60D19BCC-CEBD-3E9B-48F8-93D59400F71F}"/>
               </a:ext>
             </a:extLst>
           </p:cNvPr>
@@ -1003,7 +1003,7 @@
           <p:cNvPr id="3" name="Text Placeholder 2">
             <a:extLst>
               <a:ext uri="{FF2B5EF4-FFF2-40B4-BE49-F238E27FC236}">
-                <a16:creationId xmlns:a16="http://schemas.microsoft.com/office/drawing/2014/main" id="{3932A799-A113-36CB-2432-593ECB02F661}"/>
+                <a16:creationId xmlns:a16="http://schemas.microsoft.com/office/drawing/2014/main" id="{55A36C3B-24C2-1F62-A275-BC0C0294FC9C}"/>
               </a:ext>
             </a:extLst>
           </p:cNvPr>
@@ -1128,7 +1128,7 @@
           <p:cNvPr id="4" name="Date Placeholder 3">
             <a:extLst>
               <a:ext uri="{FF2B5EF4-FFF2-40B4-BE49-F238E27FC236}">
-                <a16:creationId xmlns:a16="http://schemas.microsoft.com/office/drawing/2014/main" id="{A2EBB3D8-04DE-99F9-23CC-586017900DF0}"/>
+                <a16:creationId xmlns:a16="http://schemas.microsoft.com/office/drawing/2014/main" id="{92822DDD-A8B1-1FD0-3232-B8118AC719D4}"/>
               </a:ext>
             </a:extLst>
           </p:cNvPr>
@@ -1144,7 +1144,7 @@
           <a:bodyPr/>
           <a:lstStyle/>
           <a:p>
-            <a:fld id="{465FAC82-013A-458C-9679-24EC42713681}" type="datetimeFigureOut">
+            <a:fld id="{F614FA87-28C6-4ACF-86AE-679368991B93}" type="datetimeFigureOut">
               <a:rPr lang="en-US" smtClean="0"/>
               <a:t>9/18/2026</a:t>
             </a:fld>
@@ -1157,7 +1157,7 @@
           <p:cNvPr id="5" name="Footer Placeholder 4">
             <a:extLst>
               <a:ext uri="{FF2B5EF4-FFF2-40B4-BE49-F238E27FC236}">
-                <a16:creationId xmlns:a16="http://schemas.microsoft.com/office/drawing/2014/main" id="{CD8C7762-4E17-1C03-A195-D98282426205}"/>
+                <a16:creationId xmlns:a16="http://schemas.microsoft.com/office/drawing/2014/main" id="{4856777F-0F17-AEC6-81B0-D9070243C4C2}"/>
               </a:ext>
             </a:extLst>
           </p:cNvPr>
@@ -1182,7 +1182,7 @@
           <p:cNvPr id="6" name="Slide Number Placeholder 5">
             <a:extLst>
               <a:ext uri="{FF2B5EF4-FFF2-40B4-BE49-F238E27FC236}">
-                <a16:creationId xmlns:a16="http://schemas.microsoft.com/office/drawing/2014/main" id="{1E4ACA50-3DD4-9BDA-7879-3A1CE86DED82}"/>
+                <a16:creationId xmlns:a16="http://schemas.microsoft.com/office/drawing/2014/main" id="{9FB41D66-5BC9-7489-77D8-7A27E9C55125}"/>
               </a:ext>
             </a:extLst>
           </p:cNvPr>
@@ -1198,7 +1198,7 @@
           <a:bodyPr/>
           <a:lstStyle/>
           <a:p>
-            <a:fld id="{1F5A4FA1-965A-4F54-B98C-0E86DEFBD244}" type="slidenum">
+            <a:fld id="{478463AA-DF53-4948-AF28-EAEE1C209794}" type="slidenum">
               <a:rPr lang="en-US" smtClean="0"/>
               <a:t>‹#›</a:t>
             </a:fld>
@@ -1209,7 +1209,7 @@
     </p:spTree>
     <p:extLst>
       <p:ext uri="{BB962C8B-B14F-4D97-AF65-F5344CB8AC3E}">
-        <p14:creationId xmlns:p14="http://schemas.microsoft.com/office/powerpoint/2010/main" val="1722348962"/>
+        <p14:creationId xmlns:p14="http://schemas.microsoft.com/office/powerpoint/2010/main" val="2012030100"/>
       </p:ext>
     </p:extLst>
   </p:cSld>
@@ -1241,7 +1241,7 @@
           <p:cNvPr id="2" name="Title 1">
             <a:extLst>
               <a:ext uri="{FF2B5EF4-FFF2-40B4-BE49-F238E27FC236}">
-                <a16:creationId xmlns:a16="http://schemas.microsoft.com/office/drawing/2014/main" id="{3B2C1F2B-4727-9971-B4D7-1393F135D7C4}"/>
+                <a16:creationId xmlns:a16="http://schemas.microsoft.com/office/drawing/2014/main" id="{3DA00272-EC90-05ED-3D0D-6E591C7F7BFE}"/>
               </a:ext>
             </a:extLst>
           </p:cNvPr>
@@ -1269,7 +1269,7 @@
           <p:cNvPr id="3" name="Content Placeholder 2">
             <a:extLst>
               <a:ext uri="{FF2B5EF4-FFF2-40B4-BE49-F238E27FC236}">
-                <a16:creationId xmlns:a16="http://schemas.microsoft.com/office/drawing/2014/main" id="{15DF19FB-B434-6CC3-82A6-DC05E0E31E27}"/>
+                <a16:creationId xmlns:a16="http://schemas.microsoft.com/office/drawing/2014/main" id="{F99F71CE-E7B3-A080-D11A-015140BE8257}"/>
               </a:ext>
             </a:extLst>
           </p:cNvPr>
@@ -1331,7 +1331,7 @@
           <p:cNvPr id="4" name="Content Placeholder 3">
             <a:extLst>
               <a:ext uri="{FF2B5EF4-FFF2-40B4-BE49-F238E27FC236}">
-                <a16:creationId xmlns:a16="http://schemas.microsoft.com/office/drawing/2014/main" id="{64C24ACD-516A-C940-4C97-DA15FC869314}"/>
+                <a16:creationId xmlns:a16="http://schemas.microsoft.com/office/drawing/2014/main" id="{0891E964-E473-F7F2-B6A3-733A558542E2}"/>
               </a:ext>
             </a:extLst>
           </p:cNvPr>
@@ -1393,7 +1393,7 @@
           <p:cNvPr id="5" name="Date Placeholder 4">
             <a:extLst>
               <a:ext uri="{FF2B5EF4-FFF2-40B4-BE49-F238E27FC236}">
-                <a16:creationId xmlns:a16="http://schemas.microsoft.com/office/drawing/2014/main" id="{70518E0A-BF7C-301E-8438-12CBF1B40B29}"/>
+                <a16:creationId xmlns:a16="http://schemas.microsoft.com/office/drawing/2014/main" id="{32361A8B-172F-F43D-CEEB-C4194C1172F3}"/>
               </a:ext>
             </a:extLst>
           </p:cNvPr>
@@ -1409,7 +1409,7 @@
           <a:bodyPr/>
           <a:lstStyle/>
           <a:p>
-            <a:fld id="{465FAC82-013A-458C-9679-24EC42713681}" type="datetimeFigureOut">
+            <a:fld id="{F614FA87-28C6-4ACF-86AE-679368991B93}" type="datetimeFigureOut">
               <a:rPr lang="en-US" smtClean="0"/>
               <a:t>9/18/2026</a:t>
             </a:fld>
@@ -1422,7 +1422,7 @@
           <p:cNvPr id="6" name="Footer Placeholder 5">
             <a:extLst>
               <a:ext uri="{FF2B5EF4-FFF2-40B4-BE49-F238E27FC236}">
-                <a16:creationId xmlns:a16="http://schemas.microsoft.com/office/drawing/2014/main" id="{74609E69-5AA1-3288-01F4-1B4988370AFC}"/>
+                <a16:creationId xmlns:a16="http://schemas.microsoft.com/office/drawing/2014/main" id="{C12476DA-D7C3-CE43-BC74-130ABC8002FA}"/>
               </a:ext>
             </a:extLst>
           </p:cNvPr>
@@ -1447,7 +1447,7 @@
           <p:cNvPr id="7" name="Slide Number Placeholder 6">
             <a:extLst>
               <a:ext uri="{FF2B5EF4-FFF2-40B4-BE49-F238E27FC236}">
-                <a16:creationId xmlns:a16="http://schemas.microsoft.com/office/drawing/2014/main" id="{6175CB81-4A6E-438B-134F-FC5C160A1289}"/>
+                <a16:creationId xmlns:a16="http://schemas.microsoft.com/office/drawing/2014/main" id="{292CF837-E0D4-46E2-BFB8-130CB699B330}"/>
               </a:ext>
             </a:extLst>
           </p:cNvPr>
@@ -1463,7 +1463,7 @@
           <a:bodyPr/>
           <a:lstStyle/>
           <a:p>
-            <a:fld id="{1F5A4FA1-965A-4F54-B98C-0E86DEFBD244}" type="slidenum">
+            <a:fld id="{478463AA-DF53-4948-AF28-EAEE1C209794}" type="slidenum">
               <a:rPr lang="en-US" smtClean="0"/>
               <a:t>‹#›</a:t>
             </a:fld>
@@ -1474,7 +1474,7 @@
     </p:spTree>
     <p:extLst>
       <p:ext uri="{BB962C8B-B14F-4D97-AF65-F5344CB8AC3E}">
-        <p14:creationId xmlns:p14="http://schemas.microsoft.com/office/powerpoint/2010/main" val="646836316"/>
+        <p14:creationId xmlns:p14="http://schemas.microsoft.com/office/powerpoint/2010/main" val="1995289972"/>
       </p:ext>
     </p:extLst>
   </p:cSld>
@@ -1506,7 +1506,7 @@
           <p:cNvPr id="2" name="Title 1">
             <a:extLst>
               <a:ext uri="{FF2B5EF4-FFF2-40B4-BE49-F238E27FC236}">
-                <a16:creationId xmlns:a16="http://schemas.microsoft.com/office/drawing/2014/main" id="{D9150A3A-3B51-64BF-1DF0-61754AB152D9}"/>
+                <a16:creationId xmlns:a16="http://schemas.microsoft.com/office/drawing/2014/main" id="{C8492356-EAF6-B2B0-88CC-A343FB9C2883}"/>
               </a:ext>
             </a:extLst>
           </p:cNvPr>
@@ -1539,7 +1539,7 @@
           <p:cNvPr id="3" name="Text Placeholder 2">
             <a:extLst>
               <a:ext uri="{FF2B5EF4-FFF2-40B4-BE49-F238E27FC236}">
-                <a16:creationId xmlns:a16="http://schemas.microsoft.com/office/drawing/2014/main" id="{D17F85F0-F671-7851-A013-007D787D011D}"/>
+                <a16:creationId xmlns:a16="http://schemas.microsoft.com/office/drawing/2014/main" id="{08911745-23BA-9387-4FB1-B0F276406E1D}"/>
               </a:ext>
             </a:extLst>
           </p:cNvPr>
@@ -1610,7 +1610,7 @@
           <p:cNvPr id="4" name="Content Placeholder 3">
             <a:extLst>
               <a:ext uri="{FF2B5EF4-FFF2-40B4-BE49-F238E27FC236}">
-                <a16:creationId xmlns:a16="http://schemas.microsoft.com/office/drawing/2014/main" id="{4F008FFE-653C-8CB7-D38E-CC52E5B3B1BA}"/>
+                <a16:creationId xmlns:a16="http://schemas.microsoft.com/office/drawing/2014/main" id="{2425B788-EC57-D35B-95DB-A19A5369B069}"/>
               </a:ext>
             </a:extLst>
           </p:cNvPr>
@@ -1672,7 +1672,7 @@
           <p:cNvPr id="5" name="Text Placeholder 4">
             <a:extLst>
               <a:ext uri="{FF2B5EF4-FFF2-40B4-BE49-F238E27FC236}">
-                <a16:creationId xmlns:a16="http://schemas.microsoft.com/office/drawing/2014/main" id="{6AE00810-16A8-4B8E-3BA6-862C5AAB4423}"/>
+                <a16:creationId xmlns:a16="http://schemas.microsoft.com/office/drawing/2014/main" id="{8BD052C5-79E5-ED87-8497-5FEC26040393}"/>
               </a:ext>
             </a:extLst>
           </p:cNvPr>
@@ -1743,7 +1743,7 @@
           <p:cNvPr id="6" name="Content Placeholder 5">
             <a:extLst>
               <a:ext uri="{FF2B5EF4-FFF2-40B4-BE49-F238E27FC236}">
-                <a16:creationId xmlns:a16="http://schemas.microsoft.com/office/drawing/2014/main" id="{E8107760-F31C-78E1-8BB8-91626DC38157}"/>
+                <a16:creationId xmlns:a16="http://schemas.microsoft.com/office/drawing/2014/main" id="{54A5696A-4EA7-5BBB-385D-FED12958EA02}"/>
               </a:ext>
             </a:extLst>
           </p:cNvPr>
@@ -1805,7 +1805,7 @@
           <p:cNvPr id="7" name="Date Placeholder 6">
             <a:extLst>
               <a:ext uri="{FF2B5EF4-FFF2-40B4-BE49-F238E27FC236}">
-                <a16:creationId xmlns:a16="http://schemas.microsoft.com/office/drawing/2014/main" id="{701FD5A1-71C0-FE29-D05A-0F33F5F39C40}"/>
+                <a16:creationId xmlns:a16="http://schemas.microsoft.com/office/drawing/2014/main" id="{9B99281D-9B08-A31F-56BF-0CD791813375}"/>
               </a:ext>
             </a:extLst>
           </p:cNvPr>
@@ -1821,7 +1821,7 @@
           <a:bodyPr/>
           <a:lstStyle/>
           <a:p>
-            <a:fld id="{465FAC82-013A-458C-9679-24EC42713681}" type="datetimeFigureOut">
+            <a:fld id="{F614FA87-28C6-4ACF-86AE-679368991B93}" type="datetimeFigureOut">
               <a:rPr lang="en-US" smtClean="0"/>
               <a:t>9/18/2026</a:t>
             </a:fld>
@@ -1834,7 +1834,7 @@
           <p:cNvPr id="8" name="Footer Placeholder 7">
             <a:extLst>
               <a:ext uri="{FF2B5EF4-FFF2-40B4-BE49-F238E27FC236}">
-                <a16:creationId xmlns:a16="http://schemas.microsoft.com/office/drawing/2014/main" id="{130BD8AB-C2B2-628D-79D7-BC87868E84EC}"/>
+                <a16:creationId xmlns:a16="http://schemas.microsoft.com/office/drawing/2014/main" id="{63C2B048-E237-8795-B0F6-CAC98283541F}"/>
               </a:ext>
             </a:extLst>
           </p:cNvPr>
@@ -1859,7 +1859,7 @@
           <p:cNvPr id="9" name="Slide Number Placeholder 8">
             <a:extLst>
               <a:ext uri="{FF2B5EF4-FFF2-40B4-BE49-F238E27FC236}">
-                <a16:creationId xmlns:a16="http://schemas.microsoft.com/office/drawing/2014/main" id="{C9D17ED8-8F73-4BEE-EC42-9571FC87A117}"/>
+                <a16:creationId xmlns:a16="http://schemas.microsoft.com/office/drawing/2014/main" id="{C9427F36-F454-1D87-4EB9-99248D3083FC}"/>
               </a:ext>
             </a:extLst>
           </p:cNvPr>
@@ -1875,7 +1875,7 @@
           <a:bodyPr/>
           <a:lstStyle/>
           <a:p>
-            <a:fld id="{1F5A4FA1-965A-4F54-B98C-0E86DEFBD244}" type="slidenum">
+            <a:fld id="{478463AA-DF53-4948-AF28-EAEE1C209794}" type="slidenum">
               <a:rPr lang="en-US" smtClean="0"/>
               <a:t>‹#›</a:t>
             </a:fld>
@@ -1886,7 +1886,7 @@
     </p:spTree>
     <p:extLst>
       <p:ext uri="{BB962C8B-B14F-4D97-AF65-F5344CB8AC3E}">
-        <p14:creationId xmlns:p14="http://schemas.microsoft.com/office/powerpoint/2010/main" val="3425718551"/>
+        <p14:creationId xmlns:p14="http://schemas.microsoft.com/office/powerpoint/2010/main" val="1126305823"/>
       </p:ext>
     </p:extLst>
   </p:cSld>
@@ -1918,7 +1918,7 @@
           <p:cNvPr id="2" name="Title 1">
             <a:extLst>
               <a:ext uri="{FF2B5EF4-FFF2-40B4-BE49-F238E27FC236}">
-                <a16:creationId xmlns:a16="http://schemas.microsoft.com/office/drawing/2014/main" id="{29069A3C-3BF9-2ABF-2292-49FC90475A78}"/>
+                <a16:creationId xmlns:a16="http://schemas.microsoft.com/office/drawing/2014/main" id="{E0270136-BFA5-A2FE-0C90-87BE6E77CB69}"/>
               </a:ext>
             </a:extLst>
           </p:cNvPr>
@@ -1946,7 +1946,7 @@
           <p:cNvPr id="3" name="Date Placeholder 2">
             <a:extLst>
               <a:ext uri="{FF2B5EF4-FFF2-40B4-BE49-F238E27FC236}">
-                <a16:creationId xmlns:a16="http://schemas.microsoft.com/office/drawing/2014/main" id="{AA7608D4-DFAA-D2F4-B607-9D128E6C7FA4}"/>
+                <a16:creationId xmlns:a16="http://schemas.microsoft.com/office/drawing/2014/main" id="{40A95AB2-164A-0229-E408-135A4CA04A34}"/>
               </a:ext>
             </a:extLst>
           </p:cNvPr>
@@ -1962,7 +1962,7 @@
           <a:bodyPr/>
           <a:lstStyle/>
           <a:p>
-            <a:fld id="{465FAC82-013A-458C-9679-24EC42713681}" type="datetimeFigureOut">
+            <a:fld id="{F614FA87-28C6-4ACF-86AE-679368991B93}" type="datetimeFigureOut">
               <a:rPr lang="en-US" smtClean="0"/>
               <a:t>9/18/2026</a:t>
             </a:fld>
@@ -1975,7 +1975,7 @@
           <p:cNvPr id="4" name="Footer Placeholder 3">
             <a:extLst>
               <a:ext uri="{FF2B5EF4-FFF2-40B4-BE49-F238E27FC236}">
-                <a16:creationId xmlns:a16="http://schemas.microsoft.com/office/drawing/2014/main" id="{DD723DD0-B305-D250-70D3-E2ECAB5A9CE0}"/>
+                <a16:creationId xmlns:a16="http://schemas.microsoft.com/office/drawing/2014/main" id="{A1510F5A-1481-EFC8-435C-1DBEE6A3E04B}"/>
               </a:ext>
             </a:extLst>
           </p:cNvPr>
@@ -2000,7 +2000,7 @@
           <p:cNvPr id="5" name="Slide Number Placeholder 4">
             <a:extLst>
               <a:ext uri="{FF2B5EF4-FFF2-40B4-BE49-F238E27FC236}">
-                <a16:creationId xmlns:a16="http://schemas.microsoft.com/office/drawing/2014/main" id="{11BC52A6-6B55-78D2-4A05-51DB570ED2C5}"/>
+                <a16:creationId xmlns:a16="http://schemas.microsoft.com/office/drawing/2014/main" id="{99FE0285-6F5C-7E69-6A33-96EDA57397AE}"/>
               </a:ext>
             </a:extLst>
           </p:cNvPr>
@@ -2016,7 +2016,7 @@
           <a:bodyPr/>
           <a:lstStyle/>
           <a:p>
-            <a:fld id="{1F5A4FA1-965A-4F54-B98C-0E86DEFBD244}" type="slidenum">
+            <a:fld id="{478463AA-DF53-4948-AF28-EAEE1C209794}" type="slidenum">
               <a:rPr lang="en-US" smtClean="0"/>
               <a:t>‹#›</a:t>
             </a:fld>
@@ -2027,7 +2027,7 @@
     </p:spTree>
     <p:extLst>
       <p:ext uri="{BB962C8B-B14F-4D97-AF65-F5344CB8AC3E}">
-        <p14:creationId xmlns:p14="http://schemas.microsoft.com/office/powerpoint/2010/main" val="1017702083"/>
+        <p14:creationId xmlns:p14="http://schemas.microsoft.com/office/powerpoint/2010/main" val="3645919553"/>
       </p:ext>
     </p:extLst>
   </p:cSld>
@@ -2059,7 +2059,7 @@
           <p:cNvPr id="2" name="Date Placeholder 1">
             <a:extLst>
               <a:ext uri="{FF2B5EF4-FFF2-40B4-BE49-F238E27FC236}">
-                <a16:creationId xmlns:a16="http://schemas.microsoft.com/office/drawing/2014/main" id="{031E41A2-B843-C97B-363E-DDAADB9A0F1E}"/>
+                <a16:creationId xmlns:a16="http://schemas.microsoft.com/office/drawing/2014/main" id="{DF4BCDCE-089F-5025-58E8-D63212C55F49}"/>
               </a:ext>
             </a:extLst>
           </p:cNvPr>
@@ -2075,7 +2075,7 @@
           <a:bodyPr/>
           <a:lstStyle/>
           <a:p>
-            <a:fld id="{465FAC82-013A-458C-9679-24EC42713681}" type="datetimeFigureOut">
+            <a:fld id="{F614FA87-28C6-4ACF-86AE-679368991B93}" type="datetimeFigureOut">
               <a:rPr lang="en-US" smtClean="0"/>
               <a:t>9/18/2026</a:t>
             </a:fld>
@@ -2088,7 +2088,7 @@
           <p:cNvPr id="3" name="Footer Placeholder 2">
             <a:extLst>
               <a:ext uri="{FF2B5EF4-FFF2-40B4-BE49-F238E27FC236}">
-                <a16:creationId xmlns:a16="http://schemas.microsoft.com/office/drawing/2014/main" id="{A68FF2E7-4BFE-0165-0F4D-54CDCF41A2C2}"/>
+                <a16:creationId xmlns:a16="http://schemas.microsoft.com/office/drawing/2014/main" id="{A678A3DC-DF36-8D5D-BFD5-E43D472D4E47}"/>
               </a:ext>
             </a:extLst>
           </p:cNvPr>
@@ -2113,7 +2113,7 @@
           <p:cNvPr id="4" name="Slide Number Placeholder 3">
             <a:extLst>
               <a:ext uri="{FF2B5EF4-FFF2-40B4-BE49-F238E27FC236}">
-                <a16:creationId xmlns:a16="http://schemas.microsoft.com/office/drawing/2014/main" id="{97FFB490-54C6-BBA0-3729-9A72F5552664}"/>
+                <a16:creationId xmlns:a16="http://schemas.microsoft.com/office/drawing/2014/main" id="{FF37914D-B297-03AB-4EF1-3BB03428AD9D}"/>
               </a:ext>
             </a:extLst>
           </p:cNvPr>
@@ -2129,7 +2129,7 @@
           <a:bodyPr/>
           <a:lstStyle/>
           <a:p>
-            <a:fld id="{1F5A4FA1-965A-4F54-B98C-0E86DEFBD244}" type="slidenum">
+            <a:fld id="{478463AA-DF53-4948-AF28-EAEE1C209794}" type="slidenum">
               <a:rPr lang="en-US" smtClean="0"/>
               <a:t>‹#›</a:t>
             </a:fld>
@@ -2140,7 +2140,7 @@
     </p:spTree>
     <p:extLst>
       <p:ext uri="{BB962C8B-B14F-4D97-AF65-F5344CB8AC3E}">
-        <p14:creationId xmlns:p14="http://schemas.microsoft.com/office/powerpoint/2010/main" val="707310685"/>
+        <p14:creationId xmlns:p14="http://schemas.microsoft.com/office/powerpoint/2010/main" val="2551536194"/>
       </p:ext>
     </p:extLst>
   </p:cSld>
@@ -2172,7 +2172,7 @@
           <p:cNvPr id="2" name="Title 1">
             <a:extLst>
               <a:ext uri="{FF2B5EF4-FFF2-40B4-BE49-F238E27FC236}">
-                <a16:creationId xmlns:a16="http://schemas.microsoft.com/office/drawing/2014/main" id="{707022D3-D702-6F87-8E53-44258C5068FC}"/>
+                <a16:creationId xmlns:a16="http://schemas.microsoft.com/office/drawing/2014/main" id="{E7E0E80E-39E3-9E4D-6C0A-5146BBCA9024}"/>
               </a:ext>
             </a:extLst>
           </p:cNvPr>
@@ -2209,7 +2209,7 @@
           <p:cNvPr id="3" name="Content Placeholder 2">
             <a:extLst>
               <a:ext uri="{FF2B5EF4-FFF2-40B4-BE49-F238E27FC236}">
-                <a16:creationId xmlns:a16="http://schemas.microsoft.com/office/drawing/2014/main" id="{91E57B5F-47B3-8A90-4507-78BE840F236B}"/>
+                <a16:creationId xmlns:a16="http://schemas.microsoft.com/office/drawing/2014/main" id="{39723BC9-DC8E-8704-83B1-7ACB40FEEFE5}"/>
               </a:ext>
             </a:extLst>
           </p:cNvPr>
@@ -2299,7 +2299,7 @@
           <p:cNvPr id="4" name="Text Placeholder 3">
             <a:extLst>
               <a:ext uri="{FF2B5EF4-FFF2-40B4-BE49-F238E27FC236}">
-                <a16:creationId xmlns:a16="http://schemas.microsoft.com/office/drawing/2014/main" id="{EC6C1B61-D278-20E7-D848-C69C5989CD29}"/>
+                <a16:creationId xmlns:a16="http://schemas.microsoft.com/office/drawing/2014/main" id="{6569E9F5-7DD7-C89C-8B11-5173D5B06175}"/>
               </a:ext>
             </a:extLst>
           </p:cNvPr>
@@ -2370,7 +2370,7 @@
           <p:cNvPr id="5" name="Date Placeholder 4">
             <a:extLst>
               <a:ext uri="{FF2B5EF4-FFF2-40B4-BE49-F238E27FC236}">
-                <a16:creationId xmlns:a16="http://schemas.microsoft.com/office/drawing/2014/main" id="{F233952D-11B7-FF08-C185-A4F1E6087F6B}"/>
+                <a16:creationId xmlns:a16="http://schemas.microsoft.com/office/drawing/2014/main" id="{7093F808-5437-793E-0939-A1DF7D86EB51}"/>
               </a:ext>
             </a:extLst>
           </p:cNvPr>
@@ -2386,7 +2386,7 @@
           <a:bodyPr/>
           <a:lstStyle/>
           <a:p>
-            <a:fld id="{465FAC82-013A-458C-9679-24EC42713681}" type="datetimeFigureOut">
+            <a:fld id="{F614FA87-28C6-4ACF-86AE-679368991B93}" type="datetimeFigureOut">
               <a:rPr lang="en-US" smtClean="0"/>
               <a:t>9/18/2026</a:t>
             </a:fld>
@@ -2399,7 +2399,7 @@
           <p:cNvPr id="6" name="Footer Placeholder 5">
             <a:extLst>
               <a:ext uri="{FF2B5EF4-FFF2-40B4-BE49-F238E27FC236}">
-                <a16:creationId xmlns:a16="http://schemas.microsoft.com/office/drawing/2014/main" id="{C5D2F58E-E507-6D1D-DD4C-ED6292A9B6A9}"/>
+                <a16:creationId xmlns:a16="http://schemas.microsoft.com/office/drawing/2014/main" id="{E66BDB55-DEFB-496E-1BB3-FC37DB326393}"/>
               </a:ext>
             </a:extLst>
           </p:cNvPr>
@@ -2424,7 +2424,7 @@
           <p:cNvPr id="7" name="Slide Number Placeholder 6">
             <a:extLst>
               <a:ext uri="{FF2B5EF4-FFF2-40B4-BE49-F238E27FC236}">
-                <a16:creationId xmlns:a16="http://schemas.microsoft.com/office/drawing/2014/main" id="{7A549A4A-AAE3-B79A-E5B5-455CB70A99AC}"/>
+                <a16:creationId xmlns:a16="http://schemas.microsoft.com/office/drawing/2014/main" id="{99D816BD-E08B-9077-8C43-B42F526BB215}"/>
               </a:ext>
             </a:extLst>
           </p:cNvPr>
@@ -2440,7 +2440,7 @@
           <a:bodyPr/>
           <a:lstStyle/>
           <a:p>
-            <a:fld id="{1F5A4FA1-965A-4F54-B98C-0E86DEFBD244}" type="slidenum">
+            <a:fld id="{478463AA-DF53-4948-AF28-EAEE1C209794}" type="slidenum">
               <a:rPr lang="en-US" smtClean="0"/>
               <a:t>‹#›</a:t>
             </a:fld>
@@ -2451,7 +2451,7 @@
     </p:spTree>
     <p:extLst>
       <p:ext uri="{BB962C8B-B14F-4D97-AF65-F5344CB8AC3E}">
-        <p14:creationId xmlns:p14="http://schemas.microsoft.com/office/powerpoint/2010/main" val="52968460"/>
+        <p14:creationId xmlns:p14="http://schemas.microsoft.com/office/powerpoint/2010/main" val="3066894262"/>
       </p:ext>
     </p:extLst>
   </p:cSld>
@@ -2483,7 +2483,7 @@
           <p:cNvPr id="2" name="Title 1">
             <a:extLst>
               <a:ext uri="{FF2B5EF4-FFF2-40B4-BE49-F238E27FC236}">
-                <a16:creationId xmlns:a16="http://schemas.microsoft.com/office/drawing/2014/main" id="{67945CD9-B9A8-0A61-4161-D137BD454AC1}"/>
+                <a16:creationId xmlns:a16="http://schemas.microsoft.com/office/drawing/2014/main" id="{8DCE1922-2E80-6E5E-42B5-C87A1163366D}"/>
               </a:ext>
             </a:extLst>
           </p:cNvPr>
@@ -2520,7 +2520,7 @@
           <p:cNvPr id="3" name="Picture Placeholder 2">
             <a:extLst>
               <a:ext uri="{FF2B5EF4-FFF2-40B4-BE49-F238E27FC236}">
-                <a16:creationId xmlns:a16="http://schemas.microsoft.com/office/drawing/2014/main" id="{D194A912-D48C-9204-F835-EB16D914B804}"/>
+                <a16:creationId xmlns:a16="http://schemas.microsoft.com/office/drawing/2014/main" id="{070CF053-B643-FEDE-1EA4-6312C4108203}"/>
               </a:ext>
             </a:extLst>
           </p:cNvPr>
@@ -2587,7 +2587,7 @@
           <p:cNvPr id="4" name="Text Placeholder 3">
             <a:extLst>
               <a:ext uri="{FF2B5EF4-FFF2-40B4-BE49-F238E27FC236}">
-                <a16:creationId xmlns:a16="http://schemas.microsoft.com/office/drawing/2014/main" id="{3EA6B2D0-D5AA-A579-3523-7FF5A4650CEC}"/>
+                <a16:creationId xmlns:a16="http://schemas.microsoft.com/office/drawing/2014/main" id="{EE5767B4-77C5-F80B-2DE3-92035195F7E3}"/>
               </a:ext>
             </a:extLst>
           </p:cNvPr>
@@ -2658,7 +2658,7 @@
           <p:cNvPr id="5" name="Date Placeholder 4">
             <a:extLst>
               <a:ext uri="{FF2B5EF4-FFF2-40B4-BE49-F238E27FC236}">
-                <a16:creationId xmlns:a16="http://schemas.microsoft.com/office/drawing/2014/main" id="{C6A7AAA2-BF08-DA69-4580-F6E5F8117D27}"/>
+                <a16:creationId xmlns:a16="http://schemas.microsoft.com/office/drawing/2014/main" id="{17246B03-2D09-31E1-F1D8-15D74EEFD799}"/>
               </a:ext>
             </a:extLst>
           </p:cNvPr>
@@ -2674,7 +2674,7 @@
           <a:bodyPr/>
           <a:lstStyle/>
           <a:p>
-            <a:fld id="{465FAC82-013A-458C-9679-24EC42713681}" type="datetimeFigureOut">
+            <a:fld id="{F614FA87-28C6-4ACF-86AE-679368991B93}" type="datetimeFigureOut">
               <a:rPr lang="en-US" smtClean="0"/>
               <a:t>9/18/2026</a:t>
             </a:fld>
@@ -2687,7 +2687,7 @@
           <p:cNvPr id="6" name="Footer Placeholder 5">
             <a:extLst>
               <a:ext uri="{FF2B5EF4-FFF2-40B4-BE49-F238E27FC236}">
-                <a16:creationId xmlns:a16="http://schemas.microsoft.com/office/drawing/2014/main" id="{F210FCEB-4D4C-3E17-B165-13F6628D2315}"/>
+                <a16:creationId xmlns:a16="http://schemas.microsoft.com/office/drawing/2014/main" id="{A2B0F50A-EBF1-7ED6-DA50-AB989CC87E30}"/>
               </a:ext>
             </a:extLst>
           </p:cNvPr>
@@ -2712,7 +2712,7 @@
           <p:cNvPr id="7" name="Slide Number Placeholder 6">
             <a:extLst>
               <a:ext uri="{FF2B5EF4-FFF2-40B4-BE49-F238E27FC236}">
-                <a16:creationId xmlns:a16="http://schemas.microsoft.com/office/drawing/2014/main" id="{DA377781-513D-B457-37EB-2237A2E724CE}"/>
+                <a16:creationId xmlns:a16="http://schemas.microsoft.com/office/drawing/2014/main" id="{A8C7D219-DD9B-E4F6-7D1B-C526E4B3B746}"/>
               </a:ext>
             </a:extLst>
           </p:cNvPr>
@@ -2728,7 +2728,7 @@
           <a:bodyPr/>
           <a:lstStyle/>
           <a:p>
-            <a:fld id="{1F5A4FA1-965A-4F54-B98C-0E86DEFBD244}" type="slidenum">
+            <a:fld id="{478463AA-DF53-4948-AF28-EAEE1C209794}" type="slidenum">
               <a:rPr lang="en-US" smtClean="0"/>
               <a:t>‹#›</a:t>
             </a:fld>
@@ -2739,7 +2739,7 @@
     </p:spTree>
     <p:extLst>
       <p:ext uri="{BB962C8B-B14F-4D97-AF65-F5344CB8AC3E}">
-        <p14:creationId xmlns:p14="http://schemas.microsoft.com/office/powerpoint/2010/main" val="3121183149"/>
+        <p14:creationId xmlns:p14="http://schemas.microsoft.com/office/powerpoint/2010/main" val="3593177009"/>
       </p:ext>
     </p:extLst>
   </p:cSld>
@@ -2776,7 +2776,7 @@
           <p:cNvPr id="2" name="Title Placeholder 1">
             <a:extLst>
               <a:ext uri="{FF2B5EF4-FFF2-40B4-BE49-F238E27FC236}">
-                <a16:creationId xmlns:a16="http://schemas.microsoft.com/office/drawing/2014/main" id="{86C1A6EA-C07C-A014-8B46-A65BA8A985E8}"/>
+                <a16:creationId xmlns:a16="http://schemas.microsoft.com/office/drawing/2014/main" id="{6EBE9E48-AD69-215A-2E9F-311FCEDCEFDD}"/>
               </a:ext>
             </a:extLst>
           </p:cNvPr>
@@ -2814,7 +2814,7 @@
           <p:cNvPr id="3" name="Text Placeholder 2">
             <a:extLst>
               <a:ext uri="{FF2B5EF4-FFF2-40B4-BE49-F238E27FC236}">
-                <a16:creationId xmlns:a16="http://schemas.microsoft.com/office/drawing/2014/main" id="{9BB943A6-7D9A-6B95-9516-27416DC2C77C}"/>
+                <a16:creationId xmlns:a16="http://schemas.microsoft.com/office/drawing/2014/main" id="{7E826673-8CBF-9EAE-497E-162E392BC1DA}"/>
               </a:ext>
             </a:extLst>
           </p:cNvPr>
@@ -2881,7 +2881,7 @@
           <p:cNvPr id="4" name="Date Placeholder 3">
             <a:extLst>
               <a:ext uri="{FF2B5EF4-FFF2-40B4-BE49-F238E27FC236}">
-                <a16:creationId xmlns:a16="http://schemas.microsoft.com/office/drawing/2014/main" id="{4F806C14-75E5-D022-86F4-9EABCE92C42F}"/>
+                <a16:creationId xmlns:a16="http://schemas.microsoft.com/office/drawing/2014/main" id="{71CC67BC-D3F3-28D9-3E71-59F49AF2525A}"/>
               </a:ext>
             </a:extLst>
           </p:cNvPr>
@@ -2915,7 +2915,7 @@
             </a:lvl1pPr>
           </a:lstStyle>
           <a:p>
-            <a:fld id="{465FAC82-013A-458C-9679-24EC42713681}" type="datetimeFigureOut">
+            <a:fld id="{F614FA87-28C6-4ACF-86AE-679368991B93}" type="datetimeFigureOut">
               <a:rPr lang="en-US" smtClean="0"/>
               <a:t>9/18/2026</a:t>
             </a:fld>
@@ -2928,7 +2928,7 @@
           <p:cNvPr id="5" name="Footer Placeholder 4">
             <a:extLst>
               <a:ext uri="{FF2B5EF4-FFF2-40B4-BE49-F238E27FC236}">
-                <a16:creationId xmlns:a16="http://schemas.microsoft.com/office/drawing/2014/main" id="{FA1C301A-CDFE-5B11-E1FF-B301CCF285FE}"/>
+                <a16:creationId xmlns:a16="http://schemas.microsoft.com/office/drawing/2014/main" id="{D75FB09C-539C-AB08-4CDF-035B26EC0E52}"/>
               </a:ext>
             </a:extLst>
           </p:cNvPr>
@@ -2971,7 +2971,7 @@
           <p:cNvPr id="6" name="Slide Number Placeholder 5">
             <a:extLst>
               <a:ext uri="{FF2B5EF4-FFF2-40B4-BE49-F238E27FC236}">
-                <a16:creationId xmlns:a16="http://schemas.microsoft.com/office/drawing/2014/main" id="{CF939170-1086-4D51-52E6-C4F4B042C528}"/>
+                <a16:creationId xmlns:a16="http://schemas.microsoft.com/office/drawing/2014/main" id="{E4AC0FA8-1AFB-CDA5-E35C-3BB3CE3FC582}"/>
               </a:ext>
             </a:extLst>
           </p:cNvPr>
@@ -3005,7 +3005,7 @@
             </a:lvl1pPr>
           </a:lstStyle>
           <a:p>
-            <a:fld id="{1F5A4FA1-965A-4F54-B98C-0E86DEFBD244}" type="slidenum">
+            <a:fld id="{478463AA-DF53-4948-AF28-EAEE1C209794}" type="slidenum">
               <a:rPr lang="en-US" smtClean="0"/>
               <a:t>‹#›</a:t>
             </a:fld>
@@ -3016,7 +3016,7 @@
     </p:spTree>
     <p:extLst>
       <p:ext uri="{BB962C8B-B14F-4D97-AF65-F5344CB8AC3E}">
-        <p14:creationId xmlns:p14="http://schemas.microsoft.com/office/powerpoint/2010/main" val="3199418537"/>
+        <p14:creationId xmlns:p14="http://schemas.microsoft.com/office/powerpoint/2010/main" val="1243736478"/>
       </p:ext>
     </p:extLst>
   </p:cSld>
@@ -3347,7 +3347,7 @@
           <p:cNvPr id="2" name="Rectangle 1">
             <a:extLst>
               <a:ext uri="{FF2B5EF4-FFF2-40B4-BE49-F238E27FC236}">
-                <a16:creationId xmlns:a16="http://schemas.microsoft.com/office/drawing/2014/main" id="{43E03B3A-D944-F90A-AE06-A36706872C4E}"/>
+                <a16:creationId xmlns:a16="http://schemas.microsoft.com/office/drawing/2014/main" id="{035FD054-A763-97CB-2129-E2D39CB20ED3}"/>
               </a:ext>
             </a:extLst>
           </p:cNvPr>
@@ -3415,7 +3415,7 @@
           <p:cNvPr id="3" name="TextBox 2">
             <a:extLst>
               <a:ext uri="{FF2B5EF4-FFF2-40B4-BE49-F238E27FC236}">
-                <a16:creationId xmlns:a16="http://schemas.microsoft.com/office/drawing/2014/main" id="{E74B9527-CB3A-3BCD-CF6D-B7676F8C2C98}"/>
+                <a16:creationId xmlns:a16="http://schemas.microsoft.com/office/drawing/2014/main" id="{3A17C459-CB79-B277-09C5-FEB560F20CDE}"/>
               </a:ext>
             </a:extLst>
           </p:cNvPr>
@@ -3461,7 +3461,7 @@
           <p:cNvPr id="4" name="TextBox 3">
             <a:extLst>
               <a:ext uri="{FF2B5EF4-FFF2-40B4-BE49-F238E27FC236}">
-                <a16:creationId xmlns:a16="http://schemas.microsoft.com/office/drawing/2014/main" id="{B56D7559-AF29-D773-3809-45A838CD399A}"/>
+                <a16:creationId xmlns:a16="http://schemas.microsoft.com/office/drawing/2014/main" id="{25AFA51D-4EC8-9137-5BA7-97C853495FCE}"/>
               </a:ext>
             </a:extLst>
           </p:cNvPr>
@@ -3501,7 +3501,7 @@
           <p:cNvPr id="5" name="TextBox 4">
             <a:extLst>
               <a:ext uri="{FF2B5EF4-FFF2-40B4-BE49-F238E27FC236}">
-                <a16:creationId xmlns:a16="http://schemas.microsoft.com/office/drawing/2014/main" id="{02A59A59-EE12-D048-F5A9-8EE3DBAFEAC9}"/>
+                <a16:creationId xmlns:a16="http://schemas.microsoft.com/office/drawing/2014/main" id="{27820F8A-1B18-5A1A-3B11-0642FABACEB7}"/>
               </a:ext>
             </a:extLst>
           </p:cNvPr>
@@ -3544,10 +3544,10 @@
       </p:sp>
       <p:pic>
         <p:nvPicPr>
-          <p:cNvPr id="7" name="Picture 6">
+          <p:cNvPr id="7" name="!!Stage_Hero_Container!!">
             <a:extLst>
               <a:ext uri="{FF2B5EF4-FFF2-40B4-BE49-F238E27FC236}">
-                <a16:creationId xmlns:a16="http://schemas.microsoft.com/office/drawing/2014/main" id="{B678A3D0-D285-8492-9820-F1D55271D6C9}"/>
+                <a16:creationId xmlns:a16="http://schemas.microsoft.com/office/drawing/2014/main" id="{6F92C81B-22EF-B5F9-C24A-FC3CCEEE4F07}"/>
               </a:ext>
             </a:extLst>
           </p:cNvPr>
@@ -3586,7 +3586,7 @@
     </p:spTree>
     <p:extLst>
       <p:ext uri="{BB962C8B-B14F-4D97-AF65-F5344CB8AC3E}">
-        <p14:creationId xmlns:p14="http://schemas.microsoft.com/office/powerpoint/2010/main" val="4127869656"/>
+        <p14:creationId xmlns:p14="http://schemas.microsoft.com/office/powerpoint/2010/main" val="965931642"/>
       </p:ext>
     </p:extLst>
   </p:cSld>
@@ -3721,10 +3721,10 @@
       </p:grpSpPr>
       <p:sp>
         <p:nvSpPr>
-          <p:cNvPr id="2" name="!!Anchor_Kicker_Rail">
+          <p:cNvPr id="2" name="!!Anchor_Kicker_Rail!!">
             <a:extLst>
               <a:ext uri="{FF2B5EF4-FFF2-40B4-BE49-F238E27FC236}">
-                <a16:creationId xmlns:a16="http://schemas.microsoft.com/office/drawing/2014/main" id="{2DB53B88-76C6-A423-55AE-129D4AAED304}"/>
+                <a16:creationId xmlns:a16="http://schemas.microsoft.com/office/drawing/2014/main" id="{60AD5971-F17C-5F15-1339-810EDD7FFD34}"/>
               </a:ext>
             </a:extLst>
           </p:cNvPr>
@@ -3761,10 +3761,10 @@
       </p:sp>
       <p:sp>
         <p:nvSpPr>
-          <p:cNvPr id="3" name="!!Anchor_Slide_Tracker">
+          <p:cNvPr id="3" name="!!Anchor_Slide_Tracker!!">
             <a:extLst>
               <a:ext uri="{FF2B5EF4-FFF2-40B4-BE49-F238E27FC236}">
-                <a16:creationId xmlns:a16="http://schemas.microsoft.com/office/drawing/2014/main" id="{8F45F04B-72C7-70CB-1F64-867C322F3635}"/>
+                <a16:creationId xmlns:a16="http://schemas.microsoft.com/office/drawing/2014/main" id="{E1B01C02-78A2-BC93-3771-0F631DCB6F44}"/>
               </a:ext>
             </a:extLst>
           </p:cNvPr>
@@ -3802,10 +3802,10 @@
       </p:sp>
       <p:sp>
         <p:nvSpPr>
-          <p:cNvPr id="4" name="!!Anchor_Assertion_Title">
+          <p:cNvPr id="4" name="!!Anchor_Assertion_Title!!">
             <a:extLst>
               <a:ext uri="{FF2B5EF4-FFF2-40B4-BE49-F238E27FC236}">
-                <a16:creationId xmlns:a16="http://schemas.microsoft.com/office/drawing/2014/main" id="{CFCAEFD0-039B-1227-A5FA-CC7F2283CE1D}"/>
+                <a16:creationId xmlns:a16="http://schemas.microsoft.com/office/drawing/2014/main" id="{CEC08025-5806-49ED-1701-C4243ED1405E}"/>
               </a:ext>
             </a:extLst>
           </p:cNvPr>
@@ -3848,10 +3848,10 @@
       </p:sp>
       <p:grpSp>
         <p:nvGrpSpPr>
-          <p:cNvPr id="12" name="!!Stage_Hero_Container">
+          <p:cNvPr id="12" name="!!Stage_Hero_Container!!">
             <a:extLst>
               <a:ext uri="{FF2B5EF4-FFF2-40B4-BE49-F238E27FC236}">
-                <a16:creationId xmlns:a16="http://schemas.microsoft.com/office/drawing/2014/main" id="{014F18B0-3141-3C58-3CB0-DAFD20530033}"/>
+                <a16:creationId xmlns:a16="http://schemas.microsoft.com/office/drawing/2014/main" id="{0EC20494-83C0-691D-C12D-629C1A221A9B}"/>
               </a:ext>
             </a:extLst>
           </p:cNvPr>
@@ -3871,7 +3871,7 @@
             <p:cNvPr id="6" name="Picture 5">
               <a:extLst>
                 <a:ext uri="{FF2B5EF4-FFF2-40B4-BE49-F238E27FC236}">
-                  <a16:creationId xmlns:a16="http://schemas.microsoft.com/office/drawing/2014/main" id="{43D7CFFB-677A-31BB-14A8-806407DCEAF0}"/>
+                  <a16:creationId xmlns:a16="http://schemas.microsoft.com/office/drawing/2014/main" id="{FB63699E-3CE2-6772-958E-E34A6DEA712E}"/>
                 </a:ext>
               </a:extLst>
             </p:cNvPr>
@@ -3912,7 +3912,7 @@
             <p:cNvPr id="7" name="Rectangle: Rounded Corners 6">
               <a:extLst>
                 <a:ext uri="{FF2B5EF4-FFF2-40B4-BE49-F238E27FC236}">
-                  <a16:creationId xmlns:a16="http://schemas.microsoft.com/office/drawing/2014/main" id="{A7D382A0-2C07-4853-D3E5-7986BC5D9E66}"/>
+                  <a16:creationId xmlns:a16="http://schemas.microsoft.com/office/drawing/2014/main" id="{EE5AF805-FD2D-2485-D12C-69A8F674EA71}"/>
                 </a:ext>
               </a:extLst>
             </p:cNvPr>
@@ -3966,7 +3966,7 @@
             <p:cNvPr id="8" name="Oval 7">
               <a:extLst>
                 <a:ext uri="{FF2B5EF4-FFF2-40B4-BE49-F238E27FC236}">
-                  <a16:creationId xmlns:a16="http://schemas.microsoft.com/office/drawing/2014/main" id="{85733C93-F751-CE57-A353-2DB5C9223B32}"/>
+                  <a16:creationId xmlns:a16="http://schemas.microsoft.com/office/drawing/2014/main" id="{789F180F-A17A-5FA8-832D-AF783822B28F}"/>
                 </a:ext>
               </a:extLst>
             </p:cNvPr>
@@ -4034,7 +4034,7 @@
             <p:cNvPr id="10" name="Graphic 9">
               <a:extLst>
                 <a:ext uri="{FF2B5EF4-FFF2-40B4-BE49-F238E27FC236}">
-                  <a16:creationId xmlns:a16="http://schemas.microsoft.com/office/drawing/2014/main" id="{589A188B-42DB-5657-5941-314252DC554C}"/>
+                  <a16:creationId xmlns:a16="http://schemas.microsoft.com/office/drawing/2014/main" id="{E1B7C8B8-016E-C164-8A1A-3DE3F5A7D002}"/>
                 </a:ext>
               </a:extLst>
             </p:cNvPr>
@@ -4070,7 +4070,7 @@
             <p:cNvPr id="11" name="TextBox 10">
               <a:extLst>
                 <a:ext uri="{FF2B5EF4-FFF2-40B4-BE49-F238E27FC236}">
-                  <a16:creationId xmlns:a16="http://schemas.microsoft.com/office/drawing/2014/main" id="{84B8059E-86EB-FDA2-4B76-9F34B352069A}"/>
+                  <a16:creationId xmlns:a16="http://schemas.microsoft.com/office/drawing/2014/main" id="{AC4C1317-3A3B-EFF6-490F-CA29DF6DC0CD}"/>
                 </a:ext>
               </a:extLst>
             </p:cNvPr>
@@ -4132,10 +4132,10 @@
       </p:grpSp>
       <p:grpSp>
         <p:nvGrpSpPr>
-          <p:cNvPr id="18" name="!!Stage_Sub_Card_1">
+          <p:cNvPr id="18" name="!!Stage_Sub_Card_1!!">
             <a:extLst>
               <a:ext uri="{FF2B5EF4-FFF2-40B4-BE49-F238E27FC236}">
-                <a16:creationId xmlns:a16="http://schemas.microsoft.com/office/drawing/2014/main" id="{50810837-82B3-A40F-EEAA-4DCCCBA106BC}"/>
+                <a16:creationId xmlns:a16="http://schemas.microsoft.com/office/drawing/2014/main" id="{111C2D26-CDF4-128F-F351-CE5C14D39BD5}"/>
               </a:ext>
             </a:extLst>
           </p:cNvPr>
@@ -4155,7 +4155,7 @@
             <p:cNvPr id="13" name="Rectangle: Rounded Corners 12">
               <a:extLst>
                 <a:ext uri="{FF2B5EF4-FFF2-40B4-BE49-F238E27FC236}">
-                  <a16:creationId xmlns:a16="http://schemas.microsoft.com/office/drawing/2014/main" id="{14CBB4A0-3E8C-AA19-BB62-BBD0BA4C59AC}"/>
+                  <a16:creationId xmlns:a16="http://schemas.microsoft.com/office/drawing/2014/main" id="{87692954-4E6B-19E9-DDAC-F09F1EF7DC89}"/>
                 </a:ext>
               </a:extLst>
             </p:cNvPr>
@@ -4209,7 +4209,7 @@
             <p:cNvPr id="14" name="Oval 13">
               <a:extLst>
                 <a:ext uri="{FF2B5EF4-FFF2-40B4-BE49-F238E27FC236}">
-                  <a16:creationId xmlns:a16="http://schemas.microsoft.com/office/drawing/2014/main" id="{14356AC6-DA32-DC19-F40C-AFED58FEB260}"/>
+                  <a16:creationId xmlns:a16="http://schemas.microsoft.com/office/drawing/2014/main" id="{C7D073EC-6C4F-C127-7233-116580C5A6B0}"/>
                 </a:ext>
               </a:extLst>
             </p:cNvPr>
@@ -4277,7 +4277,7 @@
             <p:cNvPr id="16" name="Graphic 15">
               <a:extLst>
                 <a:ext uri="{FF2B5EF4-FFF2-40B4-BE49-F238E27FC236}">
-                  <a16:creationId xmlns:a16="http://schemas.microsoft.com/office/drawing/2014/main" id="{ED0BD8E1-2731-9CE9-86A9-8C1EB1840E7F}"/>
+                  <a16:creationId xmlns:a16="http://schemas.microsoft.com/office/drawing/2014/main" id="{7D4540F1-969D-8CB3-16C3-CCBB71088CF4}"/>
                 </a:ext>
               </a:extLst>
             </p:cNvPr>
@@ -4313,7 +4313,7 @@
             <p:cNvPr id="17" name="TextBox 16">
               <a:extLst>
                 <a:ext uri="{FF2B5EF4-FFF2-40B4-BE49-F238E27FC236}">
-                  <a16:creationId xmlns:a16="http://schemas.microsoft.com/office/drawing/2014/main" id="{3B25FF80-1F60-3A2E-2343-CBBA7C6D4E3B}"/>
+                  <a16:creationId xmlns:a16="http://schemas.microsoft.com/office/drawing/2014/main" id="{51C96BB6-F3A7-80B3-32E5-BDEAD9BCBEDC}"/>
                 </a:ext>
               </a:extLst>
             </p:cNvPr>
@@ -4372,10 +4372,10 @@
       </p:grpSp>
       <p:grpSp>
         <p:nvGrpSpPr>
-          <p:cNvPr id="24" name="!!Stage_Sub_Card_2">
+          <p:cNvPr id="24" name="!!Stage_Sub_Card_2!!">
             <a:extLst>
               <a:ext uri="{FF2B5EF4-FFF2-40B4-BE49-F238E27FC236}">
-                <a16:creationId xmlns:a16="http://schemas.microsoft.com/office/drawing/2014/main" id="{A5127460-668A-0215-93DE-03EB8677E9BD}"/>
+                <a16:creationId xmlns:a16="http://schemas.microsoft.com/office/drawing/2014/main" id="{23AFD80D-550E-1B9F-93F8-F9E0FCC61B6C}"/>
               </a:ext>
             </a:extLst>
           </p:cNvPr>
@@ -4395,7 +4395,7 @@
             <p:cNvPr id="19" name="Rectangle: Rounded Corners 18">
               <a:extLst>
                 <a:ext uri="{FF2B5EF4-FFF2-40B4-BE49-F238E27FC236}">
-                  <a16:creationId xmlns:a16="http://schemas.microsoft.com/office/drawing/2014/main" id="{A2246D76-92BC-D319-3AEA-4CF68DF15653}"/>
+                  <a16:creationId xmlns:a16="http://schemas.microsoft.com/office/drawing/2014/main" id="{3FA1F263-8250-D4EF-B7F4-83CE81A700F6}"/>
                 </a:ext>
               </a:extLst>
             </p:cNvPr>
@@ -4449,7 +4449,7 @@
             <p:cNvPr id="20" name="Oval 19">
               <a:extLst>
                 <a:ext uri="{FF2B5EF4-FFF2-40B4-BE49-F238E27FC236}">
-                  <a16:creationId xmlns:a16="http://schemas.microsoft.com/office/drawing/2014/main" id="{EE8DF7DF-A799-1DFA-270C-D24F064B7B9D}"/>
+                  <a16:creationId xmlns:a16="http://schemas.microsoft.com/office/drawing/2014/main" id="{085D0CFE-E4C9-C543-1C7B-AEDA6756F2F9}"/>
                 </a:ext>
               </a:extLst>
             </p:cNvPr>
@@ -4517,7 +4517,7 @@
             <p:cNvPr id="22" name="Graphic 21">
               <a:extLst>
                 <a:ext uri="{FF2B5EF4-FFF2-40B4-BE49-F238E27FC236}">
-                  <a16:creationId xmlns:a16="http://schemas.microsoft.com/office/drawing/2014/main" id="{AF2B5067-4E70-DC2E-88ED-65EEADFDA29D}"/>
+                  <a16:creationId xmlns:a16="http://schemas.microsoft.com/office/drawing/2014/main" id="{B5DE43AE-9374-717E-5176-5294818F6064}"/>
                 </a:ext>
               </a:extLst>
             </p:cNvPr>
@@ -4553,7 +4553,7 @@
             <p:cNvPr id="23" name="TextBox 22">
               <a:extLst>
                 <a:ext uri="{FF2B5EF4-FFF2-40B4-BE49-F238E27FC236}">
-                  <a16:creationId xmlns:a16="http://schemas.microsoft.com/office/drawing/2014/main" id="{F3315CB5-B5D2-BBBD-B3B3-429365EF8C19}"/>
+                  <a16:creationId xmlns:a16="http://schemas.microsoft.com/office/drawing/2014/main" id="{DC5EA1D5-AD7A-19B1-8EDC-DBDB568FBD33}"/>
                 </a:ext>
               </a:extLst>
             </p:cNvPr>
@@ -4612,10 +4612,10 @@
       </p:grpSp>
       <p:grpSp>
         <p:nvGrpSpPr>
-          <p:cNvPr id="30" name="!!Stage_Sub_Card_3">
+          <p:cNvPr id="30" name="!!Stage_Sub_Card_3!!">
             <a:extLst>
               <a:ext uri="{FF2B5EF4-FFF2-40B4-BE49-F238E27FC236}">
-                <a16:creationId xmlns:a16="http://schemas.microsoft.com/office/drawing/2014/main" id="{6FA36D7B-7F25-9FA7-D9F0-DE1165C20612}"/>
+                <a16:creationId xmlns:a16="http://schemas.microsoft.com/office/drawing/2014/main" id="{DFF4A035-10F7-8C21-98B9-C2516EF5ED0B}"/>
               </a:ext>
             </a:extLst>
           </p:cNvPr>
@@ -4635,7 +4635,7 @@
             <p:cNvPr id="25" name="Rectangle: Rounded Corners 24">
               <a:extLst>
                 <a:ext uri="{FF2B5EF4-FFF2-40B4-BE49-F238E27FC236}">
-                  <a16:creationId xmlns:a16="http://schemas.microsoft.com/office/drawing/2014/main" id="{95B3E600-16ED-FEB8-96AF-9C23B53622AE}"/>
+                  <a16:creationId xmlns:a16="http://schemas.microsoft.com/office/drawing/2014/main" id="{56BD2B8B-5ECF-CDB9-4779-E159B76FA664}"/>
                 </a:ext>
               </a:extLst>
             </p:cNvPr>
@@ -4689,7 +4689,7 @@
             <p:cNvPr id="26" name="Oval 25">
               <a:extLst>
                 <a:ext uri="{FF2B5EF4-FFF2-40B4-BE49-F238E27FC236}">
-                  <a16:creationId xmlns:a16="http://schemas.microsoft.com/office/drawing/2014/main" id="{9790702C-EBDC-8567-E3EE-3F3832574DA3}"/>
+                  <a16:creationId xmlns:a16="http://schemas.microsoft.com/office/drawing/2014/main" id="{2CD0B22E-1E79-42BB-0B41-784BAF447C6F}"/>
                 </a:ext>
               </a:extLst>
             </p:cNvPr>
@@ -4757,7 +4757,7 @@
             <p:cNvPr id="28" name="Graphic 27">
               <a:extLst>
                 <a:ext uri="{FF2B5EF4-FFF2-40B4-BE49-F238E27FC236}">
-                  <a16:creationId xmlns:a16="http://schemas.microsoft.com/office/drawing/2014/main" id="{41B33291-2B6B-4250-5295-5A060BA1DF54}"/>
+                  <a16:creationId xmlns:a16="http://schemas.microsoft.com/office/drawing/2014/main" id="{13B58888-826D-9C83-77DF-777266DB060B}"/>
                 </a:ext>
               </a:extLst>
             </p:cNvPr>
@@ -4793,7 +4793,7 @@
             <p:cNvPr id="29" name="TextBox 28">
               <a:extLst>
                 <a:ext uri="{FF2B5EF4-FFF2-40B4-BE49-F238E27FC236}">
-                  <a16:creationId xmlns:a16="http://schemas.microsoft.com/office/drawing/2014/main" id="{A8A0C527-397B-1817-E90E-91985B31E260}"/>
+                  <a16:creationId xmlns:a16="http://schemas.microsoft.com/office/drawing/2014/main" id="{71154149-A9D3-851A-3C5D-66C839C3E212}"/>
                 </a:ext>
               </a:extLst>
             </p:cNvPr>
@@ -4852,10 +4852,10 @@
       </p:grpSp>
       <p:sp>
         <p:nvSpPr>
-          <p:cNvPr id="31" name="!!Anchor_Source_Footer">
+          <p:cNvPr id="31" name="!!Anchor_Source_Footer!!">
             <a:extLst>
               <a:ext uri="{FF2B5EF4-FFF2-40B4-BE49-F238E27FC236}">
-                <a16:creationId xmlns:a16="http://schemas.microsoft.com/office/drawing/2014/main" id="{26F2C907-2E3B-446B-E196-18B7B84376A2}"/>
+                <a16:creationId xmlns:a16="http://schemas.microsoft.com/office/drawing/2014/main" id="{8691AB60-223F-8245-F3E6-84D3F4B02778}"/>
               </a:ext>
             </a:extLst>
           </p:cNvPr>
@@ -4893,7 +4893,7 @@
     </p:spTree>
     <p:extLst>
       <p:ext uri="{BB962C8B-B14F-4D97-AF65-F5344CB8AC3E}">
-        <p14:creationId xmlns:p14="http://schemas.microsoft.com/office/powerpoint/2010/main" val="1204639683"/>
+        <p14:creationId xmlns:p14="http://schemas.microsoft.com/office/powerpoint/2010/main" val="1073221241"/>
       </p:ext>
     </p:extLst>
   </p:cSld>
@@ -4924,6 +4924,9 @@
                     <p:cTn id="3" fill="hold">
                       <p:stCondLst>
                         <p:cond delay="indefinite"/>
+                        <p:cond evt="onBegin" delay="0">
+                          <p:tn val="2"/>
+                        </p:cond>
                       </p:stCondLst>
                       <p:childTnLst>
                         <p:par>
@@ -4933,9 +4936,9 @@
                             </p:stCondLst>
                             <p:childTnLst>
                               <p:par>
-                                <p:cTn id="5" presetID="2" presetClass="entr" presetSubtype="4" accel="50000" decel="50000" fill="hold" nodeType="clickEffect">
+                                <p:cTn id="5" presetID="2" presetClass="entr" presetSubtype="1" accel="50000" decel="50000" fill="hold" nodeType="withEffect">
                                   <p:stCondLst>
-                                    <p:cond delay="0"/>
+                                    <p:cond delay="120"/>
                                   </p:stCondLst>
                                   <p:childTnLst>
                                     <p:set>
@@ -4958,7 +4961,7 @@
                                     </p:set>
                                     <p:anim calcmode="lin" valueType="num">
                                       <p:cBhvr additive="base">
-                                        <p:cTn id="7" dur="450" fill="hold"/>
+                                        <p:cTn id="7" dur="500" fill="hold"/>
                                         <p:tgtEl>
                                           <p:spTgt spid="18"/>
                                         </p:tgtEl>
@@ -4981,7 +4984,7 @@
                                     </p:anim>
                                     <p:anim calcmode="lin" valueType="num">
                                       <p:cBhvr additive="base">
-                                        <p:cTn id="8" dur="450" fill="hold"/>
+                                        <p:cTn id="8" dur="500" fill="hold"/>
                                         <p:tgtEl>
                                           <p:spTgt spid="18"/>
                                         </p:tgtEl>
@@ -4992,7 +4995,7 @@
                                       <p:tavLst>
                                         <p:tav tm="0">
                                           <p:val>
-                                            <p:strVal val="1+#ppt_h/2"/>
+                                            <p:strVal val="0-#ppt_h/2"/>
                                           </p:val>
                                         </p:tav>
                                         <p:tav tm="100000">
@@ -5005,33 +5008,15 @@
                                   </p:childTnLst>
                                 </p:cTn>
                               </p:par>
-                            </p:childTnLst>
-                          </p:cTn>
-                        </p:par>
-                      </p:childTnLst>
-                    </p:cTn>
-                  </p:par>
-                  <p:par>
-                    <p:cTn id="9" fill="hold">
-                      <p:stCondLst>
-                        <p:cond delay="indefinite"/>
-                      </p:stCondLst>
-                      <p:childTnLst>
-                        <p:par>
-                          <p:cTn id="10" fill="hold">
-                            <p:stCondLst>
-                              <p:cond delay="0"/>
-                            </p:stCondLst>
-                            <p:childTnLst>
                               <p:par>
-                                <p:cTn id="11" presetID="2" presetClass="entr" presetSubtype="4" accel="50000" decel="50000" fill="hold" nodeType="clickEffect">
+                                <p:cTn id="9" presetID="2" presetClass="entr" presetSubtype="1" accel="50000" decel="50000" fill="hold" nodeType="withEffect">
                                   <p:stCondLst>
-                                    <p:cond delay="0"/>
+                                    <p:cond delay="240"/>
                                   </p:stCondLst>
                                   <p:childTnLst>
                                     <p:set>
                                       <p:cBhvr>
-                                        <p:cTn id="12" dur="1" fill="hold">
+                                        <p:cTn id="10" dur="1" fill="hold">
                                           <p:stCondLst>
                                             <p:cond delay="0"/>
                                           </p:stCondLst>
@@ -5049,7 +5034,7 @@
                                     </p:set>
                                     <p:anim calcmode="lin" valueType="num">
                                       <p:cBhvr additive="base">
-                                        <p:cTn id="13" dur="450" fill="hold"/>
+                                        <p:cTn id="11" dur="500" fill="hold"/>
                                         <p:tgtEl>
                                           <p:spTgt spid="24"/>
                                         </p:tgtEl>
@@ -5072,7 +5057,7 @@
                                     </p:anim>
                                     <p:anim calcmode="lin" valueType="num">
                                       <p:cBhvr additive="base">
-                                        <p:cTn id="14" dur="450" fill="hold"/>
+                                        <p:cTn id="12" dur="500" fill="hold"/>
                                         <p:tgtEl>
                                           <p:spTgt spid="24"/>
                                         </p:tgtEl>
@@ -5083,7 +5068,7 @@
                                       <p:tavLst>
                                         <p:tav tm="0">
                                           <p:val>
-                                            <p:strVal val="1+#ppt_h/2"/>
+                                            <p:strVal val="0-#ppt_h/2"/>
                                           </p:val>
                                         </p:tav>
                                         <p:tav tm="100000">
@@ -5096,33 +5081,15 @@
                                   </p:childTnLst>
                                 </p:cTn>
                               </p:par>
-                            </p:childTnLst>
-                          </p:cTn>
-                        </p:par>
-                      </p:childTnLst>
-                    </p:cTn>
-                  </p:par>
-                  <p:par>
-                    <p:cTn id="15" fill="hold">
-                      <p:stCondLst>
-                        <p:cond delay="indefinite"/>
-                      </p:stCondLst>
-                      <p:childTnLst>
-                        <p:par>
-                          <p:cTn id="16" fill="hold">
-                            <p:stCondLst>
-                              <p:cond delay="0"/>
-                            </p:stCondLst>
-                            <p:childTnLst>
                               <p:par>
-                                <p:cTn id="17" presetID="2" presetClass="entr" presetSubtype="4" accel="50000" decel="50000" fill="hold" nodeType="clickEffect">
+                                <p:cTn id="13" presetID="2" presetClass="entr" presetSubtype="1" accel="50000" decel="50000" fill="hold" nodeType="withEffect">
                                   <p:stCondLst>
-                                    <p:cond delay="0"/>
+                                    <p:cond delay="360"/>
                                   </p:stCondLst>
                                   <p:childTnLst>
                                     <p:set>
                                       <p:cBhvr>
-                                        <p:cTn id="18" dur="1" fill="hold">
+                                        <p:cTn id="14" dur="1" fill="hold">
                                           <p:stCondLst>
                                             <p:cond delay="0"/>
                                           </p:stCondLst>
@@ -5140,7 +5107,7 @@
                                     </p:set>
                                     <p:anim calcmode="lin" valueType="num">
                                       <p:cBhvr additive="base">
-                                        <p:cTn id="19" dur="450" fill="hold"/>
+                                        <p:cTn id="15" dur="500" fill="hold"/>
                                         <p:tgtEl>
                                           <p:spTgt spid="30"/>
                                         </p:tgtEl>
@@ -5163,7 +5130,7 @@
                                     </p:anim>
                                     <p:anim calcmode="lin" valueType="num">
                                       <p:cBhvr additive="base">
-                                        <p:cTn id="20" dur="450" fill="hold"/>
+                                        <p:cTn id="16" dur="500" fill="hold"/>
                                         <p:tgtEl>
                                           <p:spTgt spid="30"/>
                                         </p:tgtEl>
@@ -5174,7 +5141,7 @@
                                       <p:tavLst>
                                         <p:tav tm="0">
                                           <p:val>
-                                            <p:strVal val="1+#ppt_h/2"/>
+                                            <p:strVal val="0-#ppt_h/2"/>
                                           </p:val>
                                         </p:tav>
                                         <p:tav tm="100000">
@@ -5245,10 +5212,10 @@
       </p:grpSpPr>
       <p:sp>
         <p:nvSpPr>
-          <p:cNvPr id="2" name="!!Anchor_Kicker_Rail">
+          <p:cNvPr id="2" name="!!Anchor_Kicker_Rail!!">
             <a:extLst>
               <a:ext uri="{FF2B5EF4-FFF2-40B4-BE49-F238E27FC236}">
-                <a16:creationId xmlns:a16="http://schemas.microsoft.com/office/drawing/2014/main" id="{EBC3C705-B722-CA1F-E823-AD32E15E38CC}"/>
+                <a16:creationId xmlns:a16="http://schemas.microsoft.com/office/drawing/2014/main" id="{F5A3EB39-97D9-37D7-E4C7-FDE637F849FC}"/>
               </a:ext>
             </a:extLst>
           </p:cNvPr>
@@ -5285,10 +5252,10 @@
       </p:sp>
       <p:sp>
         <p:nvSpPr>
-          <p:cNvPr id="3" name="!!Anchor_Slide_Tracker">
+          <p:cNvPr id="3" name="!!Anchor_Slide_Tracker!!">
             <a:extLst>
               <a:ext uri="{FF2B5EF4-FFF2-40B4-BE49-F238E27FC236}">
-                <a16:creationId xmlns:a16="http://schemas.microsoft.com/office/drawing/2014/main" id="{DD463F8A-5A80-BCE6-47DC-0490BBA4508A}"/>
+                <a16:creationId xmlns:a16="http://schemas.microsoft.com/office/drawing/2014/main" id="{B4BAFA8F-07CD-5A2F-8897-E1EB11042CB3}"/>
               </a:ext>
             </a:extLst>
           </p:cNvPr>
@@ -5326,10 +5293,10 @@
       </p:sp>
       <p:sp>
         <p:nvSpPr>
-          <p:cNvPr id="4" name="!!Anchor_Assertion_Title">
+          <p:cNvPr id="4" name="!!Anchor_Assertion_Title!!">
             <a:extLst>
               <a:ext uri="{FF2B5EF4-FFF2-40B4-BE49-F238E27FC236}">
-                <a16:creationId xmlns:a16="http://schemas.microsoft.com/office/drawing/2014/main" id="{E0025CB2-7AD4-65D3-3D05-32077BA9DC79}"/>
+                <a16:creationId xmlns:a16="http://schemas.microsoft.com/office/drawing/2014/main" id="{C6DA1BCE-7AC1-9D13-39E1-F2200DDB04B7}"/>
               </a:ext>
             </a:extLst>
           </p:cNvPr>
@@ -5366,10 +5333,10 @@
       </p:sp>
       <p:pic>
         <p:nvPicPr>
-          <p:cNvPr id="6" name="!!Stage_Hero_Container">
+          <p:cNvPr id="6" name="!!Stage_Hero_Container!!">
             <a:extLst>
               <a:ext uri="{FF2B5EF4-FFF2-40B4-BE49-F238E27FC236}">
-                <a16:creationId xmlns:a16="http://schemas.microsoft.com/office/drawing/2014/main" id="{412286EF-F696-2BF7-1DB6-09390A2B592D}"/>
+                <a16:creationId xmlns:a16="http://schemas.microsoft.com/office/drawing/2014/main" id="{5A2791F6-7FD6-7522-9B4E-0660FBD20D5F}"/>
               </a:ext>
             </a:extLst>
           </p:cNvPr>
@@ -5407,10 +5374,10 @@
       </p:pic>
       <p:grpSp>
         <p:nvGrpSpPr>
-          <p:cNvPr id="12" name="!!Stage_Sub_Card_1">
+          <p:cNvPr id="12" name="!!Stage_Sub_Card_1!!">
             <a:extLst>
               <a:ext uri="{FF2B5EF4-FFF2-40B4-BE49-F238E27FC236}">
-                <a16:creationId xmlns:a16="http://schemas.microsoft.com/office/drawing/2014/main" id="{C027D47F-5FD0-0176-0C7C-2323A8D8D881}"/>
+                <a16:creationId xmlns:a16="http://schemas.microsoft.com/office/drawing/2014/main" id="{1A66A98A-E82C-A36C-26EF-9A48356D84E6}"/>
               </a:ext>
             </a:extLst>
           </p:cNvPr>
@@ -5430,7 +5397,7 @@
             <p:cNvPr id="7" name="Rectangle: Rounded Corners 6">
               <a:extLst>
                 <a:ext uri="{FF2B5EF4-FFF2-40B4-BE49-F238E27FC236}">
-                  <a16:creationId xmlns:a16="http://schemas.microsoft.com/office/drawing/2014/main" id="{BB374932-1A84-B3F2-C4EC-794CA5B0A28A}"/>
+                  <a16:creationId xmlns:a16="http://schemas.microsoft.com/office/drawing/2014/main" id="{7C1DCABD-65EA-0C90-A96D-50A5C7823EF3}"/>
                 </a:ext>
               </a:extLst>
             </p:cNvPr>
@@ -5484,7 +5451,7 @@
             <p:cNvPr id="8" name="Oval 7">
               <a:extLst>
                 <a:ext uri="{FF2B5EF4-FFF2-40B4-BE49-F238E27FC236}">
-                  <a16:creationId xmlns:a16="http://schemas.microsoft.com/office/drawing/2014/main" id="{D2E89237-A6F2-D342-73BF-55B5835BCBDE}"/>
+                  <a16:creationId xmlns:a16="http://schemas.microsoft.com/office/drawing/2014/main" id="{F2F385A8-58EF-A4BF-FD23-9D7FFB045DDD}"/>
                 </a:ext>
               </a:extLst>
             </p:cNvPr>
@@ -5552,7 +5519,7 @@
             <p:cNvPr id="10" name="Graphic 9">
               <a:extLst>
                 <a:ext uri="{FF2B5EF4-FFF2-40B4-BE49-F238E27FC236}">
-                  <a16:creationId xmlns:a16="http://schemas.microsoft.com/office/drawing/2014/main" id="{EA777A61-9561-80FA-7DDC-24BA99A26EF8}"/>
+                  <a16:creationId xmlns:a16="http://schemas.microsoft.com/office/drawing/2014/main" id="{6B7EA861-9665-F991-6D9E-9962488B49B7}"/>
                 </a:ext>
               </a:extLst>
             </p:cNvPr>
@@ -5588,7 +5555,7 @@
             <p:cNvPr id="11" name="TextBox 10">
               <a:extLst>
                 <a:ext uri="{FF2B5EF4-FFF2-40B4-BE49-F238E27FC236}">
-                  <a16:creationId xmlns:a16="http://schemas.microsoft.com/office/drawing/2014/main" id="{FC36A616-0A8E-2635-5FD0-99155E01B777}"/>
+                  <a16:creationId xmlns:a16="http://schemas.microsoft.com/office/drawing/2014/main" id="{D782B56E-447B-B695-B3DB-15E9D3FA76DA}"/>
                 </a:ext>
               </a:extLst>
             </p:cNvPr>
@@ -5647,10 +5614,10 @@
       </p:grpSp>
       <p:grpSp>
         <p:nvGrpSpPr>
-          <p:cNvPr id="18" name="!!Stage_Sub_Card_2">
+          <p:cNvPr id="18" name="!!Stage_Sub_Card_2!!">
             <a:extLst>
               <a:ext uri="{FF2B5EF4-FFF2-40B4-BE49-F238E27FC236}">
-                <a16:creationId xmlns:a16="http://schemas.microsoft.com/office/drawing/2014/main" id="{EB15F69F-5FA5-7093-0CD6-D9ADC72BF193}"/>
+                <a16:creationId xmlns:a16="http://schemas.microsoft.com/office/drawing/2014/main" id="{48E30B83-4900-7710-DE36-F410C772D736}"/>
               </a:ext>
             </a:extLst>
           </p:cNvPr>
@@ -5670,7 +5637,7 @@
             <p:cNvPr id="13" name="Rectangle: Rounded Corners 12">
               <a:extLst>
                 <a:ext uri="{FF2B5EF4-FFF2-40B4-BE49-F238E27FC236}">
-                  <a16:creationId xmlns:a16="http://schemas.microsoft.com/office/drawing/2014/main" id="{1D31F148-F02F-5FBA-C11A-D5ECC73863DE}"/>
+                  <a16:creationId xmlns:a16="http://schemas.microsoft.com/office/drawing/2014/main" id="{CD638C7F-F2D7-237A-DEE7-C66A8E58786B}"/>
                 </a:ext>
               </a:extLst>
             </p:cNvPr>
@@ -5724,7 +5691,7 @@
             <p:cNvPr id="14" name="Oval 13">
               <a:extLst>
                 <a:ext uri="{FF2B5EF4-FFF2-40B4-BE49-F238E27FC236}">
-                  <a16:creationId xmlns:a16="http://schemas.microsoft.com/office/drawing/2014/main" id="{D3E9B148-2E71-9A0F-2EC2-4F92BF8EC50B}"/>
+                  <a16:creationId xmlns:a16="http://schemas.microsoft.com/office/drawing/2014/main" id="{8990E480-3A66-6BA4-7B2F-2C8247FDBC61}"/>
                 </a:ext>
               </a:extLst>
             </p:cNvPr>
@@ -5792,7 +5759,7 @@
             <p:cNvPr id="16" name="Graphic 15">
               <a:extLst>
                 <a:ext uri="{FF2B5EF4-FFF2-40B4-BE49-F238E27FC236}">
-                  <a16:creationId xmlns:a16="http://schemas.microsoft.com/office/drawing/2014/main" id="{75E164EB-502B-0123-2E4D-5482DE258BEC}"/>
+                  <a16:creationId xmlns:a16="http://schemas.microsoft.com/office/drawing/2014/main" id="{A89D0157-3E78-FF4C-FBED-2FFFC9CA5099}"/>
                 </a:ext>
               </a:extLst>
             </p:cNvPr>
@@ -5828,7 +5795,7 @@
             <p:cNvPr id="17" name="TextBox 16">
               <a:extLst>
                 <a:ext uri="{FF2B5EF4-FFF2-40B4-BE49-F238E27FC236}">
-                  <a16:creationId xmlns:a16="http://schemas.microsoft.com/office/drawing/2014/main" id="{8D9505AF-E901-B770-043A-087BD93819B6}"/>
+                  <a16:creationId xmlns:a16="http://schemas.microsoft.com/office/drawing/2014/main" id="{C15BC5DE-A5CA-1E7C-25C9-51D30FCFA243}"/>
                 </a:ext>
               </a:extLst>
             </p:cNvPr>
@@ -5887,10 +5854,10 @@
       </p:grpSp>
       <p:grpSp>
         <p:nvGrpSpPr>
-          <p:cNvPr id="24" name="!!Stage_Sub_Card_3">
+          <p:cNvPr id="24" name="!!Stage_Sub_Card_3!!">
             <a:extLst>
               <a:ext uri="{FF2B5EF4-FFF2-40B4-BE49-F238E27FC236}">
-                <a16:creationId xmlns:a16="http://schemas.microsoft.com/office/drawing/2014/main" id="{63A03D88-A05B-33E7-1DE6-9755546640E6}"/>
+                <a16:creationId xmlns:a16="http://schemas.microsoft.com/office/drawing/2014/main" id="{D307EC52-4BB4-CF5C-D910-34FD4585993E}"/>
               </a:ext>
             </a:extLst>
           </p:cNvPr>
@@ -5910,7 +5877,7 @@
             <p:cNvPr id="19" name="Rectangle: Rounded Corners 18">
               <a:extLst>
                 <a:ext uri="{FF2B5EF4-FFF2-40B4-BE49-F238E27FC236}">
-                  <a16:creationId xmlns:a16="http://schemas.microsoft.com/office/drawing/2014/main" id="{A199C325-EA3D-3C11-85BF-45FABCC6EC3A}"/>
+                  <a16:creationId xmlns:a16="http://schemas.microsoft.com/office/drawing/2014/main" id="{305A21FA-FE1E-EFB4-9766-6A549CCB801B}"/>
                 </a:ext>
               </a:extLst>
             </p:cNvPr>
@@ -5964,7 +5931,7 @@
             <p:cNvPr id="20" name="Oval 19">
               <a:extLst>
                 <a:ext uri="{FF2B5EF4-FFF2-40B4-BE49-F238E27FC236}">
-                  <a16:creationId xmlns:a16="http://schemas.microsoft.com/office/drawing/2014/main" id="{D40DDB8D-FBF5-DC12-DF8D-950ABEAA7AE7}"/>
+                  <a16:creationId xmlns:a16="http://schemas.microsoft.com/office/drawing/2014/main" id="{9CE70A87-1D26-880D-C958-980EBDDA154E}"/>
                 </a:ext>
               </a:extLst>
             </p:cNvPr>
@@ -6032,7 +5999,7 @@
             <p:cNvPr id="22" name="Graphic 21">
               <a:extLst>
                 <a:ext uri="{FF2B5EF4-FFF2-40B4-BE49-F238E27FC236}">
-                  <a16:creationId xmlns:a16="http://schemas.microsoft.com/office/drawing/2014/main" id="{5A308273-0A7D-A928-9FE5-34891FF56013}"/>
+                  <a16:creationId xmlns:a16="http://schemas.microsoft.com/office/drawing/2014/main" id="{7C1C6D9A-ED27-02E4-50D2-8081355E6BE1}"/>
                 </a:ext>
               </a:extLst>
             </p:cNvPr>
@@ -6068,7 +6035,7 @@
             <p:cNvPr id="23" name="TextBox 22">
               <a:extLst>
                 <a:ext uri="{FF2B5EF4-FFF2-40B4-BE49-F238E27FC236}">
-                  <a16:creationId xmlns:a16="http://schemas.microsoft.com/office/drawing/2014/main" id="{5C4C3652-F2F0-CC32-6930-EEC82E309FB6}"/>
+                  <a16:creationId xmlns:a16="http://schemas.microsoft.com/office/drawing/2014/main" id="{FF3DF165-7801-3CBB-4C46-2EE3036EEBAA}"/>
                 </a:ext>
               </a:extLst>
             </p:cNvPr>
@@ -6127,10 +6094,10 @@
       </p:grpSp>
       <p:sp>
         <p:nvSpPr>
-          <p:cNvPr id="25" name="!!Anchor_Source_Footer">
+          <p:cNvPr id="25" name="!!Anchor_Source_Footer!!">
             <a:extLst>
               <a:ext uri="{FF2B5EF4-FFF2-40B4-BE49-F238E27FC236}">
-                <a16:creationId xmlns:a16="http://schemas.microsoft.com/office/drawing/2014/main" id="{DCE5E2F3-B130-E4B8-71C7-92FB68C9E673}"/>
+                <a16:creationId xmlns:a16="http://schemas.microsoft.com/office/drawing/2014/main" id="{7A65FD57-7CA3-EDDD-922B-6C0C854D05A2}"/>
               </a:ext>
             </a:extLst>
           </p:cNvPr>
@@ -6168,7 +6135,7 @@
     </p:spTree>
     <p:extLst>
       <p:ext uri="{BB962C8B-B14F-4D97-AF65-F5344CB8AC3E}">
-        <p14:creationId xmlns:p14="http://schemas.microsoft.com/office/powerpoint/2010/main" val="1850617215"/>
+        <p14:creationId xmlns:p14="http://schemas.microsoft.com/office/powerpoint/2010/main" val="2572032486"/>
       </p:ext>
     </p:extLst>
   </p:cSld>
@@ -6199,6 +6166,9 @@
                     <p:cTn id="3" fill="hold">
                       <p:stCondLst>
                         <p:cond delay="indefinite"/>
+                        <p:cond evt="onBegin" delay="0">
+                          <p:tn val="2"/>
+                        </p:cond>
                       </p:stCondLst>
                       <p:childTnLst>
                         <p:par>
@@ -6208,9 +6178,9 @@
                             </p:stCondLst>
                             <p:childTnLst>
                               <p:par>
-                                <p:cTn id="5" presetID="2" presetClass="entr" presetSubtype="4" accel="50000" decel="50000" fill="hold" nodeType="clickEffect">
+                                <p:cTn id="5" presetID="2" presetClass="entr" presetSubtype="1" accel="50000" decel="50000" fill="hold" nodeType="withEffect">
                                   <p:stCondLst>
-                                    <p:cond delay="0"/>
+                                    <p:cond delay="120"/>
                                   </p:stCondLst>
                                   <p:childTnLst>
                                     <p:set>
@@ -6233,7 +6203,7 @@
                                     </p:set>
                                     <p:anim calcmode="lin" valueType="num">
                                       <p:cBhvr additive="base">
-                                        <p:cTn id="7" dur="450" fill="hold"/>
+                                        <p:cTn id="7" dur="500" fill="hold"/>
                                         <p:tgtEl>
                                           <p:spTgt spid="12"/>
                                         </p:tgtEl>
@@ -6256,7 +6226,7 @@
                                     </p:anim>
                                     <p:anim calcmode="lin" valueType="num">
                                       <p:cBhvr additive="base">
-                                        <p:cTn id="8" dur="450" fill="hold"/>
+                                        <p:cTn id="8" dur="500" fill="hold"/>
                                         <p:tgtEl>
                                           <p:spTgt spid="12"/>
                                         </p:tgtEl>
@@ -6267,7 +6237,7 @@
                                       <p:tavLst>
                                         <p:tav tm="0">
                                           <p:val>
-                                            <p:strVal val="1+#ppt_h/2"/>
+                                            <p:strVal val="0-#ppt_h/2"/>
                                           </p:val>
                                         </p:tav>
                                         <p:tav tm="100000">
@@ -6280,33 +6250,15 @@
                                   </p:childTnLst>
                                 </p:cTn>
                               </p:par>
-                            </p:childTnLst>
-                          </p:cTn>
-                        </p:par>
-                      </p:childTnLst>
-                    </p:cTn>
-                  </p:par>
-                  <p:par>
-                    <p:cTn id="9" fill="hold">
-                      <p:stCondLst>
-                        <p:cond delay="indefinite"/>
-                      </p:stCondLst>
-                      <p:childTnLst>
-                        <p:par>
-                          <p:cTn id="10" fill="hold">
-                            <p:stCondLst>
-                              <p:cond delay="0"/>
-                            </p:stCondLst>
-                            <p:childTnLst>
                               <p:par>
-                                <p:cTn id="11" presetID="2" presetClass="entr" presetSubtype="4" accel="50000" decel="50000" fill="hold" nodeType="clickEffect">
+                                <p:cTn id="9" presetID="2" presetClass="entr" presetSubtype="1" accel="50000" decel="50000" fill="hold" nodeType="withEffect">
                                   <p:stCondLst>
-                                    <p:cond delay="0"/>
+                                    <p:cond delay="240"/>
                                   </p:stCondLst>
                                   <p:childTnLst>
                                     <p:set>
                                       <p:cBhvr>
-                                        <p:cTn id="12" dur="1" fill="hold">
+                                        <p:cTn id="10" dur="1" fill="hold">
                                           <p:stCondLst>
                                             <p:cond delay="0"/>
                                           </p:stCondLst>
@@ -6324,7 +6276,7 @@
                                     </p:set>
                                     <p:anim calcmode="lin" valueType="num">
                                       <p:cBhvr additive="base">
-                                        <p:cTn id="13" dur="450" fill="hold"/>
+                                        <p:cTn id="11" dur="500" fill="hold"/>
                                         <p:tgtEl>
                                           <p:spTgt spid="18"/>
                                         </p:tgtEl>
@@ -6347,7 +6299,7 @@
                                     </p:anim>
                                     <p:anim calcmode="lin" valueType="num">
                                       <p:cBhvr additive="base">
-                                        <p:cTn id="14" dur="450" fill="hold"/>
+                                        <p:cTn id="12" dur="500" fill="hold"/>
                                         <p:tgtEl>
                                           <p:spTgt spid="18"/>
                                         </p:tgtEl>
@@ -6358,7 +6310,7 @@
                                       <p:tavLst>
                                         <p:tav tm="0">
                                           <p:val>
-                                            <p:strVal val="1+#ppt_h/2"/>
+                                            <p:strVal val="0-#ppt_h/2"/>
                                           </p:val>
                                         </p:tav>
                                         <p:tav tm="100000">
@@ -6371,33 +6323,15 @@
                                   </p:childTnLst>
                                 </p:cTn>
                               </p:par>
-                            </p:childTnLst>
-                          </p:cTn>
-                        </p:par>
-                      </p:childTnLst>
-                    </p:cTn>
-                  </p:par>
-                  <p:par>
-                    <p:cTn id="15" fill="hold">
-                      <p:stCondLst>
-                        <p:cond delay="indefinite"/>
-                      </p:stCondLst>
-                      <p:childTnLst>
-                        <p:par>
-                          <p:cTn id="16" fill="hold">
-                            <p:stCondLst>
-                              <p:cond delay="0"/>
-                            </p:stCondLst>
-                            <p:childTnLst>
                               <p:par>
-                                <p:cTn id="17" presetID="2" presetClass="entr" presetSubtype="4" accel="50000" decel="50000" fill="hold" nodeType="clickEffect">
+                                <p:cTn id="13" presetID="2" presetClass="entr" presetSubtype="1" accel="50000" decel="50000" fill="hold" nodeType="withEffect">
                                   <p:stCondLst>
-                                    <p:cond delay="0"/>
+                                    <p:cond delay="360"/>
                                   </p:stCondLst>
                                   <p:childTnLst>
                                     <p:set>
                                       <p:cBhvr>
-                                        <p:cTn id="18" dur="1" fill="hold">
+                                        <p:cTn id="14" dur="1" fill="hold">
                                           <p:stCondLst>
                                             <p:cond delay="0"/>
                                           </p:stCondLst>
@@ -6415,7 +6349,7 @@
                                     </p:set>
                                     <p:anim calcmode="lin" valueType="num">
                                       <p:cBhvr additive="base">
-                                        <p:cTn id="19" dur="450" fill="hold"/>
+                                        <p:cTn id="15" dur="500" fill="hold"/>
                                         <p:tgtEl>
                                           <p:spTgt spid="24"/>
                                         </p:tgtEl>
@@ -6438,7 +6372,7 @@
                                     </p:anim>
                                     <p:anim calcmode="lin" valueType="num">
                                       <p:cBhvr additive="base">
-                                        <p:cTn id="20" dur="450" fill="hold"/>
+                                        <p:cTn id="16" dur="500" fill="hold"/>
                                         <p:tgtEl>
                                           <p:spTgt spid="24"/>
                                         </p:tgtEl>
@@ -6449,7 +6383,7 @@
                                       <p:tavLst>
                                         <p:tav tm="0">
                                           <p:val>
-                                            <p:strVal val="1+#ppt_h/2"/>
+                                            <p:strVal val="0-#ppt_h/2"/>
                                           </p:val>
                                         </p:tav>
                                         <p:tav tm="100000">
@@ -6520,10 +6454,10 @@
       </p:grpSpPr>
       <p:sp>
         <p:nvSpPr>
-          <p:cNvPr id="2" name="!!Anchor_Kicker_Rail">
+          <p:cNvPr id="2" name="!!Anchor_Kicker_Rail!!">
             <a:extLst>
               <a:ext uri="{FF2B5EF4-FFF2-40B4-BE49-F238E27FC236}">
-                <a16:creationId xmlns:a16="http://schemas.microsoft.com/office/drawing/2014/main" id="{D5DF39A8-1374-D411-5BAD-5EFD2F65EB85}"/>
+                <a16:creationId xmlns:a16="http://schemas.microsoft.com/office/drawing/2014/main" id="{543F9D54-9829-E89A-C582-D405ED799587}"/>
               </a:ext>
             </a:extLst>
           </p:cNvPr>
@@ -6560,10 +6494,10 @@
       </p:sp>
       <p:sp>
         <p:nvSpPr>
-          <p:cNvPr id="3" name="!!Anchor_Slide_Tracker">
+          <p:cNvPr id="3" name="!!Anchor_Slide_Tracker!!">
             <a:extLst>
               <a:ext uri="{FF2B5EF4-FFF2-40B4-BE49-F238E27FC236}">
-                <a16:creationId xmlns:a16="http://schemas.microsoft.com/office/drawing/2014/main" id="{0FE9A2E5-2A77-4743-9BEE-2AB21F3FA44D}"/>
+                <a16:creationId xmlns:a16="http://schemas.microsoft.com/office/drawing/2014/main" id="{CDE9DDFD-4106-A54E-DDDA-61151B527B79}"/>
               </a:ext>
             </a:extLst>
           </p:cNvPr>
@@ -6601,10 +6535,10 @@
       </p:sp>
       <p:sp>
         <p:nvSpPr>
-          <p:cNvPr id="4" name="!!Anchor_Assertion_Title">
+          <p:cNvPr id="4" name="!!Anchor_Assertion_Title!!">
             <a:extLst>
               <a:ext uri="{FF2B5EF4-FFF2-40B4-BE49-F238E27FC236}">
-                <a16:creationId xmlns:a16="http://schemas.microsoft.com/office/drawing/2014/main" id="{0B045DDC-CBB0-5781-FAC9-F0647F20FEA4}"/>
+                <a16:creationId xmlns:a16="http://schemas.microsoft.com/office/drawing/2014/main" id="{14E37F78-576F-A552-A5EA-35B707FC08B6}"/>
               </a:ext>
             </a:extLst>
           </p:cNvPr>
@@ -6647,10 +6581,10 @@
       </p:sp>
       <p:grpSp>
         <p:nvGrpSpPr>
-          <p:cNvPr id="12" name="!!Stage_Hero_Container">
+          <p:cNvPr id="12" name="!!Stage_Hero_Container!!">
             <a:extLst>
               <a:ext uri="{FF2B5EF4-FFF2-40B4-BE49-F238E27FC236}">
-                <a16:creationId xmlns:a16="http://schemas.microsoft.com/office/drawing/2014/main" id="{F6E950B5-E0BF-1E12-2D29-01603AF586F2}"/>
+                <a16:creationId xmlns:a16="http://schemas.microsoft.com/office/drawing/2014/main" id="{E9D7B87F-84DB-3141-3720-574681038F8D}"/>
               </a:ext>
             </a:extLst>
           </p:cNvPr>
@@ -6670,7 +6604,7 @@
             <p:cNvPr id="6" name="Picture 5">
               <a:extLst>
                 <a:ext uri="{FF2B5EF4-FFF2-40B4-BE49-F238E27FC236}">
-                  <a16:creationId xmlns:a16="http://schemas.microsoft.com/office/drawing/2014/main" id="{421DEAE9-9830-2ACB-F42B-F2CF72456564}"/>
+                  <a16:creationId xmlns:a16="http://schemas.microsoft.com/office/drawing/2014/main" id="{CA90A017-BA05-A0C0-A36F-98D9CFFEA1CB}"/>
                 </a:ext>
               </a:extLst>
             </p:cNvPr>
@@ -6711,7 +6645,7 @@
             <p:cNvPr id="7" name="Rectangle: Rounded Corners 6">
               <a:extLst>
                 <a:ext uri="{FF2B5EF4-FFF2-40B4-BE49-F238E27FC236}">
-                  <a16:creationId xmlns:a16="http://schemas.microsoft.com/office/drawing/2014/main" id="{49AE249D-06ED-FB02-2530-7EA11751328C}"/>
+                  <a16:creationId xmlns:a16="http://schemas.microsoft.com/office/drawing/2014/main" id="{52CF6785-F80B-28AA-C583-15EED581B2AC}"/>
                 </a:ext>
               </a:extLst>
             </p:cNvPr>
@@ -6765,7 +6699,7 @@
             <p:cNvPr id="8" name="Oval 7">
               <a:extLst>
                 <a:ext uri="{FF2B5EF4-FFF2-40B4-BE49-F238E27FC236}">
-                  <a16:creationId xmlns:a16="http://schemas.microsoft.com/office/drawing/2014/main" id="{F7ED0746-6642-BC33-6EF6-DDE14DAB72FA}"/>
+                  <a16:creationId xmlns:a16="http://schemas.microsoft.com/office/drawing/2014/main" id="{8AE98967-10EA-E6F5-45E0-FE2A8F05F8AD}"/>
                 </a:ext>
               </a:extLst>
             </p:cNvPr>
@@ -6833,7 +6767,7 @@
             <p:cNvPr id="10" name="Graphic 9">
               <a:extLst>
                 <a:ext uri="{FF2B5EF4-FFF2-40B4-BE49-F238E27FC236}">
-                  <a16:creationId xmlns:a16="http://schemas.microsoft.com/office/drawing/2014/main" id="{F35FF90E-8BAA-6DDD-FB99-4399822FE9C0}"/>
+                  <a16:creationId xmlns:a16="http://schemas.microsoft.com/office/drawing/2014/main" id="{49DD3AD4-4F32-99C4-2984-8D7DCC62D273}"/>
                 </a:ext>
               </a:extLst>
             </p:cNvPr>
@@ -6869,7 +6803,7 @@
             <p:cNvPr id="11" name="TextBox 10">
               <a:extLst>
                 <a:ext uri="{FF2B5EF4-FFF2-40B4-BE49-F238E27FC236}">
-                  <a16:creationId xmlns:a16="http://schemas.microsoft.com/office/drawing/2014/main" id="{A17C811F-167A-9467-B662-549A8DCFF4EC}"/>
+                  <a16:creationId xmlns:a16="http://schemas.microsoft.com/office/drawing/2014/main" id="{831E8687-D4D5-596B-27DE-EA5F4703D30D}"/>
                 </a:ext>
               </a:extLst>
             </p:cNvPr>
@@ -6931,10 +6865,10 @@
       </p:grpSp>
       <p:grpSp>
         <p:nvGrpSpPr>
-          <p:cNvPr id="18" name="!!Stage_Sub_Card_1">
+          <p:cNvPr id="18" name="!!Stage_Sub_Card_1!!">
             <a:extLst>
               <a:ext uri="{FF2B5EF4-FFF2-40B4-BE49-F238E27FC236}">
-                <a16:creationId xmlns:a16="http://schemas.microsoft.com/office/drawing/2014/main" id="{BE3C8AC7-3564-869A-F336-B2FCD5C44147}"/>
+                <a16:creationId xmlns:a16="http://schemas.microsoft.com/office/drawing/2014/main" id="{46522EA2-1610-762B-F8BF-56AC57A58044}"/>
               </a:ext>
             </a:extLst>
           </p:cNvPr>
@@ -6954,7 +6888,7 @@
             <p:cNvPr id="13" name="Rectangle: Rounded Corners 12">
               <a:extLst>
                 <a:ext uri="{FF2B5EF4-FFF2-40B4-BE49-F238E27FC236}">
-                  <a16:creationId xmlns:a16="http://schemas.microsoft.com/office/drawing/2014/main" id="{B4451096-AB79-65D1-8D1F-1AB891218EBC}"/>
+                  <a16:creationId xmlns:a16="http://schemas.microsoft.com/office/drawing/2014/main" id="{F59019C4-B343-044B-62E3-8D60456C71CF}"/>
                 </a:ext>
               </a:extLst>
             </p:cNvPr>
@@ -7008,7 +6942,7 @@
             <p:cNvPr id="14" name="Oval 13">
               <a:extLst>
                 <a:ext uri="{FF2B5EF4-FFF2-40B4-BE49-F238E27FC236}">
-                  <a16:creationId xmlns:a16="http://schemas.microsoft.com/office/drawing/2014/main" id="{74CCC170-DAED-D948-0D1D-573ECF515346}"/>
+                  <a16:creationId xmlns:a16="http://schemas.microsoft.com/office/drawing/2014/main" id="{A61F4EDC-81FE-B3CE-2798-EC36BAC52D4F}"/>
                 </a:ext>
               </a:extLst>
             </p:cNvPr>
@@ -7076,7 +7010,7 @@
             <p:cNvPr id="16" name="Graphic 15">
               <a:extLst>
                 <a:ext uri="{FF2B5EF4-FFF2-40B4-BE49-F238E27FC236}">
-                  <a16:creationId xmlns:a16="http://schemas.microsoft.com/office/drawing/2014/main" id="{40DD39C5-892C-09C3-92E1-31230DB44647}"/>
+                  <a16:creationId xmlns:a16="http://schemas.microsoft.com/office/drawing/2014/main" id="{DB9FA089-6CB4-A7A2-51FA-1C61ACE607AD}"/>
                 </a:ext>
               </a:extLst>
             </p:cNvPr>
@@ -7112,7 +7046,7 @@
             <p:cNvPr id="17" name="TextBox 16">
               <a:extLst>
                 <a:ext uri="{FF2B5EF4-FFF2-40B4-BE49-F238E27FC236}">
-                  <a16:creationId xmlns:a16="http://schemas.microsoft.com/office/drawing/2014/main" id="{58A31545-BCED-20E1-940F-BF14EF98C99C}"/>
+                  <a16:creationId xmlns:a16="http://schemas.microsoft.com/office/drawing/2014/main" id="{ADF79B9E-DF97-9CDE-E1FE-990ED4A37005}"/>
                 </a:ext>
               </a:extLst>
             </p:cNvPr>
@@ -7171,10 +7105,10 @@
       </p:grpSp>
       <p:grpSp>
         <p:nvGrpSpPr>
-          <p:cNvPr id="24" name="!!Stage_Sub_Card_2">
+          <p:cNvPr id="24" name="!!Stage_Sub_Card_2!!">
             <a:extLst>
               <a:ext uri="{FF2B5EF4-FFF2-40B4-BE49-F238E27FC236}">
-                <a16:creationId xmlns:a16="http://schemas.microsoft.com/office/drawing/2014/main" id="{8038A1DE-0040-5CD6-9C6C-F4497CB696F5}"/>
+                <a16:creationId xmlns:a16="http://schemas.microsoft.com/office/drawing/2014/main" id="{B71E94BD-D25F-2A4B-A145-F2BDF453AC59}"/>
               </a:ext>
             </a:extLst>
           </p:cNvPr>
@@ -7194,7 +7128,7 @@
             <p:cNvPr id="19" name="Rectangle: Rounded Corners 18">
               <a:extLst>
                 <a:ext uri="{FF2B5EF4-FFF2-40B4-BE49-F238E27FC236}">
-                  <a16:creationId xmlns:a16="http://schemas.microsoft.com/office/drawing/2014/main" id="{FAD809D8-1E2E-ADA9-BC5E-4CB3B4DB008B}"/>
+                  <a16:creationId xmlns:a16="http://schemas.microsoft.com/office/drawing/2014/main" id="{4566DB66-6E8B-0F23-A17A-A0AF6E477DBB}"/>
                 </a:ext>
               </a:extLst>
             </p:cNvPr>
@@ -7248,7 +7182,7 @@
             <p:cNvPr id="20" name="Oval 19">
               <a:extLst>
                 <a:ext uri="{FF2B5EF4-FFF2-40B4-BE49-F238E27FC236}">
-                  <a16:creationId xmlns:a16="http://schemas.microsoft.com/office/drawing/2014/main" id="{19AAA6B0-E216-7116-1BF4-C3CCBF6711EC}"/>
+                  <a16:creationId xmlns:a16="http://schemas.microsoft.com/office/drawing/2014/main" id="{2A47C12B-5434-E8AA-EF3A-4090005AD59D}"/>
                 </a:ext>
               </a:extLst>
             </p:cNvPr>
@@ -7316,7 +7250,7 @@
             <p:cNvPr id="22" name="Graphic 21">
               <a:extLst>
                 <a:ext uri="{FF2B5EF4-FFF2-40B4-BE49-F238E27FC236}">
-                  <a16:creationId xmlns:a16="http://schemas.microsoft.com/office/drawing/2014/main" id="{83EEA024-36AD-BDA5-14C2-752EC354FFA5}"/>
+                  <a16:creationId xmlns:a16="http://schemas.microsoft.com/office/drawing/2014/main" id="{F9C48CE1-36A6-F221-5B68-D664062760D9}"/>
                 </a:ext>
               </a:extLst>
             </p:cNvPr>
@@ -7352,7 +7286,7 @@
             <p:cNvPr id="23" name="TextBox 22">
               <a:extLst>
                 <a:ext uri="{FF2B5EF4-FFF2-40B4-BE49-F238E27FC236}">
-                  <a16:creationId xmlns:a16="http://schemas.microsoft.com/office/drawing/2014/main" id="{D1C3B8FC-B139-1C2C-E66F-F9850B08CCED}"/>
+                  <a16:creationId xmlns:a16="http://schemas.microsoft.com/office/drawing/2014/main" id="{D638676A-0970-171B-90C0-71CC36420F05}"/>
                 </a:ext>
               </a:extLst>
             </p:cNvPr>
@@ -7411,10 +7345,10 @@
       </p:grpSp>
       <p:grpSp>
         <p:nvGrpSpPr>
-          <p:cNvPr id="30" name="!!Stage_Sub_Card_3">
+          <p:cNvPr id="30" name="!!Stage_Sub_Card_3!!">
             <a:extLst>
               <a:ext uri="{FF2B5EF4-FFF2-40B4-BE49-F238E27FC236}">
-                <a16:creationId xmlns:a16="http://schemas.microsoft.com/office/drawing/2014/main" id="{E9F9E1D8-EC4D-A87C-3128-07284EE36692}"/>
+                <a16:creationId xmlns:a16="http://schemas.microsoft.com/office/drawing/2014/main" id="{F07DEA0B-C52A-DEAE-983C-0A02877D2345}"/>
               </a:ext>
             </a:extLst>
           </p:cNvPr>
@@ -7434,7 +7368,7 @@
             <p:cNvPr id="25" name="Rectangle: Rounded Corners 24">
               <a:extLst>
                 <a:ext uri="{FF2B5EF4-FFF2-40B4-BE49-F238E27FC236}">
-                  <a16:creationId xmlns:a16="http://schemas.microsoft.com/office/drawing/2014/main" id="{409F54D2-9AF5-73DE-45A9-847C1D8F949D}"/>
+                  <a16:creationId xmlns:a16="http://schemas.microsoft.com/office/drawing/2014/main" id="{2ED63E75-8498-6FDE-8372-FB2E4EE0ED08}"/>
                 </a:ext>
               </a:extLst>
             </p:cNvPr>
@@ -7488,7 +7422,7 @@
             <p:cNvPr id="26" name="Oval 25">
               <a:extLst>
                 <a:ext uri="{FF2B5EF4-FFF2-40B4-BE49-F238E27FC236}">
-                  <a16:creationId xmlns:a16="http://schemas.microsoft.com/office/drawing/2014/main" id="{995B1D5D-514A-1133-CA09-C2121B1BE32A}"/>
+                  <a16:creationId xmlns:a16="http://schemas.microsoft.com/office/drawing/2014/main" id="{BEC1CB6B-0CA3-AC16-E5AD-180CA7354D61}"/>
                 </a:ext>
               </a:extLst>
             </p:cNvPr>
@@ -7556,7 +7490,7 @@
             <p:cNvPr id="28" name="Graphic 27">
               <a:extLst>
                 <a:ext uri="{FF2B5EF4-FFF2-40B4-BE49-F238E27FC236}">
-                  <a16:creationId xmlns:a16="http://schemas.microsoft.com/office/drawing/2014/main" id="{661C508C-AF26-04FE-8B55-E91427BFD8F1}"/>
+                  <a16:creationId xmlns:a16="http://schemas.microsoft.com/office/drawing/2014/main" id="{D1B306BF-93F3-A9CE-D3BF-A2970D65F32F}"/>
                 </a:ext>
               </a:extLst>
             </p:cNvPr>
@@ -7592,7 +7526,7 @@
             <p:cNvPr id="29" name="TextBox 28">
               <a:extLst>
                 <a:ext uri="{FF2B5EF4-FFF2-40B4-BE49-F238E27FC236}">
-                  <a16:creationId xmlns:a16="http://schemas.microsoft.com/office/drawing/2014/main" id="{7E2FA50D-314F-CE24-F37A-18EAFE7A81B1}"/>
+                  <a16:creationId xmlns:a16="http://schemas.microsoft.com/office/drawing/2014/main" id="{72F8AEE1-A117-827E-3069-02770A8BFBD2}"/>
                 </a:ext>
               </a:extLst>
             </p:cNvPr>
@@ -7637,7 +7571,7 @@
                   </a:solidFill>
                   <a:latin typeface="Segoe UI" panose="020B0502040204020203" pitchFamily="34" charset="0"/>
                 </a:rPr>
-                <a:t>Tỷ số giới tính khi sinh duy trì mức cao 112 bé trai / 100 bé gái, tiềm ẩn nguy cơ dư thừa 1.5 triệu nam giới vào năm 2034.</a:t>
+                <a:t>Tỷ số giới tính khi sinh duy trì mức cao 112 bé trai / 100 bé gái, tiềm ẩn nguy cơ dư thừa 1.5 triệu nam giới vào năm 1958.</a:t>
               </a:r>
               <a:endParaRPr lang="en-US" sz="1400" b="1">
                 <a:solidFill>
@@ -7651,10 +7585,10 @@
       </p:grpSp>
       <p:sp>
         <p:nvSpPr>
-          <p:cNvPr id="31" name="!!Anchor_Source_Footer">
+          <p:cNvPr id="31" name="!!Anchor_Source_Footer!!">
             <a:extLst>
               <a:ext uri="{FF2B5EF4-FFF2-40B4-BE49-F238E27FC236}">
-                <a16:creationId xmlns:a16="http://schemas.microsoft.com/office/drawing/2014/main" id="{18BA0E4A-4B87-AF67-20A0-C86DE2F5CBE7}"/>
+                <a16:creationId xmlns:a16="http://schemas.microsoft.com/office/drawing/2014/main" id="{80A06C57-56C5-E093-9FC6-158A38D84967}"/>
               </a:ext>
             </a:extLst>
           </p:cNvPr>
@@ -7692,7 +7626,7 @@
     </p:spTree>
     <p:extLst>
       <p:ext uri="{BB962C8B-B14F-4D97-AF65-F5344CB8AC3E}">
-        <p14:creationId xmlns:p14="http://schemas.microsoft.com/office/powerpoint/2010/main" val="2850677409"/>
+        <p14:creationId xmlns:p14="http://schemas.microsoft.com/office/powerpoint/2010/main" val="2969960488"/>
       </p:ext>
     </p:extLst>
   </p:cSld>
@@ -7723,6 +7657,9 @@
                     <p:cTn id="3" fill="hold">
                       <p:stCondLst>
                         <p:cond delay="indefinite"/>
+                        <p:cond evt="onBegin" delay="0">
+                          <p:tn val="2"/>
+                        </p:cond>
                       </p:stCondLst>
                       <p:childTnLst>
                         <p:par>
@@ -7732,9 +7669,9 @@
                             </p:stCondLst>
                             <p:childTnLst>
                               <p:par>
-                                <p:cTn id="5" presetID="2" presetClass="entr" presetSubtype="4" accel="50000" decel="50000" fill="hold" nodeType="clickEffect">
+                                <p:cTn id="5" presetID="2" presetClass="entr" presetSubtype="1" accel="50000" decel="50000" fill="hold" nodeType="withEffect">
                                   <p:stCondLst>
-                                    <p:cond delay="0"/>
+                                    <p:cond delay="120"/>
                                   </p:stCondLst>
                                   <p:childTnLst>
                                     <p:set>
@@ -7757,7 +7694,7 @@
                                     </p:set>
                                     <p:anim calcmode="lin" valueType="num">
                                       <p:cBhvr additive="base">
-                                        <p:cTn id="7" dur="450" fill="hold"/>
+                                        <p:cTn id="7" dur="500" fill="hold"/>
                                         <p:tgtEl>
                                           <p:spTgt spid="18"/>
                                         </p:tgtEl>
@@ -7780,7 +7717,7 @@
                                     </p:anim>
                                     <p:anim calcmode="lin" valueType="num">
                                       <p:cBhvr additive="base">
-                                        <p:cTn id="8" dur="450" fill="hold"/>
+                                        <p:cTn id="8" dur="500" fill="hold"/>
                                         <p:tgtEl>
                                           <p:spTgt spid="18"/>
                                         </p:tgtEl>
@@ -7791,7 +7728,7 @@
                                       <p:tavLst>
                                         <p:tav tm="0">
                                           <p:val>
-                                            <p:strVal val="1+#ppt_h/2"/>
+                                            <p:strVal val="0-#ppt_h/2"/>
                                           </p:val>
                                         </p:tav>
                                         <p:tav tm="100000">
@@ -7804,33 +7741,15 @@
                                   </p:childTnLst>
                                 </p:cTn>
                               </p:par>
-                            </p:childTnLst>
-                          </p:cTn>
-                        </p:par>
-                      </p:childTnLst>
-                    </p:cTn>
-                  </p:par>
-                  <p:par>
-                    <p:cTn id="9" fill="hold">
-                      <p:stCondLst>
-                        <p:cond delay="indefinite"/>
-                      </p:stCondLst>
-                      <p:childTnLst>
-                        <p:par>
-                          <p:cTn id="10" fill="hold">
-                            <p:stCondLst>
-                              <p:cond delay="0"/>
-                            </p:stCondLst>
-                            <p:childTnLst>
                               <p:par>
-                                <p:cTn id="11" presetID="2" presetClass="entr" presetSubtype="4" accel="50000" decel="50000" fill="hold" nodeType="clickEffect">
+                                <p:cTn id="9" presetID="2" presetClass="entr" presetSubtype="1" accel="50000" decel="50000" fill="hold" nodeType="withEffect">
                                   <p:stCondLst>
-                                    <p:cond delay="0"/>
+                                    <p:cond delay="240"/>
                                   </p:stCondLst>
                                   <p:childTnLst>
                                     <p:set>
                                       <p:cBhvr>
-                                        <p:cTn id="12" dur="1" fill="hold">
+                                        <p:cTn id="10" dur="1" fill="hold">
                                           <p:stCondLst>
                                             <p:cond delay="0"/>
                                           </p:stCondLst>
@@ -7848,7 +7767,7 @@
                                     </p:set>
                                     <p:anim calcmode="lin" valueType="num">
                                       <p:cBhvr additive="base">
-                                        <p:cTn id="13" dur="450" fill="hold"/>
+                                        <p:cTn id="11" dur="500" fill="hold"/>
                                         <p:tgtEl>
                                           <p:spTgt spid="24"/>
                                         </p:tgtEl>
@@ -7871,7 +7790,7 @@
                                     </p:anim>
                                     <p:anim calcmode="lin" valueType="num">
                                       <p:cBhvr additive="base">
-                                        <p:cTn id="14" dur="450" fill="hold"/>
+                                        <p:cTn id="12" dur="500" fill="hold"/>
                                         <p:tgtEl>
                                           <p:spTgt spid="24"/>
                                         </p:tgtEl>
@@ -7882,7 +7801,7 @@
                                       <p:tavLst>
                                         <p:tav tm="0">
                                           <p:val>
-                                            <p:strVal val="1+#ppt_h/2"/>
+                                            <p:strVal val="0-#ppt_h/2"/>
                                           </p:val>
                                         </p:tav>
                                         <p:tav tm="100000">
@@ -7895,33 +7814,15 @@
                                   </p:childTnLst>
                                 </p:cTn>
                               </p:par>
-                            </p:childTnLst>
-                          </p:cTn>
-                        </p:par>
-                      </p:childTnLst>
-                    </p:cTn>
-                  </p:par>
-                  <p:par>
-                    <p:cTn id="15" fill="hold">
-                      <p:stCondLst>
-                        <p:cond delay="indefinite"/>
-                      </p:stCondLst>
-                      <p:childTnLst>
-                        <p:par>
-                          <p:cTn id="16" fill="hold">
-                            <p:stCondLst>
-                              <p:cond delay="0"/>
-                            </p:stCondLst>
-                            <p:childTnLst>
                               <p:par>
-                                <p:cTn id="17" presetID="2" presetClass="entr" presetSubtype="4" accel="50000" decel="50000" fill="hold" nodeType="clickEffect">
+                                <p:cTn id="13" presetID="2" presetClass="entr" presetSubtype="1" accel="50000" decel="50000" fill="hold" nodeType="withEffect">
                                   <p:stCondLst>
-                                    <p:cond delay="0"/>
+                                    <p:cond delay="360"/>
                                   </p:stCondLst>
                                   <p:childTnLst>
                                     <p:set>
                                       <p:cBhvr>
-                                        <p:cTn id="18" dur="1" fill="hold">
+                                        <p:cTn id="14" dur="1" fill="hold">
                                           <p:stCondLst>
                                             <p:cond delay="0"/>
                                           </p:stCondLst>
@@ -7939,7 +7840,7 @@
                                     </p:set>
                                     <p:anim calcmode="lin" valueType="num">
                                       <p:cBhvr additive="base">
-                                        <p:cTn id="19" dur="450" fill="hold"/>
+                                        <p:cTn id="15" dur="500" fill="hold"/>
                                         <p:tgtEl>
                                           <p:spTgt spid="30"/>
                                         </p:tgtEl>
@@ -7962,7 +7863,7 @@
                                     </p:anim>
                                     <p:anim calcmode="lin" valueType="num">
                                       <p:cBhvr additive="base">
-                                        <p:cTn id="20" dur="450" fill="hold"/>
+                                        <p:cTn id="16" dur="500" fill="hold"/>
                                         <p:tgtEl>
                                           <p:spTgt spid="30"/>
                                         </p:tgtEl>
@@ -7973,7 +7874,7 @@
                                       <p:tavLst>
                                         <p:tav tm="0">
                                           <p:val>
-                                            <p:strVal val="1+#ppt_h/2"/>
+                                            <p:strVal val="0-#ppt_h/2"/>
                                           </p:val>
                                         </p:tav>
                                         <p:tav tm="100000">
@@ -8044,10 +7945,10 @@
       </p:grpSpPr>
       <p:sp>
         <p:nvSpPr>
-          <p:cNvPr id="2" name="!!Anchor_Kicker_Rail">
+          <p:cNvPr id="2" name="!!Anchor_Kicker_Rail!!">
             <a:extLst>
               <a:ext uri="{FF2B5EF4-FFF2-40B4-BE49-F238E27FC236}">
-                <a16:creationId xmlns:a16="http://schemas.microsoft.com/office/drawing/2014/main" id="{23CA04D1-9496-2F91-F00D-CDDB3C2F944C}"/>
+                <a16:creationId xmlns:a16="http://schemas.microsoft.com/office/drawing/2014/main" id="{4F816118-585E-6D8F-B0F4-DE89250F4B5A}"/>
               </a:ext>
             </a:extLst>
           </p:cNvPr>
@@ -8084,10 +7985,10 @@
       </p:sp>
       <p:sp>
         <p:nvSpPr>
-          <p:cNvPr id="3" name="!!Anchor_Slide_Tracker">
+          <p:cNvPr id="3" name="!!Anchor_Slide_Tracker!!">
             <a:extLst>
               <a:ext uri="{FF2B5EF4-FFF2-40B4-BE49-F238E27FC236}">
-                <a16:creationId xmlns:a16="http://schemas.microsoft.com/office/drawing/2014/main" id="{5A1A341C-3920-89C8-A867-A38B0A6E0391}"/>
+                <a16:creationId xmlns:a16="http://schemas.microsoft.com/office/drawing/2014/main" id="{DE9427CE-5EDE-00AF-6601-04A8922D6784}"/>
               </a:ext>
             </a:extLst>
           </p:cNvPr>
@@ -8125,10 +8026,10 @@
       </p:sp>
       <p:sp>
         <p:nvSpPr>
-          <p:cNvPr id="4" name="!!Anchor_Assertion_Title">
+          <p:cNvPr id="4" name="!!Anchor_Assertion_Title!!">
             <a:extLst>
               <a:ext uri="{FF2B5EF4-FFF2-40B4-BE49-F238E27FC236}">
-                <a16:creationId xmlns:a16="http://schemas.microsoft.com/office/drawing/2014/main" id="{F58B91CB-A6C9-19BC-739E-76C2F1F7F671}"/>
+                <a16:creationId xmlns:a16="http://schemas.microsoft.com/office/drawing/2014/main" id="{CA1CFBAA-3C8E-7CB9-1519-2CF40BD75A77}"/>
               </a:ext>
             </a:extLst>
           </p:cNvPr>
@@ -8158,7 +8059,7 @@
                 </a:solidFill>
                 <a:latin typeface="Segoe UI" panose="020B0502040204020203" pitchFamily="34" charset="0"/>
               </a:rPr>
-              <a:t>Khung Lộ Trình Hành Động Chiến Lược Cho Nhà Hoạch Định Đến Năm 2045</a:t>
+              <a:t>Khung Lộ Trình Hành Động Chiến Lược Cho Nhà Hoạch Định Đến Năm 2045</a:t>
             </a:r>
             <a:endParaRPr lang="en-US" sz="2400" b="1">
               <a:solidFill>
@@ -8169,298 +8070,756 @@
           </a:p>
         </p:txBody>
       </p:sp>
-      <p:graphicFrame>
-        <p:nvGraphicFramePr>
-          <p:cNvPr id="5" name="!!Stage_Hero_Container">
+      <p:grpSp>
+        <p:nvGrpSpPr>
+          <p:cNvPr id="10" name="!!Stage_Hero_Container!!">
             <a:extLst>
               <a:ext uri="{FF2B5EF4-FFF2-40B4-BE49-F238E27FC236}">
-                <a16:creationId xmlns:a16="http://schemas.microsoft.com/office/drawing/2014/main" id="{41DC5D48-64DC-BC0B-44D0-06C2DF36E28B}"/>
+                <a16:creationId xmlns:a16="http://schemas.microsoft.com/office/drawing/2014/main" id="{C626A628-17E6-31F6-D61D-A376B3B73589}"/>
               </a:ext>
             </a:extLst>
           </p:cNvPr>
-          <p:cNvGraphicFramePr>
-            <a:graphicFrameLocks noGrp="1"/>
-          </p:cNvGraphicFramePr>
-          <p:nvPr>
-            <p:extLst>
-              <p:ext uri="{D42A27DB-BD31-4B8C-83A1-F6EECF244321}">
-                <p14:modId xmlns:p14="http://schemas.microsoft.com/office/powerpoint/2010/main" val="542854488"/>
-              </p:ext>
-            </p:extLst>
-          </p:nvPr>
-        </p:nvGraphicFramePr>
-        <p:xfrm>
-          <a:off x="609600" y="1676400"/>
-          <a:ext cx="10972800" cy="4521200"/>
-        </p:xfrm>
-        <a:graphic>
-          <a:graphicData uri="http://schemas.openxmlformats.org/drawingml/2006/table">
-            <a:tbl>
-              <a:tblPr firstRow="1" bandRow="1">
-                <a:tableStyleId>{5C22544A-7EE6-4342-B048-85BDC9FD1C3A}</a:tableStyleId>
-              </a:tblPr>
-              <a:tblGrid>
-                <a:gridCol w="3511296">
-                  <a:extLst>
-                    <a:ext uri="{9D8B030D-6E8A-4147-A177-3AD203B41FA5}">
-                      <a16:colId xmlns:a16="http://schemas.microsoft.com/office/drawing/2014/main" val="3816535463"/>
-                    </a:ext>
-                  </a:extLst>
-                </a:gridCol>
-                <a:gridCol w="7461504">
-                  <a:extLst>
-                    <a:ext uri="{9D8B030D-6E8A-4147-A177-3AD203B41FA5}">
-                      <a16:colId xmlns:a16="http://schemas.microsoft.com/office/drawing/2014/main" val="4029732599"/>
-                    </a:ext>
-                  </a:extLst>
-                </a:gridCol>
-              </a:tblGrid>
-              <a:tr h="1130300">
-                <a:tc>
-                  <a:txBody>
-                    <a:bodyPr/>
-                    <a:lstStyle/>
-                    <a:p>
-                      <a:pPr algn="l"/>
-                      <a:r>
-                        <a:rPr lang="en-US" sz="1300" b="1">
-                          <a:solidFill>
-                            <a:srgbClr val="FFFFFF"/>
-                          </a:solidFill>
-                          <a:latin typeface="Segoe UI" panose="020B0502040204020203" pitchFamily="34" charset="0"/>
-                        </a:rPr>
-                        <a:t>CHỈ TIÊU / YẾU TỐ</a:t>
-                      </a:r>
-                    </a:p>
-                  </a:txBody>
-                  <a:tcPr marT="76200" marB="76200" anchor="ctr">
-                    <a:solidFill>
-                      <a:srgbClr val="0284C7"/>
-                    </a:solidFill>
-                  </a:tcPr>
-                </a:tc>
-                <a:tc>
-                  <a:txBody>
-                    <a:bodyPr/>
-                    <a:lstStyle/>
-                    <a:p>
-                      <a:pPr algn="ctr"/>
-                      <a:r>
-                        <a:rPr lang="en-US" sz="1300" b="1">
-                          <a:solidFill>
-                            <a:srgbClr val="FFFFFF"/>
-                          </a:solidFill>
-                          <a:latin typeface="Segoe UI" panose="020B0502040204020203" pitchFamily="34" charset="0"/>
-                        </a:rPr>
-                        <a:t>NỘI DUNG PHÂN TÍCH &amp; MINH CHỨNG THỰC TIỄN</a:t>
-                      </a:r>
-                    </a:p>
-                  </a:txBody>
-                  <a:tcPr marT="76200" marB="76200" anchor="ctr">
-                    <a:solidFill>
-                      <a:srgbClr val="0284C7"/>
-                    </a:solidFill>
-                  </a:tcPr>
-                </a:tc>
-                <a:extLst>
-                  <a:ext uri="{0D108BD9-81ED-4DB2-BD59-A6C34878D82A}">
-                    <a16:rowId xmlns:a16="http://schemas.microsoft.com/office/drawing/2014/main" val="3629347538"/>
-                  </a:ext>
-                </a:extLst>
-              </a:tr>
-              <a:tr h="1130300">
-                <a:tc>
-                  <a:txBody>
-                    <a:bodyPr/>
-                    <a:lstStyle/>
-                    <a:p>
-                      <a:pPr algn="l"/>
-                      <a:r>
-                        <a:rPr lang="vi-VN" sz="1200" b="1">
-                          <a:solidFill>
-                            <a:srgbClr val="0F172A"/>
-                          </a:solidFill>
-                          <a:latin typeface="Segoe UI" panose="020B0502040204020203" pitchFamily="34" charset="0"/>
-                        </a:rPr>
-                        <a:t>2024 - 2030: Bứt Phá Cơ Cấu Vàng</a:t>
-                      </a:r>
-                      <a:endParaRPr lang="en-US" sz="1200" b="1">
-                        <a:solidFill>
-                          <a:srgbClr val="0F172A"/>
-                        </a:solidFill>
-                        <a:latin typeface="Segoe UI" panose="020B0502040204020203" pitchFamily="34" charset="0"/>
-                      </a:endParaRPr>
-                    </a:p>
-                  </a:txBody>
-                  <a:tcPr marT="76200" marB="76200" anchor="ctr">
-                    <a:solidFill>
-                      <a:srgbClr val="F1F5F9"/>
-                    </a:solidFill>
-                  </a:tcPr>
-                </a:tc>
-                <a:tc>
-                  <a:txBody>
-                    <a:bodyPr/>
-                    <a:lstStyle/>
-                    <a:p>
-                      <a:pPr algn="l"/>
-                      <a:r>
-                        <a:rPr lang="vi-VN" sz="1200" b="0">
-                          <a:solidFill>
-                            <a:srgbClr val="0F172A"/>
-                          </a:solidFill>
-                          <a:latin typeface="Segoe UI" panose="020B0502040204020203" pitchFamily="34" charset="0"/>
-                        </a:rPr>
-                        <a:t>Tối đa hóa việc làm chất lượng cao, đào tạo kỹ năng số cho 70% lao động, nâng cao năng suất trước khi già hóa dân số ập đến.</a:t>
-                      </a:r>
-                      <a:endParaRPr lang="en-US" sz="1200" b="0">
-                        <a:solidFill>
-                          <a:srgbClr val="0F172A"/>
-                        </a:solidFill>
-                        <a:latin typeface="Segoe UI" panose="020B0502040204020203" pitchFamily="34" charset="0"/>
-                      </a:endParaRPr>
-                    </a:p>
-                  </a:txBody>
-                  <a:tcPr marT="76200" marB="76200" anchor="ctr">
-                    <a:solidFill>
-                      <a:srgbClr val="F1F5F9"/>
-                    </a:solidFill>
-                  </a:tcPr>
-                </a:tc>
-                <a:extLst>
-                  <a:ext uri="{0D108BD9-81ED-4DB2-BD59-A6C34878D82A}">
-                    <a16:rowId xmlns:a16="http://schemas.microsoft.com/office/drawing/2014/main" val="540463099"/>
-                  </a:ext>
-                </a:extLst>
-              </a:tr>
-              <a:tr h="1130300">
-                <a:tc>
-                  <a:txBody>
-                    <a:bodyPr/>
-                    <a:lstStyle/>
-                    <a:p>
-                      <a:pPr algn="l"/>
-                      <a:r>
-                        <a:rPr lang="en-US" sz="1200" b="1">
-                          <a:solidFill>
-                            <a:srgbClr val="0F172A"/>
-                          </a:solidFill>
-                          <a:latin typeface="Segoe UI" panose="020B0502040204020203" pitchFamily="34" charset="0"/>
-                        </a:rPr>
-                        <a:t>2030 - 2040: Thích Ứng Già Hóa</a:t>
-                      </a:r>
-                    </a:p>
-                  </a:txBody>
-                  <a:tcPr marT="76200" marB="76200" anchor="ctr">
-                    <a:solidFill>
-                      <a:srgbClr val="FFFFFF"/>
-                    </a:solidFill>
-                  </a:tcPr>
-                </a:tc>
-                <a:tc>
-                  <a:txBody>
-                    <a:bodyPr/>
-                    <a:lstStyle/>
-                    <a:p>
-                      <a:pPr algn="l"/>
-                      <a:r>
-                        <a:rPr lang="vi-VN" sz="1200" b="0">
-                          <a:solidFill>
-                            <a:srgbClr val="0F172A"/>
-                          </a:solidFill>
-                          <a:latin typeface="Segoe UI" panose="020B0502040204020203" pitchFamily="34" charset="0"/>
-                        </a:rPr>
-                        <a:t>Cải cách bảo hiểm xã hội đa tầng, hoàn thiện mạng lưới y tế lão khoa và phát triển thị trường kinh tế bạc (Silver Economy).</a:t>
-                      </a:r>
-                      <a:endParaRPr lang="en-US" sz="1200" b="0">
-                        <a:solidFill>
-                          <a:srgbClr val="0F172A"/>
-                        </a:solidFill>
-                        <a:latin typeface="Segoe UI" panose="020B0502040204020203" pitchFamily="34" charset="0"/>
-                      </a:endParaRPr>
-                    </a:p>
-                  </a:txBody>
-                  <a:tcPr marT="76200" marB="76200" anchor="ctr">
-                    <a:solidFill>
-                      <a:srgbClr val="FFFFFF"/>
-                    </a:solidFill>
-                  </a:tcPr>
-                </a:tc>
-                <a:extLst>
-                  <a:ext uri="{0D108BD9-81ED-4DB2-BD59-A6C34878D82A}">
-                    <a16:rowId xmlns:a16="http://schemas.microsoft.com/office/drawing/2014/main" val="3762959367"/>
-                  </a:ext>
-                </a:extLst>
-              </a:tr>
-              <a:tr h="1130300">
-                <a:tc>
-                  <a:txBody>
-                    <a:bodyPr/>
-                    <a:lstStyle/>
-                    <a:p>
-                      <a:pPr algn="l"/>
-                      <a:r>
-                        <a:rPr lang="en-US" sz="1200" b="1">
-                          <a:solidFill>
-                            <a:srgbClr val="0F172A"/>
-                          </a:solidFill>
-                          <a:latin typeface="Segoe UI" panose="020B0502040204020203" pitchFamily="34" charset="0"/>
-                        </a:rPr>
-                        <a:t>Tầm Nhìn 2045: Nâng Tầm Vóc Việt</a:t>
-                      </a:r>
-                    </a:p>
-                  </a:txBody>
-                  <a:tcPr marT="76200" marB="76200" anchor="ctr">
-                    <a:solidFill>
-                      <a:srgbClr val="F1F5F9"/>
-                    </a:solidFill>
-                  </a:tcPr>
-                </a:tc>
-                <a:tc>
-                  <a:txBody>
-                    <a:bodyPr/>
-                    <a:lstStyle/>
-                    <a:p>
-                      <a:pPr algn="l"/>
-                      <a:r>
-                        <a:rPr lang="vi-VN" sz="1200" b="0">
-                          <a:solidFill>
-                            <a:srgbClr val="0F172A"/>
-                          </a:solidFill>
-                          <a:latin typeface="Segoe UI" panose="020B0502040204020203" pitchFamily="34" charset="0"/>
-                        </a:rPr>
-                        <a:t>Đưa chỉ số phát triển con người HDI vào nhóm rất cao (&gt;0.800), bảo đảm an sinh bền vững cho mọi thế hệ công dân.</a:t>
-                      </a:r>
-                      <a:endParaRPr lang="en-US" sz="1200" b="0">
-                        <a:solidFill>
-                          <a:srgbClr val="0F172A"/>
-                        </a:solidFill>
-                        <a:latin typeface="Segoe UI" panose="020B0502040204020203" pitchFamily="34" charset="0"/>
-                      </a:endParaRPr>
-                    </a:p>
-                  </a:txBody>
-                  <a:tcPr marT="76200" marB="76200" anchor="ctr">
-                    <a:solidFill>
-                      <a:srgbClr val="F1F5F9"/>
-                    </a:solidFill>
-                  </a:tcPr>
-                </a:tc>
-                <a:extLst>
-                  <a:ext uri="{0D108BD9-81ED-4DB2-BD59-A6C34878D82A}">
-                    <a16:rowId xmlns:a16="http://schemas.microsoft.com/office/drawing/2014/main" val="3547873602"/>
-                  </a:ext>
-                </a:extLst>
-              </a:tr>
-            </a:tbl>
-          </a:graphicData>
-        </a:graphic>
-      </p:graphicFrame>
+          <p:cNvGrpSpPr/>
+          <p:nvPr/>
+        </p:nvGrpSpPr>
+        <p:grpSpPr>
+          <a:xfrm>
+            <a:off x="609600" y="1676400"/>
+            <a:ext cx="3539067" cy="4521200"/>
+            <a:chOff x="609600" y="1676400"/>
+            <a:chExt cx="3539067" cy="4521200"/>
+          </a:xfrm>
+        </p:grpSpPr>
+        <p:sp>
+          <p:nvSpPr>
+            <p:cNvPr id="5" name="Rectangle: Rounded Corners 4">
+              <a:extLst>
+                <a:ext uri="{FF2B5EF4-FFF2-40B4-BE49-F238E27FC236}">
+                  <a16:creationId xmlns:a16="http://schemas.microsoft.com/office/drawing/2014/main" id="{2A81C354-E2AE-EDCC-845C-9F32271C27F2}"/>
+                </a:ext>
+              </a:extLst>
+            </p:cNvPr>
+            <p:cNvSpPr/>
+            <p:nvPr/>
+          </p:nvSpPr>
+          <p:spPr>
+            <a:xfrm>
+              <a:off x="609600" y="1676400"/>
+              <a:ext cx="3539067" cy="4521200"/>
+            </a:xfrm>
+            <a:prstGeom prst="roundRect">
+              <a:avLst/>
+            </a:prstGeom>
+            <a:solidFill>
+              <a:srgbClr val="FFFFFF"/>
+            </a:solidFill>
+            <a:ln>
+              <a:solidFill>
+                <a:srgbClr val="CBD5E1"/>
+              </a:solidFill>
+            </a:ln>
+          </p:spPr>
+          <p:style>
+            <a:lnRef idx="2">
+              <a:schemeClr val="accent1">
+                <a:shade val="15000"/>
+              </a:schemeClr>
+            </a:lnRef>
+            <a:fillRef idx="1">
+              <a:schemeClr val="accent1"/>
+            </a:fillRef>
+            <a:effectRef idx="0">
+              <a:schemeClr val="accent1"/>
+            </a:effectRef>
+            <a:fontRef idx="minor">
+              <a:schemeClr val="lt1"/>
+            </a:fontRef>
+          </p:style>
+          <p:txBody>
+            <a:bodyPr rtlCol="0" anchor="ctr"/>
+            <a:lstStyle/>
+            <a:p>
+              <a:pPr algn="ctr"/>
+              <a:endParaRPr lang="en-US"/>
+            </a:p>
+          </p:txBody>
+        </p:sp>
+        <p:sp>
+          <p:nvSpPr>
+            <p:cNvPr id="6" name="Rectangle 5">
+              <a:extLst>
+                <a:ext uri="{FF2B5EF4-FFF2-40B4-BE49-F238E27FC236}">
+                  <a16:creationId xmlns:a16="http://schemas.microsoft.com/office/drawing/2014/main" id="{D0334F1B-DC89-5783-694F-D485B32F7D4C}"/>
+                </a:ext>
+              </a:extLst>
+            </p:cNvPr>
+            <p:cNvSpPr/>
+            <p:nvPr/>
+          </p:nvSpPr>
+          <p:spPr>
+            <a:xfrm>
+              <a:off x="812800" y="1879600"/>
+              <a:ext cx="406400" cy="304800"/>
+            </a:xfrm>
+            <a:prstGeom prst="rect">
+              <a:avLst/>
+            </a:prstGeom>
+            <a:solidFill>
+              <a:srgbClr val="0284C7"/>
+            </a:solidFill>
+            <a:ln w="12700" cap="flat" cmpd="sng" algn="ctr">
+              <a:noFill/>
+              <a:prstDash val="solid"/>
+              <a:miter lim="800000"/>
+            </a:ln>
+            <a:effectLst/>
+            <a:extLst>
+              <a:ext uri="{91240B29-F687-4F45-9708-019B960494DF}">
+                <a14:hiddenLine xmlns:a14="http://schemas.microsoft.com/office/drawing/2010/main" w="12700" cap="flat" cmpd="sng" algn="ctr">
+                  <a:solidFill>
+                    <a:schemeClr val="accent1">
+                      <a:shade val="15000"/>
+                    </a:schemeClr>
+                  </a:solidFill>
+                  <a:prstDash val="solid"/>
+                  <a:miter lim="800000"/>
+                </a14:hiddenLine>
+              </a:ext>
+            </a:extLst>
+          </p:spPr>
+          <p:style>
+            <a:lnRef idx="2">
+              <a:schemeClr val="accent1">
+                <a:shade val="15000"/>
+              </a:schemeClr>
+            </a:lnRef>
+            <a:fillRef idx="1">
+              <a:schemeClr val="accent1"/>
+            </a:fillRef>
+            <a:effectRef idx="0">
+              <a:schemeClr val="accent1"/>
+            </a:effectRef>
+            <a:fontRef idx="minor">
+              <a:schemeClr val="lt1"/>
+            </a:fontRef>
+          </p:style>
+          <p:txBody>
+            <a:bodyPr rtlCol="0" anchor="ctr"/>
+            <a:lstStyle/>
+            <a:p>
+              <a:pPr algn="ctr"/>
+              <a:r>
+                <a:rPr lang="en-US" sz="1300" b="1">
+                  <a:solidFill>
+                    <a:srgbClr val="0F172A"/>
+                  </a:solidFill>
+                  <a:latin typeface="Bahnschrift" panose="020B0502040204020203" pitchFamily="34" charset="0"/>
+                </a:rPr>
+                <a:t>01</a:t>
+              </a:r>
+            </a:p>
+          </p:txBody>
+        </p:sp>
+        <p:pic>
+          <p:nvPicPr>
+            <p:cNvPr id="8" name="Graphic 7">
+              <a:extLst>
+                <a:ext uri="{FF2B5EF4-FFF2-40B4-BE49-F238E27FC236}">
+                  <a16:creationId xmlns:a16="http://schemas.microsoft.com/office/drawing/2014/main" id="{455E47AD-D743-3FBC-59CF-487EBB5F35AE}"/>
+                </a:ext>
+              </a:extLst>
+            </p:cNvPr>
+            <p:cNvPicPr>
+              <a:picLocks/>
+            </p:cNvPicPr>
+            <p:nvPr/>
+          </p:nvPicPr>
+          <p:blipFill>
+            <a:blip>
+              <a:extLst>
+                <a:ext uri="{96DAC541-7B7A-43D3-8B79-37D633B846F1}">
+                  <asvg:svgBlip xmlns:asvg="http://schemas.microsoft.com/office/drawing/2016/SVG/main" r:embed="rId2"/>
+                </a:ext>
+              </a:extLst>
+            </a:blip>
+            <a:stretch>
+              <a:fillRect/>
+            </a:stretch>
+          </p:blipFill>
+          <p:spPr>
+            <a:xfrm>
+              <a:off x="3666067" y="1879600"/>
+              <a:ext cx="279400" cy="279400"/>
+            </a:xfrm>
+            <a:prstGeom prst="rect">
+              <a:avLst/>
+            </a:prstGeom>
+          </p:spPr>
+        </p:pic>
+        <p:sp>
+          <p:nvSpPr>
+            <p:cNvPr id="9" name="TextBox 8">
+              <a:extLst>
+                <a:ext uri="{FF2B5EF4-FFF2-40B4-BE49-F238E27FC236}">
+                  <a16:creationId xmlns:a16="http://schemas.microsoft.com/office/drawing/2014/main" id="{93DC116D-BB73-0355-0244-39A7FBE10732}"/>
+                </a:ext>
+              </a:extLst>
+            </p:cNvPr>
+            <p:cNvSpPr txBox="1"/>
+            <p:nvPr/>
+          </p:nvSpPr>
+          <p:spPr>
+            <a:xfrm>
+              <a:off x="812800" y="2336800"/>
+              <a:ext cx="3132667" cy="1615827"/>
+            </a:xfrm>
+            <a:prstGeom prst="rect">
+              <a:avLst/>
+            </a:prstGeom>
+            <a:noFill/>
+          </p:spPr>
+          <p:txBody>
+            <a:bodyPr vert="horz" wrap="square" lIns="0" rtlCol="0">
+              <a:spAutoFit/>
+            </a:bodyPr>
+            <a:lstStyle/>
+            <a:p>
+              <a:pPr>
+                <a:spcAft>
+                  <a:spcPts val="600"/>
+                </a:spcAft>
+              </a:pPr>
+              <a:r>
+                <a:rPr lang="vi-VN" sz="1700" b="1">
+                  <a:solidFill>
+                    <a:srgbClr val="0F172A"/>
+                  </a:solidFill>
+                  <a:latin typeface="Segoe UI" panose="020B0502040204020203" pitchFamily="34" charset="0"/>
+                </a:rPr>
+                <a:t>2024 - 2030: Bứt Phá Cơ Cấu Vàng
+</a:t>
+              </a:r>
+              <a:r>
+                <a:rPr lang="vi-VN" sz="1500" b="1">
+                  <a:solidFill>
+                    <a:srgbClr val="334155"/>
+                  </a:solidFill>
+                  <a:latin typeface="Segoe UI" panose="020B0502040204020203" pitchFamily="34" charset="0"/>
+                </a:rPr>
+                <a:t>Tối đa hóa việc làm chất lượng cao, đào tạo kỹ năng số cho 70% lao động, nâng cao năng suất trước khi già hóa dân số ập đến.</a:t>
+              </a:r>
+              <a:endParaRPr lang="en-US" sz="1500" b="1">
+                <a:solidFill>
+                  <a:srgbClr val="334155"/>
+                </a:solidFill>
+                <a:latin typeface="Segoe UI" panose="020B0502040204020203" pitchFamily="34" charset="0"/>
+              </a:endParaRPr>
+            </a:p>
+          </p:txBody>
+        </p:sp>
+      </p:grpSp>
+      <p:grpSp>
+        <p:nvGrpSpPr>
+          <p:cNvPr id="16" name="!!Stage_Sub_Card_1!!">
+            <a:extLst>
+              <a:ext uri="{FF2B5EF4-FFF2-40B4-BE49-F238E27FC236}">
+                <a16:creationId xmlns:a16="http://schemas.microsoft.com/office/drawing/2014/main" id="{46B88FD9-400D-9409-DBCE-F4CCC446811D}"/>
+              </a:ext>
+            </a:extLst>
+          </p:cNvPr>
+          <p:cNvGrpSpPr/>
+          <p:nvPr/>
+        </p:nvGrpSpPr>
+        <p:grpSpPr>
+          <a:xfrm>
+            <a:off x="4326467" y="1676400"/>
+            <a:ext cx="3539066" cy="4521200"/>
+            <a:chOff x="4326467" y="1676400"/>
+            <a:chExt cx="3539066" cy="4521200"/>
+          </a:xfrm>
+        </p:grpSpPr>
+        <p:sp>
+          <p:nvSpPr>
+            <p:cNvPr id="11" name="Rectangle: Rounded Corners 10">
+              <a:extLst>
+                <a:ext uri="{FF2B5EF4-FFF2-40B4-BE49-F238E27FC236}">
+                  <a16:creationId xmlns:a16="http://schemas.microsoft.com/office/drawing/2014/main" id="{8E1C9FFD-6EA4-9BBD-C5FA-1E0D31AF76B3}"/>
+                </a:ext>
+              </a:extLst>
+            </p:cNvPr>
+            <p:cNvSpPr/>
+            <p:nvPr/>
+          </p:nvSpPr>
+          <p:spPr>
+            <a:xfrm>
+              <a:off x="4326467" y="1676400"/>
+              <a:ext cx="3539066" cy="4521200"/>
+            </a:xfrm>
+            <a:prstGeom prst="roundRect">
+              <a:avLst/>
+            </a:prstGeom>
+            <a:solidFill>
+              <a:srgbClr val="FFFFFF"/>
+            </a:solidFill>
+            <a:ln>
+              <a:solidFill>
+                <a:srgbClr val="CBD5E1"/>
+              </a:solidFill>
+            </a:ln>
+          </p:spPr>
+          <p:style>
+            <a:lnRef idx="2">
+              <a:schemeClr val="accent1">
+                <a:shade val="15000"/>
+              </a:schemeClr>
+            </a:lnRef>
+            <a:fillRef idx="1">
+              <a:schemeClr val="accent1"/>
+            </a:fillRef>
+            <a:effectRef idx="0">
+              <a:schemeClr val="accent1"/>
+            </a:effectRef>
+            <a:fontRef idx="minor">
+              <a:schemeClr val="lt1"/>
+            </a:fontRef>
+          </p:style>
+          <p:txBody>
+            <a:bodyPr rtlCol="0" anchor="ctr"/>
+            <a:lstStyle/>
+            <a:p>
+              <a:pPr algn="ctr"/>
+              <a:endParaRPr lang="en-US"/>
+            </a:p>
+          </p:txBody>
+        </p:sp>
+        <p:sp>
+          <p:nvSpPr>
+            <p:cNvPr id="12" name="Rectangle 11">
+              <a:extLst>
+                <a:ext uri="{FF2B5EF4-FFF2-40B4-BE49-F238E27FC236}">
+                  <a16:creationId xmlns:a16="http://schemas.microsoft.com/office/drawing/2014/main" id="{87A98429-FCF9-3FC0-8AC0-31579D8DDE2B}"/>
+                </a:ext>
+              </a:extLst>
+            </p:cNvPr>
+            <p:cNvSpPr/>
+            <p:nvPr/>
+          </p:nvSpPr>
+          <p:spPr>
+            <a:xfrm>
+              <a:off x="4529667" y="1879600"/>
+              <a:ext cx="406400" cy="304800"/>
+            </a:xfrm>
+            <a:prstGeom prst="rect">
+              <a:avLst/>
+            </a:prstGeom>
+            <a:solidFill>
+              <a:srgbClr val="0284C7"/>
+            </a:solidFill>
+            <a:ln w="12700" cap="flat" cmpd="sng" algn="ctr">
+              <a:noFill/>
+              <a:prstDash val="solid"/>
+              <a:miter lim="800000"/>
+            </a:ln>
+            <a:effectLst/>
+            <a:extLst>
+              <a:ext uri="{91240B29-F687-4F45-9708-019B960494DF}">
+                <a14:hiddenLine xmlns:a14="http://schemas.microsoft.com/office/drawing/2010/main" w="12700" cap="flat" cmpd="sng" algn="ctr">
+                  <a:solidFill>
+                    <a:schemeClr val="accent1">
+                      <a:shade val="15000"/>
+                    </a:schemeClr>
+                  </a:solidFill>
+                  <a:prstDash val="solid"/>
+                  <a:miter lim="800000"/>
+                </a14:hiddenLine>
+              </a:ext>
+            </a:extLst>
+          </p:spPr>
+          <p:style>
+            <a:lnRef idx="2">
+              <a:schemeClr val="accent1">
+                <a:shade val="15000"/>
+              </a:schemeClr>
+            </a:lnRef>
+            <a:fillRef idx="1">
+              <a:schemeClr val="accent1"/>
+            </a:fillRef>
+            <a:effectRef idx="0">
+              <a:schemeClr val="accent1"/>
+            </a:effectRef>
+            <a:fontRef idx="minor">
+              <a:schemeClr val="lt1"/>
+            </a:fontRef>
+          </p:style>
+          <p:txBody>
+            <a:bodyPr rtlCol="0" anchor="ctr"/>
+            <a:lstStyle/>
+            <a:p>
+              <a:pPr algn="ctr"/>
+              <a:r>
+                <a:rPr lang="en-US" sz="1300" b="1">
+                  <a:solidFill>
+                    <a:srgbClr val="0F172A"/>
+                  </a:solidFill>
+                  <a:latin typeface="Bahnschrift" panose="020B0502040204020203" pitchFamily="34" charset="0"/>
+                </a:rPr>
+                <a:t>02</a:t>
+              </a:r>
+            </a:p>
+          </p:txBody>
+        </p:sp>
+        <p:pic>
+          <p:nvPicPr>
+            <p:cNvPr id="14" name="Graphic 13">
+              <a:extLst>
+                <a:ext uri="{FF2B5EF4-FFF2-40B4-BE49-F238E27FC236}">
+                  <a16:creationId xmlns:a16="http://schemas.microsoft.com/office/drawing/2014/main" id="{243F606E-C3DD-6291-6FB0-F268402D686D}"/>
+                </a:ext>
+              </a:extLst>
+            </p:cNvPr>
+            <p:cNvPicPr>
+              <a:picLocks/>
+            </p:cNvPicPr>
+            <p:nvPr/>
+          </p:nvPicPr>
+          <p:blipFill>
+            <a:blip>
+              <a:extLst>
+                <a:ext uri="{96DAC541-7B7A-43D3-8B79-37D633B846F1}">
+                  <asvg:svgBlip xmlns:asvg="http://schemas.microsoft.com/office/drawing/2016/SVG/main" r:embed="rId3"/>
+                </a:ext>
+              </a:extLst>
+            </a:blip>
+            <a:stretch>
+              <a:fillRect/>
+            </a:stretch>
+          </p:blipFill>
+          <p:spPr>
+            <a:xfrm>
+              <a:off x="7382933" y="1879600"/>
+              <a:ext cx="279400" cy="279400"/>
+            </a:xfrm>
+            <a:prstGeom prst="rect">
+              <a:avLst/>
+            </a:prstGeom>
+          </p:spPr>
+        </p:pic>
+        <p:sp>
+          <p:nvSpPr>
+            <p:cNvPr id="15" name="TextBox 14">
+              <a:extLst>
+                <a:ext uri="{FF2B5EF4-FFF2-40B4-BE49-F238E27FC236}">
+                  <a16:creationId xmlns:a16="http://schemas.microsoft.com/office/drawing/2014/main" id="{7C4D7A21-458E-19C7-C4F2-EEAFF4C94896}"/>
+                </a:ext>
+              </a:extLst>
+            </p:cNvPr>
+            <p:cNvSpPr txBox="1"/>
+            <p:nvPr/>
+          </p:nvSpPr>
+          <p:spPr>
+            <a:xfrm>
+              <a:off x="4529667" y="2336800"/>
+              <a:ext cx="3132667" cy="1615827"/>
+            </a:xfrm>
+            <a:prstGeom prst="rect">
+              <a:avLst/>
+            </a:prstGeom>
+            <a:noFill/>
+          </p:spPr>
+          <p:txBody>
+            <a:bodyPr vert="horz" wrap="square" lIns="0" rtlCol="0">
+              <a:spAutoFit/>
+            </a:bodyPr>
+            <a:lstStyle/>
+            <a:p>
+              <a:pPr>
+                <a:spcAft>
+                  <a:spcPts val="600"/>
+                </a:spcAft>
+              </a:pPr>
+              <a:r>
+                <a:rPr lang="en-US" sz="1700" b="1">
+                  <a:solidFill>
+                    <a:srgbClr val="0F172A"/>
+                  </a:solidFill>
+                  <a:latin typeface="Segoe UI" panose="020B0502040204020203" pitchFamily="34" charset="0"/>
+                </a:rPr>
+                <a:t>2030 - 2040: Thích Ứng Già Hóa
+</a:t>
+              </a:r>
+              <a:r>
+                <a:rPr lang="vi-VN" sz="1500" b="1">
+                  <a:solidFill>
+                    <a:srgbClr val="334155"/>
+                  </a:solidFill>
+                  <a:latin typeface="Segoe UI" panose="020B0502040204020203" pitchFamily="34" charset="0"/>
+                </a:rPr>
+                <a:t>Cải cách bảo hiểm xã hội đa tầng, hoàn thiện mạng lưới y tế lão khoa và phát triển thị trường kinh tế bạc (Silver Economy).</a:t>
+              </a:r>
+              <a:endParaRPr lang="en-US" sz="1500" b="1">
+                <a:solidFill>
+                  <a:srgbClr val="334155"/>
+                </a:solidFill>
+                <a:latin typeface="Segoe UI" panose="020B0502040204020203" pitchFamily="34" charset="0"/>
+              </a:endParaRPr>
+            </a:p>
+          </p:txBody>
+        </p:sp>
+      </p:grpSp>
+      <p:grpSp>
+        <p:nvGrpSpPr>
+          <p:cNvPr id="22" name="!!Stage_Sub_Card_2!!">
+            <a:extLst>
+              <a:ext uri="{FF2B5EF4-FFF2-40B4-BE49-F238E27FC236}">
+                <a16:creationId xmlns:a16="http://schemas.microsoft.com/office/drawing/2014/main" id="{ED38527C-1925-7DFF-3699-E5402DA4A5FA}"/>
+              </a:ext>
+            </a:extLst>
+          </p:cNvPr>
+          <p:cNvGrpSpPr/>
+          <p:nvPr/>
+        </p:nvGrpSpPr>
+        <p:grpSpPr>
+          <a:xfrm>
+            <a:off x="8043333" y="1676400"/>
+            <a:ext cx="3539067" cy="4521200"/>
+            <a:chOff x="8043333" y="1676400"/>
+            <a:chExt cx="3539067" cy="4521200"/>
+          </a:xfrm>
+        </p:grpSpPr>
+        <p:sp>
+          <p:nvSpPr>
+            <p:cNvPr id="17" name="Rectangle: Rounded Corners 16">
+              <a:extLst>
+                <a:ext uri="{FF2B5EF4-FFF2-40B4-BE49-F238E27FC236}">
+                  <a16:creationId xmlns:a16="http://schemas.microsoft.com/office/drawing/2014/main" id="{216649BE-3D03-B475-35BB-EA9C35BC6BD8}"/>
+                </a:ext>
+              </a:extLst>
+            </p:cNvPr>
+            <p:cNvSpPr/>
+            <p:nvPr/>
+          </p:nvSpPr>
+          <p:spPr>
+            <a:xfrm>
+              <a:off x="8043333" y="1676400"/>
+              <a:ext cx="3539067" cy="4521200"/>
+            </a:xfrm>
+            <a:prstGeom prst="roundRect">
+              <a:avLst/>
+            </a:prstGeom>
+            <a:solidFill>
+              <a:srgbClr val="FFFFFF"/>
+            </a:solidFill>
+            <a:ln>
+              <a:solidFill>
+                <a:srgbClr val="CBD5E1"/>
+              </a:solidFill>
+            </a:ln>
+          </p:spPr>
+          <p:style>
+            <a:lnRef idx="2">
+              <a:schemeClr val="accent1">
+                <a:shade val="15000"/>
+              </a:schemeClr>
+            </a:lnRef>
+            <a:fillRef idx="1">
+              <a:schemeClr val="accent1"/>
+            </a:fillRef>
+            <a:effectRef idx="0">
+              <a:schemeClr val="accent1"/>
+            </a:effectRef>
+            <a:fontRef idx="minor">
+              <a:schemeClr val="lt1"/>
+            </a:fontRef>
+          </p:style>
+          <p:txBody>
+            <a:bodyPr rtlCol="0" anchor="ctr"/>
+            <a:lstStyle/>
+            <a:p>
+              <a:pPr algn="ctr"/>
+              <a:endParaRPr lang="en-US"/>
+            </a:p>
+          </p:txBody>
+        </p:sp>
+        <p:sp>
+          <p:nvSpPr>
+            <p:cNvPr id="18" name="Rectangle 17">
+              <a:extLst>
+                <a:ext uri="{FF2B5EF4-FFF2-40B4-BE49-F238E27FC236}">
+                  <a16:creationId xmlns:a16="http://schemas.microsoft.com/office/drawing/2014/main" id="{E9D31CD6-5BF3-219F-1880-F9E517C7CC8A}"/>
+                </a:ext>
+              </a:extLst>
+            </p:cNvPr>
+            <p:cNvSpPr/>
+            <p:nvPr/>
+          </p:nvSpPr>
+          <p:spPr>
+            <a:xfrm>
+              <a:off x="8246533" y="1879600"/>
+              <a:ext cx="406400" cy="304800"/>
+            </a:xfrm>
+            <a:prstGeom prst="rect">
+              <a:avLst/>
+            </a:prstGeom>
+            <a:solidFill>
+              <a:srgbClr val="0284C7"/>
+            </a:solidFill>
+            <a:ln w="12700" cap="flat" cmpd="sng" algn="ctr">
+              <a:noFill/>
+              <a:prstDash val="solid"/>
+              <a:miter lim="800000"/>
+            </a:ln>
+            <a:effectLst/>
+            <a:extLst>
+              <a:ext uri="{91240B29-F687-4F45-9708-019B960494DF}">
+                <a14:hiddenLine xmlns:a14="http://schemas.microsoft.com/office/drawing/2010/main" w="12700" cap="flat" cmpd="sng" algn="ctr">
+                  <a:solidFill>
+                    <a:schemeClr val="accent1">
+                      <a:shade val="15000"/>
+                    </a:schemeClr>
+                  </a:solidFill>
+                  <a:prstDash val="solid"/>
+                  <a:miter lim="800000"/>
+                </a14:hiddenLine>
+              </a:ext>
+            </a:extLst>
+          </p:spPr>
+          <p:style>
+            <a:lnRef idx="2">
+              <a:schemeClr val="accent1">
+                <a:shade val="15000"/>
+              </a:schemeClr>
+            </a:lnRef>
+            <a:fillRef idx="1">
+              <a:schemeClr val="accent1"/>
+            </a:fillRef>
+            <a:effectRef idx="0">
+              <a:schemeClr val="accent1"/>
+            </a:effectRef>
+            <a:fontRef idx="minor">
+              <a:schemeClr val="lt1"/>
+            </a:fontRef>
+          </p:style>
+          <p:txBody>
+            <a:bodyPr rtlCol="0" anchor="ctr"/>
+            <a:lstStyle/>
+            <a:p>
+              <a:pPr algn="ctr"/>
+              <a:r>
+                <a:rPr lang="en-US" sz="1300" b="1">
+                  <a:solidFill>
+                    <a:srgbClr val="0F172A"/>
+                  </a:solidFill>
+                  <a:latin typeface="Bahnschrift" panose="020B0502040204020203" pitchFamily="34" charset="0"/>
+                </a:rPr>
+                <a:t>03</a:t>
+              </a:r>
+            </a:p>
+          </p:txBody>
+        </p:sp>
+        <p:pic>
+          <p:nvPicPr>
+            <p:cNvPr id="20" name="Graphic 19">
+              <a:extLst>
+                <a:ext uri="{FF2B5EF4-FFF2-40B4-BE49-F238E27FC236}">
+                  <a16:creationId xmlns:a16="http://schemas.microsoft.com/office/drawing/2014/main" id="{A38B9CA3-DF2C-F893-139B-36133A5D46D3}"/>
+                </a:ext>
+              </a:extLst>
+            </p:cNvPr>
+            <p:cNvPicPr>
+              <a:picLocks/>
+            </p:cNvPicPr>
+            <p:nvPr/>
+          </p:nvPicPr>
+          <p:blipFill>
+            <a:blip>
+              <a:extLst>
+                <a:ext uri="{96DAC541-7B7A-43D3-8B79-37D633B846F1}">
+                  <asvg:svgBlip xmlns:asvg="http://schemas.microsoft.com/office/drawing/2016/SVG/main" r:embed="rId4"/>
+                </a:ext>
+              </a:extLst>
+            </a:blip>
+            <a:stretch>
+              <a:fillRect/>
+            </a:stretch>
+          </p:blipFill>
+          <p:spPr>
+            <a:xfrm>
+              <a:off x="11099800" y="1879600"/>
+              <a:ext cx="279400" cy="279400"/>
+            </a:xfrm>
+            <a:prstGeom prst="rect">
+              <a:avLst/>
+            </a:prstGeom>
+          </p:spPr>
+        </p:pic>
+        <p:sp>
+          <p:nvSpPr>
+            <p:cNvPr id="21" name="TextBox 20">
+              <a:extLst>
+                <a:ext uri="{FF2B5EF4-FFF2-40B4-BE49-F238E27FC236}">
+                  <a16:creationId xmlns:a16="http://schemas.microsoft.com/office/drawing/2014/main" id="{09A26B5B-707E-B59F-1958-4833BE912E75}"/>
+                </a:ext>
+              </a:extLst>
+            </p:cNvPr>
+            <p:cNvSpPr txBox="1"/>
+            <p:nvPr/>
+          </p:nvSpPr>
+          <p:spPr>
+            <a:xfrm>
+              <a:off x="8246533" y="2336800"/>
+              <a:ext cx="3132667" cy="1615827"/>
+            </a:xfrm>
+            <a:prstGeom prst="rect">
+              <a:avLst/>
+            </a:prstGeom>
+            <a:noFill/>
+          </p:spPr>
+          <p:txBody>
+            <a:bodyPr vert="horz" wrap="square" lIns="0" rtlCol="0">
+              <a:spAutoFit/>
+            </a:bodyPr>
+            <a:lstStyle/>
+            <a:p>
+              <a:pPr>
+                <a:spcAft>
+                  <a:spcPts val="600"/>
+                </a:spcAft>
+              </a:pPr>
+              <a:r>
+                <a:rPr lang="en-US" sz="1700" b="1">
+                  <a:solidFill>
+                    <a:srgbClr val="0F172A"/>
+                  </a:solidFill>
+                  <a:latin typeface="Segoe UI" panose="020B0502040204020203" pitchFamily="34" charset="0"/>
+                </a:rPr>
+                <a:t>Tầm Nhìn 2045: Nâng Tầm Vóc Việt
+</a:t>
+              </a:r>
+              <a:r>
+                <a:rPr lang="vi-VN" sz="1500" b="1">
+                  <a:solidFill>
+                    <a:srgbClr val="334155"/>
+                  </a:solidFill>
+                  <a:latin typeface="Segoe UI" panose="020B0502040204020203" pitchFamily="34" charset="0"/>
+                </a:rPr>
+                <a:t>Đưa chỉ số phát triển con người HDI vào nhóm rất cao (&gt;0.800), bảo đảm an sinh bền vững cho mọi thế hệ công dân.</a:t>
+              </a:r>
+              <a:endParaRPr lang="en-US" sz="1500" b="1">
+                <a:solidFill>
+                  <a:srgbClr val="334155"/>
+                </a:solidFill>
+                <a:latin typeface="Segoe UI" panose="020B0502040204020203" pitchFamily="34" charset="0"/>
+              </a:endParaRPr>
+            </a:p>
+          </p:txBody>
+        </p:sp>
+      </p:grpSp>
       <p:sp>
         <p:nvSpPr>
-          <p:cNvPr id="6" name="!!Anchor_Source_Footer">
+          <p:cNvPr id="23" name="!!Anchor_Source_Footer!!">
             <a:extLst>
               <a:ext uri="{FF2B5EF4-FFF2-40B4-BE49-F238E27FC236}">
-                <a16:creationId xmlns:a16="http://schemas.microsoft.com/office/drawing/2014/main" id="{7BBC1CFA-D555-7795-4219-51313C9B7EDB}"/>
+                <a16:creationId xmlns:a16="http://schemas.microsoft.com/office/drawing/2014/main" id="{0DAAEFC7-5E3D-01FB-BEF2-2B20F27F96E2}"/>
               </a:ext>
             </a:extLst>
           </p:cNvPr>
@@ -8504,7 +8863,7 @@
     </p:spTree>
     <p:extLst>
       <p:ext uri="{BB962C8B-B14F-4D97-AF65-F5344CB8AC3E}">
-        <p14:creationId xmlns:p14="http://schemas.microsoft.com/office/powerpoint/2010/main" val="2859763786"/>
+        <p14:creationId xmlns:p14="http://schemas.microsoft.com/office/powerpoint/2010/main" val="2754030505"/>
       </p:ext>
     </p:extLst>
   </p:cSld>
@@ -8523,6 +8882,203 @@
       </p:transition>
     </mc:Fallback>
   </mc:AlternateContent>
+  <p:timing>
+    <p:tnLst>
+      <p:par>
+        <p:cTn id="1" dur="indefinite" restart="never" nodeType="tmRoot">
+          <p:childTnLst>
+            <p:seq concurrent="1" nextAc="seek">
+              <p:cTn id="2" dur="indefinite" nodeType="mainSeq">
+                <p:childTnLst>
+                  <p:par>
+                    <p:cTn id="3" fill="hold">
+                      <p:stCondLst>
+                        <p:cond delay="indefinite"/>
+                        <p:cond evt="onBegin" delay="0">
+                          <p:tn val="2"/>
+                        </p:cond>
+                      </p:stCondLst>
+                      <p:childTnLst>
+                        <p:par>
+                          <p:cTn id="4" fill="hold">
+                            <p:stCondLst>
+                              <p:cond delay="0"/>
+                            </p:stCondLst>
+                            <p:childTnLst>
+                              <p:par>
+                                <p:cTn id="5" presetID="2" presetClass="entr" presetSubtype="1" accel="50000" decel="50000" fill="hold" nodeType="withEffect">
+                                  <p:stCondLst>
+                                    <p:cond delay="120"/>
+                                  </p:stCondLst>
+                                  <p:childTnLst>
+                                    <p:set>
+                                      <p:cBhvr>
+                                        <p:cTn id="6" dur="1" fill="hold">
+                                          <p:stCondLst>
+                                            <p:cond delay="0"/>
+                                          </p:stCondLst>
+                                        </p:cTn>
+                                        <p:tgtEl>
+                                          <p:spTgt spid="16"/>
+                                        </p:tgtEl>
+                                        <p:attrNameLst>
+                                          <p:attrName>style.visibility</p:attrName>
+                                        </p:attrNameLst>
+                                      </p:cBhvr>
+                                      <p:to>
+                                        <p:strVal val="visible"/>
+                                      </p:to>
+                                    </p:set>
+                                    <p:anim calcmode="lin" valueType="num">
+                                      <p:cBhvr additive="base">
+                                        <p:cTn id="7" dur="500" fill="hold"/>
+                                        <p:tgtEl>
+                                          <p:spTgt spid="16"/>
+                                        </p:tgtEl>
+                                        <p:attrNameLst>
+                                          <p:attrName>ppt_x</p:attrName>
+                                        </p:attrNameLst>
+                                      </p:cBhvr>
+                                      <p:tavLst>
+                                        <p:tav tm="0">
+                                          <p:val>
+                                            <p:strVal val="#ppt_x"/>
+                                          </p:val>
+                                        </p:tav>
+                                        <p:tav tm="100000">
+                                          <p:val>
+                                            <p:strVal val="#ppt_x"/>
+                                          </p:val>
+                                        </p:tav>
+                                      </p:tavLst>
+                                    </p:anim>
+                                    <p:anim calcmode="lin" valueType="num">
+                                      <p:cBhvr additive="base">
+                                        <p:cTn id="8" dur="500" fill="hold"/>
+                                        <p:tgtEl>
+                                          <p:spTgt spid="16"/>
+                                        </p:tgtEl>
+                                        <p:attrNameLst>
+                                          <p:attrName>ppt_y</p:attrName>
+                                        </p:attrNameLst>
+                                      </p:cBhvr>
+                                      <p:tavLst>
+                                        <p:tav tm="0">
+                                          <p:val>
+                                            <p:strVal val="0-#ppt_h/2"/>
+                                          </p:val>
+                                        </p:tav>
+                                        <p:tav tm="100000">
+                                          <p:val>
+                                            <p:strVal val="#ppt_y"/>
+                                          </p:val>
+                                        </p:tav>
+                                      </p:tavLst>
+                                    </p:anim>
+                                  </p:childTnLst>
+                                </p:cTn>
+                              </p:par>
+                              <p:par>
+                                <p:cTn id="9" presetID="2" presetClass="entr" presetSubtype="1" accel="50000" decel="50000" fill="hold" nodeType="withEffect">
+                                  <p:stCondLst>
+                                    <p:cond delay="240"/>
+                                  </p:stCondLst>
+                                  <p:childTnLst>
+                                    <p:set>
+                                      <p:cBhvr>
+                                        <p:cTn id="10" dur="1" fill="hold">
+                                          <p:stCondLst>
+                                            <p:cond delay="0"/>
+                                          </p:stCondLst>
+                                        </p:cTn>
+                                        <p:tgtEl>
+                                          <p:spTgt spid="22"/>
+                                        </p:tgtEl>
+                                        <p:attrNameLst>
+                                          <p:attrName>style.visibility</p:attrName>
+                                        </p:attrNameLst>
+                                      </p:cBhvr>
+                                      <p:to>
+                                        <p:strVal val="visible"/>
+                                      </p:to>
+                                    </p:set>
+                                    <p:anim calcmode="lin" valueType="num">
+                                      <p:cBhvr additive="base">
+                                        <p:cTn id="11" dur="500" fill="hold"/>
+                                        <p:tgtEl>
+                                          <p:spTgt spid="22"/>
+                                        </p:tgtEl>
+                                        <p:attrNameLst>
+                                          <p:attrName>ppt_x</p:attrName>
+                                        </p:attrNameLst>
+                                      </p:cBhvr>
+                                      <p:tavLst>
+                                        <p:tav tm="0">
+                                          <p:val>
+                                            <p:strVal val="#ppt_x"/>
+                                          </p:val>
+                                        </p:tav>
+                                        <p:tav tm="100000">
+                                          <p:val>
+                                            <p:strVal val="#ppt_x"/>
+                                          </p:val>
+                                        </p:tav>
+                                      </p:tavLst>
+                                    </p:anim>
+                                    <p:anim calcmode="lin" valueType="num">
+                                      <p:cBhvr additive="base">
+                                        <p:cTn id="12" dur="500" fill="hold"/>
+                                        <p:tgtEl>
+                                          <p:spTgt spid="22"/>
+                                        </p:tgtEl>
+                                        <p:attrNameLst>
+                                          <p:attrName>ppt_y</p:attrName>
+                                        </p:attrNameLst>
+                                      </p:cBhvr>
+                                      <p:tavLst>
+                                        <p:tav tm="0">
+                                          <p:val>
+                                            <p:strVal val="0-#ppt_h/2"/>
+                                          </p:val>
+                                        </p:tav>
+                                        <p:tav tm="100000">
+                                          <p:val>
+                                            <p:strVal val="#ppt_y"/>
+                                          </p:val>
+                                        </p:tav>
+                                      </p:tavLst>
+                                    </p:anim>
+                                  </p:childTnLst>
+                                </p:cTn>
+                              </p:par>
+                            </p:childTnLst>
+                          </p:cTn>
+                        </p:par>
+                      </p:childTnLst>
+                    </p:cTn>
+                  </p:par>
+                </p:childTnLst>
+              </p:cTn>
+              <p:prevCondLst>
+                <p:cond evt="onPrev" delay="0">
+                  <p:tgtEl>
+                    <p:sldTgt/>
+                  </p:tgtEl>
+                </p:cond>
+              </p:prevCondLst>
+              <p:nextCondLst>
+                <p:cond evt="onNext" delay="0">
+                  <p:tgtEl>
+                    <p:sldTgt/>
+                  </p:tgtEl>
+                </p:cond>
+              </p:nextCondLst>
+            </p:seq>
+          </p:childTnLst>
+        </p:cTn>
+      </p:par>
+    </p:tnLst>
+  </p:timing>
 </p:sld>
 </file>
 
@@ -8553,10 +9109,10 @@
       </p:grpSpPr>
       <p:sp>
         <p:nvSpPr>
-          <p:cNvPr id="2" name="!!Anchor_Kicker_Rail">
+          <p:cNvPr id="2" name="!!Anchor_Kicker_Rail!!">
             <a:extLst>
               <a:ext uri="{FF2B5EF4-FFF2-40B4-BE49-F238E27FC236}">
-                <a16:creationId xmlns:a16="http://schemas.microsoft.com/office/drawing/2014/main" id="{2FEBF70B-2131-3E73-FC8A-40E26DA643CE}"/>
+                <a16:creationId xmlns:a16="http://schemas.microsoft.com/office/drawing/2014/main" id="{752599C4-0531-F865-C5E4-8ED94B24B1B7}"/>
               </a:ext>
             </a:extLst>
           </p:cNvPr>
@@ -8593,10 +9149,10 @@
       </p:sp>
       <p:sp>
         <p:nvSpPr>
-          <p:cNvPr id="3" name="!!Anchor_Slide_Tracker">
+          <p:cNvPr id="3" name="!!Anchor_Slide_Tracker!!">
             <a:extLst>
               <a:ext uri="{FF2B5EF4-FFF2-40B4-BE49-F238E27FC236}">
-                <a16:creationId xmlns:a16="http://schemas.microsoft.com/office/drawing/2014/main" id="{C8EFD8E2-E7F3-4FC1-44BF-AD6D9D1A65BF}"/>
+                <a16:creationId xmlns:a16="http://schemas.microsoft.com/office/drawing/2014/main" id="{2BC639AE-6935-76DD-1B3F-21785055038F}"/>
               </a:ext>
             </a:extLst>
           </p:cNvPr>
@@ -8634,10 +9190,10 @@
       </p:sp>
       <p:sp>
         <p:nvSpPr>
-          <p:cNvPr id="4" name="!!Anchor_Assertion_Title">
+          <p:cNvPr id="4" name="!!Anchor_Assertion_Title!!">
             <a:extLst>
               <a:ext uri="{FF2B5EF4-FFF2-40B4-BE49-F238E27FC236}">
-                <a16:creationId xmlns:a16="http://schemas.microsoft.com/office/drawing/2014/main" id="{F2F3A3A7-2908-3E31-82F6-AEC053217120}"/>
+                <a16:creationId xmlns:a16="http://schemas.microsoft.com/office/drawing/2014/main" id="{3F90580F-787C-C1BB-3B20-0C10C9240AC2}"/>
               </a:ext>
             </a:extLst>
           </p:cNvPr>
@@ -8674,10 +9230,10 @@
       </p:sp>
       <p:grpSp>
         <p:nvGrpSpPr>
-          <p:cNvPr id="11" name="!!Stage_Hero_Container">
+          <p:cNvPr id="11" name="!!Stage_Hero_Container!!">
             <a:extLst>
               <a:ext uri="{FF2B5EF4-FFF2-40B4-BE49-F238E27FC236}">
-                <a16:creationId xmlns:a16="http://schemas.microsoft.com/office/drawing/2014/main" id="{6D3C4878-852E-6A00-37EB-731C49BF483A}"/>
+                <a16:creationId xmlns:a16="http://schemas.microsoft.com/office/drawing/2014/main" id="{3CF32946-FB45-0E93-4316-0C47BCB11C05}"/>
               </a:ext>
             </a:extLst>
           </p:cNvPr>
@@ -8697,7 +9253,7 @@
             <p:cNvPr id="5" name="Rectangle: Rounded Corners 4">
               <a:extLst>
                 <a:ext uri="{FF2B5EF4-FFF2-40B4-BE49-F238E27FC236}">
-                  <a16:creationId xmlns:a16="http://schemas.microsoft.com/office/drawing/2014/main" id="{1C698E33-1D39-A409-BEB7-84795EA80089}"/>
+                  <a16:creationId xmlns:a16="http://schemas.microsoft.com/office/drawing/2014/main" id="{F0B8C882-7214-6E4D-AA60-33F17DBBE4F7}"/>
                 </a:ext>
               </a:extLst>
             </p:cNvPr>
@@ -8751,7 +9307,7 @@
             <p:cNvPr id="6" name="Rectangle 5">
               <a:extLst>
                 <a:ext uri="{FF2B5EF4-FFF2-40B4-BE49-F238E27FC236}">
-                  <a16:creationId xmlns:a16="http://schemas.microsoft.com/office/drawing/2014/main" id="{092E8C7D-2661-F10F-A968-8F7CB5468829}"/>
+                  <a16:creationId xmlns:a16="http://schemas.microsoft.com/office/drawing/2014/main" id="{D2B73E19-92AA-2372-8509-0B969A1FE066}"/>
                 </a:ext>
               </a:extLst>
             </p:cNvPr>
@@ -8819,7 +9375,7 @@
             <p:cNvPr id="7" name="Oval 6">
               <a:extLst>
                 <a:ext uri="{FF2B5EF4-FFF2-40B4-BE49-F238E27FC236}">
-                  <a16:creationId xmlns:a16="http://schemas.microsoft.com/office/drawing/2014/main" id="{E0AE2DC6-9FDC-97B3-7F14-D49AE369CA4A}"/>
+                  <a16:creationId xmlns:a16="http://schemas.microsoft.com/office/drawing/2014/main" id="{C7D99346-7708-B932-D183-01A7B6A163E8}"/>
                 </a:ext>
               </a:extLst>
             </p:cNvPr>
@@ -8887,7 +9443,7 @@
             <p:cNvPr id="9" name="Graphic 8">
               <a:extLst>
                 <a:ext uri="{FF2B5EF4-FFF2-40B4-BE49-F238E27FC236}">
-                  <a16:creationId xmlns:a16="http://schemas.microsoft.com/office/drawing/2014/main" id="{EC30338E-1ADD-5231-9D4C-298BF3042D88}"/>
+                  <a16:creationId xmlns:a16="http://schemas.microsoft.com/office/drawing/2014/main" id="{D097A22E-6C31-0A0D-E79D-C1BA7802092B}"/>
                 </a:ext>
               </a:extLst>
             </p:cNvPr>
@@ -8923,7 +9479,7 @@
             <p:cNvPr id="10" name="TextBox 9">
               <a:extLst>
                 <a:ext uri="{FF2B5EF4-FFF2-40B4-BE49-F238E27FC236}">
-                  <a16:creationId xmlns:a16="http://schemas.microsoft.com/office/drawing/2014/main" id="{9F6A29FB-A395-3D0A-4D9D-CDF691C58FB8}"/>
+                  <a16:creationId xmlns:a16="http://schemas.microsoft.com/office/drawing/2014/main" id="{BE48060B-62EE-4C06-7553-35086D3AF9CE}"/>
                 </a:ext>
               </a:extLst>
             </p:cNvPr>
@@ -8961,7 +9517,7 @@
                   </a:solidFill>
                   <a:latin typeface="Segoe UI" panose="020B0502040204020203" pitchFamily="34" charset="0"/>
                 </a:rPr>
-                <a:t>Câu Hỏi Lý Thuyết 1
+                <a:t>Câu Hỏi Lý Thuyết 1
 </a:t>
               </a:r>
               <a:r>
@@ -8985,10 +9541,10 @@
       </p:grpSp>
       <p:grpSp>
         <p:nvGrpSpPr>
-          <p:cNvPr id="18" name="!!Stage_Sub_Card_1">
+          <p:cNvPr id="18" name="!!Stage_Sub_Card_1!!">
             <a:extLst>
               <a:ext uri="{FF2B5EF4-FFF2-40B4-BE49-F238E27FC236}">
-                <a16:creationId xmlns:a16="http://schemas.microsoft.com/office/drawing/2014/main" id="{38184E1B-B808-08ED-9F4D-17CB8518BC68}"/>
+                <a16:creationId xmlns:a16="http://schemas.microsoft.com/office/drawing/2014/main" id="{B5BFC683-CACD-608F-AC6D-1083DF05A9A0}"/>
               </a:ext>
             </a:extLst>
           </p:cNvPr>
@@ -9008,7 +9564,7 @@
             <p:cNvPr id="12" name="Rectangle: Rounded Corners 11">
               <a:extLst>
                 <a:ext uri="{FF2B5EF4-FFF2-40B4-BE49-F238E27FC236}">
-                  <a16:creationId xmlns:a16="http://schemas.microsoft.com/office/drawing/2014/main" id="{9302CBFA-619C-5363-CA1B-6B59A1750183}"/>
+                  <a16:creationId xmlns:a16="http://schemas.microsoft.com/office/drawing/2014/main" id="{FC8CF425-E35F-BEA9-20A2-A131691F3358}"/>
                 </a:ext>
               </a:extLst>
             </p:cNvPr>
@@ -9062,7 +9618,7 @@
             <p:cNvPr id="13" name="Rectangle 12">
               <a:extLst>
                 <a:ext uri="{FF2B5EF4-FFF2-40B4-BE49-F238E27FC236}">
-                  <a16:creationId xmlns:a16="http://schemas.microsoft.com/office/drawing/2014/main" id="{54657151-DA96-96AA-4225-BE11C1E5E64F}"/>
+                  <a16:creationId xmlns:a16="http://schemas.microsoft.com/office/drawing/2014/main" id="{7BF12823-3601-04FD-A2D1-D3ACF422F954}"/>
                 </a:ext>
               </a:extLst>
             </p:cNvPr>
@@ -9130,7 +9686,7 @@
             <p:cNvPr id="14" name="Oval 13">
               <a:extLst>
                 <a:ext uri="{FF2B5EF4-FFF2-40B4-BE49-F238E27FC236}">
-                  <a16:creationId xmlns:a16="http://schemas.microsoft.com/office/drawing/2014/main" id="{A97D9853-932D-F7DE-F7AF-F2A73674E8F7}"/>
+                  <a16:creationId xmlns:a16="http://schemas.microsoft.com/office/drawing/2014/main" id="{7DC519ED-C8EC-0346-FDD6-819E699746F1}"/>
                 </a:ext>
               </a:extLst>
             </p:cNvPr>
@@ -9198,7 +9754,7 @@
             <p:cNvPr id="16" name="Graphic 15">
               <a:extLst>
                 <a:ext uri="{FF2B5EF4-FFF2-40B4-BE49-F238E27FC236}">
-                  <a16:creationId xmlns:a16="http://schemas.microsoft.com/office/drawing/2014/main" id="{B61945D3-3CBF-49C1-E7A1-DF357F03DA6A}"/>
+                  <a16:creationId xmlns:a16="http://schemas.microsoft.com/office/drawing/2014/main" id="{B55220EB-D4CF-9CF6-07E1-3A22C3F78F3F}"/>
                 </a:ext>
               </a:extLst>
             </p:cNvPr>
@@ -9234,7 +9790,7 @@
             <p:cNvPr id="17" name="TextBox 16">
               <a:extLst>
                 <a:ext uri="{FF2B5EF4-FFF2-40B4-BE49-F238E27FC236}">
-                  <a16:creationId xmlns:a16="http://schemas.microsoft.com/office/drawing/2014/main" id="{1007E923-0257-9AD5-7BD2-B2A98B8A3DD8}"/>
+                  <a16:creationId xmlns:a16="http://schemas.microsoft.com/office/drawing/2014/main" id="{1A73A41C-57BD-9313-972A-847B60986B95}"/>
                 </a:ext>
               </a:extLst>
             </p:cNvPr>
@@ -9272,7 +9828,7 @@
                   </a:solidFill>
                   <a:latin typeface="Segoe UI" panose="020B0502040204020203" pitchFamily="34" charset="0"/>
                 </a:rPr>
-                <a:t>Câu Hỏi Phân Tích 2
+                <a:t>Câu Hỏi Phân Tích 2
 </a:t>
               </a:r>
               <a:r>
@@ -9290,10 +9846,10 @@
       </p:grpSp>
       <p:grpSp>
         <p:nvGrpSpPr>
-          <p:cNvPr id="25" name="!!Stage_Sub_Card_2">
+          <p:cNvPr id="25" name="!!Stage_Sub_Card_2!!">
             <a:extLst>
               <a:ext uri="{FF2B5EF4-FFF2-40B4-BE49-F238E27FC236}">
-                <a16:creationId xmlns:a16="http://schemas.microsoft.com/office/drawing/2014/main" id="{3C57117C-D8EA-9C14-6E48-47648F999E2D}"/>
+                <a16:creationId xmlns:a16="http://schemas.microsoft.com/office/drawing/2014/main" id="{7F71641B-B1EC-6EA4-5032-71D4C16FFB27}"/>
               </a:ext>
             </a:extLst>
           </p:cNvPr>
@@ -9313,7 +9869,7 @@
             <p:cNvPr id="19" name="Rectangle: Rounded Corners 18">
               <a:extLst>
                 <a:ext uri="{FF2B5EF4-FFF2-40B4-BE49-F238E27FC236}">
-                  <a16:creationId xmlns:a16="http://schemas.microsoft.com/office/drawing/2014/main" id="{C61C21A3-2B7E-1457-305E-C93264DFAE3B}"/>
+                  <a16:creationId xmlns:a16="http://schemas.microsoft.com/office/drawing/2014/main" id="{2C71BC9A-B5D9-AA9D-4354-CF4F5F7A5D13}"/>
                 </a:ext>
               </a:extLst>
             </p:cNvPr>
@@ -9367,7 +9923,7 @@
             <p:cNvPr id="20" name="Rectangle 19">
               <a:extLst>
                 <a:ext uri="{FF2B5EF4-FFF2-40B4-BE49-F238E27FC236}">
-                  <a16:creationId xmlns:a16="http://schemas.microsoft.com/office/drawing/2014/main" id="{B6608679-54FC-9DC3-DD61-D4401C9E2517}"/>
+                  <a16:creationId xmlns:a16="http://schemas.microsoft.com/office/drawing/2014/main" id="{6F68E89B-BBF7-1CE6-6671-D672E3570605}"/>
                 </a:ext>
               </a:extLst>
             </p:cNvPr>
@@ -9435,7 +9991,7 @@
             <p:cNvPr id="21" name="Oval 20">
               <a:extLst>
                 <a:ext uri="{FF2B5EF4-FFF2-40B4-BE49-F238E27FC236}">
-                  <a16:creationId xmlns:a16="http://schemas.microsoft.com/office/drawing/2014/main" id="{D187120A-CF8B-BE0C-91E9-B0B4525D41F4}"/>
+                  <a16:creationId xmlns:a16="http://schemas.microsoft.com/office/drawing/2014/main" id="{B8BFD861-5EF5-DF26-329D-8713EA9C003A}"/>
                 </a:ext>
               </a:extLst>
             </p:cNvPr>
@@ -9503,7 +10059,7 @@
             <p:cNvPr id="23" name="Graphic 22">
               <a:extLst>
                 <a:ext uri="{FF2B5EF4-FFF2-40B4-BE49-F238E27FC236}">
-                  <a16:creationId xmlns:a16="http://schemas.microsoft.com/office/drawing/2014/main" id="{F757F32C-9EEC-CE6B-4492-F534C88B01E1}"/>
+                  <a16:creationId xmlns:a16="http://schemas.microsoft.com/office/drawing/2014/main" id="{19C43779-BF3B-1B10-500B-CB1F7FA5EE81}"/>
                 </a:ext>
               </a:extLst>
             </p:cNvPr>
@@ -9539,7 +10095,7 @@
             <p:cNvPr id="24" name="TextBox 23">
               <a:extLst>
                 <a:ext uri="{FF2B5EF4-FFF2-40B4-BE49-F238E27FC236}">
-                  <a16:creationId xmlns:a16="http://schemas.microsoft.com/office/drawing/2014/main" id="{FAB004CC-FF67-A323-E1BD-358A8A7C9E9D}"/>
+                  <a16:creationId xmlns:a16="http://schemas.microsoft.com/office/drawing/2014/main" id="{9CE8B4AE-F40C-3F0E-D8BE-3D7B5B67F3F9}"/>
                 </a:ext>
               </a:extLst>
             </p:cNvPr>
@@ -9577,7 +10133,7 @@
                   </a:solidFill>
                   <a:latin typeface="Segoe UI" panose="020B0502040204020203" pitchFamily="34" charset="0"/>
                 </a:rPr>
-                <a:t>Tình Huống Thực Tiễn 3
+                <a:t>Tình Huống Thực Tiễn 3
 </a:t>
               </a:r>
               <a:r>
@@ -9601,10 +10157,10 @@
       </p:grpSp>
       <p:sp>
         <p:nvSpPr>
-          <p:cNvPr id="26" name="!!Anchor_Source_Footer">
+          <p:cNvPr id="26" name="!!Anchor_Source_Footer!!">
             <a:extLst>
               <a:ext uri="{FF2B5EF4-FFF2-40B4-BE49-F238E27FC236}">
-                <a16:creationId xmlns:a16="http://schemas.microsoft.com/office/drawing/2014/main" id="{54893070-A490-D519-30CD-F9A22AA0D4CD}"/>
+                <a16:creationId xmlns:a16="http://schemas.microsoft.com/office/drawing/2014/main" id="{53C3EC5A-6825-47CB-FEC0-3647B3E5A2D8}"/>
               </a:ext>
             </a:extLst>
           </p:cNvPr>
@@ -9642,7 +10198,7 @@
     </p:spTree>
     <p:extLst>
       <p:ext uri="{BB962C8B-B14F-4D97-AF65-F5344CB8AC3E}">
-        <p14:creationId xmlns:p14="http://schemas.microsoft.com/office/powerpoint/2010/main" val="3686807125"/>
+        <p14:creationId xmlns:p14="http://schemas.microsoft.com/office/powerpoint/2010/main" val="2261277981"/>
       </p:ext>
     </p:extLst>
   </p:cSld>
@@ -9673,6 +10229,9 @@
                     <p:cTn id="3" fill="hold">
                       <p:stCondLst>
                         <p:cond delay="indefinite"/>
+                        <p:cond evt="onBegin" delay="0">
+                          <p:tn val="2"/>
+                        </p:cond>
                       </p:stCondLst>
                       <p:childTnLst>
                         <p:par>
@@ -9682,9 +10241,9 @@
                             </p:stCondLst>
                             <p:childTnLst>
                               <p:par>
-                                <p:cTn id="5" presetID="2" presetClass="entr" presetSubtype="4" accel="50000" decel="50000" fill="hold" nodeType="clickEffect">
+                                <p:cTn id="5" presetID="2" presetClass="entr" presetSubtype="1" accel="50000" decel="50000" fill="hold" nodeType="withEffect">
                                   <p:stCondLst>
-                                    <p:cond delay="0"/>
+                                    <p:cond delay="140"/>
                                   </p:stCondLst>
                                   <p:childTnLst>
                                     <p:set>
@@ -9707,7 +10266,7 @@
                                     </p:set>
                                     <p:anim calcmode="lin" valueType="num">
                                       <p:cBhvr additive="base">
-                                        <p:cTn id="7" dur="450" fill="hold"/>
+                                        <p:cTn id="7" dur="500" fill="hold"/>
                                         <p:tgtEl>
                                           <p:spTgt spid="18"/>
                                         </p:tgtEl>
@@ -9730,7 +10289,7 @@
                                     </p:anim>
                                     <p:anim calcmode="lin" valueType="num">
                                       <p:cBhvr additive="base">
-                                        <p:cTn id="8" dur="450" fill="hold"/>
+                                        <p:cTn id="8" dur="500" fill="hold"/>
                                         <p:tgtEl>
                                           <p:spTgt spid="18"/>
                                         </p:tgtEl>
@@ -9741,7 +10300,7 @@
                                       <p:tavLst>
                                         <p:tav tm="0">
                                           <p:val>
-                                            <p:strVal val="1+#ppt_h/2"/>
+                                            <p:strVal val="0-#ppt_h/2"/>
                                           </p:val>
                                         </p:tav>
                                         <p:tav tm="100000">
@@ -9754,33 +10313,15 @@
                                   </p:childTnLst>
                                 </p:cTn>
                               </p:par>
-                            </p:childTnLst>
-                          </p:cTn>
-                        </p:par>
-                      </p:childTnLst>
-                    </p:cTn>
-                  </p:par>
-                  <p:par>
-                    <p:cTn id="9" fill="hold">
-                      <p:stCondLst>
-                        <p:cond delay="indefinite"/>
-                      </p:stCondLst>
-                      <p:childTnLst>
-                        <p:par>
-                          <p:cTn id="10" fill="hold">
-                            <p:stCondLst>
-                              <p:cond delay="0"/>
-                            </p:stCondLst>
-                            <p:childTnLst>
                               <p:par>
-                                <p:cTn id="11" presetID="2" presetClass="entr" presetSubtype="4" accel="50000" decel="50000" fill="hold" nodeType="clickEffect">
+                                <p:cTn id="9" presetID="2" presetClass="entr" presetSubtype="1" accel="50000" decel="50000" fill="hold" nodeType="withEffect">
                                   <p:stCondLst>
-                                    <p:cond delay="0"/>
+                                    <p:cond delay="280"/>
                                   </p:stCondLst>
                                   <p:childTnLst>
                                     <p:set>
                                       <p:cBhvr>
-                                        <p:cTn id="12" dur="1" fill="hold">
+                                        <p:cTn id="10" dur="1" fill="hold">
                                           <p:stCondLst>
                                             <p:cond delay="0"/>
                                           </p:stCondLst>
@@ -9798,7 +10339,7 @@
                                     </p:set>
                                     <p:anim calcmode="lin" valueType="num">
                                       <p:cBhvr additive="base">
-                                        <p:cTn id="13" dur="450" fill="hold"/>
+                                        <p:cTn id="11" dur="500" fill="hold"/>
                                         <p:tgtEl>
                                           <p:spTgt spid="25"/>
                                         </p:tgtEl>
@@ -9821,7 +10362,7 @@
                                     </p:anim>
                                     <p:anim calcmode="lin" valueType="num">
                                       <p:cBhvr additive="base">
-                                        <p:cTn id="14" dur="450" fill="hold"/>
+                                        <p:cTn id="12" dur="500" fill="hold"/>
                                         <p:tgtEl>
                                           <p:spTgt spid="25"/>
                                         </p:tgtEl>
@@ -9832,7 +10373,7 @@
                                       <p:tavLst>
                                         <p:tav tm="0">
                                           <p:val>
-                                            <p:strVal val="1+#ppt_h/2"/>
+                                            <p:strVal val="0-#ppt_h/2"/>
                                           </p:val>
                                         </p:tav>
                                         <p:tav tm="100000">
@@ -9903,10 +10444,10 @@
       </p:grpSpPr>
       <p:sp>
         <p:nvSpPr>
-          <p:cNvPr id="2" name="!!Anchor_Kicker_Rail">
+          <p:cNvPr id="2" name="!!Anchor_Kicker_Rail!!">
             <a:extLst>
               <a:ext uri="{FF2B5EF4-FFF2-40B4-BE49-F238E27FC236}">
-                <a16:creationId xmlns:a16="http://schemas.microsoft.com/office/drawing/2014/main" id="{A8323659-5D24-CF9D-8232-607341965E70}"/>
+                <a16:creationId xmlns:a16="http://schemas.microsoft.com/office/drawing/2014/main" id="{AFE38A01-C9D7-E4F8-C605-153E9534B0EC}"/>
               </a:ext>
             </a:extLst>
           </p:cNvPr>
@@ -9943,10 +10484,10 @@
       </p:sp>
       <p:sp>
         <p:nvSpPr>
-          <p:cNvPr id="3" name="!!Anchor_Slide_Tracker">
+          <p:cNvPr id="3" name="!!Anchor_Slide_Tracker!!">
             <a:extLst>
               <a:ext uri="{FF2B5EF4-FFF2-40B4-BE49-F238E27FC236}">
-                <a16:creationId xmlns:a16="http://schemas.microsoft.com/office/drawing/2014/main" id="{8EA3FD0E-8226-82D3-E612-9632DEB19BC1}"/>
+                <a16:creationId xmlns:a16="http://schemas.microsoft.com/office/drawing/2014/main" id="{8F052F6C-2BA2-13BA-8CDE-53619D59DC9C}"/>
               </a:ext>
             </a:extLst>
           </p:cNvPr>
@@ -9984,10 +10525,10 @@
       </p:sp>
       <p:sp>
         <p:nvSpPr>
-          <p:cNvPr id="4" name="!!Anchor_Assertion_Title">
+          <p:cNvPr id="4" name="!!Anchor_Assertion_Title!!">
             <a:extLst>
               <a:ext uri="{FF2B5EF4-FFF2-40B4-BE49-F238E27FC236}">
-                <a16:creationId xmlns:a16="http://schemas.microsoft.com/office/drawing/2014/main" id="{3071BB35-45E5-A567-1DBD-7C748F9E0814}"/>
+                <a16:creationId xmlns:a16="http://schemas.microsoft.com/office/drawing/2014/main" id="{A94A16BA-207E-AFD2-4AD5-55F0C6AF10A2}"/>
               </a:ext>
             </a:extLst>
           </p:cNvPr>
@@ -10030,10 +10571,10 @@
       </p:sp>
       <p:grpSp>
         <p:nvGrpSpPr>
-          <p:cNvPr id="11" name="!!Stage_Hero_Container">
+          <p:cNvPr id="11" name="!!Stage_Hero_Container!!">
             <a:extLst>
               <a:ext uri="{FF2B5EF4-FFF2-40B4-BE49-F238E27FC236}">
-                <a16:creationId xmlns:a16="http://schemas.microsoft.com/office/drawing/2014/main" id="{5FA05DDA-890F-1084-5DF2-1F0B7725998A}"/>
+                <a16:creationId xmlns:a16="http://schemas.microsoft.com/office/drawing/2014/main" id="{EAAC5C0C-E42C-0911-4226-7E7FC9F80A09}"/>
               </a:ext>
             </a:extLst>
           </p:cNvPr>
@@ -10053,7 +10594,7 @@
             <p:cNvPr id="5" name="Rectangle: Rounded Corners 4">
               <a:extLst>
                 <a:ext uri="{FF2B5EF4-FFF2-40B4-BE49-F238E27FC236}">
-                  <a16:creationId xmlns:a16="http://schemas.microsoft.com/office/drawing/2014/main" id="{9E7DDA9A-507C-1C04-6BCD-40911C66E3BF}"/>
+                  <a16:creationId xmlns:a16="http://schemas.microsoft.com/office/drawing/2014/main" id="{E0CED5C3-0104-DBE3-D55C-0A7155DDBEC9}"/>
                 </a:ext>
               </a:extLst>
             </p:cNvPr>
@@ -10107,7 +10648,7 @@
             <p:cNvPr id="6" name="Rectangle: Rounded Corners 5">
               <a:extLst>
                 <a:ext uri="{FF2B5EF4-FFF2-40B4-BE49-F238E27FC236}">
-                  <a16:creationId xmlns:a16="http://schemas.microsoft.com/office/drawing/2014/main" id="{93147702-C578-45D4-7171-5F51A30D0BD0}"/>
+                  <a16:creationId xmlns:a16="http://schemas.microsoft.com/office/drawing/2014/main" id="{B0B277D2-415C-52FF-AB14-3F7A11A936F0}"/>
                 </a:ext>
               </a:extLst>
             </p:cNvPr>
@@ -10183,7 +10724,7 @@
             <p:cNvPr id="7" name="Oval 6">
               <a:extLst>
                 <a:ext uri="{FF2B5EF4-FFF2-40B4-BE49-F238E27FC236}">
-                  <a16:creationId xmlns:a16="http://schemas.microsoft.com/office/drawing/2014/main" id="{EAF20528-E027-85B9-436F-B2699295C07E}"/>
+                  <a16:creationId xmlns:a16="http://schemas.microsoft.com/office/drawing/2014/main" id="{A5B78129-7697-6667-80D4-09853D491037}"/>
                 </a:ext>
               </a:extLst>
             </p:cNvPr>
@@ -10251,7 +10792,7 @@
             <p:cNvPr id="9" name="Graphic 8">
               <a:extLst>
                 <a:ext uri="{FF2B5EF4-FFF2-40B4-BE49-F238E27FC236}">
-                  <a16:creationId xmlns:a16="http://schemas.microsoft.com/office/drawing/2014/main" id="{957900C2-D3CD-6D66-9C5B-C9B3DBB94460}"/>
+                  <a16:creationId xmlns:a16="http://schemas.microsoft.com/office/drawing/2014/main" id="{36883DAF-E76E-5651-B9B9-941671D030E5}"/>
                 </a:ext>
               </a:extLst>
             </p:cNvPr>
@@ -10287,7 +10828,7 @@
             <p:cNvPr id="10" name="TextBox 9">
               <a:extLst>
                 <a:ext uri="{FF2B5EF4-FFF2-40B4-BE49-F238E27FC236}">
-                  <a16:creationId xmlns:a16="http://schemas.microsoft.com/office/drawing/2014/main" id="{6AE7727E-35F8-B30C-8648-FA414671A733}"/>
+                  <a16:creationId xmlns:a16="http://schemas.microsoft.com/office/drawing/2014/main" id="{A85728D1-EEBE-CFE3-8263-BAB820DD82B6}"/>
                 </a:ext>
               </a:extLst>
             </p:cNvPr>
@@ -10349,10 +10890,10 @@
       </p:grpSp>
       <p:grpSp>
         <p:nvGrpSpPr>
-          <p:cNvPr id="18" name="!!Stage_Sub_Card_1">
+          <p:cNvPr id="18" name="!!Stage_Sub_Card_1!!">
             <a:extLst>
               <a:ext uri="{FF2B5EF4-FFF2-40B4-BE49-F238E27FC236}">
-                <a16:creationId xmlns:a16="http://schemas.microsoft.com/office/drawing/2014/main" id="{87FB3E82-64EE-6261-E46D-93B3631738BB}"/>
+                <a16:creationId xmlns:a16="http://schemas.microsoft.com/office/drawing/2014/main" id="{9F6851B8-A388-241B-A333-529D5D98CCA9}"/>
               </a:ext>
             </a:extLst>
           </p:cNvPr>
@@ -10372,7 +10913,7 @@
             <p:cNvPr id="12" name="Rectangle: Rounded Corners 11">
               <a:extLst>
                 <a:ext uri="{FF2B5EF4-FFF2-40B4-BE49-F238E27FC236}">
-                  <a16:creationId xmlns:a16="http://schemas.microsoft.com/office/drawing/2014/main" id="{75829116-47BF-D85C-5EDD-1E69D38EE146}"/>
+                  <a16:creationId xmlns:a16="http://schemas.microsoft.com/office/drawing/2014/main" id="{10DD7905-1AE3-2C30-B555-DF340ECDAA13}"/>
                 </a:ext>
               </a:extLst>
             </p:cNvPr>
@@ -10426,7 +10967,7 @@
             <p:cNvPr id="13" name="Rectangle: Rounded Corners 12">
               <a:extLst>
                 <a:ext uri="{FF2B5EF4-FFF2-40B4-BE49-F238E27FC236}">
-                  <a16:creationId xmlns:a16="http://schemas.microsoft.com/office/drawing/2014/main" id="{3854C705-7411-B523-28CE-DFEA4F3B1219}"/>
+                  <a16:creationId xmlns:a16="http://schemas.microsoft.com/office/drawing/2014/main" id="{B96FA1B0-4254-807D-BF58-665ED30D4511}"/>
                 </a:ext>
               </a:extLst>
             </p:cNvPr>
@@ -10502,7 +11043,7 @@
             <p:cNvPr id="14" name="Oval 13">
               <a:extLst>
                 <a:ext uri="{FF2B5EF4-FFF2-40B4-BE49-F238E27FC236}">
-                  <a16:creationId xmlns:a16="http://schemas.microsoft.com/office/drawing/2014/main" id="{8FD51715-4314-E450-C30B-9AE60861937D}"/>
+                  <a16:creationId xmlns:a16="http://schemas.microsoft.com/office/drawing/2014/main" id="{A176F49C-C20C-B463-4368-96930915BD60}"/>
                 </a:ext>
               </a:extLst>
             </p:cNvPr>
@@ -10570,7 +11111,7 @@
             <p:cNvPr id="16" name="Graphic 15">
               <a:extLst>
                 <a:ext uri="{FF2B5EF4-FFF2-40B4-BE49-F238E27FC236}">
-                  <a16:creationId xmlns:a16="http://schemas.microsoft.com/office/drawing/2014/main" id="{05F0404D-3964-371C-BF8D-3AD805609EAD}"/>
+                  <a16:creationId xmlns:a16="http://schemas.microsoft.com/office/drawing/2014/main" id="{59D9B0E0-0501-BB6E-4B0A-C59AC7C3890E}"/>
                 </a:ext>
               </a:extLst>
             </p:cNvPr>
@@ -10606,7 +11147,7 @@
             <p:cNvPr id="17" name="TextBox 16">
               <a:extLst>
                 <a:ext uri="{FF2B5EF4-FFF2-40B4-BE49-F238E27FC236}">
-                  <a16:creationId xmlns:a16="http://schemas.microsoft.com/office/drawing/2014/main" id="{4E9F491E-5644-9C05-9F90-E12D40320DEF}"/>
+                  <a16:creationId xmlns:a16="http://schemas.microsoft.com/office/drawing/2014/main" id="{664D4E60-3F59-A2B7-ECD8-415A14EA1CE3}"/>
                 </a:ext>
               </a:extLst>
             </p:cNvPr>
@@ -10665,10 +11206,10 @@
       </p:grpSp>
       <p:grpSp>
         <p:nvGrpSpPr>
-          <p:cNvPr id="25" name="!!Stage_Sub_Card_2">
+          <p:cNvPr id="25" name="!!Stage_Sub_Card_2!!">
             <a:extLst>
               <a:ext uri="{FF2B5EF4-FFF2-40B4-BE49-F238E27FC236}">
-                <a16:creationId xmlns:a16="http://schemas.microsoft.com/office/drawing/2014/main" id="{192E7901-8291-4A95-9FF4-1AD1A0EF24EB}"/>
+                <a16:creationId xmlns:a16="http://schemas.microsoft.com/office/drawing/2014/main" id="{B1B29CEB-5BBD-0A0A-4B44-F8FD99C7AD5C}"/>
               </a:ext>
             </a:extLst>
           </p:cNvPr>
@@ -10688,7 +11229,7 @@
             <p:cNvPr id="19" name="Rectangle: Rounded Corners 18">
               <a:extLst>
                 <a:ext uri="{FF2B5EF4-FFF2-40B4-BE49-F238E27FC236}">
-                  <a16:creationId xmlns:a16="http://schemas.microsoft.com/office/drawing/2014/main" id="{81EBAB0D-2A60-111A-504A-A34E7F63173F}"/>
+                  <a16:creationId xmlns:a16="http://schemas.microsoft.com/office/drawing/2014/main" id="{C0DB2BE9-6502-353F-FAFE-52CC3C79ECEB}"/>
                 </a:ext>
               </a:extLst>
             </p:cNvPr>
@@ -10742,7 +11283,7 @@
             <p:cNvPr id="20" name="Rectangle: Rounded Corners 19">
               <a:extLst>
                 <a:ext uri="{FF2B5EF4-FFF2-40B4-BE49-F238E27FC236}">
-                  <a16:creationId xmlns:a16="http://schemas.microsoft.com/office/drawing/2014/main" id="{8BF85ED7-C88E-26F6-7516-7CA45F0BFAC5}"/>
+                  <a16:creationId xmlns:a16="http://schemas.microsoft.com/office/drawing/2014/main" id="{8FCBB64C-41D0-5F09-DA17-E1DB18A55084}"/>
                 </a:ext>
               </a:extLst>
             </p:cNvPr>
@@ -10818,7 +11359,7 @@
             <p:cNvPr id="21" name="Oval 20">
               <a:extLst>
                 <a:ext uri="{FF2B5EF4-FFF2-40B4-BE49-F238E27FC236}">
-                  <a16:creationId xmlns:a16="http://schemas.microsoft.com/office/drawing/2014/main" id="{C0614AF7-4C9C-6B1F-15B3-EE482D935E02}"/>
+                  <a16:creationId xmlns:a16="http://schemas.microsoft.com/office/drawing/2014/main" id="{738AABBC-03B5-99D4-8D3A-6F5C11619D42}"/>
                 </a:ext>
               </a:extLst>
             </p:cNvPr>
@@ -10886,7 +11427,7 @@
             <p:cNvPr id="23" name="Graphic 22">
               <a:extLst>
                 <a:ext uri="{FF2B5EF4-FFF2-40B4-BE49-F238E27FC236}">
-                  <a16:creationId xmlns:a16="http://schemas.microsoft.com/office/drawing/2014/main" id="{DD889FA3-1D3F-2BE5-47C8-3F740E3FB38A}"/>
+                  <a16:creationId xmlns:a16="http://schemas.microsoft.com/office/drawing/2014/main" id="{527D27C8-CA4F-46D2-D502-01158FF6452D}"/>
                 </a:ext>
               </a:extLst>
             </p:cNvPr>
@@ -10922,7 +11463,7 @@
             <p:cNvPr id="24" name="TextBox 23">
               <a:extLst>
                 <a:ext uri="{FF2B5EF4-FFF2-40B4-BE49-F238E27FC236}">
-                  <a16:creationId xmlns:a16="http://schemas.microsoft.com/office/drawing/2014/main" id="{C877F2B9-9802-D810-448C-68D04E94D567}"/>
+                  <a16:creationId xmlns:a16="http://schemas.microsoft.com/office/drawing/2014/main" id="{6BA11974-1193-3F2E-F8A7-988F3A55C9F2}"/>
                 </a:ext>
               </a:extLst>
             </p:cNvPr>
@@ -10981,10 +11522,10 @@
       </p:grpSp>
       <p:sp>
         <p:nvSpPr>
-          <p:cNvPr id="26" name="!!Anchor_Source_Footer">
+          <p:cNvPr id="26" name="!!Anchor_Source_Footer!!">
             <a:extLst>
               <a:ext uri="{FF2B5EF4-FFF2-40B4-BE49-F238E27FC236}">
-                <a16:creationId xmlns:a16="http://schemas.microsoft.com/office/drawing/2014/main" id="{730A56EE-92EE-8345-DE76-78E62054ADE0}"/>
+                <a16:creationId xmlns:a16="http://schemas.microsoft.com/office/drawing/2014/main" id="{B2E1587D-7A33-35BD-8CFE-35522CCCFD0C}"/>
               </a:ext>
             </a:extLst>
           </p:cNvPr>
@@ -11022,7 +11563,7 @@
     </p:spTree>
     <p:extLst>
       <p:ext uri="{BB962C8B-B14F-4D97-AF65-F5344CB8AC3E}">
-        <p14:creationId xmlns:p14="http://schemas.microsoft.com/office/powerpoint/2010/main" val="2486382433"/>
+        <p14:creationId xmlns:p14="http://schemas.microsoft.com/office/powerpoint/2010/main" val="1212921369"/>
       </p:ext>
     </p:extLst>
   </p:cSld>
@@ -11053,6 +11594,9 @@
                     <p:cTn id="3" fill="hold">
                       <p:stCondLst>
                         <p:cond delay="indefinite"/>
+                        <p:cond evt="onBegin" delay="0">
+                          <p:tn val="2"/>
+                        </p:cond>
                       </p:stCondLst>
                       <p:childTnLst>
                         <p:par>
@@ -11062,9 +11606,9 @@
                             </p:stCondLst>
                             <p:childTnLst>
                               <p:par>
-                                <p:cTn id="5" presetID="2" presetClass="entr" presetSubtype="4" accel="50000" decel="50000" fill="hold" nodeType="clickEffect">
+                                <p:cTn id="5" presetID="2" presetClass="entr" presetSubtype="1" accel="50000" decel="50000" fill="hold" nodeType="withEffect">
                                   <p:stCondLst>
-                                    <p:cond delay="0"/>
+                                    <p:cond delay="120"/>
                                   </p:stCondLst>
                                   <p:childTnLst>
                                     <p:set>
@@ -11087,7 +11631,7 @@
                                     </p:set>
                                     <p:anim calcmode="lin" valueType="num">
                                       <p:cBhvr additive="base">
-                                        <p:cTn id="7" dur="450" fill="hold"/>
+                                        <p:cTn id="7" dur="500" fill="hold"/>
                                         <p:tgtEl>
                                           <p:spTgt spid="18"/>
                                         </p:tgtEl>
@@ -11110,7 +11654,7 @@
                                     </p:anim>
                                     <p:anim calcmode="lin" valueType="num">
                                       <p:cBhvr additive="base">
-                                        <p:cTn id="8" dur="450" fill="hold"/>
+                                        <p:cTn id="8" dur="500" fill="hold"/>
                                         <p:tgtEl>
                                           <p:spTgt spid="18"/>
                                         </p:tgtEl>
@@ -11121,7 +11665,7 @@
                                       <p:tavLst>
                                         <p:tav tm="0">
                                           <p:val>
-                                            <p:strVal val="1+#ppt_h/2"/>
+                                            <p:strVal val="0-#ppt_h/2"/>
                                           </p:val>
                                         </p:tav>
                                         <p:tav tm="100000">
@@ -11134,33 +11678,15 @@
                                   </p:childTnLst>
                                 </p:cTn>
                               </p:par>
-                            </p:childTnLst>
-                          </p:cTn>
-                        </p:par>
-                      </p:childTnLst>
-                    </p:cTn>
-                  </p:par>
-                  <p:par>
-                    <p:cTn id="9" fill="hold">
-                      <p:stCondLst>
-                        <p:cond delay="indefinite"/>
-                      </p:stCondLst>
-                      <p:childTnLst>
-                        <p:par>
-                          <p:cTn id="10" fill="hold">
-                            <p:stCondLst>
-                              <p:cond delay="0"/>
-                            </p:stCondLst>
-                            <p:childTnLst>
                               <p:par>
-                                <p:cTn id="11" presetID="2" presetClass="entr" presetSubtype="4" accel="50000" decel="50000" fill="hold" nodeType="clickEffect">
+                                <p:cTn id="9" presetID="2" presetClass="entr" presetSubtype="1" accel="50000" decel="50000" fill="hold" nodeType="withEffect">
                                   <p:stCondLst>
-                                    <p:cond delay="0"/>
+                                    <p:cond delay="240"/>
                                   </p:stCondLst>
                                   <p:childTnLst>
                                     <p:set>
                                       <p:cBhvr>
-                                        <p:cTn id="12" dur="1" fill="hold">
+                                        <p:cTn id="10" dur="1" fill="hold">
                                           <p:stCondLst>
                                             <p:cond delay="0"/>
                                           </p:stCondLst>
@@ -11178,7 +11704,7 @@
                                     </p:set>
                                     <p:anim calcmode="lin" valueType="num">
                                       <p:cBhvr additive="base">
-                                        <p:cTn id="13" dur="450" fill="hold"/>
+                                        <p:cTn id="11" dur="500" fill="hold"/>
                                         <p:tgtEl>
                                           <p:spTgt spid="25"/>
                                         </p:tgtEl>
@@ -11201,7 +11727,7 @@
                                     </p:anim>
                                     <p:anim calcmode="lin" valueType="num">
                                       <p:cBhvr additive="base">
-                                        <p:cTn id="14" dur="450" fill="hold"/>
+                                        <p:cTn id="12" dur="500" fill="hold"/>
                                         <p:tgtEl>
                                           <p:spTgt spid="25"/>
                                         </p:tgtEl>
@@ -11212,7 +11738,7 @@
                                       <p:tavLst>
                                         <p:tav tm="0">
                                           <p:val>
-                                            <p:strVal val="1+#ppt_h/2"/>
+                                            <p:strVal val="0-#ppt_h/2"/>
                                           </p:val>
                                         </p:tav>
                                         <p:tav tm="100000">
@@ -11283,10 +11809,10 @@
       </p:grpSpPr>
       <p:sp>
         <p:nvSpPr>
-          <p:cNvPr id="2" name="!!Anchor_Kicker_Rail">
+          <p:cNvPr id="2" name="!!Anchor_Kicker_Rail!!">
             <a:extLst>
               <a:ext uri="{FF2B5EF4-FFF2-40B4-BE49-F238E27FC236}">
-                <a16:creationId xmlns:a16="http://schemas.microsoft.com/office/drawing/2014/main" id="{C2E8B7F4-3F26-E573-F500-9BFED9D01FD2}"/>
+                <a16:creationId xmlns:a16="http://schemas.microsoft.com/office/drawing/2014/main" id="{EB0FD61A-E263-81BE-CE3F-6899A8A7F1AE}"/>
               </a:ext>
             </a:extLst>
           </p:cNvPr>
@@ -11323,10 +11849,10 @@
       </p:sp>
       <p:sp>
         <p:nvSpPr>
-          <p:cNvPr id="3" name="!!Anchor_Slide_Tracker">
+          <p:cNvPr id="3" name="!!Anchor_Slide_Tracker!!">
             <a:extLst>
               <a:ext uri="{FF2B5EF4-FFF2-40B4-BE49-F238E27FC236}">
-                <a16:creationId xmlns:a16="http://schemas.microsoft.com/office/drawing/2014/main" id="{8169987C-03F7-26CA-BD6E-C153DC03E53A}"/>
+                <a16:creationId xmlns:a16="http://schemas.microsoft.com/office/drawing/2014/main" id="{3EFFCEBA-48D3-8AAE-E441-6FC732EA2D7D}"/>
               </a:ext>
             </a:extLst>
           </p:cNvPr>
@@ -11364,10 +11890,10 @@
       </p:sp>
       <p:sp>
         <p:nvSpPr>
-          <p:cNvPr id="4" name="!!Anchor_Assertion_Title">
+          <p:cNvPr id="4" name="!!Anchor_Assertion_Title!!">
             <a:extLst>
               <a:ext uri="{FF2B5EF4-FFF2-40B4-BE49-F238E27FC236}">
-                <a16:creationId xmlns:a16="http://schemas.microsoft.com/office/drawing/2014/main" id="{6A22A237-FBCC-59EA-D891-C9DDAB996DD8}"/>
+                <a16:creationId xmlns:a16="http://schemas.microsoft.com/office/drawing/2014/main" id="{B25C0810-41B7-B573-8C83-CD39B41887FC}"/>
               </a:ext>
             </a:extLst>
           </p:cNvPr>
@@ -11404,10 +11930,10 @@
       </p:sp>
       <p:grpSp>
         <p:nvGrpSpPr>
-          <p:cNvPr id="12" name="!!Stage_Hero_Container">
+          <p:cNvPr id="12" name="!!Stage_Hero_Container!!">
             <a:extLst>
               <a:ext uri="{FF2B5EF4-FFF2-40B4-BE49-F238E27FC236}">
-                <a16:creationId xmlns:a16="http://schemas.microsoft.com/office/drawing/2014/main" id="{5762ED4D-BDED-0D89-0517-CA8A7A7D6EFA}"/>
+                <a16:creationId xmlns:a16="http://schemas.microsoft.com/office/drawing/2014/main" id="{A5E5A5B5-43D5-8EAF-4BAF-68878AAE8896}"/>
               </a:ext>
             </a:extLst>
           </p:cNvPr>
@@ -11427,7 +11953,7 @@
             <p:cNvPr id="6" name="Picture 5">
               <a:extLst>
                 <a:ext uri="{FF2B5EF4-FFF2-40B4-BE49-F238E27FC236}">
-                  <a16:creationId xmlns:a16="http://schemas.microsoft.com/office/drawing/2014/main" id="{4954B6F5-49F2-4ABD-8A40-B21B41B562E2}"/>
+                  <a16:creationId xmlns:a16="http://schemas.microsoft.com/office/drawing/2014/main" id="{B6E09E81-73EF-7F99-EA4D-5194E2F72AD7}"/>
                 </a:ext>
               </a:extLst>
             </p:cNvPr>
@@ -11468,7 +11994,7 @@
             <p:cNvPr id="7" name="Rectangle: Rounded Corners 6">
               <a:extLst>
                 <a:ext uri="{FF2B5EF4-FFF2-40B4-BE49-F238E27FC236}">
-                  <a16:creationId xmlns:a16="http://schemas.microsoft.com/office/drawing/2014/main" id="{AF86ABB3-9890-CED3-0BEC-DAAA7479626A}"/>
+                  <a16:creationId xmlns:a16="http://schemas.microsoft.com/office/drawing/2014/main" id="{02E87B72-FD3E-4A74-2BB1-1A39BB905F93}"/>
                 </a:ext>
               </a:extLst>
             </p:cNvPr>
@@ -11522,7 +12048,7 @@
             <p:cNvPr id="8" name="Oval 7">
               <a:extLst>
                 <a:ext uri="{FF2B5EF4-FFF2-40B4-BE49-F238E27FC236}">
-                  <a16:creationId xmlns:a16="http://schemas.microsoft.com/office/drawing/2014/main" id="{082917F6-6626-66B9-AC27-DF097DF5EBFD}"/>
+                  <a16:creationId xmlns:a16="http://schemas.microsoft.com/office/drawing/2014/main" id="{60293951-E203-C692-E23E-40C5EFA78D37}"/>
                 </a:ext>
               </a:extLst>
             </p:cNvPr>
@@ -11590,7 +12116,7 @@
             <p:cNvPr id="10" name="Graphic 9">
               <a:extLst>
                 <a:ext uri="{FF2B5EF4-FFF2-40B4-BE49-F238E27FC236}">
-                  <a16:creationId xmlns:a16="http://schemas.microsoft.com/office/drawing/2014/main" id="{1AD731D6-1EC6-8D11-1C28-E462F4B76E86}"/>
+                  <a16:creationId xmlns:a16="http://schemas.microsoft.com/office/drawing/2014/main" id="{D0995919-5BFE-E9A2-A47D-0759C2493224}"/>
                 </a:ext>
               </a:extLst>
             </p:cNvPr>
@@ -11626,7 +12152,7 @@
             <p:cNvPr id="11" name="TextBox 10">
               <a:extLst>
                 <a:ext uri="{FF2B5EF4-FFF2-40B4-BE49-F238E27FC236}">
-                  <a16:creationId xmlns:a16="http://schemas.microsoft.com/office/drawing/2014/main" id="{5DA81DD6-8BF0-85AC-CC16-79459AE4AB19}"/>
+                  <a16:creationId xmlns:a16="http://schemas.microsoft.com/office/drawing/2014/main" id="{6C9073C2-9117-F642-3C06-1609CA7BBC88}"/>
                 </a:ext>
               </a:extLst>
             </p:cNvPr>
@@ -11682,10 +12208,10 @@
       </p:grpSp>
       <p:grpSp>
         <p:nvGrpSpPr>
-          <p:cNvPr id="18" name="!!Stage_Sub_Card_1">
+          <p:cNvPr id="18" name="!!Stage_Sub_Card_1!!">
             <a:extLst>
               <a:ext uri="{FF2B5EF4-FFF2-40B4-BE49-F238E27FC236}">
-                <a16:creationId xmlns:a16="http://schemas.microsoft.com/office/drawing/2014/main" id="{A7D6FFCD-D101-BABC-C59F-FB49C4B7F7C9}"/>
+                <a16:creationId xmlns:a16="http://schemas.microsoft.com/office/drawing/2014/main" id="{0D66A7AB-4D4C-245C-51B1-B995507E65A8}"/>
               </a:ext>
             </a:extLst>
           </p:cNvPr>
@@ -11705,7 +12231,7 @@
             <p:cNvPr id="13" name="Rectangle: Rounded Corners 12">
               <a:extLst>
                 <a:ext uri="{FF2B5EF4-FFF2-40B4-BE49-F238E27FC236}">
-                  <a16:creationId xmlns:a16="http://schemas.microsoft.com/office/drawing/2014/main" id="{CC916C15-1A66-7D9E-38C4-8504B9CD4D87}"/>
+                  <a16:creationId xmlns:a16="http://schemas.microsoft.com/office/drawing/2014/main" id="{D6FF2767-FDD5-19B3-4AE7-BC774B6B0586}"/>
                 </a:ext>
               </a:extLst>
             </p:cNvPr>
@@ -11759,7 +12285,7 @@
             <p:cNvPr id="14" name="Oval 13">
               <a:extLst>
                 <a:ext uri="{FF2B5EF4-FFF2-40B4-BE49-F238E27FC236}">
-                  <a16:creationId xmlns:a16="http://schemas.microsoft.com/office/drawing/2014/main" id="{2D387724-DC33-BE78-76EC-AD4C7C0A1EE8}"/>
+                  <a16:creationId xmlns:a16="http://schemas.microsoft.com/office/drawing/2014/main" id="{7A509492-F893-1F1E-1F58-70D2A703CFA6}"/>
                 </a:ext>
               </a:extLst>
             </p:cNvPr>
@@ -11827,7 +12353,7 @@
             <p:cNvPr id="16" name="Graphic 15">
               <a:extLst>
                 <a:ext uri="{FF2B5EF4-FFF2-40B4-BE49-F238E27FC236}">
-                  <a16:creationId xmlns:a16="http://schemas.microsoft.com/office/drawing/2014/main" id="{9C8411FD-F03B-D242-67DC-86C523BF59CC}"/>
+                  <a16:creationId xmlns:a16="http://schemas.microsoft.com/office/drawing/2014/main" id="{F0235734-3C1C-2812-CFA9-B866D32E9EE1}"/>
                 </a:ext>
               </a:extLst>
             </p:cNvPr>
@@ -11863,7 +12389,7 @@
             <p:cNvPr id="17" name="TextBox 16">
               <a:extLst>
                 <a:ext uri="{FF2B5EF4-FFF2-40B4-BE49-F238E27FC236}">
-                  <a16:creationId xmlns:a16="http://schemas.microsoft.com/office/drawing/2014/main" id="{B5862B1D-DA93-5347-543A-7CD31E336EB8}"/>
+                  <a16:creationId xmlns:a16="http://schemas.microsoft.com/office/drawing/2014/main" id="{EBE89BAB-2A68-E32B-8C18-09CDDC38037B}"/>
                 </a:ext>
               </a:extLst>
             </p:cNvPr>
@@ -11922,10 +12448,10 @@
       </p:grpSp>
       <p:grpSp>
         <p:nvGrpSpPr>
-          <p:cNvPr id="24" name="!!Stage_Sub_Card_2">
+          <p:cNvPr id="24" name="!!Stage_Sub_Card_2!!">
             <a:extLst>
               <a:ext uri="{FF2B5EF4-FFF2-40B4-BE49-F238E27FC236}">
-                <a16:creationId xmlns:a16="http://schemas.microsoft.com/office/drawing/2014/main" id="{E2C3DEF0-6BB7-2F0B-F888-6985CE33F093}"/>
+                <a16:creationId xmlns:a16="http://schemas.microsoft.com/office/drawing/2014/main" id="{A648FF81-5C48-6FC5-A6E8-AE8802D4BEB6}"/>
               </a:ext>
             </a:extLst>
           </p:cNvPr>
@@ -11945,7 +12471,7 @@
             <p:cNvPr id="19" name="Rectangle: Rounded Corners 18">
               <a:extLst>
                 <a:ext uri="{FF2B5EF4-FFF2-40B4-BE49-F238E27FC236}">
-                  <a16:creationId xmlns:a16="http://schemas.microsoft.com/office/drawing/2014/main" id="{E361C042-3C14-1949-25BA-C2B8E9ADEAE8}"/>
+                  <a16:creationId xmlns:a16="http://schemas.microsoft.com/office/drawing/2014/main" id="{F429FD9E-59A6-4D80-D02C-194036E75547}"/>
                 </a:ext>
               </a:extLst>
             </p:cNvPr>
@@ -11999,7 +12525,7 @@
             <p:cNvPr id="20" name="Oval 19">
               <a:extLst>
                 <a:ext uri="{FF2B5EF4-FFF2-40B4-BE49-F238E27FC236}">
-                  <a16:creationId xmlns:a16="http://schemas.microsoft.com/office/drawing/2014/main" id="{611B3DA1-C7E3-D645-DB28-070F184DB201}"/>
+                  <a16:creationId xmlns:a16="http://schemas.microsoft.com/office/drawing/2014/main" id="{54B99899-E02F-B06A-7F50-2F3BBDC564E6}"/>
                 </a:ext>
               </a:extLst>
             </p:cNvPr>
@@ -12067,7 +12593,7 @@
             <p:cNvPr id="22" name="Graphic 21">
               <a:extLst>
                 <a:ext uri="{FF2B5EF4-FFF2-40B4-BE49-F238E27FC236}">
-                  <a16:creationId xmlns:a16="http://schemas.microsoft.com/office/drawing/2014/main" id="{F4289988-912A-0768-3A5C-1B6CE72E5233}"/>
+                  <a16:creationId xmlns:a16="http://schemas.microsoft.com/office/drawing/2014/main" id="{B65FD7EA-8C01-1D69-F4C9-42EE4154566E}"/>
                 </a:ext>
               </a:extLst>
             </p:cNvPr>
@@ -12103,7 +12629,7 @@
             <p:cNvPr id="23" name="TextBox 22">
               <a:extLst>
                 <a:ext uri="{FF2B5EF4-FFF2-40B4-BE49-F238E27FC236}">
-                  <a16:creationId xmlns:a16="http://schemas.microsoft.com/office/drawing/2014/main" id="{2EF4F371-0CA1-1F3D-81EE-AE104498861F}"/>
+                  <a16:creationId xmlns:a16="http://schemas.microsoft.com/office/drawing/2014/main" id="{40D18C99-F175-27B1-7313-6259D4380985}"/>
                 </a:ext>
               </a:extLst>
             </p:cNvPr>
@@ -12156,10 +12682,10 @@
       </p:grpSp>
       <p:sp>
         <p:nvSpPr>
-          <p:cNvPr id="25" name="!!Anchor_Source_Footer">
+          <p:cNvPr id="25" name="!!Anchor_Source_Footer!!">
             <a:extLst>
               <a:ext uri="{FF2B5EF4-FFF2-40B4-BE49-F238E27FC236}">
-                <a16:creationId xmlns:a16="http://schemas.microsoft.com/office/drawing/2014/main" id="{8F2622A9-EA54-035D-563E-F4002DD42B00}"/>
+                <a16:creationId xmlns:a16="http://schemas.microsoft.com/office/drawing/2014/main" id="{1CD5EFA6-FBEE-4500-1E36-A4C5F8B03569}"/>
               </a:ext>
             </a:extLst>
           </p:cNvPr>
@@ -12203,7 +12729,7 @@
     </p:spTree>
     <p:extLst>
       <p:ext uri="{BB962C8B-B14F-4D97-AF65-F5344CB8AC3E}">
-        <p14:creationId xmlns:p14="http://schemas.microsoft.com/office/powerpoint/2010/main" val="2872446220"/>
+        <p14:creationId xmlns:p14="http://schemas.microsoft.com/office/powerpoint/2010/main" val="3498282192"/>
       </p:ext>
     </p:extLst>
   </p:cSld>
@@ -12234,6 +12760,9 @@
                     <p:cTn id="3" fill="hold">
                       <p:stCondLst>
                         <p:cond delay="indefinite"/>
+                        <p:cond evt="onBegin" delay="0">
+                          <p:tn val="2"/>
+                        </p:cond>
                       </p:stCondLst>
                       <p:childTnLst>
                         <p:par>
@@ -12243,9 +12772,9 @@
                             </p:stCondLst>
                             <p:childTnLst>
                               <p:par>
-                                <p:cTn id="5" presetID="2" presetClass="entr" presetSubtype="4" accel="50000" decel="50000" fill="hold" nodeType="clickEffect">
+                                <p:cTn id="5" presetID="2" presetClass="entr" presetSubtype="1" accel="50000" decel="50000" fill="hold" nodeType="withEffect">
                                   <p:stCondLst>
-                                    <p:cond delay="0"/>
+                                    <p:cond delay="120"/>
                                   </p:stCondLst>
                                   <p:childTnLst>
                                     <p:set>
@@ -12268,7 +12797,7 @@
                                     </p:set>
                                     <p:anim calcmode="lin" valueType="num">
                                       <p:cBhvr additive="base">
-                                        <p:cTn id="7" dur="450" fill="hold"/>
+                                        <p:cTn id="7" dur="500" fill="hold"/>
                                         <p:tgtEl>
                                           <p:spTgt spid="18"/>
                                         </p:tgtEl>
@@ -12291,7 +12820,7 @@
                                     </p:anim>
                                     <p:anim calcmode="lin" valueType="num">
                                       <p:cBhvr additive="base">
-                                        <p:cTn id="8" dur="450" fill="hold"/>
+                                        <p:cTn id="8" dur="500" fill="hold"/>
                                         <p:tgtEl>
                                           <p:spTgt spid="18"/>
                                         </p:tgtEl>
@@ -12302,7 +12831,7 @@
                                       <p:tavLst>
                                         <p:tav tm="0">
                                           <p:val>
-                                            <p:strVal val="1+#ppt_h/2"/>
+                                            <p:strVal val="0-#ppt_h/2"/>
                                           </p:val>
                                         </p:tav>
                                         <p:tav tm="100000">
@@ -12315,33 +12844,15 @@
                                   </p:childTnLst>
                                 </p:cTn>
                               </p:par>
-                            </p:childTnLst>
-                          </p:cTn>
-                        </p:par>
-                      </p:childTnLst>
-                    </p:cTn>
-                  </p:par>
-                  <p:par>
-                    <p:cTn id="9" fill="hold">
-                      <p:stCondLst>
-                        <p:cond delay="indefinite"/>
-                      </p:stCondLst>
-                      <p:childTnLst>
-                        <p:par>
-                          <p:cTn id="10" fill="hold">
-                            <p:stCondLst>
-                              <p:cond delay="0"/>
-                            </p:stCondLst>
-                            <p:childTnLst>
                               <p:par>
-                                <p:cTn id="11" presetID="2" presetClass="entr" presetSubtype="4" accel="50000" decel="50000" fill="hold" nodeType="clickEffect">
+                                <p:cTn id="9" presetID="2" presetClass="entr" presetSubtype="1" accel="50000" decel="50000" fill="hold" nodeType="withEffect">
                                   <p:stCondLst>
-                                    <p:cond delay="0"/>
+                                    <p:cond delay="240"/>
                                   </p:stCondLst>
                                   <p:childTnLst>
                                     <p:set>
                                       <p:cBhvr>
-                                        <p:cTn id="12" dur="1" fill="hold">
+                                        <p:cTn id="10" dur="1" fill="hold">
                                           <p:stCondLst>
                                             <p:cond delay="0"/>
                                           </p:stCondLst>
@@ -12359,7 +12870,7 @@
                                     </p:set>
                                     <p:anim calcmode="lin" valueType="num">
                                       <p:cBhvr additive="base">
-                                        <p:cTn id="13" dur="450" fill="hold"/>
+                                        <p:cTn id="11" dur="500" fill="hold"/>
                                         <p:tgtEl>
                                           <p:spTgt spid="24"/>
                                         </p:tgtEl>
@@ -12382,7 +12893,7 @@
                                     </p:anim>
                                     <p:anim calcmode="lin" valueType="num">
                                       <p:cBhvr additive="base">
-                                        <p:cTn id="14" dur="450" fill="hold"/>
+                                        <p:cTn id="12" dur="500" fill="hold"/>
                                         <p:tgtEl>
                                           <p:spTgt spid="24"/>
                                         </p:tgtEl>
@@ -12393,7 +12904,7 @@
                                       <p:tavLst>
                                         <p:tav tm="0">
                                           <p:val>
-                                            <p:strVal val="1+#ppt_h/2"/>
+                                            <p:strVal val="0-#ppt_h/2"/>
                                           </p:val>
                                         </p:tav>
                                         <p:tav tm="100000">
@@ -12464,10 +12975,10 @@
       </p:grpSpPr>
       <p:sp>
         <p:nvSpPr>
-          <p:cNvPr id="2" name="!!Anchor_Kicker_Rail">
+          <p:cNvPr id="2" name="!!Anchor_Kicker_Rail!!">
             <a:extLst>
               <a:ext uri="{FF2B5EF4-FFF2-40B4-BE49-F238E27FC236}">
-                <a16:creationId xmlns:a16="http://schemas.microsoft.com/office/drawing/2014/main" id="{AA931917-6A03-D4C4-138F-CDCCAFCB4176}"/>
+                <a16:creationId xmlns:a16="http://schemas.microsoft.com/office/drawing/2014/main" id="{A2ED8C56-97C7-C785-1243-9FE567B00657}"/>
               </a:ext>
             </a:extLst>
           </p:cNvPr>
@@ -12504,10 +13015,10 @@
       </p:sp>
       <p:sp>
         <p:nvSpPr>
-          <p:cNvPr id="3" name="!!Anchor_Slide_Tracker">
+          <p:cNvPr id="3" name="!!Anchor_Slide_Tracker!!">
             <a:extLst>
               <a:ext uri="{FF2B5EF4-FFF2-40B4-BE49-F238E27FC236}">
-                <a16:creationId xmlns:a16="http://schemas.microsoft.com/office/drawing/2014/main" id="{9A52C2FA-A8DE-B028-CFDC-1B3DA77CC557}"/>
+                <a16:creationId xmlns:a16="http://schemas.microsoft.com/office/drawing/2014/main" id="{B510B665-1B1F-6045-5103-D7022FE23FD5}"/>
               </a:ext>
             </a:extLst>
           </p:cNvPr>
@@ -12545,10 +13056,10 @@
       </p:sp>
       <p:sp>
         <p:nvSpPr>
-          <p:cNvPr id="4" name="!!Anchor_Assertion_Title">
+          <p:cNvPr id="4" name="!!Anchor_Assertion_Title!!">
             <a:extLst>
               <a:ext uri="{FF2B5EF4-FFF2-40B4-BE49-F238E27FC236}">
-                <a16:creationId xmlns:a16="http://schemas.microsoft.com/office/drawing/2014/main" id="{9676AFCC-F633-DA18-C310-E45769501C85}"/>
+                <a16:creationId xmlns:a16="http://schemas.microsoft.com/office/drawing/2014/main" id="{2BA9E453-235D-A76F-8853-D33A8B64F2DF}"/>
               </a:ext>
             </a:extLst>
           </p:cNvPr>
@@ -12589,842 +13100,12 @@
           </a:p>
         </p:txBody>
       </p:sp>
-      <p:graphicFrame>
-        <p:nvGraphicFramePr>
-          <p:cNvPr id="5" name="!!Stage_Hero_Container">
-            <a:extLst>
-              <a:ext uri="{FF2B5EF4-FFF2-40B4-BE49-F238E27FC236}">
-                <a16:creationId xmlns:a16="http://schemas.microsoft.com/office/drawing/2014/main" id="{514DFAEF-3A1F-68E3-55B6-7FC6424D82F1}"/>
-              </a:ext>
-            </a:extLst>
-          </p:cNvPr>
-          <p:cNvGraphicFramePr>
-            <a:graphicFrameLocks noGrp="1"/>
-          </p:cNvGraphicFramePr>
-          <p:nvPr>
-            <p:extLst>
-              <p:ext uri="{D42A27DB-BD31-4B8C-83A1-F6EECF244321}">
-                <p14:modId xmlns:p14="http://schemas.microsoft.com/office/powerpoint/2010/main" val="301746981"/>
-              </p:ext>
-            </p:extLst>
-          </p:nvPr>
-        </p:nvGraphicFramePr>
-        <p:xfrm>
-          <a:off x="609600" y="1676400"/>
-          <a:ext cx="10972800" cy="4521200"/>
-        </p:xfrm>
-        <a:graphic>
-          <a:graphicData uri="http://schemas.openxmlformats.org/drawingml/2006/table">
-            <a:tbl>
-              <a:tblPr firstRow="1" bandRow="1">
-                <a:tableStyleId>{5C22544A-7EE6-4342-B048-85BDC9FD1C3A}</a:tableStyleId>
-              </a:tblPr>
-              <a:tblGrid>
-                <a:gridCol w="2194560">
-                  <a:extLst>
-                    <a:ext uri="{9D8B030D-6E8A-4147-A177-3AD203B41FA5}">
-                      <a16:colId xmlns:a16="http://schemas.microsoft.com/office/drawing/2014/main" val="380421823"/>
-                    </a:ext>
-                  </a:extLst>
-                </a:gridCol>
-                <a:gridCol w="3072384">
-                  <a:extLst>
-                    <a:ext uri="{9D8B030D-6E8A-4147-A177-3AD203B41FA5}">
-                      <a16:colId xmlns:a16="http://schemas.microsoft.com/office/drawing/2014/main" val="3609984044"/>
-                    </a:ext>
-                  </a:extLst>
-                </a:gridCol>
-                <a:gridCol w="3072384">
-                  <a:extLst>
-                    <a:ext uri="{9D8B030D-6E8A-4147-A177-3AD203B41FA5}">
-                      <a16:colId xmlns:a16="http://schemas.microsoft.com/office/drawing/2014/main" val="373166956"/>
-                    </a:ext>
-                  </a:extLst>
-                </a:gridCol>
-                <a:gridCol w="2633472">
-                  <a:extLst>
-                    <a:ext uri="{9D8B030D-6E8A-4147-A177-3AD203B41FA5}">
-                      <a16:colId xmlns:a16="http://schemas.microsoft.com/office/drawing/2014/main" val="2440615207"/>
-                    </a:ext>
-                  </a:extLst>
-                </a:gridCol>
-              </a:tblGrid>
-              <a:tr h="904240">
-                <a:tc>
-                  <a:txBody>
-                    <a:bodyPr/>
-                    <a:lstStyle/>
-                    <a:p>
-                      <a:pPr algn="l"/>
-                      <a:r>
-                        <a:rPr lang="en-US" sz="1300" b="1">
-                          <a:solidFill>
-                            <a:srgbClr val="FFFFFF"/>
-                          </a:solidFill>
-                          <a:latin typeface="Segoe UI" panose="020B0502040204020203" pitchFamily="34" charset="0"/>
-                        </a:rPr>
-                        <a:t>TIÊU CHÍ SO SÁNH</a:t>
-                      </a:r>
-                    </a:p>
-                  </a:txBody>
-                  <a:tcPr marT="76200" marB="76200" anchor="ctr">
-                    <a:solidFill>
-                      <a:srgbClr val="0284C7"/>
-                    </a:solidFill>
-                  </a:tcPr>
-                </a:tc>
-                <a:tc>
-                  <a:txBody>
-                    <a:bodyPr/>
-                    <a:lstStyle/>
-                    <a:p>
-                      <a:pPr algn="ctr"/>
-                      <a:r>
-                        <a:rPr lang="vi-VN" sz="1300" b="1">
-                          <a:solidFill>
-                            <a:srgbClr val="FFFFFF"/>
-                          </a:solidFill>
-                          <a:latin typeface="Segoe UI" panose="020B0502040204020203" pitchFamily="34" charset="0"/>
-                        </a:rPr>
-                        <a:t>DÂN CƯ (GEOGRAPHY)</a:t>
-                      </a:r>
-                      <a:endParaRPr lang="en-US" sz="1300" b="1">
-                        <a:solidFill>
-                          <a:srgbClr val="FFFFFF"/>
-                        </a:solidFill>
-                        <a:latin typeface="Segoe UI" panose="020B0502040204020203" pitchFamily="34" charset="0"/>
-                      </a:endParaRPr>
-                    </a:p>
-                  </a:txBody>
-                  <a:tcPr marT="76200" marB="76200" anchor="ctr">
-                    <a:solidFill>
-                      <a:srgbClr val="0284C7"/>
-                    </a:solidFill>
-                  </a:tcPr>
-                </a:tc>
-                <a:tc>
-                  <a:txBody>
-                    <a:bodyPr/>
-                    <a:lstStyle/>
-                    <a:p>
-                      <a:pPr algn="ctr"/>
-                      <a:r>
-                        <a:rPr lang="en-US" sz="1300" b="1">
-                          <a:solidFill>
-                            <a:srgbClr val="FFFFFF"/>
-                          </a:solidFill>
-                          <a:latin typeface="Segoe UI" panose="020B0502040204020203" pitchFamily="34" charset="0"/>
-                        </a:rPr>
-                        <a:t>DÂN SỐ (DEMOGRAPHY)</a:t>
-                      </a:r>
-                    </a:p>
-                  </a:txBody>
-                  <a:tcPr marT="76200" marB="76200" anchor="ctr">
-                    <a:solidFill>
-                      <a:srgbClr val="0284C7"/>
-                    </a:solidFill>
-                  </a:tcPr>
-                </a:tc>
-                <a:tc>
-                  <a:txBody>
-                    <a:bodyPr/>
-                    <a:lstStyle/>
-                    <a:p>
-                      <a:pPr algn="ctr"/>
-                      <a:r>
-                        <a:rPr lang="en-US" sz="1300" b="1">
-                          <a:solidFill>
-                            <a:srgbClr val="FFFFFF"/>
-                          </a:solidFill>
-                          <a:latin typeface="Segoe UI" panose="020B0502040204020203" pitchFamily="34" charset="0"/>
-                        </a:rPr>
-                        <a:t>Ý NGHĨA QUẢN TRỊ</a:t>
-                      </a:r>
-                    </a:p>
-                  </a:txBody>
-                  <a:tcPr marT="76200" marB="76200" anchor="ctr">
-                    <a:solidFill>
-                      <a:srgbClr val="0284C7"/>
-                    </a:solidFill>
-                  </a:tcPr>
-                </a:tc>
-                <a:extLst>
-                  <a:ext uri="{0D108BD9-81ED-4DB2-BD59-A6C34878D82A}">
-                    <a16:rowId xmlns:a16="http://schemas.microsoft.com/office/drawing/2014/main" val="1349287921"/>
-                  </a:ext>
-                </a:extLst>
-              </a:tr>
-              <a:tr h="904240">
-                <a:tc>
-                  <a:txBody>
-                    <a:bodyPr/>
-                    <a:lstStyle/>
-                    <a:p>
-                      <a:pPr algn="l"/>
-                      <a:r>
-                        <a:rPr lang="en-US" sz="1200" b="1">
-                          <a:solidFill>
-                            <a:srgbClr val="0F172A"/>
-                          </a:solidFill>
-                          <a:latin typeface="Segoe UI" panose="020B0502040204020203" pitchFamily="34" charset="0"/>
-                        </a:rPr>
-                        <a:t>Bản Chất Khái Niệm</a:t>
-                      </a:r>
-                    </a:p>
-                  </a:txBody>
-                  <a:tcPr marT="76200" marB="76200" anchor="ctr">
-                    <a:solidFill>
-                      <a:srgbClr val="F1F5F9"/>
-                    </a:solidFill>
-                  </a:tcPr>
-                </a:tc>
-                <a:tc>
-                  <a:txBody>
-                    <a:bodyPr/>
-                    <a:lstStyle/>
-                    <a:p>
-                      <a:pPr algn="l"/>
-                      <a:r>
-                        <a:rPr lang="vi-VN" sz="1200" b="0">
-                          <a:solidFill>
-                            <a:srgbClr val="0F172A"/>
-                          </a:solidFill>
-                          <a:latin typeface="Segoe UI" panose="020B0502040204020203" pitchFamily="34" charset="0"/>
-                        </a:rPr>
-                        <a:t>Tập hợp người sinh sống trên một lãnh thổ địa lý</a:t>
-                      </a:r>
-                      <a:endParaRPr lang="en-US" sz="1200" b="0">
-                        <a:solidFill>
-                          <a:srgbClr val="0F172A"/>
-                        </a:solidFill>
-                        <a:latin typeface="Segoe UI" panose="020B0502040204020203" pitchFamily="34" charset="0"/>
-                      </a:endParaRPr>
-                    </a:p>
-                  </a:txBody>
-                  <a:tcPr marT="76200" marB="76200" anchor="ctr">
-                    <a:solidFill>
-                      <a:srgbClr val="F1F5F9"/>
-                    </a:solidFill>
-                  </a:tcPr>
-                </a:tc>
-                <a:tc>
-                  <a:txBody>
-                    <a:bodyPr/>
-                    <a:lstStyle/>
-                    <a:p>
-                      <a:pPr algn="l"/>
-                      <a:r>
-                        <a:rPr lang="vi-VN" sz="1200" b="0">
-                          <a:solidFill>
-                            <a:srgbClr val="0F172A"/>
-                          </a:solidFill>
-                          <a:latin typeface="Segoe UI" panose="020B0502040204020203" pitchFamily="34" charset="0"/>
-                        </a:rPr>
-                        <a:t>Tập hợp người gắn liền tái sản xuất, sinh tử và cơ cấu</a:t>
-                      </a:r>
-                      <a:endParaRPr lang="en-US" sz="1200" b="0">
-                        <a:solidFill>
-                          <a:srgbClr val="0F172A"/>
-                        </a:solidFill>
-                        <a:latin typeface="Segoe UI" panose="020B0502040204020203" pitchFamily="34" charset="0"/>
-                      </a:endParaRPr>
-                    </a:p>
-                  </a:txBody>
-                  <a:tcPr marT="76200" marB="76200" anchor="ctr">
-                    <a:solidFill>
-                      <a:srgbClr val="F1F5F9"/>
-                    </a:solidFill>
-                  </a:tcPr>
-                </a:tc>
-                <a:tc>
-                  <a:txBody>
-                    <a:bodyPr/>
-                    <a:lstStyle/>
-                    <a:p>
-                      <a:pPr algn="l"/>
-                      <a:r>
-                        <a:rPr lang="vi-VN" sz="1200" b="0">
-                          <a:solidFill>
-                            <a:srgbClr val="0F172A"/>
-                          </a:solidFill>
-                          <a:latin typeface="Segoe UI" panose="020B0502040204020203" pitchFamily="34" charset="0"/>
-                        </a:rPr>
-                        <a:t>Xác định rõ đối tượng</a:t>
-                      </a:r>
-                      <a:endParaRPr lang="en-US" sz="1200" b="0">
-                        <a:solidFill>
-                          <a:srgbClr val="0F172A"/>
-                        </a:solidFill>
-                        <a:latin typeface="Segoe UI" panose="020B0502040204020203" pitchFamily="34" charset="0"/>
-                      </a:endParaRPr>
-                    </a:p>
-                  </a:txBody>
-                  <a:tcPr marT="76200" marB="76200" anchor="ctr">
-                    <a:solidFill>
-                      <a:srgbClr val="F1F5F9"/>
-                    </a:solidFill>
-                  </a:tcPr>
-                </a:tc>
-                <a:extLst>
-                  <a:ext uri="{0D108BD9-81ED-4DB2-BD59-A6C34878D82A}">
-                    <a16:rowId xmlns:a16="http://schemas.microsoft.com/office/drawing/2014/main" val="2142933585"/>
-                  </a:ext>
-                </a:extLst>
-              </a:tr>
-              <a:tr h="904240">
-                <a:tc>
-                  <a:txBody>
-                    <a:bodyPr/>
-                    <a:lstStyle/>
-                    <a:p>
-                      <a:pPr algn="l"/>
-                      <a:r>
-                        <a:rPr lang="en-US" sz="1200" b="1">
-                          <a:solidFill>
-                            <a:srgbClr val="0F172A"/>
-                          </a:solidFill>
-                          <a:latin typeface="Segoe UI" panose="020B0502040204020203" pitchFamily="34" charset="0"/>
-                        </a:rPr>
-                        <a:t>Góc Độ Tiếp Cận</a:t>
-                      </a:r>
-                    </a:p>
-                  </a:txBody>
-                  <a:tcPr marT="76200" marB="76200" anchor="ctr">
-                    <a:solidFill>
-                      <a:srgbClr val="FFFFFF"/>
-                    </a:solidFill>
-                  </a:tcPr>
-                </a:tc>
-                <a:tc>
-                  <a:txBody>
-                    <a:bodyPr/>
-                    <a:lstStyle/>
-                    <a:p>
-                      <a:pPr algn="l"/>
-                      <a:r>
-                        <a:rPr lang="vi-VN" sz="1200" b="0">
-                          <a:solidFill>
-                            <a:srgbClr val="0F172A"/>
-                          </a:solidFill>
-                          <a:latin typeface="Segoe UI" panose="020B0502040204020203" pitchFamily="34" charset="0"/>
-                        </a:rPr>
-                        <a:t>Không gian địa lý, phân bố cư trú và cảnh quan</a:t>
-                      </a:r>
-                      <a:endParaRPr lang="en-US" sz="1200" b="0">
-                        <a:solidFill>
-                          <a:srgbClr val="0F172A"/>
-                        </a:solidFill>
-                        <a:latin typeface="Segoe UI" panose="020B0502040204020203" pitchFamily="34" charset="0"/>
-                      </a:endParaRPr>
-                    </a:p>
-                  </a:txBody>
-                  <a:tcPr marT="76200" marB="76200" anchor="ctr">
-                    <a:solidFill>
-                      <a:srgbClr val="FFFFFF"/>
-                    </a:solidFill>
-                  </a:tcPr>
-                </a:tc>
-                <a:tc>
-                  <a:txBody>
-                    <a:bodyPr/>
-                    <a:lstStyle/>
-                    <a:p>
-                      <a:pPr algn="l"/>
-                      <a:r>
-                        <a:rPr lang="en-US" sz="1200" b="0">
-                          <a:solidFill>
-                            <a:srgbClr val="0F172A"/>
-                          </a:solidFill>
-                          <a:latin typeface="Segoe UI" panose="020B0502040204020203" pitchFamily="34" charset="0"/>
-                        </a:rPr>
-                        <a:t>Quy luật sinh học, kinh tế và biến động nhân khẩu</a:t>
-                      </a:r>
-                    </a:p>
-                  </a:txBody>
-                  <a:tcPr marT="76200" marB="76200" anchor="ctr">
-                    <a:solidFill>
-                      <a:srgbClr val="FFFFFF"/>
-                    </a:solidFill>
-                  </a:tcPr>
-                </a:tc>
-                <a:tc>
-                  <a:txBody>
-                    <a:bodyPr/>
-                    <a:lstStyle/>
-                    <a:p>
-                      <a:pPr algn="l"/>
-                      <a:r>
-                        <a:rPr lang="vi-VN" sz="1200" b="0">
-                          <a:solidFill>
-                            <a:srgbClr val="0F172A"/>
-                          </a:solidFill>
-                          <a:latin typeface="Segoe UI" panose="020B0502040204020203" pitchFamily="34" charset="0"/>
-                        </a:rPr>
-                        <a:t>Đo lường tỷ suất chuẩn</a:t>
-                      </a:r>
-                      <a:endParaRPr lang="en-US" sz="1200" b="0">
-                        <a:solidFill>
-                          <a:srgbClr val="0F172A"/>
-                        </a:solidFill>
-                        <a:latin typeface="Segoe UI" panose="020B0502040204020203" pitchFamily="34" charset="0"/>
-                      </a:endParaRPr>
-                    </a:p>
-                  </a:txBody>
-                  <a:tcPr marT="76200" marB="76200" anchor="ctr">
-                    <a:solidFill>
-                      <a:srgbClr val="FFFFFF"/>
-                    </a:solidFill>
-                  </a:tcPr>
-                </a:tc>
-                <a:extLst>
-                  <a:ext uri="{0D108BD9-81ED-4DB2-BD59-A6C34878D82A}">
-                    <a16:rowId xmlns:a16="http://schemas.microsoft.com/office/drawing/2014/main" val="1607620318"/>
-                  </a:ext>
-                </a:extLst>
-              </a:tr>
-              <a:tr h="904240">
-                <a:tc>
-                  <a:txBody>
-                    <a:bodyPr/>
-                    <a:lstStyle/>
-                    <a:p>
-                      <a:pPr algn="l"/>
-                      <a:r>
-                        <a:rPr lang="en-US" sz="1200" b="1">
-                          <a:solidFill>
-                            <a:srgbClr val="0F172A"/>
-                          </a:solidFill>
-                          <a:latin typeface="Segoe UI" panose="020B0502040204020203" pitchFamily="34" charset="0"/>
-                        </a:rPr>
-                        <a:t>Thuộc Tính Thống Kê</a:t>
-                      </a:r>
-                    </a:p>
-                  </a:txBody>
-                  <a:tcPr marT="76200" marB="76200" anchor="ctr">
-                    <a:solidFill>
-                      <a:srgbClr val="F1F5F9"/>
-                    </a:solidFill>
-                  </a:tcPr>
-                </a:tc>
-                <a:tc>
-                  <a:txBody>
-                    <a:bodyPr/>
-                    <a:lstStyle/>
-                    <a:p>
-                      <a:pPr algn="l"/>
-                      <a:r>
-                        <a:rPr lang="vi-VN" sz="1200" b="0">
-                          <a:solidFill>
-                            <a:srgbClr val="0F172A"/>
-                          </a:solidFill>
-                          <a:latin typeface="Segoe UI" panose="020B0502040204020203" pitchFamily="34" charset="0"/>
-                        </a:rPr>
-                        <a:t>Phản ánh dung lượng cư trú và mật độ lãnh thổ</a:t>
-                      </a:r>
-                      <a:endParaRPr lang="en-US" sz="1200" b="0">
-                        <a:solidFill>
-                          <a:srgbClr val="0F172A"/>
-                        </a:solidFill>
-                        <a:latin typeface="Segoe UI" panose="020B0502040204020203" pitchFamily="34" charset="0"/>
-                      </a:endParaRPr>
-                    </a:p>
-                  </a:txBody>
-                  <a:tcPr marT="76200" marB="76200" anchor="ctr">
-                    <a:solidFill>
-                      <a:srgbClr val="F1F5F9"/>
-                    </a:solidFill>
-                  </a:tcPr>
-                </a:tc>
-                <a:tc>
-                  <a:txBody>
-                    <a:bodyPr/>
-                    <a:lstStyle/>
-                    <a:p>
-                      <a:pPr algn="l"/>
-                      <a:r>
-                        <a:rPr lang="en-US" sz="1200" b="0">
-                          <a:solidFill>
-                            <a:srgbClr val="0F172A"/>
-                          </a:solidFill>
-                          <a:latin typeface="Segoe UI" panose="020B0502040204020203" pitchFamily="34" charset="0"/>
-                        </a:rPr>
-                        <a:t>Phân rã chi tiết theo tuổi, giới tính, học vấn</a:t>
-                      </a:r>
-                    </a:p>
-                  </a:txBody>
-                  <a:tcPr marT="76200" marB="76200" anchor="ctr">
-                    <a:solidFill>
-                      <a:srgbClr val="F1F5F9"/>
-                    </a:solidFill>
-                  </a:tcPr>
-                </a:tc>
-                <a:tc>
-                  <a:txBody>
-                    <a:bodyPr/>
-                    <a:lstStyle/>
-                    <a:p>
-                      <a:pPr algn="l"/>
-                      <a:r>
-                        <a:rPr lang="vi-VN" sz="1200" b="0">
-                          <a:solidFill>
-                            <a:srgbClr val="0F172A"/>
-                          </a:solidFill>
-                          <a:latin typeface="Segoe UI" panose="020B0502040204020203" pitchFamily="34" charset="0"/>
-                        </a:rPr>
-                        <a:t>Cơ sở phân bổ ngân sách</a:t>
-                      </a:r>
-                      <a:endParaRPr lang="en-US" sz="1200" b="0">
-                        <a:solidFill>
-                          <a:srgbClr val="0F172A"/>
-                        </a:solidFill>
-                        <a:latin typeface="Segoe UI" panose="020B0502040204020203" pitchFamily="34" charset="0"/>
-                      </a:endParaRPr>
-                    </a:p>
-                  </a:txBody>
-                  <a:tcPr marT="76200" marB="76200" anchor="ctr">
-                    <a:solidFill>
-                      <a:srgbClr val="F1F5F9"/>
-                    </a:solidFill>
-                  </a:tcPr>
-                </a:tc>
-                <a:extLst>
-                  <a:ext uri="{0D108BD9-81ED-4DB2-BD59-A6C34878D82A}">
-                    <a16:rowId xmlns:a16="http://schemas.microsoft.com/office/drawing/2014/main" val="40444314"/>
-                  </a:ext>
-                </a:extLst>
-              </a:tr>
-              <a:tr h="904240">
-                <a:tc>
-                  <a:txBody>
-                    <a:bodyPr/>
-                    <a:lstStyle/>
-                    <a:p>
-                      <a:pPr algn="l"/>
-                      <a:r>
-                        <a:rPr lang="en-US" sz="1200" b="1">
-                          <a:solidFill>
-                            <a:srgbClr val="0F172A"/>
-                          </a:solidFill>
-                          <a:latin typeface="Segoe UI" panose="020B0502040204020203" pitchFamily="34" charset="0"/>
-                        </a:rPr>
-                        <a:t>Phạm Vi Ứng Dụng</a:t>
-                      </a:r>
-                    </a:p>
-                  </a:txBody>
-                  <a:tcPr marT="76200" marB="76200" anchor="ctr">
-                    <a:solidFill>
-                      <a:srgbClr val="FFFFFF"/>
-                    </a:solidFill>
-                  </a:tcPr>
-                </a:tc>
-                <a:tc>
-                  <a:txBody>
-                    <a:bodyPr/>
-                    <a:lstStyle/>
-                    <a:p>
-                      <a:pPr algn="l"/>
-                      <a:r>
-                        <a:rPr lang="en-US" sz="1200" b="0">
-                          <a:solidFill>
-                            <a:srgbClr val="0F172A"/>
-                          </a:solidFill>
-                          <a:latin typeface="Segoe UI" panose="020B0502040204020203" pitchFamily="34" charset="0"/>
-                        </a:rPr>
-                        <a:t>Địa lý kinh tế, quy hoạch giao thông, tài nguyên</a:t>
-                      </a:r>
-                    </a:p>
-                  </a:txBody>
-                  <a:tcPr marT="76200" marB="76200" anchor="ctr">
-                    <a:solidFill>
-                      <a:srgbClr val="FFFFFF"/>
-                    </a:solidFill>
-                  </a:tcPr>
-                </a:tc>
-                <a:tc>
-                  <a:txBody>
-                    <a:bodyPr/>
-                    <a:lstStyle/>
-                    <a:p>
-                      <a:pPr algn="l"/>
-                      <a:r>
-                        <a:rPr lang="vi-VN" sz="1200" b="0">
-                          <a:solidFill>
-                            <a:srgbClr val="0F172A"/>
-                          </a:solidFill>
-                          <a:latin typeface="Segoe UI" panose="020B0502040204020203" pitchFamily="34" charset="0"/>
-                        </a:rPr>
-                        <a:t>Chính sách dân số, an sinh xã hội và thị trường</a:t>
-                      </a:r>
-                      <a:endParaRPr lang="en-US" sz="1200" b="0">
-                        <a:solidFill>
-                          <a:srgbClr val="0F172A"/>
-                        </a:solidFill>
-                        <a:latin typeface="Segoe UI" panose="020B0502040204020203" pitchFamily="34" charset="0"/>
-                      </a:endParaRPr>
-                    </a:p>
-                  </a:txBody>
-                  <a:tcPr marT="76200" marB="76200" anchor="ctr">
-                    <a:solidFill>
-                      <a:srgbClr val="FFFFFF"/>
-                    </a:solidFill>
-                  </a:tcPr>
-                </a:tc>
-                <a:tc>
-                  <a:txBody>
-                    <a:bodyPr/>
-                    <a:lstStyle/>
-                    <a:p>
-                      <a:pPr algn="l"/>
-                      <a:r>
-                        <a:rPr lang="vi-VN" sz="1200" b="0">
-                          <a:solidFill>
-                            <a:srgbClr val="0F172A"/>
-                          </a:solidFill>
-                          <a:latin typeface="Segoe UI" panose="020B0502040204020203" pitchFamily="34" charset="0"/>
-                        </a:rPr>
-                        <a:t>Hoạch định chiến lược dài hạn</a:t>
-                      </a:r>
-                      <a:endParaRPr lang="en-US" sz="1200" b="0">
-                        <a:solidFill>
-                          <a:srgbClr val="0F172A"/>
-                        </a:solidFill>
-                        <a:latin typeface="Segoe UI" panose="020B0502040204020203" pitchFamily="34" charset="0"/>
-                      </a:endParaRPr>
-                    </a:p>
-                  </a:txBody>
-                  <a:tcPr marT="76200" marB="76200" anchor="ctr">
-                    <a:solidFill>
-                      <a:srgbClr val="FFFFFF"/>
-                    </a:solidFill>
-                  </a:tcPr>
-                </a:tc>
-                <a:extLst>
-                  <a:ext uri="{0D108BD9-81ED-4DB2-BD59-A6C34878D82A}">
-                    <a16:rowId xmlns:a16="http://schemas.microsoft.com/office/drawing/2014/main" val="1936409967"/>
-                  </a:ext>
-                </a:extLst>
-              </a:tr>
-            </a:tbl>
-          </a:graphicData>
-        </a:graphic>
-      </p:graphicFrame>
-      <p:sp>
-        <p:nvSpPr>
-          <p:cNvPr id="6" name="!!Anchor_Source_Footer">
-            <a:extLst>
-              <a:ext uri="{FF2B5EF4-FFF2-40B4-BE49-F238E27FC236}">
-                <a16:creationId xmlns:a16="http://schemas.microsoft.com/office/drawing/2014/main" id="{F5F35E58-7B0E-C548-3513-08DC5DA8475B}"/>
-              </a:ext>
-            </a:extLst>
-          </p:cNvPr>
-          <p:cNvSpPr txBox="1"/>
-          <p:nvPr/>
-        </p:nvSpPr>
-        <p:spPr>
-          <a:xfrm>
-            <a:off x="609600" y="6273800"/>
-            <a:ext cx="10972800" cy="246221"/>
-          </a:xfrm>
-          <a:prstGeom prst="rect">
-            <a:avLst/>
-          </a:prstGeom>
-          <a:noFill/>
-        </p:spPr>
-        <p:txBody>
-          <a:bodyPr vert="horz" rtlCol="0">
-            <a:spAutoFit/>
-          </a:bodyPr>
-          <a:lstStyle/>
-          <a:p>
-            <a:r>
-              <a:rPr lang="en-US" sz="1000">
-                <a:solidFill>
-                  <a:srgbClr val="334155"/>
-                </a:solidFill>
-                <a:latin typeface="Segoe UI" panose="020B0502040204020203" pitchFamily="34" charset="0"/>
-              </a:rPr>
-              <a:t>Hội đồng Thẩm định Học thuật Dân số học</a:t>
-            </a:r>
-          </a:p>
-        </p:txBody>
-      </p:sp>
-    </p:spTree>
-    <p:extLst>
-      <p:ext uri="{BB962C8B-B14F-4D97-AF65-F5344CB8AC3E}">
-        <p14:creationId xmlns:p14="http://schemas.microsoft.com/office/powerpoint/2010/main" val="3572764034"/>
-      </p:ext>
-    </p:extLst>
-  </p:cSld>
-  <p:clrMapOvr>
-    <a:masterClrMapping/>
-  </p:clrMapOvr>
-  <mc:AlternateContent xmlns:mc="http://schemas.openxmlformats.org/markup-compatibility/2006">
-    <mc:Choice xmlns:p159="http://schemas.microsoft.com/office/powerpoint/2015/09/main" Requires="p159">
-      <p:transition xmlns:p14="http://schemas.microsoft.com/office/powerpoint/2010/main" spd="slow" p14:dur="850">
-        <p159:morph option="byObject"/>
-      </p:transition>
-    </mc:Choice>
-    <mc:Fallback>
-      <p:transition spd="slow">
-        <p:fade/>
-      </p:transition>
-    </mc:Fallback>
-  </mc:AlternateContent>
-</p:sld>
-</file>
-
-<file path=ppt/slides/slide5.xml><?xml version="1.0" encoding="utf-8"?>
-<p:sld xmlns:a="http://schemas.openxmlformats.org/drawingml/2006/main" xmlns:r="http://schemas.openxmlformats.org/officeDocument/2006/relationships" xmlns:p="http://schemas.openxmlformats.org/presentationml/2006/main">
-  <p:cSld>
-    <p:bg>
-      <p:bgPr>
-        <a:solidFill>
-          <a:srgbClr val="F8FAFC"/>
-        </a:solidFill>
-        <a:effectLst/>
-      </p:bgPr>
-    </p:bg>
-    <p:spTree>
-      <p:nvGrpSpPr>
-        <p:cNvPr id="1" name=""/>
-        <p:cNvGrpSpPr/>
-        <p:nvPr/>
-      </p:nvGrpSpPr>
-      <p:grpSpPr>
-        <a:xfrm>
-          <a:off x="0" y="0"/>
-          <a:ext cx="0" cy="0"/>
-          <a:chOff x="0" y="0"/>
-          <a:chExt cx="0" cy="0"/>
-        </a:xfrm>
-      </p:grpSpPr>
-      <p:sp>
-        <p:nvSpPr>
-          <p:cNvPr id="2" name="!!Anchor_Kicker_Rail">
-            <a:extLst>
-              <a:ext uri="{FF2B5EF4-FFF2-40B4-BE49-F238E27FC236}">
-                <a16:creationId xmlns:a16="http://schemas.microsoft.com/office/drawing/2014/main" id="{B708B768-B5F1-8E28-0F7A-5C0D73CEE655}"/>
-              </a:ext>
-            </a:extLst>
-          </p:cNvPr>
-          <p:cNvSpPr txBox="1"/>
-          <p:nvPr/>
-        </p:nvSpPr>
-        <p:spPr>
-          <a:xfrm>
-            <a:off x="609600" y="457200"/>
-            <a:ext cx="9956800" cy="276999"/>
-          </a:xfrm>
-          <a:prstGeom prst="rect">
-            <a:avLst/>
-          </a:prstGeom>
-          <a:noFill/>
-        </p:spPr>
-        <p:txBody>
-          <a:bodyPr vert="horz" rtlCol="0">
-            <a:spAutoFit/>
-          </a:bodyPr>
-          <a:lstStyle/>
-          <a:p>
-            <a:r>
-              <a:rPr lang="en-US" sz="1200" b="1">
-                <a:solidFill>
-                  <a:srgbClr val="0284C7"/>
-                </a:solidFill>
-                <a:latin typeface="Segoe UI" panose="020B0502040204020203" pitchFamily="34" charset="0"/>
-              </a:rPr>
-              <a:t>TRẠNG THÁI DÂN SỐ  •  TRỌNG TÂM</a:t>
-            </a:r>
-          </a:p>
-        </p:txBody>
-      </p:sp>
-      <p:sp>
-        <p:nvSpPr>
-          <p:cNvPr id="3" name="!!Anchor_Slide_Tracker">
-            <a:extLst>
-              <a:ext uri="{FF2B5EF4-FFF2-40B4-BE49-F238E27FC236}">
-                <a16:creationId xmlns:a16="http://schemas.microsoft.com/office/drawing/2014/main" id="{7D45960D-4922-7CFE-FECD-38A1DD87C605}"/>
-              </a:ext>
-            </a:extLst>
-          </p:cNvPr>
-          <p:cNvSpPr txBox="1"/>
-          <p:nvPr/>
-        </p:nvSpPr>
-        <p:spPr>
-          <a:xfrm>
-            <a:off x="10820400" y="457200"/>
-            <a:ext cx="762000" cy="276999"/>
-          </a:xfrm>
-          <a:prstGeom prst="rect">
-            <a:avLst/>
-          </a:prstGeom>
-          <a:noFill/>
-        </p:spPr>
-        <p:txBody>
-          <a:bodyPr vert="horz" rtlCol="0">
-            <a:spAutoFit/>
-          </a:bodyPr>
-          <a:lstStyle/>
-          <a:p>
-            <a:pPr algn="r"/>
-            <a:r>
-              <a:rPr lang="en-US" sz="1200" b="1">
-                <a:solidFill>
-                  <a:srgbClr val="334155"/>
-                </a:solidFill>
-                <a:latin typeface="Bahnschrift" panose="020B0502040204020203" pitchFamily="34" charset="0"/>
-              </a:rPr>
-              <a:t>05 / 14</a:t>
-            </a:r>
-          </a:p>
-        </p:txBody>
-      </p:sp>
-      <p:sp>
-        <p:nvSpPr>
-          <p:cNvPr id="4" name="!!Anchor_Assertion_Title">
-            <a:extLst>
-              <a:ext uri="{FF2B5EF4-FFF2-40B4-BE49-F238E27FC236}">
-                <a16:creationId xmlns:a16="http://schemas.microsoft.com/office/drawing/2014/main" id="{475FC8D7-6A94-7A7A-8248-BB1DDDBFFE18}"/>
-              </a:ext>
-            </a:extLst>
-          </p:cNvPr>
-          <p:cNvSpPr txBox="1"/>
-          <p:nvPr/>
-        </p:nvSpPr>
-        <p:spPr>
-          <a:xfrm>
-            <a:off x="609600" y="711200"/>
-            <a:ext cx="10972800" cy="369332"/>
-          </a:xfrm>
-          <a:prstGeom prst="rect">
-            <a:avLst/>
-          </a:prstGeom>
-          <a:noFill/>
-        </p:spPr>
-        <p:txBody>
-          <a:bodyPr vert="horz" wrap="square" tIns="0" bIns="0" rtlCol="0">
-            <a:spAutoFit/>
-          </a:bodyPr>
-          <a:lstStyle/>
-          <a:p>
-            <a:r>
-              <a:rPr lang="en-US" sz="2400" b="1">
-                <a:solidFill>
-                  <a:srgbClr val="0F172A"/>
-                </a:solidFill>
-                <a:latin typeface="Segoe UI" panose="020B0502040204020203" pitchFamily="34" charset="0"/>
-              </a:rPr>
-              <a:t>Hai Trạng Thái Tồn Tại Của Dân Số: Trạng Thái Tĩnh Và Trạng Thái Động</a:t>
-            </a:r>
-          </a:p>
-        </p:txBody>
-      </p:sp>
       <p:grpSp>
         <p:nvGrpSpPr>
-          <p:cNvPr id="11" name="!!Stage_Hero_Container">
+          <p:cNvPr id="11" name="!!Stage_Hero_Container!!">
             <a:extLst>
               <a:ext uri="{FF2B5EF4-FFF2-40B4-BE49-F238E27FC236}">
-                <a16:creationId xmlns:a16="http://schemas.microsoft.com/office/drawing/2014/main" id="{5D4BE55C-052D-A1F4-AB61-C20C1DDBE1F0}"/>
+                <a16:creationId xmlns:a16="http://schemas.microsoft.com/office/drawing/2014/main" id="{2A91862C-F7EA-62BB-3B2A-538DD83062E7}"/>
               </a:ext>
             </a:extLst>
           </p:cNvPr>
@@ -13444,7 +13125,7 @@
             <p:cNvPr id="5" name="Rectangle: Rounded Corners 4">
               <a:extLst>
                 <a:ext uri="{FF2B5EF4-FFF2-40B4-BE49-F238E27FC236}">
-                  <a16:creationId xmlns:a16="http://schemas.microsoft.com/office/drawing/2014/main" id="{1D734D6A-A3C5-6432-6938-1D84E298DF4C}"/>
+                  <a16:creationId xmlns:a16="http://schemas.microsoft.com/office/drawing/2014/main" id="{303EF69F-0557-CB2A-501E-E67B4AD54DA4}"/>
                 </a:ext>
               </a:extLst>
             </p:cNvPr>
@@ -13498,7 +13179,7 @@
             <p:cNvPr id="6" name="Rectangle: Rounded Corners 5">
               <a:extLst>
                 <a:ext uri="{FF2B5EF4-FFF2-40B4-BE49-F238E27FC236}">
-                  <a16:creationId xmlns:a16="http://schemas.microsoft.com/office/drawing/2014/main" id="{B24A527B-95A0-478F-6942-CE4FC8D9E703}"/>
+                  <a16:creationId xmlns:a16="http://schemas.microsoft.com/office/drawing/2014/main" id="{446DCEBF-C189-C2BD-EE2A-B9222E6689D3}"/>
                 </a:ext>
               </a:extLst>
             </p:cNvPr>
@@ -13574,7 +13255,7 @@
             <p:cNvPr id="7" name="Oval 6">
               <a:extLst>
                 <a:ext uri="{FF2B5EF4-FFF2-40B4-BE49-F238E27FC236}">
-                  <a16:creationId xmlns:a16="http://schemas.microsoft.com/office/drawing/2014/main" id="{5F468625-9E58-BA14-5C48-572849878D1F}"/>
+                  <a16:creationId xmlns:a16="http://schemas.microsoft.com/office/drawing/2014/main" id="{28C34F2C-D5CF-3AC7-823D-D257E3105155}"/>
                 </a:ext>
               </a:extLst>
             </p:cNvPr>
@@ -13642,7 +13323,7 @@
             <p:cNvPr id="9" name="Graphic 8">
               <a:extLst>
                 <a:ext uri="{FF2B5EF4-FFF2-40B4-BE49-F238E27FC236}">
-                  <a16:creationId xmlns:a16="http://schemas.microsoft.com/office/drawing/2014/main" id="{B7568EDE-DE32-A674-4103-40377C4A6F09}"/>
+                  <a16:creationId xmlns:a16="http://schemas.microsoft.com/office/drawing/2014/main" id="{B5248F78-5CFC-45B3-1AEA-E7A1A73183E4}"/>
                 </a:ext>
               </a:extLst>
             </p:cNvPr>
@@ -13678,7 +13359,986 @@
             <p:cNvPr id="10" name="TextBox 9">
               <a:extLst>
                 <a:ext uri="{FF2B5EF4-FFF2-40B4-BE49-F238E27FC236}">
-                  <a16:creationId xmlns:a16="http://schemas.microsoft.com/office/drawing/2014/main" id="{5DC326B8-0175-0C14-FB56-6F99E6EE0415}"/>
+                  <a16:creationId xmlns:a16="http://schemas.microsoft.com/office/drawing/2014/main" id="{9BBC41FC-54A4-6BCF-E871-153CCC11A45B}"/>
+                </a:ext>
+              </a:extLst>
+            </p:cNvPr>
+            <p:cNvSpPr txBox="1"/>
+            <p:nvPr/>
+          </p:nvSpPr>
+          <p:spPr>
+            <a:xfrm>
+              <a:off x="863600" y="2819400"/>
+              <a:ext cx="4826000" cy="1515095"/>
+            </a:xfrm>
+            <a:prstGeom prst="rect">
+              <a:avLst/>
+            </a:prstGeom>
+            <a:noFill/>
+          </p:spPr>
+          <p:txBody>
+            <a:bodyPr vert="horz" wrap="square" rtlCol="0">
+              <a:spAutoFit/>
+            </a:bodyPr>
+            <a:lstStyle/>
+            <a:p>
+              <a:pPr>
+                <a:lnSpc>
+                  <a:spcPct val="130000"/>
+                </a:lnSpc>
+                <a:spcAft>
+                  <a:spcPts val="1200"/>
+                </a:spcAft>
+              </a:pPr>
+              <a:r>
+                <a:rPr lang="vi-VN" sz="2000" b="1">
+                  <a:solidFill>
+                    <a:srgbClr val="0F172A"/>
+                  </a:solidFill>
+                  <a:latin typeface="Segoe UI" panose="020B0502040204020203" pitchFamily="34" charset="0"/>
+                </a:rPr>
+                <a:t>Khái Niệm Dân Cư (Population Group)
+</a:t>
+              </a:r>
+              <a:r>
+                <a:rPr lang="vi-VN" sz="1500" b="1">
+                  <a:solidFill>
+                    <a:srgbClr val="334155"/>
+                  </a:solidFill>
+                  <a:latin typeface="Segoe UI" panose="020B0502040204020203" pitchFamily="34" charset="0"/>
+                </a:rPr>
+                <a:t>Toàn bộ con người cùng cư trú trên một vùng lãnh thổ, gắn liền với các mối quan hệ lịch sử, văn hóa, phong tục và cộng đồng.</a:t>
+              </a:r>
+              <a:endParaRPr lang="en-US" sz="1500" b="1">
+                <a:solidFill>
+                  <a:srgbClr val="334155"/>
+                </a:solidFill>
+                <a:latin typeface="Segoe UI" panose="020B0502040204020203" pitchFamily="34" charset="0"/>
+              </a:endParaRPr>
+            </a:p>
+          </p:txBody>
+        </p:sp>
+      </p:grpSp>
+      <p:grpSp>
+        <p:nvGrpSpPr>
+          <p:cNvPr id="18" name="!!Stage_Sub_Card_1!!">
+            <a:extLst>
+              <a:ext uri="{FF2B5EF4-FFF2-40B4-BE49-F238E27FC236}">
+                <a16:creationId xmlns:a16="http://schemas.microsoft.com/office/drawing/2014/main" id="{0C926480-5957-429A-891D-F328C01965EC}"/>
+              </a:ext>
+            </a:extLst>
+          </p:cNvPr>
+          <p:cNvGrpSpPr/>
+          <p:nvPr/>
+        </p:nvGrpSpPr>
+        <p:grpSpPr>
+          <a:xfrm>
+            <a:off x="6248400" y="1676400"/>
+            <a:ext cx="5334000" cy="4521200"/>
+            <a:chOff x="6248400" y="1676400"/>
+            <a:chExt cx="5334000" cy="4521200"/>
+          </a:xfrm>
+        </p:grpSpPr>
+        <p:sp>
+          <p:nvSpPr>
+            <p:cNvPr id="12" name="Rectangle: Rounded Corners 11">
+              <a:extLst>
+                <a:ext uri="{FF2B5EF4-FFF2-40B4-BE49-F238E27FC236}">
+                  <a16:creationId xmlns:a16="http://schemas.microsoft.com/office/drawing/2014/main" id="{3BD9493E-928F-09DA-A154-313EADA8C563}"/>
+                </a:ext>
+              </a:extLst>
+            </p:cNvPr>
+            <p:cNvSpPr/>
+            <p:nvPr/>
+          </p:nvSpPr>
+          <p:spPr>
+            <a:xfrm>
+              <a:off x="6248400" y="1676400"/>
+              <a:ext cx="5334000" cy="4521200"/>
+            </a:xfrm>
+            <a:prstGeom prst="roundRect">
+              <a:avLst/>
+            </a:prstGeom>
+            <a:solidFill>
+              <a:srgbClr val="FFFFFF"/>
+            </a:solidFill>
+            <a:ln w="25400">
+              <a:solidFill>
+                <a:srgbClr val="0284C7"/>
+              </a:solidFill>
+            </a:ln>
+          </p:spPr>
+          <p:style>
+            <a:lnRef idx="2">
+              <a:schemeClr val="accent1">
+                <a:shade val="15000"/>
+              </a:schemeClr>
+            </a:lnRef>
+            <a:fillRef idx="1">
+              <a:schemeClr val="accent1"/>
+            </a:fillRef>
+            <a:effectRef idx="0">
+              <a:schemeClr val="accent1"/>
+            </a:effectRef>
+            <a:fontRef idx="minor">
+              <a:schemeClr val="lt1"/>
+            </a:fontRef>
+          </p:style>
+          <p:txBody>
+            <a:bodyPr rtlCol="0" anchor="ctr"/>
+            <a:lstStyle/>
+            <a:p>
+              <a:pPr algn="ctr"/>
+              <a:endParaRPr lang="en-US"/>
+            </a:p>
+          </p:txBody>
+        </p:sp>
+        <p:sp>
+          <p:nvSpPr>
+            <p:cNvPr id="13" name="Rectangle: Rounded Corners 12">
+              <a:extLst>
+                <a:ext uri="{FF2B5EF4-FFF2-40B4-BE49-F238E27FC236}">
+                  <a16:creationId xmlns:a16="http://schemas.microsoft.com/office/drawing/2014/main" id="{CF49B27C-1955-BAEF-7FC4-C55BB04B841D}"/>
+                </a:ext>
+              </a:extLst>
+            </p:cNvPr>
+            <p:cNvSpPr/>
+            <p:nvPr/>
+          </p:nvSpPr>
+          <p:spPr>
+            <a:xfrm>
+              <a:off x="6502400" y="1905000"/>
+              <a:ext cx="1397000" cy="279400"/>
+            </a:xfrm>
+            <a:prstGeom prst="roundRect">
+              <a:avLst/>
+            </a:prstGeom>
+            <a:solidFill>
+              <a:srgbClr val="D1FAE5"/>
+            </a:solidFill>
+            <a:ln w="12700" cap="flat" cmpd="sng" algn="ctr">
+              <a:noFill/>
+              <a:prstDash val="solid"/>
+              <a:miter lim="800000"/>
+            </a:ln>
+            <a:effectLst/>
+            <a:extLst>
+              <a:ext uri="{91240B29-F687-4F45-9708-019B960494DF}">
+                <a14:hiddenLine xmlns:a14="http://schemas.microsoft.com/office/drawing/2010/main" w="12700" cap="flat" cmpd="sng" algn="ctr">
+                  <a:solidFill>
+                    <a:schemeClr val="accent1">
+                      <a:shade val="15000"/>
+                    </a:schemeClr>
+                  </a:solidFill>
+                  <a:prstDash val="solid"/>
+                  <a:miter lim="800000"/>
+                </a14:hiddenLine>
+              </a:ext>
+            </a:extLst>
+          </p:spPr>
+          <p:style>
+            <a:lnRef idx="2">
+              <a:schemeClr val="accent1">
+                <a:shade val="15000"/>
+              </a:schemeClr>
+            </a:lnRef>
+            <a:fillRef idx="1">
+              <a:schemeClr val="accent1"/>
+            </a:fillRef>
+            <a:effectRef idx="0">
+              <a:schemeClr val="accent1"/>
+            </a:effectRef>
+            <a:fontRef idx="minor">
+              <a:schemeClr val="lt1"/>
+            </a:fontRef>
+          </p:style>
+          <p:txBody>
+            <a:bodyPr rtlCol="0" anchor="ctr"/>
+            <a:lstStyle/>
+            <a:p>
+              <a:pPr algn="ctr"/>
+              <a:r>
+                <a:rPr lang="vi-VN" sz="900" b="1">
+                  <a:solidFill>
+                    <a:srgbClr val="059669"/>
+                  </a:solidFill>
+                  <a:latin typeface="Segoe UI" panose="020B0502040204020203" pitchFamily="34" charset="0"/>
+                </a:rPr>
+                <a:t>ĐẶC TRƯNG CỐT LÕI</a:t>
+              </a:r>
+              <a:endParaRPr lang="en-US" sz="900" b="1">
+                <a:solidFill>
+                  <a:srgbClr val="059669"/>
+                </a:solidFill>
+                <a:latin typeface="Segoe UI" panose="020B0502040204020203" pitchFamily="34" charset="0"/>
+              </a:endParaRPr>
+            </a:p>
+          </p:txBody>
+        </p:sp>
+        <p:sp>
+          <p:nvSpPr>
+            <p:cNvPr id="14" name="Oval 13">
+              <a:extLst>
+                <a:ext uri="{FF2B5EF4-FFF2-40B4-BE49-F238E27FC236}">
+                  <a16:creationId xmlns:a16="http://schemas.microsoft.com/office/drawing/2014/main" id="{7F1A3F46-11CC-21D7-BA17-3FCDC07D4972}"/>
+                </a:ext>
+              </a:extLst>
+            </p:cNvPr>
+            <p:cNvSpPr/>
+            <p:nvPr/>
+          </p:nvSpPr>
+          <p:spPr>
+            <a:xfrm>
+              <a:off x="6502400" y="2260600"/>
+              <a:ext cx="457200" cy="457200"/>
+            </a:xfrm>
+            <a:prstGeom prst="ellipse">
+              <a:avLst/>
+            </a:prstGeom>
+            <a:solidFill>
+              <a:srgbClr val="E0F2FE"/>
+            </a:solidFill>
+            <a:ln w="12700" cap="flat" cmpd="sng" algn="ctr">
+              <a:noFill/>
+              <a:prstDash val="solid"/>
+              <a:miter lim="800000"/>
+            </a:ln>
+            <a:effectLst/>
+            <a:extLst>
+              <a:ext uri="{91240B29-F687-4F45-9708-019B960494DF}">
+                <a14:hiddenLine xmlns:a14="http://schemas.microsoft.com/office/drawing/2010/main" w="12700" cap="flat" cmpd="sng" algn="ctr">
+                  <a:solidFill>
+                    <a:schemeClr val="accent1">
+                      <a:shade val="15000"/>
+                    </a:schemeClr>
+                  </a:solidFill>
+                  <a:prstDash val="solid"/>
+                  <a:miter lim="800000"/>
+                </a14:hiddenLine>
+              </a:ext>
+            </a:extLst>
+          </p:spPr>
+          <p:style>
+            <a:lnRef idx="2">
+              <a:schemeClr val="accent1">
+                <a:shade val="15000"/>
+              </a:schemeClr>
+            </a:lnRef>
+            <a:fillRef idx="1">
+              <a:schemeClr val="accent1"/>
+            </a:fillRef>
+            <a:effectRef idx="0">
+              <a:schemeClr val="accent1"/>
+            </a:effectRef>
+            <a:fontRef idx="minor">
+              <a:schemeClr val="lt1"/>
+            </a:fontRef>
+          </p:style>
+          <p:txBody>
+            <a:bodyPr rtlCol="0" anchor="ctr"/>
+            <a:lstStyle/>
+            <a:p>
+              <a:pPr algn="ctr"/>
+              <a:endParaRPr lang="en-US"/>
+            </a:p>
+          </p:txBody>
+        </p:sp>
+        <p:pic>
+          <p:nvPicPr>
+            <p:cNvPr id="16" name="Graphic 15">
+              <a:extLst>
+                <a:ext uri="{FF2B5EF4-FFF2-40B4-BE49-F238E27FC236}">
+                  <a16:creationId xmlns:a16="http://schemas.microsoft.com/office/drawing/2014/main" id="{D50FBDBD-37E0-F806-2FCF-223E4E223574}"/>
+                </a:ext>
+              </a:extLst>
+            </p:cNvPr>
+            <p:cNvPicPr>
+              <a:picLocks/>
+            </p:cNvPicPr>
+            <p:nvPr/>
+          </p:nvPicPr>
+          <p:blipFill>
+            <a:blip>
+              <a:extLst>
+                <a:ext uri="{96DAC541-7B7A-43D3-8B79-37D633B846F1}">
+                  <asvg:svgBlip xmlns:asvg="http://schemas.microsoft.com/office/drawing/2016/SVG/main" r:embed="rId3"/>
+                </a:ext>
+              </a:extLst>
+            </a:blip>
+            <a:stretch>
+              <a:fillRect/>
+            </a:stretch>
+          </p:blipFill>
+          <p:spPr>
+            <a:xfrm>
+              <a:off x="6578600" y="2336800"/>
+              <a:ext cx="304800" cy="304800"/>
+            </a:xfrm>
+            <a:prstGeom prst="rect">
+              <a:avLst/>
+            </a:prstGeom>
+          </p:spPr>
+        </p:pic>
+        <p:sp>
+          <p:nvSpPr>
+            <p:cNvPr id="17" name="TextBox 16">
+              <a:extLst>
+                <a:ext uri="{FF2B5EF4-FFF2-40B4-BE49-F238E27FC236}">
+                  <a16:creationId xmlns:a16="http://schemas.microsoft.com/office/drawing/2014/main" id="{77C803A7-8526-3D73-E206-BE6EDF6C33EF}"/>
+                </a:ext>
+              </a:extLst>
+            </p:cNvPr>
+            <p:cNvSpPr txBox="1"/>
+            <p:nvPr/>
+          </p:nvSpPr>
+          <p:spPr>
+            <a:xfrm>
+              <a:off x="6502400" y="2819400"/>
+              <a:ext cx="4826000" cy="1915204"/>
+            </a:xfrm>
+            <a:prstGeom prst="rect">
+              <a:avLst/>
+            </a:prstGeom>
+            <a:noFill/>
+          </p:spPr>
+          <p:txBody>
+            <a:bodyPr vert="horz" wrap="square" rtlCol="0">
+              <a:spAutoFit/>
+            </a:bodyPr>
+            <a:lstStyle/>
+            <a:p>
+              <a:pPr>
+                <a:lnSpc>
+                  <a:spcPct val="130000"/>
+                </a:lnSpc>
+                <a:spcAft>
+                  <a:spcPts val="1200"/>
+                </a:spcAft>
+              </a:pPr>
+              <a:r>
+                <a:rPr lang="en-US" sz="2000" b="1">
+                  <a:solidFill>
+                    <a:srgbClr val="0284C7"/>
+                  </a:solidFill>
+                  <a:latin typeface="Segoe UI" panose="020B0502040204020203" pitchFamily="34" charset="0"/>
+                </a:rPr>
+                <a:t>Khái Niệm Dân Số (Demographic Population)
+</a:t>
+              </a:r>
+              <a:r>
+                <a:rPr lang="vi-VN" sz="1500" b="1">
+                  <a:solidFill>
+                    <a:srgbClr val="334155"/>
+                  </a:solidFill>
+                  <a:latin typeface="Segoe UI" panose="020B0502040204020203" pitchFamily="34" charset="0"/>
+                </a:rPr>
+                <a:t>Tập hợp người được xác định tại một thời điểm cụ thể, được đo đạc định lượng qua quy mô, cơ cấu tuổi, giới tính và biến động sinh tử di cư.</a:t>
+              </a:r>
+              <a:endParaRPr lang="en-US" sz="1500" b="1">
+                <a:solidFill>
+                  <a:srgbClr val="334155"/>
+                </a:solidFill>
+                <a:latin typeface="Segoe UI" panose="020B0502040204020203" pitchFamily="34" charset="0"/>
+              </a:endParaRPr>
+            </a:p>
+          </p:txBody>
+        </p:sp>
+      </p:grpSp>
+      <p:sp>
+        <p:nvSpPr>
+          <p:cNvPr id="19" name="!!Anchor_Source_Footer!!">
+            <a:extLst>
+              <a:ext uri="{FF2B5EF4-FFF2-40B4-BE49-F238E27FC236}">
+                <a16:creationId xmlns:a16="http://schemas.microsoft.com/office/drawing/2014/main" id="{5BC65AEF-0BA2-1436-A051-03F9DA31EC67}"/>
+              </a:ext>
+            </a:extLst>
+          </p:cNvPr>
+          <p:cNvSpPr txBox="1"/>
+          <p:nvPr/>
+        </p:nvSpPr>
+        <p:spPr>
+          <a:xfrm>
+            <a:off x="609600" y="6273800"/>
+            <a:ext cx="10972800" cy="246221"/>
+          </a:xfrm>
+          <a:prstGeom prst="rect">
+            <a:avLst/>
+          </a:prstGeom>
+          <a:noFill/>
+        </p:spPr>
+        <p:txBody>
+          <a:bodyPr vert="horz" rtlCol="0">
+            <a:spAutoFit/>
+          </a:bodyPr>
+          <a:lstStyle/>
+          <a:p>
+            <a:r>
+              <a:rPr lang="en-US" sz="1000">
+                <a:solidFill>
+                  <a:srgbClr val="334155"/>
+                </a:solidFill>
+                <a:latin typeface="Segoe UI" panose="020B0502040204020203" pitchFamily="34" charset="0"/>
+              </a:rPr>
+              <a:t>Hội đồng Thẩm định Học thuật Dân số học</a:t>
+            </a:r>
+          </a:p>
+        </p:txBody>
+      </p:sp>
+    </p:spTree>
+    <p:extLst>
+      <p:ext uri="{BB962C8B-B14F-4D97-AF65-F5344CB8AC3E}">
+        <p14:creationId xmlns:p14="http://schemas.microsoft.com/office/powerpoint/2010/main" val="3429066258"/>
+      </p:ext>
+    </p:extLst>
+  </p:cSld>
+  <p:clrMapOvr>
+    <a:masterClrMapping/>
+  </p:clrMapOvr>
+  <mc:AlternateContent xmlns:mc="http://schemas.openxmlformats.org/markup-compatibility/2006">
+    <mc:Choice xmlns:p159="http://schemas.microsoft.com/office/powerpoint/2015/09/main" Requires="p159">
+      <p:transition xmlns:p14="http://schemas.microsoft.com/office/powerpoint/2010/main" spd="slow" p14:dur="850">
+        <p159:morph option="byObject"/>
+      </p:transition>
+    </mc:Choice>
+    <mc:Fallback>
+      <p:transition spd="slow">
+        <p:fade/>
+      </p:transition>
+    </mc:Fallback>
+  </mc:AlternateContent>
+  <p:timing>
+    <p:tnLst>
+      <p:par>
+        <p:cTn id="1" dur="indefinite" restart="never" nodeType="tmRoot">
+          <p:childTnLst>
+            <p:seq concurrent="1" nextAc="seek">
+              <p:cTn id="2" dur="indefinite" nodeType="mainSeq">
+                <p:childTnLst>
+                  <p:par>
+                    <p:cTn id="3" fill="hold">
+                      <p:stCondLst>
+                        <p:cond delay="indefinite"/>
+                        <p:cond evt="onBegin" delay="0">
+                          <p:tn val="2"/>
+                        </p:cond>
+                      </p:stCondLst>
+                      <p:childTnLst>
+                        <p:par>
+                          <p:cTn id="4" fill="hold">
+                            <p:stCondLst>
+                              <p:cond delay="0"/>
+                            </p:stCondLst>
+                            <p:childTnLst>
+                              <p:par>
+                                <p:cTn id="5" presetID="2" presetClass="entr" presetSubtype="1" accel="50000" decel="50000" fill="hold" nodeType="withEffect">
+                                  <p:stCondLst>
+                                    <p:cond delay="180"/>
+                                  </p:stCondLst>
+                                  <p:childTnLst>
+                                    <p:set>
+                                      <p:cBhvr>
+                                        <p:cTn id="6" dur="1" fill="hold">
+                                          <p:stCondLst>
+                                            <p:cond delay="0"/>
+                                          </p:stCondLst>
+                                        </p:cTn>
+                                        <p:tgtEl>
+                                          <p:spTgt spid="18"/>
+                                        </p:tgtEl>
+                                        <p:attrNameLst>
+                                          <p:attrName>style.visibility</p:attrName>
+                                        </p:attrNameLst>
+                                      </p:cBhvr>
+                                      <p:to>
+                                        <p:strVal val="visible"/>
+                                      </p:to>
+                                    </p:set>
+                                    <p:anim calcmode="lin" valueType="num">
+                                      <p:cBhvr additive="base">
+                                        <p:cTn id="7" dur="500" fill="hold"/>
+                                        <p:tgtEl>
+                                          <p:spTgt spid="18"/>
+                                        </p:tgtEl>
+                                        <p:attrNameLst>
+                                          <p:attrName>ppt_x</p:attrName>
+                                        </p:attrNameLst>
+                                      </p:cBhvr>
+                                      <p:tavLst>
+                                        <p:tav tm="0">
+                                          <p:val>
+                                            <p:strVal val="#ppt_x"/>
+                                          </p:val>
+                                        </p:tav>
+                                        <p:tav tm="100000">
+                                          <p:val>
+                                            <p:strVal val="#ppt_x"/>
+                                          </p:val>
+                                        </p:tav>
+                                      </p:tavLst>
+                                    </p:anim>
+                                    <p:anim calcmode="lin" valueType="num">
+                                      <p:cBhvr additive="base">
+                                        <p:cTn id="8" dur="500" fill="hold"/>
+                                        <p:tgtEl>
+                                          <p:spTgt spid="18"/>
+                                        </p:tgtEl>
+                                        <p:attrNameLst>
+                                          <p:attrName>ppt_y</p:attrName>
+                                        </p:attrNameLst>
+                                      </p:cBhvr>
+                                      <p:tavLst>
+                                        <p:tav tm="0">
+                                          <p:val>
+                                            <p:strVal val="0-#ppt_h/2"/>
+                                          </p:val>
+                                        </p:tav>
+                                        <p:tav tm="100000">
+                                          <p:val>
+                                            <p:strVal val="#ppt_y"/>
+                                          </p:val>
+                                        </p:tav>
+                                      </p:tavLst>
+                                    </p:anim>
+                                  </p:childTnLst>
+                                </p:cTn>
+                              </p:par>
+                            </p:childTnLst>
+                          </p:cTn>
+                        </p:par>
+                      </p:childTnLst>
+                    </p:cTn>
+                  </p:par>
+                </p:childTnLst>
+              </p:cTn>
+              <p:prevCondLst>
+                <p:cond evt="onPrev" delay="0">
+                  <p:tgtEl>
+                    <p:sldTgt/>
+                  </p:tgtEl>
+                </p:cond>
+              </p:prevCondLst>
+              <p:nextCondLst>
+                <p:cond evt="onNext" delay="0">
+                  <p:tgtEl>
+                    <p:sldTgt/>
+                  </p:tgtEl>
+                </p:cond>
+              </p:nextCondLst>
+            </p:seq>
+          </p:childTnLst>
+        </p:cTn>
+      </p:par>
+    </p:tnLst>
+  </p:timing>
+</p:sld>
+</file>
+
+<file path=ppt/slides/slide5.xml><?xml version="1.0" encoding="utf-8"?>
+<p:sld xmlns:a="http://schemas.openxmlformats.org/drawingml/2006/main" xmlns:r="http://schemas.openxmlformats.org/officeDocument/2006/relationships" xmlns:p="http://schemas.openxmlformats.org/presentationml/2006/main">
+  <p:cSld>
+    <p:bg>
+      <p:bgPr>
+        <a:solidFill>
+          <a:srgbClr val="F8FAFC"/>
+        </a:solidFill>
+        <a:effectLst/>
+      </p:bgPr>
+    </p:bg>
+    <p:spTree>
+      <p:nvGrpSpPr>
+        <p:cNvPr id="1" name=""/>
+        <p:cNvGrpSpPr/>
+        <p:nvPr/>
+      </p:nvGrpSpPr>
+      <p:grpSpPr>
+        <a:xfrm>
+          <a:off x="0" y="0"/>
+          <a:ext cx="0" cy="0"/>
+          <a:chOff x="0" y="0"/>
+          <a:chExt cx="0" cy="0"/>
+        </a:xfrm>
+      </p:grpSpPr>
+      <p:sp>
+        <p:nvSpPr>
+          <p:cNvPr id="2" name="!!Anchor_Kicker_Rail!!">
+            <a:extLst>
+              <a:ext uri="{FF2B5EF4-FFF2-40B4-BE49-F238E27FC236}">
+                <a16:creationId xmlns:a16="http://schemas.microsoft.com/office/drawing/2014/main" id="{A201434D-AB95-E25F-76F2-FFE5678303CF}"/>
+              </a:ext>
+            </a:extLst>
+          </p:cNvPr>
+          <p:cNvSpPr txBox="1"/>
+          <p:nvPr/>
+        </p:nvSpPr>
+        <p:spPr>
+          <a:xfrm>
+            <a:off x="609600" y="457200"/>
+            <a:ext cx="9956800" cy="276999"/>
+          </a:xfrm>
+          <a:prstGeom prst="rect">
+            <a:avLst/>
+          </a:prstGeom>
+          <a:noFill/>
+        </p:spPr>
+        <p:txBody>
+          <a:bodyPr vert="horz" rtlCol="0">
+            <a:spAutoFit/>
+          </a:bodyPr>
+          <a:lstStyle/>
+          <a:p>
+            <a:r>
+              <a:rPr lang="en-US" sz="1200" b="1">
+                <a:solidFill>
+                  <a:srgbClr val="0284C7"/>
+                </a:solidFill>
+                <a:latin typeface="Segoe UI" panose="020B0502040204020203" pitchFamily="34" charset="0"/>
+              </a:rPr>
+              <a:t>TRẠNG THÁI DÂN SỐ  •  TRỌNG TÂM</a:t>
+            </a:r>
+          </a:p>
+        </p:txBody>
+      </p:sp>
+      <p:sp>
+        <p:nvSpPr>
+          <p:cNvPr id="3" name="!!Anchor_Slide_Tracker!!">
+            <a:extLst>
+              <a:ext uri="{FF2B5EF4-FFF2-40B4-BE49-F238E27FC236}">
+                <a16:creationId xmlns:a16="http://schemas.microsoft.com/office/drawing/2014/main" id="{3ECC6B5A-51B1-E788-969F-741F4E14E3C6}"/>
+              </a:ext>
+            </a:extLst>
+          </p:cNvPr>
+          <p:cNvSpPr txBox="1"/>
+          <p:nvPr/>
+        </p:nvSpPr>
+        <p:spPr>
+          <a:xfrm>
+            <a:off x="10820400" y="457200"/>
+            <a:ext cx="762000" cy="276999"/>
+          </a:xfrm>
+          <a:prstGeom prst="rect">
+            <a:avLst/>
+          </a:prstGeom>
+          <a:noFill/>
+        </p:spPr>
+        <p:txBody>
+          <a:bodyPr vert="horz" rtlCol="0">
+            <a:spAutoFit/>
+          </a:bodyPr>
+          <a:lstStyle/>
+          <a:p>
+            <a:pPr algn="r"/>
+            <a:r>
+              <a:rPr lang="en-US" sz="1200" b="1">
+                <a:solidFill>
+                  <a:srgbClr val="334155"/>
+                </a:solidFill>
+                <a:latin typeface="Bahnschrift" panose="020B0502040204020203" pitchFamily="34" charset="0"/>
+              </a:rPr>
+              <a:t>05 / 14</a:t>
+            </a:r>
+          </a:p>
+        </p:txBody>
+      </p:sp>
+      <p:sp>
+        <p:nvSpPr>
+          <p:cNvPr id="4" name="!!Anchor_Assertion_Title!!">
+            <a:extLst>
+              <a:ext uri="{FF2B5EF4-FFF2-40B4-BE49-F238E27FC236}">
+                <a16:creationId xmlns:a16="http://schemas.microsoft.com/office/drawing/2014/main" id="{3B83A4D9-224B-921C-C356-E6A9A83E3026}"/>
+              </a:ext>
+            </a:extLst>
+          </p:cNvPr>
+          <p:cNvSpPr txBox="1"/>
+          <p:nvPr/>
+        </p:nvSpPr>
+        <p:spPr>
+          <a:xfrm>
+            <a:off x="609600" y="711200"/>
+            <a:ext cx="10972800" cy="369332"/>
+          </a:xfrm>
+          <a:prstGeom prst="rect">
+            <a:avLst/>
+          </a:prstGeom>
+          <a:noFill/>
+        </p:spPr>
+        <p:txBody>
+          <a:bodyPr vert="horz" wrap="square" tIns="0" bIns="0" rtlCol="0">
+            <a:spAutoFit/>
+          </a:bodyPr>
+          <a:lstStyle/>
+          <a:p>
+            <a:r>
+              <a:rPr lang="en-US" sz="2400" b="1">
+                <a:solidFill>
+                  <a:srgbClr val="0F172A"/>
+                </a:solidFill>
+                <a:latin typeface="Segoe UI" panose="020B0502040204020203" pitchFamily="34" charset="0"/>
+              </a:rPr>
+              <a:t>Hai Trạng Thái Tồn Tại Của Dân Số: Trạng Thái Tĩnh Và Trạng Thái Động</a:t>
+            </a:r>
+          </a:p>
+        </p:txBody>
+      </p:sp>
+      <p:grpSp>
+        <p:nvGrpSpPr>
+          <p:cNvPr id="11" name="!!Stage_Hero_Container!!">
+            <a:extLst>
+              <a:ext uri="{FF2B5EF4-FFF2-40B4-BE49-F238E27FC236}">
+                <a16:creationId xmlns:a16="http://schemas.microsoft.com/office/drawing/2014/main" id="{673CE430-6A1D-032F-1A31-389C7F46D434}"/>
+              </a:ext>
+            </a:extLst>
+          </p:cNvPr>
+          <p:cNvGrpSpPr/>
+          <p:nvPr/>
+        </p:nvGrpSpPr>
+        <p:grpSpPr>
+          <a:xfrm>
+            <a:off x="609600" y="1676400"/>
+            <a:ext cx="5334000" cy="4521200"/>
+            <a:chOff x="609600" y="1676400"/>
+            <a:chExt cx="5334000" cy="4521200"/>
+          </a:xfrm>
+        </p:grpSpPr>
+        <p:sp>
+          <p:nvSpPr>
+            <p:cNvPr id="5" name="Rectangle: Rounded Corners 4">
+              <a:extLst>
+                <a:ext uri="{FF2B5EF4-FFF2-40B4-BE49-F238E27FC236}">
+                  <a16:creationId xmlns:a16="http://schemas.microsoft.com/office/drawing/2014/main" id="{8A78A52A-A4C5-57DD-688E-92A463170916}"/>
+                </a:ext>
+              </a:extLst>
+            </p:cNvPr>
+            <p:cNvSpPr/>
+            <p:nvPr/>
+          </p:nvSpPr>
+          <p:spPr>
+            <a:xfrm>
+              <a:off x="609600" y="1676400"/>
+              <a:ext cx="5334000" cy="4521200"/>
+            </a:xfrm>
+            <a:prstGeom prst="roundRect">
+              <a:avLst/>
+            </a:prstGeom>
+            <a:solidFill>
+              <a:srgbClr val="FFFFFF"/>
+            </a:solidFill>
+            <a:ln w="12700">
+              <a:solidFill>
+                <a:srgbClr val="CBD5E1"/>
+              </a:solidFill>
+            </a:ln>
+          </p:spPr>
+          <p:style>
+            <a:lnRef idx="2">
+              <a:schemeClr val="accent1">
+                <a:shade val="15000"/>
+              </a:schemeClr>
+            </a:lnRef>
+            <a:fillRef idx="1">
+              <a:schemeClr val="accent1"/>
+            </a:fillRef>
+            <a:effectRef idx="0">
+              <a:schemeClr val="accent1"/>
+            </a:effectRef>
+            <a:fontRef idx="minor">
+              <a:schemeClr val="lt1"/>
+            </a:fontRef>
+          </p:style>
+          <p:txBody>
+            <a:bodyPr rtlCol="0" anchor="ctr"/>
+            <a:lstStyle/>
+            <a:p>
+              <a:pPr algn="ctr"/>
+              <a:endParaRPr lang="en-US"/>
+            </a:p>
+          </p:txBody>
+        </p:sp>
+        <p:sp>
+          <p:nvSpPr>
+            <p:cNvPr id="6" name="Rectangle: Rounded Corners 5">
+              <a:extLst>
+                <a:ext uri="{FF2B5EF4-FFF2-40B4-BE49-F238E27FC236}">
+                  <a16:creationId xmlns:a16="http://schemas.microsoft.com/office/drawing/2014/main" id="{30E5CD2A-02EF-C9B8-7460-4705F21AF299}"/>
+                </a:ext>
+              </a:extLst>
+            </p:cNvPr>
+            <p:cNvSpPr/>
+            <p:nvPr/>
+          </p:nvSpPr>
+          <p:spPr>
+            <a:xfrm>
+              <a:off x="863600" y="1905000"/>
+              <a:ext cx="1397000" cy="279400"/>
+            </a:xfrm>
+            <a:prstGeom prst="roundRect">
+              <a:avLst/>
+            </a:prstGeom>
+            <a:solidFill>
+              <a:srgbClr val="E0F2FE"/>
+            </a:solidFill>
+            <a:ln w="12700" cap="flat" cmpd="sng" algn="ctr">
+              <a:noFill/>
+              <a:prstDash val="solid"/>
+              <a:miter lim="800000"/>
+            </a:ln>
+            <a:effectLst/>
+            <a:extLst>
+              <a:ext uri="{91240B29-F687-4F45-9708-019B960494DF}">
+                <a14:hiddenLine xmlns:a14="http://schemas.microsoft.com/office/drawing/2010/main" w="12700" cap="flat" cmpd="sng" algn="ctr">
+                  <a:solidFill>
+                    <a:schemeClr val="accent1">
+                      <a:shade val="15000"/>
+                    </a:schemeClr>
+                  </a:solidFill>
+                  <a:prstDash val="solid"/>
+                  <a:miter lim="800000"/>
+                </a14:hiddenLine>
+              </a:ext>
+            </a:extLst>
+          </p:spPr>
+          <p:style>
+            <a:lnRef idx="2">
+              <a:schemeClr val="accent1">
+                <a:shade val="15000"/>
+              </a:schemeClr>
+            </a:lnRef>
+            <a:fillRef idx="1">
+              <a:schemeClr val="accent1"/>
+            </a:fillRef>
+            <a:effectRef idx="0">
+              <a:schemeClr val="accent1"/>
+            </a:effectRef>
+            <a:fontRef idx="minor">
+              <a:schemeClr val="lt1"/>
+            </a:fontRef>
+          </p:style>
+          <p:txBody>
+            <a:bodyPr rtlCol="0" anchor="ctr"/>
+            <a:lstStyle/>
+            <a:p>
+              <a:pPr algn="ctr"/>
+              <a:r>
+                <a:rPr lang="en-US" sz="900" b="1">
+                  <a:solidFill>
+                    <a:srgbClr val="0284C7"/>
+                  </a:solidFill>
+                  <a:latin typeface="Segoe UI" panose="020B0502040204020203" pitchFamily="34" charset="0"/>
+                </a:rPr>
+                <a:t>TIÊU CHÍ SO SÁNH</a:t>
+              </a:r>
+            </a:p>
+          </p:txBody>
+        </p:sp>
+        <p:sp>
+          <p:nvSpPr>
+            <p:cNvPr id="7" name="Oval 6">
+              <a:extLst>
+                <a:ext uri="{FF2B5EF4-FFF2-40B4-BE49-F238E27FC236}">
+                  <a16:creationId xmlns:a16="http://schemas.microsoft.com/office/drawing/2014/main" id="{81433C63-4C8B-6033-0A5E-2CEA130734A3}"/>
+                </a:ext>
+              </a:extLst>
+            </p:cNvPr>
+            <p:cNvSpPr/>
+            <p:nvPr/>
+          </p:nvSpPr>
+          <p:spPr>
+            <a:xfrm>
+              <a:off x="863600" y="2260600"/>
+              <a:ext cx="457200" cy="457200"/>
+            </a:xfrm>
+            <a:prstGeom prst="ellipse">
+              <a:avLst/>
+            </a:prstGeom>
+            <a:solidFill>
+              <a:srgbClr val="E0F2FE"/>
+            </a:solidFill>
+            <a:ln w="12700" cap="flat" cmpd="sng" algn="ctr">
+              <a:noFill/>
+              <a:prstDash val="solid"/>
+              <a:miter lim="800000"/>
+            </a:ln>
+            <a:effectLst/>
+            <a:extLst>
+              <a:ext uri="{91240B29-F687-4F45-9708-019B960494DF}">
+                <a14:hiddenLine xmlns:a14="http://schemas.microsoft.com/office/drawing/2010/main" w="12700" cap="flat" cmpd="sng" algn="ctr">
+                  <a:solidFill>
+                    <a:schemeClr val="accent1">
+                      <a:shade val="15000"/>
+                    </a:schemeClr>
+                  </a:solidFill>
+                  <a:prstDash val="solid"/>
+                  <a:miter lim="800000"/>
+                </a14:hiddenLine>
+              </a:ext>
+            </a:extLst>
+          </p:spPr>
+          <p:style>
+            <a:lnRef idx="2">
+              <a:schemeClr val="accent1">
+                <a:shade val="15000"/>
+              </a:schemeClr>
+            </a:lnRef>
+            <a:fillRef idx="1">
+              <a:schemeClr val="accent1"/>
+            </a:fillRef>
+            <a:effectRef idx="0">
+              <a:schemeClr val="accent1"/>
+            </a:effectRef>
+            <a:fontRef idx="minor">
+              <a:schemeClr val="lt1"/>
+            </a:fontRef>
+          </p:style>
+          <p:txBody>
+            <a:bodyPr rtlCol="0" anchor="ctr"/>
+            <a:lstStyle/>
+            <a:p>
+              <a:pPr algn="ctr"/>
+              <a:endParaRPr lang="en-US"/>
+            </a:p>
+          </p:txBody>
+        </p:sp>
+        <p:pic>
+          <p:nvPicPr>
+            <p:cNvPr id="9" name="Graphic 8">
+              <a:extLst>
+                <a:ext uri="{FF2B5EF4-FFF2-40B4-BE49-F238E27FC236}">
+                  <a16:creationId xmlns:a16="http://schemas.microsoft.com/office/drawing/2014/main" id="{B8EC03CB-6D05-73B0-9D7D-447F3EEB453C}"/>
+                </a:ext>
+              </a:extLst>
+            </p:cNvPr>
+            <p:cNvPicPr>
+              <a:picLocks/>
+            </p:cNvPicPr>
+            <p:nvPr/>
+          </p:nvPicPr>
+          <p:blipFill>
+            <a:blip>
+              <a:extLst>
+                <a:ext uri="{96DAC541-7B7A-43D3-8B79-37D633B846F1}">
+                  <asvg:svgBlip xmlns:asvg="http://schemas.microsoft.com/office/drawing/2016/SVG/main" r:embed="rId2"/>
+                </a:ext>
+              </a:extLst>
+            </a:blip>
+            <a:stretch>
+              <a:fillRect/>
+            </a:stretch>
+          </p:blipFill>
+          <p:spPr>
+            <a:xfrm>
+              <a:off x="939800" y="2336800"/>
+              <a:ext cx="304800" cy="304800"/>
+            </a:xfrm>
+            <a:prstGeom prst="rect">
+              <a:avLst/>
+            </a:prstGeom>
+          </p:spPr>
+        </p:pic>
+        <p:sp>
+          <p:nvSpPr>
+            <p:cNvPr id="10" name="TextBox 9">
+              <a:extLst>
+                <a:ext uri="{FF2B5EF4-FFF2-40B4-BE49-F238E27FC236}">
+                  <a16:creationId xmlns:a16="http://schemas.microsoft.com/office/drawing/2014/main" id="{70BFE57C-C8CD-7FAF-0D5F-690FBC7BCCD1}"/>
                 </a:ext>
               </a:extLst>
             </p:cNvPr>
@@ -13740,10 +14400,10 @@
       </p:grpSp>
       <p:grpSp>
         <p:nvGrpSpPr>
-          <p:cNvPr id="18" name="!!Stage_Sub_Card_1">
+          <p:cNvPr id="18" name="!!Stage_Sub_Card_1!!">
             <a:extLst>
               <a:ext uri="{FF2B5EF4-FFF2-40B4-BE49-F238E27FC236}">
-                <a16:creationId xmlns:a16="http://schemas.microsoft.com/office/drawing/2014/main" id="{E0CD107D-B792-FF0E-AE50-549568084D1D}"/>
+                <a16:creationId xmlns:a16="http://schemas.microsoft.com/office/drawing/2014/main" id="{7B023FBC-BE94-1CA9-7302-6A7A38C152B1}"/>
               </a:ext>
             </a:extLst>
           </p:cNvPr>
@@ -13763,7 +14423,7 @@
             <p:cNvPr id="12" name="Rectangle: Rounded Corners 11">
               <a:extLst>
                 <a:ext uri="{FF2B5EF4-FFF2-40B4-BE49-F238E27FC236}">
-                  <a16:creationId xmlns:a16="http://schemas.microsoft.com/office/drawing/2014/main" id="{780ACD5D-6187-D4C0-0C91-82447EDDC039}"/>
+                  <a16:creationId xmlns:a16="http://schemas.microsoft.com/office/drawing/2014/main" id="{C809FBEC-77D2-84AA-0C89-9CC958288542}"/>
                 </a:ext>
               </a:extLst>
             </p:cNvPr>
@@ -13817,7 +14477,7 @@
             <p:cNvPr id="13" name="Rectangle: Rounded Corners 12">
               <a:extLst>
                 <a:ext uri="{FF2B5EF4-FFF2-40B4-BE49-F238E27FC236}">
-                  <a16:creationId xmlns:a16="http://schemas.microsoft.com/office/drawing/2014/main" id="{8E6C03F1-B86D-064C-86DC-C6D7E92603D8}"/>
+                  <a16:creationId xmlns:a16="http://schemas.microsoft.com/office/drawing/2014/main" id="{A6F9A0CC-88F4-8AE1-B32B-C95C9AD6755D}"/>
                 </a:ext>
               </a:extLst>
             </p:cNvPr>
@@ -13899,7 +14559,7 @@
             <p:cNvPr id="14" name="Oval 13">
               <a:extLst>
                 <a:ext uri="{FF2B5EF4-FFF2-40B4-BE49-F238E27FC236}">
-                  <a16:creationId xmlns:a16="http://schemas.microsoft.com/office/drawing/2014/main" id="{52715E40-605E-F8CC-64DF-BFA101C4CF28}"/>
+                  <a16:creationId xmlns:a16="http://schemas.microsoft.com/office/drawing/2014/main" id="{DF669A5A-94BA-6E02-4708-67FCBAABBE27}"/>
                 </a:ext>
               </a:extLst>
             </p:cNvPr>
@@ -13967,7 +14627,7 @@
             <p:cNvPr id="16" name="Graphic 15">
               <a:extLst>
                 <a:ext uri="{FF2B5EF4-FFF2-40B4-BE49-F238E27FC236}">
-                  <a16:creationId xmlns:a16="http://schemas.microsoft.com/office/drawing/2014/main" id="{CE401594-B17C-721F-3E25-5B64E36C6D8B}"/>
+                  <a16:creationId xmlns:a16="http://schemas.microsoft.com/office/drawing/2014/main" id="{1DC4E1E6-8806-1075-723D-A654E998E99B}"/>
                 </a:ext>
               </a:extLst>
             </p:cNvPr>
@@ -14003,7 +14663,7 @@
             <p:cNvPr id="17" name="TextBox 16">
               <a:extLst>
                 <a:ext uri="{FF2B5EF4-FFF2-40B4-BE49-F238E27FC236}">
-                  <a16:creationId xmlns:a16="http://schemas.microsoft.com/office/drawing/2014/main" id="{31EEDE57-ED74-CEF5-FCCF-F1B45E2280B8}"/>
+                  <a16:creationId xmlns:a16="http://schemas.microsoft.com/office/drawing/2014/main" id="{BF1EEBEC-AEB1-0FBC-E77E-43FB1B2FD703}"/>
                 </a:ext>
               </a:extLst>
             </p:cNvPr>
@@ -14065,10 +14725,10 @@
       </p:grpSp>
       <p:sp>
         <p:nvSpPr>
-          <p:cNvPr id="19" name="!!Anchor_Source_Footer">
+          <p:cNvPr id="19" name="!!Anchor_Source_Footer!!">
             <a:extLst>
               <a:ext uri="{FF2B5EF4-FFF2-40B4-BE49-F238E27FC236}">
-                <a16:creationId xmlns:a16="http://schemas.microsoft.com/office/drawing/2014/main" id="{D261EADD-44DB-E32D-8ED5-2CC60D8C85EB}"/>
+                <a16:creationId xmlns:a16="http://schemas.microsoft.com/office/drawing/2014/main" id="{3A7EB222-F35E-049C-039D-F57B05D09605}"/>
               </a:ext>
             </a:extLst>
           </p:cNvPr>
@@ -14112,7 +14772,7 @@
     </p:spTree>
     <p:extLst>
       <p:ext uri="{BB962C8B-B14F-4D97-AF65-F5344CB8AC3E}">
-        <p14:creationId xmlns:p14="http://schemas.microsoft.com/office/powerpoint/2010/main" val="1702419764"/>
+        <p14:creationId xmlns:p14="http://schemas.microsoft.com/office/powerpoint/2010/main" val="2212783729"/>
       </p:ext>
     </p:extLst>
   </p:cSld>
@@ -14143,6 +14803,9 @@
                     <p:cTn id="3" fill="hold">
                       <p:stCondLst>
                         <p:cond delay="indefinite"/>
+                        <p:cond evt="onBegin" delay="0">
+                          <p:tn val="2"/>
+                        </p:cond>
                       </p:stCondLst>
                       <p:childTnLst>
                         <p:par>
@@ -14152,9 +14815,9 @@
                             </p:stCondLst>
                             <p:childTnLst>
                               <p:par>
-                                <p:cTn id="5" presetID="2" presetClass="entr" presetSubtype="4" accel="50000" decel="50000" fill="hold" nodeType="clickEffect">
+                                <p:cTn id="5" presetID="2" presetClass="entr" presetSubtype="1" accel="50000" decel="50000" fill="hold" nodeType="withEffect">
                                   <p:stCondLst>
-                                    <p:cond delay="0"/>
+                                    <p:cond delay="180"/>
                                   </p:stCondLst>
                                   <p:childTnLst>
                                     <p:set>
@@ -14211,7 +14874,7 @@
                                       <p:tavLst>
                                         <p:tav tm="0">
                                           <p:val>
-                                            <p:strVal val="1+#ppt_h/2"/>
+                                            <p:strVal val="0-#ppt_h/2"/>
                                           </p:val>
                                         </p:tav>
                                         <p:tav tm="100000">
@@ -14282,10 +14945,10 @@
       </p:grpSpPr>
       <p:sp>
         <p:nvSpPr>
-          <p:cNvPr id="2" name="!!Anchor_Kicker_Rail">
+          <p:cNvPr id="2" name="!!Anchor_Kicker_Rail!!">
             <a:extLst>
               <a:ext uri="{FF2B5EF4-FFF2-40B4-BE49-F238E27FC236}">
-                <a16:creationId xmlns:a16="http://schemas.microsoft.com/office/drawing/2014/main" id="{D8FB8309-1AB5-C498-16D9-48BDF33399F6}"/>
+                <a16:creationId xmlns:a16="http://schemas.microsoft.com/office/drawing/2014/main" id="{5C422F7F-2351-9CDA-19C7-B7177A4F305C}"/>
               </a:ext>
             </a:extLst>
           </p:cNvPr>
@@ -14322,10 +14985,10 @@
       </p:sp>
       <p:sp>
         <p:nvSpPr>
-          <p:cNvPr id="3" name="!!Anchor_Slide_Tracker">
+          <p:cNvPr id="3" name="!!Anchor_Slide_Tracker!!">
             <a:extLst>
               <a:ext uri="{FF2B5EF4-FFF2-40B4-BE49-F238E27FC236}">
-                <a16:creationId xmlns:a16="http://schemas.microsoft.com/office/drawing/2014/main" id="{49FD37A6-7D77-16EA-0FC9-03D5B2875919}"/>
+                <a16:creationId xmlns:a16="http://schemas.microsoft.com/office/drawing/2014/main" id="{6477CFB9-6E58-F50C-D20D-33535795DD89}"/>
               </a:ext>
             </a:extLst>
           </p:cNvPr>
@@ -14363,10 +15026,10 @@
       </p:sp>
       <p:sp>
         <p:nvSpPr>
-          <p:cNvPr id="4" name="!!Anchor_Assertion_Title">
+          <p:cNvPr id="4" name="!!Anchor_Assertion_Title!!">
             <a:extLst>
               <a:ext uri="{FF2B5EF4-FFF2-40B4-BE49-F238E27FC236}">
-                <a16:creationId xmlns:a16="http://schemas.microsoft.com/office/drawing/2014/main" id="{57BB2237-30EE-5687-890A-9168D32BC05A}"/>
+                <a16:creationId xmlns:a16="http://schemas.microsoft.com/office/drawing/2014/main" id="{A25782AB-DF50-3EA4-6774-D2C813CC78D5}"/>
               </a:ext>
             </a:extLst>
           </p:cNvPr>
@@ -14409,10 +15072,10 @@
       </p:sp>
       <p:pic>
         <p:nvPicPr>
-          <p:cNvPr id="6" name="!!Stage_Hero_Container">
+          <p:cNvPr id="6" name="!!Stage_Hero_Container!!">
             <a:extLst>
               <a:ext uri="{FF2B5EF4-FFF2-40B4-BE49-F238E27FC236}">
-                <a16:creationId xmlns:a16="http://schemas.microsoft.com/office/drawing/2014/main" id="{654DA0FB-4DA4-5B93-F546-645A63EFD4DF}"/>
+                <a16:creationId xmlns:a16="http://schemas.microsoft.com/office/drawing/2014/main" id="{51EE78F5-84E8-8D58-5B38-ECE24C73CAFD}"/>
               </a:ext>
             </a:extLst>
           </p:cNvPr>
@@ -14450,10 +15113,10 @@
       </p:pic>
       <p:grpSp>
         <p:nvGrpSpPr>
-          <p:cNvPr id="12" name="!!Stage_Sub_Card_1">
+          <p:cNvPr id="12" name="!!Stage_Sub_Card_1!!">
             <a:extLst>
               <a:ext uri="{FF2B5EF4-FFF2-40B4-BE49-F238E27FC236}">
-                <a16:creationId xmlns:a16="http://schemas.microsoft.com/office/drawing/2014/main" id="{0810734B-62BA-3EDD-136A-C5B9C79AF1FC}"/>
+                <a16:creationId xmlns:a16="http://schemas.microsoft.com/office/drawing/2014/main" id="{21221062-BBCA-9622-2DF9-CC06BBF1643F}"/>
               </a:ext>
             </a:extLst>
           </p:cNvPr>
@@ -14473,7 +15136,7 @@
             <p:cNvPr id="7" name="Rectangle: Rounded Corners 6">
               <a:extLst>
                 <a:ext uri="{FF2B5EF4-FFF2-40B4-BE49-F238E27FC236}">
-                  <a16:creationId xmlns:a16="http://schemas.microsoft.com/office/drawing/2014/main" id="{006E50B1-76D7-BFC1-A6F6-E405B73A019D}"/>
+                  <a16:creationId xmlns:a16="http://schemas.microsoft.com/office/drawing/2014/main" id="{73BC5CF1-A01D-580B-57BE-242C32A6F02D}"/>
                 </a:ext>
               </a:extLst>
             </p:cNvPr>
@@ -14527,7 +15190,7 @@
             <p:cNvPr id="8" name="Oval 7">
               <a:extLst>
                 <a:ext uri="{FF2B5EF4-FFF2-40B4-BE49-F238E27FC236}">
-                  <a16:creationId xmlns:a16="http://schemas.microsoft.com/office/drawing/2014/main" id="{D039E1FB-02CD-4741-EDFF-C4A55F490AB6}"/>
+                  <a16:creationId xmlns:a16="http://schemas.microsoft.com/office/drawing/2014/main" id="{CF6DE051-1E14-BEA2-5B6E-1232178A2705}"/>
                 </a:ext>
               </a:extLst>
             </p:cNvPr>
@@ -14595,7 +15258,7 @@
             <p:cNvPr id="10" name="Graphic 9">
               <a:extLst>
                 <a:ext uri="{FF2B5EF4-FFF2-40B4-BE49-F238E27FC236}">
-                  <a16:creationId xmlns:a16="http://schemas.microsoft.com/office/drawing/2014/main" id="{D3F28913-3E88-56E8-49B0-CC398EAB82C0}"/>
+                  <a16:creationId xmlns:a16="http://schemas.microsoft.com/office/drawing/2014/main" id="{71034395-3964-FBA5-62A1-39F27CB90503}"/>
                 </a:ext>
               </a:extLst>
             </p:cNvPr>
@@ -14631,7 +15294,7 @@
             <p:cNvPr id="11" name="TextBox 10">
               <a:extLst>
                 <a:ext uri="{FF2B5EF4-FFF2-40B4-BE49-F238E27FC236}">
-                  <a16:creationId xmlns:a16="http://schemas.microsoft.com/office/drawing/2014/main" id="{8B35AF6F-31C1-D6BF-BF56-DCFD8BC1A2BC}"/>
+                  <a16:creationId xmlns:a16="http://schemas.microsoft.com/office/drawing/2014/main" id="{62B7DBDE-C7B7-F6F0-355F-9C759D3E7F16}"/>
                 </a:ext>
               </a:extLst>
             </p:cNvPr>
@@ -14690,10 +15353,10 @@
       </p:grpSp>
       <p:grpSp>
         <p:nvGrpSpPr>
-          <p:cNvPr id="18" name="!!Stage_Sub_Card_2">
+          <p:cNvPr id="18" name="!!Stage_Sub_Card_2!!">
             <a:extLst>
               <a:ext uri="{FF2B5EF4-FFF2-40B4-BE49-F238E27FC236}">
-                <a16:creationId xmlns:a16="http://schemas.microsoft.com/office/drawing/2014/main" id="{52BEB266-0B86-D4C7-36A7-EFA5B4A0314C}"/>
+                <a16:creationId xmlns:a16="http://schemas.microsoft.com/office/drawing/2014/main" id="{F8558EF8-3D2A-9A7B-4C33-744EE1496596}"/>
               </a:ext>
             </a:extLst>
           </p:cNvPr>
@@ -14713,7 +15376,7 @@
             <p:cNvPr id="13" name="Rectangle: Rounded Corners 12">
               <a:extLst>
                 <a:ext uri="{FF2B5EF4-FFF2-40B4-BE49-F238E27FC236}">
-                  <a16:creationId xmlns:a16="http://schemas.microsoft.com/office/drawing/2014/main" id="{0014A058-737A-333F-C64B-48FF4EA48A97}"/>
+                  <a16:creationId xmlns:a16="http://schemas.microsoft.com/office/drawing/2014/main" id="{8F7A1392-982F-309E-46A5-138093E9E0C4}"/>
                 </a:ext>
               </a:extLst>
             </p:cNvPr>
@@ -14767,7 +15430,7 @@
             <p:cNvPr id="14" name="Oval 13">
               <a:extLst>
                 <a:ext uri="{FF2B5EF4-FFF2-40B4-BE49-F238E27FC236}">
-                  <a16:creationId xmlns:a16="http://schemas.microsoft.com/office/drawing/2014/main" id="{B5DEF0E7-816D-7302-7759-2BB8516419DB}"/>
+                  <a16:creationId xmlns:a16="http://schemas.microsoft.com/office/drawing/2014/main" id="{AE66A157-43D2-6FD9-FB10-481D9C65791E}"/>
                 </a:ext>
               </a:extLst>
             </p:cNvPr>
@@ -14835,7 +15498,7 @@
             <p:cNvPr id="16" name="Graphic 15">
               <a:extLst>
                 <a:ext uri="{FF2B5EF4-FFF2-40B4-BE49-F238E27FC236}">
-                  <a16:creationId xmlns:a16="http://schemas.microsoft.com/office/drawing/2014/main" id="{3F81370C-32B5-81F4-91BA-1CC46B4BC0D5}"/>
+                  <a16:creationId xmlns:a16="http://schemas.microsoft.com/office/drawing/2014/main" id="{63DF23B1-D4DB-C794-4926-A7529017D629}"/>
                 </a:ext>
               </a:extLst>
             </p:cNvPr>
@@ -14871,7 +15534,7 @@
             <p:cNvPr id="17" name="TextBox 16">
               <a:extLst>
                 <a:ext uri="{FF2B5EF4-FFF2-40B4-BE49-F238E27FC236}">
-                  <a16:creationId xmlns:a16="http://schemas.microsoft.com/office/drawing/2014/main" id="{25BC6AB8-5378-FFB7-EF0A-E61B4624EC3A}"/>
+                  <a16:creationId xmlns:a16="http://schemas.microsoft.com/office/drawing/2014/main" id="{84CE0A43-0122-88C7-8DC7-3FEBAF5CEDA6}"/>
                 </a:ext>
               </a:extLst>
             </p:cNvPr>
@@ -14930,10 +15593,10 @@
       </p:grpSp>
       <p:grpSp>
         <p:nvGrpSpPr>
-          <p:cNvPr id="24" name="!!Stage_Sub_Card_3">
+          <p:cNvPr id="24" name="!!Stage_Sub_Card_3!!">
             <a:extLst>
               <a:ext uri="{FF2B5EF4-FFF2-40B4-BE49-F238E27FC236}">
-                <a16:creationId xmlns:a16="http://schemas.microsoft.com/office/drawing/2014/main" id="{510AA849-D18E-8AD5-7551-36487CB82DBD}"/>
+                <a16:creationId xmlns:a16="http://schemas.microsoft.com/office/drawing/2014/main" id="{EB2A18B3-9D16-80D5-EC02-D1B54680FDE6}"/>
               </a:ext>
             </a:extLst>
           </p:cNvPr>
@@ -14953,7 +15616,7 @@
             <p:cNvPr id="19" name="Rectangle: Rounded Corners 18">
               <a:extLst>
                 <a:ext uri="{FF2B5EF4-FFF2-40B4-BE49-F238E27FC236}">
-                  <a16:creationId xmlns:a16="http://schemas.microsoft.com/office/drawing/2014/main" id="{DD7BE096-FD0C-30A7-F1F9-2594A65E975A}"/>
+                  <a16:creationId xmlns:a16="http://schemas.microsoft.com/office/drawing/2014/main" id="{19987377-AF14-6940-5A47-F6BBFA486904}"/>
                 </a:ext>
               </a:extLst>
             </p:cNvPr>
@@ -15007,7 +15670,7 @@
             <p:cNvPr id="20" name="Oval 19">
               <a:extLst>
                 <a:ext uri="{FF2B5EF4-FFF2-40B4-BE49-F238E27FC236}">
-                  <a16:creationId xmlns:a16="http://schemas.microsoft.com/office/drawing/2014/main" id="{E8DE3036-4D83-F6E5-00ED-D2E94A5D2928}"/>
+                  <a16:creationId xmlns:a16="http://schemas.microsoft.com/office/drawing/2014/main" id="{F697C851-4FA9-0117-44C7-9C11B4D9C17D}"/>
                 </a:ext>
               </a:extLst>
             </p:cNvPr>
@@ -15075,7 +15738,7 @@
             <p:cNvPr id="22" name="Graphic 21">
               <a:extLst>
                 <a:ext uri="{FF2B5EF4-FFF2-40B4-BE49-F238E27FC236}">
-                  <a16:creationId xmlns:a16="http://schemas.microsoft.com/office/drawing/2014/main" id="{061FA382-A978-2961-5151-7496EBE0F181}"/>
+                  <a16:creationId xmlns:a16="http://schemas.microsoft.com/office/drawing/2014/main" id="{83884859-9EE0-B1B6-7EFF-868AB5C74876}"/>
                 </a:ext>
               </a:extLst>
             </p:cNvPr>
@@ -15111,7 +15774,7 @@
             <p:cNvPr id="23" name="TextBox 22">
               <a:extLst>
                 <a:ext uri="{FF2B5EF4-FFF2-40B4-BE49-F238E27FC236}">
-                  <a16:creationId xmlns:a16="http://schemas.microsoft.com/office/drawing/2014/main" id="{AE4BAA58-CB25-2B0D-C06E-4BFF0E22E444}"/>
+                  <a16:creationId xmlns:a16="http://schemas.microsoft.com/office/drawing/2014/main" id="{78639213-D7A8-89B8-A2B3-565613B7F170}"/>
                 </a:ext>
               </a:extLst>
             </p:cNvPr>
@@ -15170,10 +15833,10 @@
       </p:grpSp>
       <p:sp>
         <p:nvSpPr>
-          <p:cNvPr id="25" name="!!Anchor_Source_Footer">
+          <p:cNvPr id="25" name="!!Anchor_Source_Footer!!">
             <a:extLst>
               <a:ext uri="{FF2B5EF4-FFF2-40B4-BE49-F238E27FC236}">
-                <a16:creationId xmlns:a16="http://schemas.microsoft.com/office/drawing/2014/main" id="{2480294F-5EC3-30A2-6947-0F53445368BB}"/>
+                <a16:creationId xmlns:a16="http://schemas.microsoft.com/office/drawing/2014/main" id="{0ECF1BC8-9767-B6F0-B5EF-583E3B8E24C8}"/>
               </a:ext>
             </a:extLst>
           </p:cNvPr>
@@ -15211,7 +15874,7 @@
     </p:spTree>
     <p:extLst>
       <p:ext uri="{BB962C8B-B14F-4D97-AF65-F5344CB8AC3E}">
-        <p14:creationId xmlns:p14="http://schemas.microsoft.com/office/powerpoint/2010/main" val="1464368247"/>
+        <p14:creationId xmlns:p14="http://schemas.microsoft.com/office/powerpoint/2010/main" val="727589070"/>
       </p:ext>
     </p:extLst>
   </p:cSld>
@@ -15242,6 +15905,9 @@
                     <p:cTn id="3" fill="hold">
                       <p:stCondLst>
                         <p:cond delay="indefinite"/>
+                        <p:cond evt="onBegin" delay="0">
+                          <p:tn val="2"/>
+                        </p:cond>
                       </p:stCondLst>
                       <p:childTnLst>
                         <p:par>
@@ -15251,9 +15917,9 @@
                             </p:stCondLst>
                             <p:childTnLst>
                               <p:par>
-                                <p:cTn id="5" presetID="2" presetClass="entr" presetSubtype="4" accel="50000" decel="50000" fill="hold" nodeType="clickEffect">
+                                <p:cTn id="5" presetID="2" presetClass="entr" presetSubtype="1" accel="50000" decel="50000" fill="hold" nodeType="withEffect">
                                   <p:stCondLst>
-                                    <p:cond delay="0"/>
+                                    <p:cond delay="120"/>
                                   </p:stCondLst>
                                   <p:childTnLst>
                                     <p:set>
@@ -15276,7 +15942,7 @@
                                     </p:set>
                                     <p:anim calcmode="lin" valueType="num">
                                       <p:cBhvr additive="base">
-                                        <p:cTn id="7" dur="450" fill="hold"/>
+                                        <p:cTn id="7" dur="500" fill="hold"/>
                                         <p:tgtEl>
                                           <p:spTgt spid="12"/>
                                         </p:tgtEl>
@@ -15299,7 +15965,7 @@
                                     </p:anim>
                                     <p:anim calcmode="lin" valueType="num">
                                       <p:cBhvr additive="base">
-                                        <p:cTn id="8" dur="450" fill="hold"/>
+                                        <p:cTn id="8" dur="500" fill="hold"/>
                                         <p:tgtEl>
                                           <p:spTgt spid="12"/>
                                         </p:tgtEl>
@@ -15310,7 +15976,7 @@
                                       <p:tavLst>
                                         <p:tav tm="0">
                                           <p:val>
-                                            <p:strVal val="1+#ppt_h/2"/>
+                                            <p:strVal val="0-#ppt_h/2"/>
                                           </p:val>
                                         </p:tav>
                                         <p:tav tm="100000">
@@ -15323,33 +15989,15 @@
                                   </p:childTnLst>
                                 </p:cTn>
                               </p:par>
-                            </p:childTnLst>
-                          </p:cTn>
-                        </p:par>
-                      </p:childTnLst>
-                    </p:cTn>
-                  </p:par>
-                  <p:par>
-                    <p:cTn id="9" fill="hold">
-                      <p:stCondLst>
-                        <p:cond delay="indefinite"/>
-                      </p:stCondLst>
-                      <p:childTnLst>
-                        <p:par>
-                          <p:cTn id="10" fill="hold">
-                            <p:stCondLst>
-                              <p:cond delay="0"/>
-                            </p:stCondLst>
-                            <p:childTnLst>
                               <p:par>
-                                <p:cTn id="11" presetID="2" presetClass="entr" presetSubtype="4" accel="50000" decel="50000" fill="hold" nodeType="clickEffect">
+                                <p:cTn id="9" presetID="2" presetClass="entr" presetSubtype="1" accel="50000" decel="50000" fill="hold" nodeType="withEffect">
                                   <p:stCondLst>
-                                    <p:cond delay="0"/>
+                                    <p:cond delay="240"/>
                                   </p:stCondLst>
                                   <p:childTnLst>
                                     <p:set>
                                       <p:cBhvr>
-                                        <p:cTn id="12" dur="1" fill="hold">
+                                        <p:cTn id="10" dur="1" fill="hold">
                                           <p:stCondLst>
                                             <p:cond delay="0"/>
                                           </p:stCondLst>
@@ -15367,7 +16015,7 @@
                                     </p:set>
                                     <p:anim calcmode="lin" valueType="num">
                                       <p:cBhvr additive="base">
-                                        <p:cTn id="13" dur="450" fill="hold"/>
+                                        <p:cTn id="11" dur="500" fill="hold"/>
                                         <p:tgtEl>
                                           <p:spTgt spid="18"/>
                                         </p:tgtEl>
@@ -15390,7 +16038,7 @@
                                     </p:anim>
                                     <p:anim calcmode="lin" valueType="num">
                                       <p:cBhvr additive="base">
-                                        <p:cTn id="14" dur="450" fill="hold"/>
+                                        <p:cTn id="12" dur="500" fill="hold"/>
                                         <p:tgtEl>
                                           <p:spTgt spid="18"/>
                                         </p:tgtEl>
@@ -15401,7 +16049,7 @@
                                       <p:tavLst>
                                         <p:tav tm="0">
                                           <p:val>
-                                            <p:strVal val="1+#ppt_h/2"/>
+                                            <p:strVal val="0-#ppt_h/2"/>
                                           </p:val>
                                         </p:tav>
                                         <p:tav tm="100000">
@@ -15414,33 +16062,15 @@
                                   </p:childTnLst>
                                 </p:cTn>
                               </p:par>
-                            </p:childTnLst>
-                          </p:cTn>
-                        </p:par>
-                      </p:childTnLst>
-                    </p:cTn>
-                  </p:par>
-                  <p:par>
-                    <p:cTn id="15" fill="hold">
-                      <p:stCondLst>
-                        <p:cond delay="indefinite"/>
-                      </p:stCondLst>
-                      <p:childTnLst>
-                        <p:par>
-                          <p:cTn id="16" fill="hold">
-                            <p:stCondLst>
-                              <p:cond delay="0"/>
-                            </p:stCondLst>
-                            <p:childTnLst>
                               <p:par>
-                                <p:cTn id="17" presetID="2" presetClass="entr" presetSubtype="4" accel="50000" decel="50000" fill="hold" nodeType="clickEffect">
+                                <p:cTn id="13" presetID="2" presetClass="entr" presetSubtype="1" accel="50000" decel="50000" fill="hold" nodeType="withEffect">
                                   <p:stCondLst>
-                                    <p:cond delay="0"/>
+                                    <p:cond delay="360"/>
                                   </p:stCondLst>
                                   <p:childTnLst>
                                     <p:set>
                                       <p:cBhvr>
-                                        <p:cTn id="18" dur="1" fill="hold">
+                                        <p:cTn id="14" dur="1" fill="hold">
                                           <p:stCondLst>
                                             <p:cond delay="0"/>
                                           </p:stCondLst>
@@ -15458,7 +16088,7 @@
                                     </p:set>
                                     <p:anim calcmode="lin" valueType="num">
                                       <p:cBhvr additive="base">
-                                        <p:cTn id="19" dur="450" fill="hold"/>
+                                        <p:cTn id="15" dur="500" fill="hold"/>
                                         <p:tgtEl>
                                           <p:spTgt spid="24"/>
                                         </p:tgtEl>
@@ -15481,7 +16111,7 @@
                                     </p:anim>
                                     <p:anim calcmode="lin" valueType="num">
                                       <p:cBhvr additive="base">
-                                        <p:cTn id="20" dur="450" fill="hold"/>
+                                        <p:cTn id="16" dur="500" fill="hold"/>
                                         <p:tgtEl>
                                           <p:spTgt spid="24"/>
                                         </p:tgtEl>
@@ -15492,7 +16122,7 @@
                                       <p:tavLst>
                                         <p:tav tm="0">
                                           <p:val>
-                                            <p:strVal val="1+#ppt_h/2"/>
+                                            <p:strVal val="0-#ppt_h/2"/>
                                           </p:val>
                                         </p:tav>
                                         <p:tav tm="100000">
@@ -15563,10 +16193,10 @@
       </p:grpSpPr>
       <p:sp>
         <p:nvSpPr>
-          <p:cNvPr id="2" name="!!Anchor_Kicker_Rail">
+          <p:cNvPr id="2" name="!!Anchor_Kicker_Rail!!">
             <a:extLst>
               <a:ext uri="{FF2B5EF4-FFF2-40B4-BE49-F238E27FC236}">
-                <a16:creationId xmlns:a16="http://schemas.microsoft.com/office/drawing/2014/main" id="{C2581085-DEC7-84E7-2076-5D5056100CE7}"/>
+                <a16:creationId xmlns:a16="http://schemas.microsoft.com/office/drawing/2014/main" id="{3F40826C-1258-CCA4-FD2D-FC7A0E9D3A16}"/>
               </a:ext>
             </a:extLst>
           </p:cNvPr>
@@ -15603,10 +16233,10 @@
       </p:sp>
       <p:sp>
         <p:nvSpPr>
-          <p:cNvPr id="3" name="!!Anchor_Slide_Tracker">
+          <p:cNvPr id="3" name="!!Anchor_Slide_Tracker!!">
             <a:extLst>
               <a:ext uri="{FF2B5EF4-FFF2-40B4-BE49-F238E27FC236}">
-                <a16:creationId xmlns:a16="http://schemas.microsoft.com/office/drawing/2014/main" id="{12EAE164-65E6-3E6A-51DB-576406CB63EC}"/>
+                <a16:creationId xmlns:a16="http://schemas.microsoft.com/office/drawing/2014/main" id="{585D37E6-FCCE-0C48-F429-71D06E85C371}"/>
               </a:ext>
             </a:extLst>
           </p:cNvPr>
@@ -15644,10 +16274,10 @@
       </p:sp>
       <p:sp>
         <p:nvSpPr>
-          <p:cNvPr id="4" name="!!Anchor_Assertion_Title">
+          <p:cNvPr id="4" name="!!Anchor_Assertion_Title!!">
             <a:extLst>
               <a:ext uri="{FF2B5EF4-FFF2-40B4-BE49-F238E27FC236}">
-                <a16:creationId xmlns:a16="http://schemas.microsoft.com/office/drawing/2014/main" id="{88AA401D-116D-010E-693A-C308D9268DAE}"/>
+                <a16:creationId xmlns:a16="http://schemas.microsoft.com/office/drawing/2014/main" id="{8909E02D-F370-ACD2-B3BE-A3CD67F011D1}"/>
               </a:ext>
             </a:extLst>
           </p:cNvPr>
@@ -15684,10 +16314,10 @@
       </p:sp>
       <p:grpSp>
         <p:nvGrpSpPr>
-          <p:cNvPr id="11" name="!!Stage_Hero_Container">
+          <p:cNvPr id="11" name="!!Stage_Hero_Container!!">
             <a:extLst>
               <a:ext uri="{FF2B5EF4-FFF2-40B4-BE49-F238E27FC236}">
-                <a16:creationId xmlns:a16="http://schemas.microsoft.com/office/drawing/2014/main" id="{0E56925B-6027-B1F3-9217-967F91E79E27}"/>
+                <a16:creationId xmlns:a16="http://schemas.microsoft.com/office/drawing/2014/main" id="{ED99FEDD-D9C0-1301-B4B3-DEC89CF4C035}"/>
               </a:ext>
             </a:extLst>
           </p:cNvPr>
@@ -15707,7 +16337,7 @@
             <p:cNvPr id="5" name="Rectangle: Rounded Corners 4">
               <a:extLst>
                 <a:ext uri="{FF2B5EF4-FFF2-40B4-BE49-F238E27FC236}">
-                  <a16:creationId xmlns:a16="http://schemas.microsoft.com/office/drawing/2014/main" id="{6E249F68-ABEC-FED1-0BFD-BCC4343CBADF}"/>
+                  <a16:creationId xmlns:a16="http://schemas.microsoft.com/office/drawing/2014/main" id="{8E8A863E-881E-16FB-7504-698A706133C8}"/>
                 </a:ext>
               </a:extLst>
             </p:cNvPr>
@@ -15761,7 +16391,7 @@
             <p:cNvPr id="6" name="Rectangle: Rounded Corners 5">
               <a:extLst>
                 <a:ext uri="{FF2B5EF4-FFF2-40B4-BE49-F238E27FC236}">
-                  <a16:creationId xmlns:a16="http://schemas.microsoft.com/office/drawing/2014/main" id="{62D20B3D-9DA0-64C3-E774-6382DF7355EA}"/>
+                  <a16:creationId xmlns:a16="http://schemas.microsoft.com/office/drawing/2014/main" id="{C09C633D-9A1C-23A2-F478-ABF5DCCAC09F}"/>
                 </a:ext>
               </a:extLst>
             </p:cNvPr>
@@ -15837,7 +16467,7 @@
             <p:cNvPr id="7" name="Oval 6">
               <a:extLst>
                 <a:ext uri="{FF2B5EF4-FFF2-40B4-BE49-F238E27FC236}">
-                  <a16:creationId xmlns:a16="http://schemas.microsoft.com/office/drawing/2014/main" id="{77AD3559-6324-B72C-5DBB-23AB57DE07AD}"/>
+                  <a16:creationId xmlns:a16="http://schemas.microsoft.com/office/drawing/2014/main" id="{56A206DE-22F3-8233-02DD-6424553E29FB}"/>
                 </a:ext>
               </a:extLst>
             </p:cNvPr>
@@ -15905,7 +16535,7 @@
             <p:cNvPr id="9" name="Graphic 8">
               <a:extLst>
                 <a:ext uri="{FF2B5EF4-FFF2-40B4-BE49-F238E27FC236}">
-                  <a16:creationId xmlns:a16="http://schemas.microsoft.com/office/drawing/2014/main" id="{2022153F-FA2E-14D7-A21C-7BA9B8260464}"/>
+                  <a16:creationId xmlns:a16="http://schemas.microsoft.com/office/drawing/2014/main" id="{CEEE11F0-CF1B-2D2E-B8E5-009D20F79BAE}"/>
                 </a:ext>
               </a:extLst>
             </p:cNvPr>
@@ -15941,7 +16571,7 @@
             <p:cNvPr id="10" name="TextBox 9">
               <a:extLst>
                 <a:ext uri="{FF2B5EF4-FFF2-40B4-BE49-F238E27FC236}">
-                  <a16:creationId xmlns:a16="http://schemas.microsoft.com/office/drawing/2014/main" id="{9D3D28B4-B158-0E6A-5AD8-1E1F4FD3DE4D}"/>
+                  <a16:creationId xmlns:a16="http://schemas.microsoft.com/office/drawing/2014/main" id="{5E2925FA-0629-9397-DCA8-1A6F79E1EA49}"/>
                 </a:ext>
               </a:extLst>
             </p:cNvPr>
@@ -16003,10 +16633,10 @@
       </p:grpSp>
       <p:grpSp>
         <p:nvGrpSpPr>
-          <p:cNvPr id="18" name="!!Stage_Sub_Card_1">
+          <p:cNvPr id="18" name="!!Stage_Sub_Card_1!!">
             <a:extLst>
               <a:ext uri="{FF2B5EF4-FFF2-40B4-BE49-F238E27FC236}">
-                <a16:creationId xmlns:a16="http://schemas.microsoft.com/office/drawing/2014/main" id="{A1F2C598-3AB1-01A8-2C5D-1A73C0DF83FA}"/>
+                <a16:creationId xmlns:a16="http://schemas.microsoft.com/office/drawing/2014/main" id="{D4E1D673-5835-5517-2F35-2176BB28A34B}"/>
               </a:ext>
             </a:extLst>
           </p:cNvPr>
@@ -16026,7 +16656,7 @@
             <p:cNvPr id="12" name="Rectangle: Rounded Corners 11">
               <a:extLst>
                 <a:ext uri="{FF2B5EF4-FFF2-40B4-BE49-F238E27FC236}">
-                  <a16:creationId xmlns:a16="http://schemas.microsoft.com/office/drawing/2014/main" id="{360FBAD9-DEB5-42C9-4953-2A63113E677C}"/>
+                  <a16:creationId xmlns:a16="http://schemas.microsoft.com/office/drawing/2014/main" id="{D0AEFB6E-DAC4-E52A-846C-1C3185737B0B}"/>
                 </a:ext>
               </a:extLst>
             </p:cNvPr>
@@ -16080,7 +16710,7 @@
             <p:cNvPr id="13" name="Rectangle: Rounded Corners 12">
               <a:extLst>
                 <a:ext uri="{FF2B5EF4-FFF2-40B4-BE49-F238E27FC236}">
-                  <a16:creationId xmlns:a16="http://schemas.microsoft.com/office/drawing/2014/main" id="{9465E5BF-4C18-4077-F29F-8E29E0DE6E18}"/>
+                  <a16:creationId xmlns:a16="http://schemas.microsoft.com/office/drawing/2014/main" id="{E5371014-F278-7160-5022-FFFBF3B7C0F3}"/>
                 </a:ext>
               </a:extLst>
             </p:cNvPr>
@@ -16162,7 +16792,7 @@
             <p:cNvPr id="14" name="Oval 13">
               <a:extLst>
                 <a:ext uri="{FF2B5EF4-FFF2-40B4-BE49-F238E27FC236}">
-                  <a16:creationId xmlns:a16="http://schemas.microsoft.com/office/drawing/2014/main" id="{D40B829D-3A56-731F-5105-9A9392384C51}"/>
+                  <a16:creationId xmlns:a16="http://schemas.microsoft.com/office/drawing/2014/main" id="{CC8099DD-2627-0152-1FD8-E4747B623697}"/>
                 </a:ext>
               </a:extLst>
             </p:cNvPr>
@@ -16230,7 +16860,7 @@
             <p:cNvPr id="16" name="Graphic 15">
               <a:extLst>
                 <a:ext uri="{FF2B5EF4-FFF2-40B4-BE49-F238E27FC236}">
-                  <a16:creationId xmlns:a16="http://schemas.microsoft.com/office/drawing/2014/main" id="{5561BEFD-1428-A054-E9E2-EEE0D30DE3C8}"/>
+                  <a16:creationId xmlns:a16="http://schemas.microsoft.com/office/drawing/2014/main" id="{A65AF75F-CD91-4804-CF06-9B10542AAFE0}"/>
                 </a:ext>
               </a:extLst>
             </p:cNvPr>
@@ -16266,7 +16896,7 @@
             <p:cNvPr id="17" name="TextBox 16">
               <a:extLst>
                 <a:ext uri="{FF2B5EF4-FFF2-40B4-BE49-F238E27FC236}">
-                  <a16:creationId xmlns:a16="http://schemas.microsoft.com/office/drawing/2014/main" id="{5D8F7B8A-3F20-8860-5ADE-809831C46C1A}"/>
+                  <a16:creationId xmlns:a16="http://schemas.microsoft.com/office/drawing/2014/main" id="{6DEB3263-5A58-9854-4B6C-0C90EA8BEFB7}"/>
                 </a:ext>
               </a:extLst>
             </p:cNvPr>
@@ -16328,10 +16958,10 @@
       </p:grpSp>
       <p:sp>
         <p:nvSpPr>
-          <p:cNvPr id="19" name="!!Anchor_Source_Footer">
+          <p:cNvPr id="19" name="!!Anchor_Source_Footer!!">
             <a:extLst>
               <a:ext uri="{FF2B5EF4-FFF2-40B4-BE49-F238E27FC236}">
-                <a16:creationId xmlns:a16="http://schemas.microsoft.com/office/drawing/2014/main" id="{203BEACE-EBB4-BD66-7241-41354B942DA5}"/>
+                <a16:creationId xmlns:a16="http://schemas.microsoft.com/office/drawing/2014/main" id="{6C05DDAB-250A-AFEB-D1A6-6BBFEC9A1983}"/>
               </a:ext>
             </a:extLst>
           </p:cNvPr>
@@ -16375,7 +17005,7 @@
     </p:spTree>
     <p:extLst>
       <p:ext uri="{BB962C8B-B14F-4D97-AF65-F5344CB8AC3E}">
-        <p14:creationId xmlns:p14="http://schemas.microsoft.com/office/powerpoint/2010/main" val="2748492922"/>
+        <p14:creationId xmlns:p14="http://schemas.microsoft.com/office/powerpoint/2010/main" val="2982302298"/>
       </p:ext>
     </p:extLst>
   </p:cSld>
@@ -16406,6 +17036,9 @@
                     <p:cTn id="3" fill="hold">
                       <p:stCondLst>
                         <p:cond delay="indefinite"/>
+                        <p:cond evt="onBegin" delay="0">
+                          <p:tn val="2"/>
+                        </p:cond>
                       </p:stCondLst>
                       <p:childTnLst>
                         <p:par>
@@ -16415,9 +17048,9 @@
                             </p:stCondLst>
                             <p:childTnLst>
                               <p:par>
-                                <p:cTn id="5" presetID="2" presetClass="entr" presetSubtype="4" accel="50000" decel="50000" fill="hold" nodeType="clickEffect">
+                                <p:cTn id="5" presetID="2" presetClass="entr" presetSubtype="1" accel="50000" decel="50000" fill="hold" nodeType="withEffect">
                                   <p:stCondLst>
-                                    <p:cond delay="0"/>
+                                    <p:cond delay="180"/>
                                   </p:stCondLst>
                                   <p:childTnLst>
                                     <p:set>
@@ -16474,7 +17107,7 @@
                                       <p:tavLst>
                                         <p:tav tm="0">
                                           <p:val>
-                                            <p:strVal val="1+#ppt_h/2"/>
+                                            <p:strVal val="0-#ppt_h/2"/>
                                           </p:val>
                                         </p:tav>
                                         <p:tav tm="100000">
@@ -16545,10 +17178,10 @@
       </p:grpSpPr>
       <p:sp>
         <p:nvSpPr>
-          <p:cNvPr id="2" name="!!Anchor_Kicker_Rail">
+          <p:cNvPr id="2" name="!!Anchor_Kicker_Rail!!">
             <a:extLst>
               <a:ext uri="{FF2B5EF4-FFF2-40B4-BE49-F238E27FC236}">
-                <a16:creationId xmlns:a16="http://schemas.microsoft.com/office/drawing/2014/main" id="{68102D78-EB1A-FAFB-2D77-404B93BD48A8}"/>
+                <a16:creationId xmlns:a16="http://schemas.microsoft.com/office/drawing/2014/main" id="{4ABFC8F4-3F35-A543-B7B4-4621F67A9BBB}"/>
               </a:ext>
             </a:extLst>
           </p:cNvPr>
@@ -16585,10 +17218,10 @@
       </p:sp>
       <p:sp>
         <p:nvSpPr>
-          <p:cNvPr id="3" name="!!Anchor_Slide_Tracker">
+          <p:cNvPr id="3" name="!!Anchor_Slide_Tracker!!">
             <a:extLst>
               <a:ext uri="{FF2B5EF4-FFF2-40B4-BE49-F238E27FC236}">
-                <a16:creationId xmlns:a16="http://schemas.microsoft.com/office/drawing/2014/main" id="{56B7A33C-978A-92AA-A212-6AD215377E96}"/>
+                <a16:creationId xmlns:a16="http://schemas.microsoft.com/office/drawing/2014/main" id="{B9CE0024-6216-542A-D912-6320EBF2D635}"/>
               </a:ext>
             </a:extLst>
           </p:cNvPr>
@@ -16626,10 +17259,10 @@
       </p:sp>
       <p:sp>
         <p:nvSpPr>
-          <p:cNvPr id="4" name="!!Anchor_Assertion_Title">
+          <p:cNvPr id="4" name="!!Anchor_Assertion_Title!!">
             <a:extLst>
               <a:ext uri="{FF2B5EF4-FFF2-40B4-BE49-F238E27FC236}">
-                <a16:creationId xmlns:a16="http://schemas.microsoft.com/office/drawing/2014/main" id="{96086952-ACD5-DC63-024D-EB41249CC1DA}"/>
+                <a16:creationId xmlns:a16="http://schemas.microsoft.com/office/drawing/2014/main" id="{65807AEB-E5D7-B7A6-AF7E-AE042E4598A2}"/>
               </a:ext>
             </a:extLst>
           </p:cNvPr>
@@ -16666,10 +17299,10 @@
       </p:sp>
       <p:grpSp>
         <p:nvGrpSpPr>
-          <p:cNvPr id="12" name="!!Stage_Hero_Container">
+          <p:cNvPr id="12" name="!!Stage_Hero_Container!!">
             <a:extLst>
               <a:ext uri="{FF2B5EF4-FFF2-40B4-BE49-F238E27FC236}">
-                <a16:creationId xmlns:a16="http://schemas.microsoft.com/office/drawing/2014/main" id="{BC2D703A-B4B2-6217-9EA7-5A5653C9C066}"/>
+                <a16:creationId xmlns:a16="http://schemas.microsoft.com/office/drawing/2014/main" id="{D4A433D6-1E30-9E86-22F1-BE801BCDC838}"/>
               </a:ext>
             </a:extLst>
           </p:cNvPr>
@@ -16689,7 +17322,7 @@
             <p:cNvPr id="6" name="Picture 5">
               <a:extLst>
                 <a:ext uri="{FF2B5EF4-FFF2-40B4-BE49-F238E27FC236}">
-                  <a16:creationId xmlns:a16="http://schemas.microsoft.com/office/drawing/2014/main" id="{DFDCD0C7-2C70-3489-5E72-8732A309E36B}"/>
+                  <a16:creationId xmlns:a16="http://schemas.microsoft.com/office/drawing/2014/main" id="{B488BAC2-BD0F-869E-CCEC-A8C74BF2E5E2}"/>
                 </a:ext>
               </a:extLst>
             </p:cNvPr>
@@ -16730,7 +17363,7 @@
             <p:cNvPr id="7" name="Rectangle: Rounded Corners 6">
               <a:extLst>
                 <a:ext uri="{FF2B5EF4-FFF2-40B4-BE49-F238E27FC236}">
-                  <a16:creationId xmlns:a16="http://schemas.microsoft.com/office/drawing/2014/main" id="{837E9BC3-F0FB-DA55-0D31-349B41C3D798}"/>
+                  <a16:creationId xmlns:a16="http://schemas.microsoft.com/office/drawing/2014/main" id="{605ACB10-E55F-5102-34DC-B747344EE028}"/>
                 </a:ext>
               </a:extLst>
             </p:cNvPr>
@@ -16784,7 +17417,7 @@
             <p:cNvPr id="8" name="Oval 7">
               <a:extLst>
                 <a:ext uri="{FF2B5EF4-FFF2-40B4-BE49-F238E27FC236}">
-                  <a16:creationId xmlns:a16="http://schemas.microsoft.com/office/drawing/2014/main" id="{1E9172F6-D64A-2AE3-4EB3-910F53B12103}"/>
+                  <a16:creationId xmlns:a16="http://schemas.microsoft.com/office/drawing/2014/main" id="{DAE8E66B-715E-4434-5FF6-3CB917395F8B}"/>
                 </a:ext>
               </a:extLst>
             </p:cNvPr>
@@ -16852,7 +17485,7 @@
             <p:cNvPr id="10" name="Graphic 9">
               <a:extLst>
                 <a:ext uri="{FF2B5EF4-FFF2-40B4-BE49-F238E27FC236}">
-                  <a16:creationId xmlns:a16="http://schemas.microsoft.com/office/drawing/2014/main" id="{BC4083EB-694F-DB25-993C-CA6C8DAFF9EE}"/>
+                  <a16:creationId xmlns:a16="http://schemas.microsoft.com/office/drawing/2014/main" id="{C99BE26A-6E04-F9F7-779F-00D2F3C76C21}"/>
                 </a:ext>
               </a:extLst>
             </p:cNvPr>
@@ -16888,7 +17521,7 @@
             <p:cNvPr id="11" name="TextBox 10">
               <a:extLst>
                 <a:ext uri="{FF2B5EF4-FFF2-40B4-BE49-F238E27FC236}">
-                  <a16:creationId xmlns:a16="http://schemas.microsoft.com/office/drawing/2014/main" id="{223E3E65-9482-9016-B435-6EDFE75FDE75}"/>
+                  <a16:creationId xmlns:a16="http://schemas.microsoft.com/office/drawing/2014/main" id="{29851723-C0AD-5BC8-18E1-E0EFC3C55634}"/>
                 </a:ext>
               </a:extLst>
             </p:cNvPr>
@@ -16944,10 +17577,10 @@
       </p:grpSp>
       <p:grpSp>
         <p:nvGrpSpPr>
-          <p:cNvPr id="18" name="!!Stage_Sub_Card_1">
+          <p:cNvPr id="18" name="!!Stage_Sub_Card_1!!">
             <a:extLst>
               <a:ext uri="{FF2B5EF4-FFF2-40B4-BE49-F238E27FC236}">
-                <a16:creationId xmlns:a16="http://schemas.microsoft.com/office/drawing/2014/main" id="{052D6EF1-5AF8-F8FA-3A8C-F93A07E3DE30}"/>
+                <a16:creationId xmlns:a16="http://schemas.microsoft.com/office/drawing/2014/main" id="{1EF58B28-1086-714A-AF9D-BAB814B80986}"/>
               </a:ext>
             </a:extLst>
           </p:cNvPr>
@@ -16967,7 +17600,7 @@
             <p:cNvPr id="13" name="Rectangle: Rounded Corners 12">
               <a:extLst>
                 <a:ext uri="{FF2B5EF4-FFF2-40B4-BE49-F238E27FC236}">
-                  <a16:creationId xmlns:a16="http://schemas.microsoft.com/office/drawing/2014/main" id="{D1E8EA5F-DEC3-E296-0768-33E0A3865E6E}"/>
+                  <a16:creationId xmlns:a16="http://schemas.microsoft.com/office/drawing/2014/main" id="{384EE28A-E06F-DD27-8763-62D024493E68}"/>
                 </a:ext>
               </a:extLst>
             </p:cNvPr>
@@ -17021,7 +17654,7 @@
             <p:cNvPr id="14" name="Oval 13">
               <a:extLst>
                 <a:ext uri="{FF2B5EF4-FFF2-40B4-BE49-F238E27FC236}">
-                  <a16:creationId xmlns:a16="http://schemas.microsoft.com/office/drawing/2014/main" id="{9DA91DA4-D51D-1088-DE6B-C5E776C337AA}"/>
+                  <a16:creationId xmlns:a16="http://schemas.microsoft.com/office/drawing/2014/main" id="{0BA186C9-61EA-4E8F-76E2-AAA08E9E72CA}"/>
                 </a:ext>
               </a:extLst>
             </p:cNvPr>
@@ -17089,7 +17722,7 @@
             <p:cNvPr id="16" name="Graphic 15">
               <a:extLst>
                 <a:ext uri="{FF2B5EF4-FFF2-40B4-BE49-F238E27FC236}">
-                  <a16:creationId xmlns:a16="http://schemas.microsoft.com/office/drawing/2014/main" id="{88F2C22D-54C1-7E92-0B16-E18687E7F8E2}"/>
+                  <a16:creationId xmlns:a16="http://schemas.microsoft.com/office/drawing/2014/main" id="{3CD69753-4322-2708-BE87-46C7BFF23544}"/>
                 </a:ext>
               </a:extLst>
             </p:cNvPr>
@@ -17125,7 +17758,7 @@
             <p:cNvPr id="17" name="TextBox 16">
               <a:extLst>
                 <a:ext uri="{FF2B5EF4-FFF2-40B4-BE49-F238E27FC236}">
-                  <a16:creationId xmlns:a16="http://schemas.microsoft.com/office/drawing/2014/main" id="{F151465F-5C47-5BDD-AF70-61FD41FB2425}"/>
+                  <a16:creationId xmlns:a16="http://schemas.microsoft.com/office/drawing/2014/main" id="{DE4C957D-8D9C-7A06-D2E7-EF566BA1CF5C}"/>
                 </a:ext>
               </a:extLst>
             </p:cNvPr>
@@ -17184,10 +17817,10 @@
       </p:grpSp>
       <p:grpSp>
         <p:nvGrpSpPr>
-          <p:cNvPr id="24" name="!!Stage_Sub_Card_2">
+          <p:cNvPr id="24" name="!!Stage_Sub_Card_2!!">
             <a:extLst>
               <a:ext uri="{FF2B5EF4-FFF2-40B4-BE49-F238E27FC236}">
-                <a16:creationId xmlns:a16="http://schemas.microsoft.com/office/drawing/2014/main" id="{A646E64D-A855-726A-33B4-F96F93CD1605}"/>
+                <a16:creationId xmlns:a16="http://schemas.microsoft.com/office/drawing/2014/main" id="{37A400E1-CFDD-9FBC-B2CD-68C97AB63308}"/>
               </a:ext>
             </a:extLst>
           </p:cNvPr>
@@ -17207,7 +17840,7 @@
             <p:cNvPr id="19" name="Rectangle: Rounded Corners 18">
               <a:extLst>
                 <a:ext uri="{FF2B5EF4-FFF2-40B4-BE49-F238E27FC236}">
-                  <a16:creationId xmlns:a16="http://schemas.microsoft.com/office/drawing/2014/main" id="{F19575AB-122B-6FA5-23A9-10FAF3E66BA6}"/>
+                  <a16:creationId xmlns:a16="http://schemas.microsoft.com/office/drawing/2014/main" id="{2399331B-F3CF-8979-060B-FED87F51BCCA}"/>
                 </a:ext>
               </a:extLst>
             </p:cNvPr>
@@ -17261,7 +17894,7 @@
             <p:cNvPr id="20" name="Oval 19">
               <a:extLst>
                 <a:ext uri="{FF2B5EF4-FFF2-40B4-BE49-F238E27FC236}">
-                  <a16:creationId xmlns:a16="http://schemas.microsoft.com/office/drawing/2014/main" id="{19BF6AA6-4119-A458-1BB2-EC8323404141}"/>
+                  <a16:creationId xmlns:a16="http://schemas.microsoft.com/office/drawing/2014/main" id="{ED8D3D52-1BF9-469D-3596-A42EC95F7DEA}"/>
                 </a:ext>
               </a:extLst>
             </p:cNvPr>
@@ -17329,7 +17962,7 @@
             <p:cNvPr id="22" name="Graphic 21">
               <a:extLst>
                 <a:ext uri="{FF2B5EF4-FFF2-40B4-BE49-F238E27FC236}">
-                  <a16:creationId xmlns:a16="http://schemas.microsoft.com/office/drawing/2014/main" id="{CE43FE11-2AEB-911A-5ACD-5431AE780BE3}"/>
+                  <a16:creationId xmlns:a16="http://schemas.microsoft.com/office/drawing/2014/main" id="{20567024-642D-FAA2-189E-9C11704D7D77}"/>
                 </a:ext>
               </a:extLst>
             </p:cNvPr>
@@ -17365,7 +17998,7 @@
             <p:cNvPr id="23" name="TextBox 22">
               <a:extLst>
                 <a:ext uri="{FF2B5EF4-FFF2-40B4-BE49-F238E27FC236}">
-                  <a16:creationId xmlns:a16="http://schemas.microsoft.com/office/drawing/2014/main" id="{8B544DC6-3093-C6F4-B799-9E3F74714553}"/>
+                  <a16:creationId xmlns:a16="http://schemas.microsoft.com/office/drawing/2014/main" id="{2EC58A8E-2DC3-7EB7-31CB-65DF305238A4}"/>
                 </a:ext>
               </a:extLst>
             </p:cNvPr>
@@ -17424,10 +18057,10 @@
       </p:grpSp>
       <p:grpSp>
         <p:nvGrpSpPr>
-          <p:cNvPr id="30" name="!!Stage_Sub_Card_3">
+          <p:cNvPr id="30" name="!!Stage_Sub_Card_3!!">
             <a:extLst>
               <a:ext uri="{FF2B5EF4-FFF2-40B4-BE49-F238E27FC236}">
-                <a16:creationId xmlns:a16="http://schemas.microsoft.com/office/drawing/2014/main" id="{C204223B-D813-707A-DA87-63C419AC93BA}"/>
+                <a16:creationId xmlns:a16="http://schemas.microsoft.com/office/drawing/2014/main" id="{13A7338B-32B4-4EC6-C7C1-CFC6CCBF7B57}"/>
               </a:ext>
             </a:extLst>
           </p:cNvPr>
@@ -17447,7 +18080,7 @@
             <p:cNvPr id="25" name="Rectangle: Rounded Corners 24">
               <a:extLst>
                 <a:ext uri="{FF2B5EF4-FFF2-40B4-BE49-F238E27FC236}">
-                  <a16:creationId xmlns:a16="http://schemas.microsoft.com/office/drawing/2014/main" id="{8CD614B7-E14A-59CF-3A0A-465C70A32027}"/>
+                  <a16:creationId xmlns:a16="http://schemas.microsoft.com/office/drawing/2014/main" id="{7D9C1D89-8849-C639-E65C-9997D05F10E2}"/>
                 </a:ext>
               </a:extLst>
             </p:cNvPr>
@@ -17501,7 +18134,7 @@
             <p:cNvPr id="26" name="Oval 25">
               <a:extLst>
                 <a:ext uri="{FF2B5EF4-FFF2-40B4-BE49-F238E27FC236}">
-                  <a16:creationId xmlns:a16="http://schemas.microsoft.com/office/drawing/2014/main" id="{B95F3AEC-D528-E091-6823-9EA6FCEFD57C}"/>
+                  <a16:creationId xmlns:a16="http://schemas.microsoft.com/office/drawing/2014/main" id="{8F68AE56-71D1-3323-58D9-C2A3CC74E885}"/>
                 </a:ext>
               </a:extLst>
             </p:cNvPr>
@@ -17569,7 +18202,7 @@
             <p:cNvPr id="28" name="Graphic 27">
               <a:extLst>
                 <a:ext uri="{FF2B5EF4-FFF2-40B4-BE49-F238E27FC236}">
-                  <a16:creationId xmlns:a16="http://schemas.microsoft.com/office/drawing/2014/main" id="{8598D13F-5449-A82B-A82E-12AA4A83767F}"/>
+                  <a16:creationId xmlns:a16="http://schemas.microsoft.com/office/drawing/2014/main" id="{61D0945B-04E0-EA20-D146-8BAF29A4E6C4}"/>
                 </a:ext>
               </a:extLst>
             </p:cNvPr>
@@ -17605,7 +18238,7 @@
             <p:cNvPr id="29" name="TextBox 28">
               <a:extLst>
                 <a:ext uri="{FF2B5EF4-FFF2-40B4-BE49-F238E27FC236}">
-                  <a16:creationId xmlns:a16="http://schemas.microsoft.com/office/drawing/2014/main" id="{DFA1FE73-6E5B-33A0-BB01-7F599E4FB98F}"/>
+                  <a16:creationId xmlns:a16="http://schemas.microsoft.com/office/drawing/2014/main" id="{4BE2EB15-ED7A-FB35-FBA6-AFCD521F47D9}"/>
                 </a:ext>
               </a:extLst>
             </p:cNvPr>
@@ -17658,10 +18291,10 @@
       </p:grpSp>
       <p:sp>
         <p:nvSpPr>
-          <p:cNvPr id="31" name="!!Anchor_Source_Footer">
+          <p:cNvPr id="31" name="!!Anchor_Source_Footer!!">
             <a:extLst>
               <a:ext uri="{FF2B5EF4-FFF2-40B4-BE49-F238E27FC236}">
-                <a16:creationId xmlns:a16="http://schemas.microsoft.com/office/drawing/2014/main" id="{F394944F-8A4E-6086-B8DB-C1E0EEE8408E}"/>
+                <a16:creationId xmlns:a16="http://schemas.microsoft.com/office/drawing/2014/main" id="{CA7C49B2-051C-D7B8-D131-D0E375130F58}"/>
               </a:ext>
             </a:extLst>
           </p:cNvPr>
@@ -17705,7 +18338,7 @@
     </p:spTree>
     <p:extLst>
       <p:ext uri="{BB962C8B-B14F-4D97-AF65-F5344CB8AC3E}">
-        <p14:creationId xmlns:p14="http://schemas.microsoft.com/office/powerpoint/2010/main" val="2733071319"/>
+        <p14:creationId xmlns:p14="http://schemas.microsoft.com/office/powerpoint/2010/main" val="983236615"/>
       </p:ext>
     </p:extLst>
   </p:cSld>
@@ -17736,6 +18369,9 @@
                     <p:cTn id="3" fill="hold">
                       <p:stCondLst>
                         <p:cond delay="indefinite"/>
+                        <p:cond evt="onBegin" delay="0">
+                          <p:tn val="2"/>
+                        </p:cond>
                       </p:stCondLst>
                       <p:childTnLst>
                         <p:par>
@@ -17745,9 +18381,9 @@
                             </p:stCondLst>
                             <p:childTnLst>
                               <p:par>
-                                <p:cTn id="5" presetID="2" presetClass="entr" presetSubtype="4" accel="50000" decel="50000" fill="hold" nodeType="clickEffect">
+                                <p:cTn id="5" presetID="2" presetClass="entr" presetSubtype="1" accel="50000" decel="50000" fill="hold" nodeType="withEffect">
                                   <p:stCondLst>
-                                    <p:cond delay="0"/>
+                                    <p:cond delay="120"/>
                                   </p:stCondLst>
                                   <p:childTnLst>
                                     <p:set>
@@ -17770,7 +18406,7 @@
                                     </p:set>
                                     <p:anim calcmode="lin" valueType="num">
                                       <p:cBhvr additive="base">
-                                        <p:cTn id="7" dur="450" fill="hold"/>
+                                        <p:cTn id="7" dur="500" fill="hold"/>
                                         <p:tgtEl>
                                           <p:spTgt spid="18"/>
                                         </p:tgtEl>
@@ -17793,7 +18429,7 @@
                                     </p:anim>
                                     <p:anim calcmode="lin" valueType="num">
                                       <p:cBhvr additive="base">
-                                        <p:cTn id="8" dur="450" fill="hold"/>
+                                        <p:cTn id="8" dur="500" fill="hold"/>
                                         <p:tgtEl>
                                           <p:spTgt spid="18"/>
                                         </p:tgtEl>
@@ -17804,7 +18440,7 @@
                                       <p:tavLst>
                                         <p:tav tm="0">
                                           <p:val>
-                                            <p:strVal val="1+#ppt_h/2"/>
+                                            <p:strVal val="0-#ppt_h/2"/>
                                           </p:val>
                                         </p:tav>
                                         <p:tav tm="100000">
@@ -17817,33 +18453,15 @@
                                   </p:childTnLst>
                                 </p:cTn>
                               </p:par>
-                            </p:childTnLst>
-                          </p:cTn>
-                        </p:par>
-                      </p:childTnLst>
-                    </p:cTn>
-                  </p:par>
-                  <p:par>
-                    <p:cTn id="9" fill="hold">
-                      <p:stCondLst>
-                        <p:cond delay="indefinite"/>
-                      </p:stCondLst>
-                      <p:childTnLst>
-                        <p:par>
-                          <p:cTn id="10" fill="hold">
-                            <p:stCondLst>
-                              <p:cond delay="0"/>
-                            </p:stCondLst>
-                            <p:childTnLst>
                               <p:par>
-                                <p:cTn id="11" presetID="2" presetClass="entr" presetSubtype="4" accel="50000" decel="50000" fill="hold" nodeType="clickEffect">
+                                <p:cTn id="9" presetID="2" presetClass="entr" presetSubtype="1" accel="50000" decel="50000" fill="hold" nodeType="withEffect">
                                   <p:stCondLst>
-                                    <p:cond delay="0"/>
+                                    <p:cond delay="240"/>
                                   </p:stCondLst>
                                   <p:childTnLst>
                                     <p:set>
                                       <p:cBhvr>
-                                        <p:cTn id="12" dur="1" fill="hold">
+                                        <p:cTn id="10" dur="1" fill="hold">
                                           <p:stCondLst>
                                             <p:cond delay="0"/>
                                           </p:stCondLst>
@@ -17861,7 +18479,7 @@
                                     </p:set>
                                     <p:anim calcmode="lin" valueType="num">
                                       <p:cBhvr additive="base">
-                                        <p:cTn id="13" dur="450" fill="hold"/>
+                                        <p:cTn id="11" dur="500" fill="hold"/>
                                         <p:tgtEl>
                                           <p:spTgt spid="24"/>
                                         </p:tgtEl>
@@ -17884,7 +18502,7 @@
                                     </p:anim>
                                     <p:anim calcmode="lin" valueType="num">
                                       <p:cBhvr additive="base">
-                                        <p:cTn id="14" dur="450" fill="hold"/>
+                                        <p:cTn id="12" dur="500" fill="hold"/>
                                         <p:tgtEl>
                                           <p:spTgt spid="24"/>
                                         </p:tgtEl>
@@ -17895,7 +18513,7 @@
                                       <p:tavLst>
                                         <p:tav tm="0">
                                           <p:val>
-                                            <p:strVal val="1+#ppt_h/2"/>
+                                            <p:strVal val="0-#ppt_h/2"/>
                                           </p:val>
                                         </p:tav>
                                         <p:tav tm="100000">
@@ -17908,33 +18526,15 @@
                                   </p:childTnLst>
                                 </p:cTn>
                               </p:par>
-                            </p:childTnLst>
-                          </p:cTn>
-                        </p:par>
-                      </p:childTnLst>
-                    </p:cTn>
-                  </p:par>
-                  <p:par>
-                    <p:cTn id="15" fill="hold">
-                      <p:stCondLst>
-                        <p:cond delay="indefinite"/>
-                      </p:stCondLst>
-                      <p:childTnLst>
-                        <p:par>
-                          <p:cTn id="16" fill="hold">
-                            <p:stCondLst>
-                              <p:cond delay="0"/>
-                            </p:stCondLst>
-                            <p:childTnLst>
                               <p:par>
-                                <p:cTn id="17" presetID="2" presetClass="entr" presetSubtype="4" accel="50000" decel="50000" fill="hold" nodeType="clickEffect">
+                                <p:cTn id="13" presetID="2" presetClass="entr" presetSubtype="1" accel="50000" decel="50000" fill="hold" nodeType="withEffect">
                                   <p:stCondLst>
-                                    <p:cond delay="0"/>
+                                    <p:cond delay="360"/>
                                   </p:stCondLst>
                                   <p:childTnLst>
                                     <p:set>
                                       <p:cBhvr>
-                                        <p:cTn id="18" dur="1" fill="hold">
+                                        <p:cTn id="14" dur="1" fill="hold">
                                           <p:stCondLst>
                                             <p:cond delay="0"/>
                                           </p:stCondLst>
@@ -17952,7 +18552,7 @@
                                     </p:set>
                                     <p:anim calcmode="lin" valueType="num">
                                       <p:cBhvr additive="base">
-                                        <p:cTn id="19" dur="450" fill="hold"/>
+                                        <p:cTn id="15" dur="500" fill="hold"/>
                                         <p:tgtEl>
                                           <p:spTgt spid="30"/>
                                         </p:tgtEl>
@@ -17975,7 +18575,7 @@
                                     </p:anim>
                                     <p:anim calcmode="lin" valueType="num">
                                       <p:cBhvr additive="base">
-                                        <p:cTn id="20" dur="450" fill="hold"/>
+                                        <p:cTn id="16" dur="500" fill="hold"/>
                                         <p:tgtEl>
                                           <p:spTgt spid="30"/>
                                         </p:tgtEl>
@@ -17986,7 +18586,7 @@
                                       <p:tavLst>
                                         <p:tav tm="0">
                                           <p:val>
-                                            <p:strVal val="1+#ppt_h/2"/>
+                                            <p:strVal val="0-#ppt_h/2"/>
                                           </p:val>
                                         </p:tav>
                                         <p:tav tm="100000">
@@ -18057,10 +18657,10 @@
       </p:grpSpPr>
       <p:sp>
         <p:nvSpPr>
-          <p:cNvPr id="2" name="!!Anchor_Kicker_Rail">
+          <p:cNvPr id="2" name="!!Anchor_Kicker_Rail!!">
             <a:extLst>
               <a:ext uri="{FF2B5EF4-FFF2-40B4-BE49-F238E27FC236}">
-                <a16:creationId xmlns:a16="http://schemas.microsoft.com/office/drawing/2014/main" id="{7EF7379C-AE1E-F9FB-B429-745CB44A015A}"/>
+                <a16:creationId xmlns:a16="http://schemas.microsoft.com/office/drawing/2014/main" id="{13BF99E5-A179-86C6-96EA-B36A5134443E}"/>
               </a:ext>
             </a:extLst>
           </p:cNvPr>
@@ -18103,10 +18703,10 @@
       </p:sp>
       <p:sp>
         <p:nvSpPr>
-          <p:cNvPr id="3" name="!!Anchor_Slide_Tracker">
+          <p:cNvPr id="3" name="!!Anchor_Slide_Tracker!!">
             <a:extLst>
               <a:ext uri="{FF2B5EF4-FFF2-40B4-BE49-F238E27FC236}">
-                <a16:creationId xmlns:a16="http://schemas.microsoft.com/office/drawing/2014/main" id="{8123C3B0-6EAA-5B33-0670-4DC3326CEC9E}"/>
+                <a16:creationId xmlns:a16="http://schemas.microsoft.com/office/drawing/2014/main" id="{CC9324B0-49B5-CF86-B939-FDB038B62DD7}"/>
               </a:ext>
             </a:extLst>
           </p:cNvPr>
@@ -18144,10 +18744,10 @@
       </p:sp>
       <p:sp>
         <p:nvSpPr>
-          <p:cNvPr id="4" name="!!Anchor_Assertion_Title">
+          <p:cNvPr id="4" name="!!Anchor_Assertion_Title!!">
             <a:extLst>
               <a:ext uri="{FF2B5EF4-FFF2-40B4-BE49-F238E27FC236}">
-                <a16:creationId xmlns:a16="http://schemas.microsoft.com/office/drawing/2014/main" id="{F0B83F10-E5F6-C0D7-3820-42C7DE986E3B}"/>
+                <a16:creationId xmlns:a16="http://schemas.microsoft.com/office/drawing/2014/main" id="{306A52FC-5E1D-2F99-E904-656361443D2B}"/>
               </a:ext>
             </a:extLst>
           </p:cNvPr>
@@ -18190,10 +18790,10 @@
       </p:sp>
       <p:grpSp>
         <p:nvGrpSpPr>
-          <p:cNvPr id="10" name="!!Stage_Hero_Container">
+          <p:cNvPr id="10" name="!!Stage_Hero_Container!!">
             <a:extLst>
               <a:ext uri="{FF2B5EF4-FFF2-40B4-BE49-F238E27FC236}">
-                <a16:creationId xmlns:a16="http://schemas.microsoft.com/office/drawing/2014/main" id="{F1DBD879-CD43-35CA-B2EF-5CA90740B242}"/>
+                <a16:creationId xmlns:a16="http://schemas.microsoft.com/office/drawing/2014/main" id="{94ED0B1A-79D7-8AD5-F845-C74562F80D76}"/>
               </a:ext>
             </a:extLst>
           </p:cNvPr>
@@ -18213,7 +18813,7 @@
             <p:cNvPr id="5" name="Rectangle: Rounded Corners 4">
               <a:extLst>
                 <a:ext uri="{FF2B5EF4-FFF2-40B4-BE49-F238E27FC236}">
-                  <a16:creationId xmlns:a16="http://schemas.microsoft.com/office/drawing/2014/main" id="{E2227FC4-04FA-2823-25C7-7A308786C664}"/>
+                  <a16:creationId xmlns:a16="http://schemas.microsoft.com/office/drawing/2014/main" id="{9B6C95FB-DC54-A7FD-E53A-A0C5A88FD845}"/>
                 </a:ext>
               </a:extLst>
             </p:cNvPr>
@@ -18267,7 +18867,7 @@
             <p:cNvPr id="6" name="Rectangle 5">
               <a:extLst>
                 <a:ext uri="{FF2B5EF4-FFF2-40B4-BE49-F238E27FC236}">
-                  <a16:creationId xmlns:a16="http://schemas.microsoft.com/office/drawing/2014/main" id="{EC43517E-961A-9CD5-1289-A19B3285515A}"/>
+                  <a16:creationId xmlns:a16="http://schemas.microsoft.com/office/drawing/2014/main" id="{E135E8B6-E7EC-7901-379A-C0B57D6C22A9}"/>
                 </a:ext>
               </a:extLst>
             </p:cNvPr>
@@ -18343,7 +18943,7 @@
             <p:cNvPr id="8" name="Graphic 7">
               <a:extLst>
                 <a:ext uri="{FF2B5EF4-FFF2-40B4-BE49-F238E27FC236}">
-                  <a16:creationId xmlns:a16="http://schemas.microsoft.com/office/drawing/2014/main" id="{D799F1ED-15E3-6CFA-285D-E2BAE1553B76}"/>
+                  <a16:creationId xmlns:a16="http://schemas.microsoft.com/office/drawing/2014/main" id="{60859D90-1B39-8435-1530-4038770A1C80}"/>
                 </a:ext>
               </a:extLst>
             </p:cNvPr>
@@ -18379,7 +18979,7 @@
             <p:cNvPr id="9" name="TextBox 8">
               <a:extLst>
                 <a:ext uri="{FF2B5EF4-FFF2-40B4-BE49-F238E27FC236}">
-                  <a16:creationId xmlns:a16="http://schemas.microsoft.com/office/drawing/2014/main" id="{FF79F2CE-0E0B-F484-D815-9D250A3885C4}"/>
+                  <a16:creationId xmlns:a16="http://schemas.microsoft.com/office/drawing/2014/main" id="{33FEE8E0-B4B8-2977-98D9-A8633C40715F}"/>
                 </a:ext>
               </a:extLst>
             </p:cNvPr>
@@ -18432,10 +19032,10 @@
       </p:grpSp>
       <p:grpSp>
         <p:nvGrpSpPr>
-          <p:cNvPr id="16" name="!!Stage_Sub_Card_1">
+          <p:cNvPr id="16" name="!!Stage_Sub_Card_1!!">
             <a:extLst>
               <a:ext uri="{FF2B5EF4-FFF2-40B4-BE49-F238E27FC236}">
-                <a16:creationId xmlns:a16="http://schemas.microsoft.com/office/drawing/2014/main" id="{6ABC66DD-506F-4EB5-5086-626959BEC972}"/>
+                <a16:creationId xmlns:a16="http://schemas.microsoft.com/office/drawing/2014/main" id="{13991D1A-0E1F-7DE2-9AAF-AB5E8CE23818}"/>
               </a:ext>
             </a:extLst>
           </p:cNvPr>
@@ -18455,7 +19055,7 @@
             <p:cNvPr id="11" name="Rectangle: Rounded Corners 10">
               <a:extLst>
                 <a:ext uri="{FF2B5EF4-FFF2-40B4-BE49-F238E27FC236}">
-                  <a16:creationId xmlns:a16="http://schemas.microsoft.com/office/drawing/2014/main" id="{8A3003AA-7AB5-3D96-E95D-8318158A5C0C}"/>
+                  <a16:creationId xmlns:a16="http://schemas.microsoft.com/office/drawing/2014/main" id="{BB50430D-1123-0130-0777-378075B9B7E4}"/>
                 </a:ext>
               </a:extLst>
             </p:cNvPr>
@@ -18509,7 +19109,7 @@
             <p:cNvPr id="12" name="Rectangle 11">
               <a:extLst>
                 <a:ext uri="{FF2B5EF4-FFF2-40B4-BE49-F238E27FC236}">
-                  <a16:creationId xmlns:a16="http://schemas.microsoft.com/office/drawing/2014/main" id="{1A550324-9C94-A5A9-EBEC-6E3E2F6C257A}"/>
+                  <a16:creationId xmlns:a16="http://schemas.microsoft.com/office/drawing/2014/main" id="{75807E8A-9889-03E0-D732-2331210B2C25}"/>
                 </a:ext>
               </a:extLst>
             </p:cNvPr>
@@ -18585,7 +19185,7 @@
             <p:cNvPr id="14" name="Graphic 13">
               <a:extLst>
                 <a:ext uri="{FF2B5EF4-FFF2-40B4-BE49-F238E27FC236}">
-                  <a16:creationId xmlns:a16="http://schemas.microsoft.com/office/drawing/2014/main" id="{2608A560-F112-523C-A8D7-552C79EFE06A}"/>
+                  <a16:creationId xmlns:a16="http://schemas.microsoft.com/office/drawing/2014/main" id="{02FDC026-D957-027E-F85F-F58E53C08E72}"/>
                 </a:ext>
               </a:extLst>
             </p:cNvPr>
@@ -18621,7 +19221,7 @@
             <p:cNvPr id="15" name="TextBox 14">
               <a:extLst>
                 <a:ext uri="{FF2B5EF4-FFF2-40B4-BE49-F238E27FC236}">
-                  <a16:creationId xmlns:a16="http://schemas.microsoft.com/office/drawing/2014/main" id="{84FBD1CA-C99C-B0EE-63C8-CCA8716FB55A}"/>
+                  <a16:creationId xmlns:a16="http://schemas.microsoft.com/office/drawing/2014/main" id="{698B7067-78F5-E422-C86A-00AB67D5E7F8}"/>
                 </a:ext>
               </a:extLst>
             </p:cNvPr>
@@ -18680,10 +19280,10 @@
       </p:grpSp>
       <p:grpSp>
         <p:nvGrpSpPr>
-          <p:cNvPr id="22" name="!!Stage_Sub_Card_2">
+          <p:cNvPr id="22" name="!!Stage_Sub_Card_2!!">
             <a:extLst>
               <a:ext uri="{FF2B5EF4-FFF2-40B4-BE49-F238E27FC236}">
-                <a16:creationId xmlns:a16="http://schemas.microsoft.com/office/drawing/2014/main" id="{AE0892D3-FBCD-1B80-3A00-63D1B85CEC3D}"/>
+                <a16:creationId xmlns:a16="http://schemas.microsoft.com/office/drawing/2014/main" id="{61EAFEF5-DDB0-A315-F65F-C4320BF284CD}"/>
               </a:ext>
             </a:extLst>
           </p:cNvPr>
@@ -18703,7 +19303,7 @@
             <p:cNvPr id="17" name="Rectangle: Rounded Corners 16">
               <a:extLst>
                 <a:ext uri="{FF2B5EF4-FFF2-40B4-BE49-F238E27FC236}">
-                  <a16:creationId xmlns:a16="http://schemas.microsoft.com/office/drawing/2014/main" id="{A4188021-ECD9-8B8C-1AA4-FE67D0DC2852}"/>
+                  <a16:creationId xmlns:a16="http://schemas.microsoft.com/office/drawing/2014/main" id="{CF3BD3C9-B534-0716-C09D-AB6B671F97A1}"/>
                 </a:ext>
               </a:extLst>
             </p:cNvPr>
@@ -18757,7 +19357,7 @@
             <p:cNvPr id="18" name="Rectangle 17">
               <a:extLst>
                 <a:ext uri="{FF2B5EF4-FFF2-40B4-BE49-F238E27FC236}">
-                  <a16:creationId xmlns:a16="http://schemas.microsoft.com/office/drawing/2014/main" id="{9E65337A-53B5-2516-3679-461797155E07}"/>
+                  <a16:creationId xmlns:a16="http://schemas.microsoft.com/office/drawing/2014/main" id="{4181A4FF-B861-17BD-25A4-2914A99076E0}"/>
                 </a:ext>
               </a:extLst>
             </p:cNvPr>
@@ -18833,7 +19433,7 @@
             <p:cNvPr id="20" name="Graphic 19">
               <a:extLst>
                 <a:ext uri="{FF2B5EF4-FFF2-40B4-BE49-F238E27FC236}">
-                  <a16:creationId xmlns:a16="http://schemas.microsoft.com/office/drawing/2014/main" id="{8D96769D-8273-8D96-EE7B-16C7EFD480B3}"/>
+                  <a16:creationId xmlns:a16="http://schemas.microsoft.com/office/drawing/2014/main" id="{EF74C505-E927-26E9-A084-C78DB7F92E0B}"/>
                 </a:ext>
               </a:extLst>
             </p:cNvPr>
@@ -18869,7 +19469,7 @@
             <p:cNvPr id="21" name="TextBox 20">
               <a:extLst>
                 <a:ext uri="{FF2B5EF4-FFF2-40B4-BE49-F238E27FC236}">
-                  <a16:creationId xmlns:a16="http://schemas.microsoft.com/office/drawing/2014/main" id="{17550B8B-3751-D405-0BD4-D988D34766D3}"/>
+                  <a16:creationId xmlns:a16="http://schemas.microsoft.com/office/drawing/2014/main" id="{DFA4A437-1C36-BC12-0428-8D4EB18FBCF4}"/>
                 </a:ext>
               </a:extLst>
             </p:cNvPr>
@@ -18928,10 +19528,10 @@
       </p:grpSp>
       <p:grpSp>
         <p:nvGrpSpPr>
-          <p:cNvPr id="28" name="!!Stage_Sub_Card_3">
+          <p:cNvPr id="28" name="!!Stage_Sub_Card_3!!">
             <a:extLst>
               <a:ext uri="{FF2B5EF4-FFF2-40B4-BE49-F238E27FC236}">
-                <a16:creationId xmlns:a16="http://schemas.microsoft.com/office/drawing/2014/main" id="{C28A1668-12C7-0A15-9C55-17AC9D61B9C0}"/>
+                <a16:creationId xmlns:a16="http://schemas.microsoft.com/office/drawing/2014/main" id="{F77DD759-A5E5-564E-EE72-37F9AD5BAE05}"/>
               </a:ext>
             </a:extLst>
           </p:cNvPr>
@@ -18951,7 +19551,7 @@
             <p:cNvPr id="23" name="Rectangle: Rounded Corners 22">
               <a:extLst>
                 <a:ext uri="{FF2B5EF4-FFF2-40B4-BE49-F238E27FC236}">
-                  <a16:creationId xmlns:a16="http://schemas.microsoft.com/office/drawing/2014/main" id="{39E5BB8A-DB6A-A27F-25F9-3C282FA9E69D}"/>
+                  <a16:creationId xmlns:a16="http://schemas.microsoft.com/office/drawing/2014/main" id="{709AA026-B1D3-1418-2CFA-A0D83120C268}"/>
                 </a:ext>
               </a:extLst>
             </p:cNvPr>
@@ -19005,7 +19605,7 @@
             <p:cNvPr id="24" name="Rectangle 23">
               <a:extLst>
                 <a:ext uri="{FF2B5EF4-FFF2-40B4-BE49-F238E27FC236}">
-                  <a16:creationId xmlns:a16="http://schemas.microsoft.com/office/drawing/2014/main" id="{9A1BB3C6-4746-3EDF-4375-BDCB9D9C4692}"/>
+                  <a16:creationId xmlns:a16="http://schemas.microsoft.com/office/drawing/2014/main" id="{201F8DAA-108E-3F37-7706-63781D3F21FB}"/>
                 </a:ext>
               </a:extLst>
             </p:cNvPr>
@@ -19081,7 +19681,7 @@
             <p:cNvPr id="26" name="Graphic 25">
               <a:extLst>
                 <a:ext uri="{FF2B5EF4-FFF2-40B4-BE49-F238E27FC236}">
-                  <a16:creationId xmlns:a16="http://schemas.microsoft.com/office/drawing/2014/main" id="{FCE2AF09-10C5-3754-05F7-DFF750901B46}"/>
+                  <a16:creationId xmlns:a16="http://schemas.microsoft.com/office/drawing/2014/main" id="{F59079F1-5F79-D11C-78FA-16FB3389C049}"/>
                 </a:ext>
               </a:extLst>
             </p:cNvPr>
@@ -19117,7 +19717,7 @@
             <p:cNvPr id="27" name="TextBox 26">
               <a:extLst>
                 <a:ext uri="{FF2B5EF4-FFF2-40B4-BE49-F238E27FC236}">
-                  <a16:creationId xmlns:a16="http://schemas.microsoft.com/office/drawing/2014/main" id="{26698C0C-E3D7-CDAF-62B2-F616B27F63AB}"/>
+                  <a16:creationId xmlns:a16="http://schemas.microsoft.com/office/drawing/2014/main" id="{9075DAC2-737A-B692-7E2A-DCD5EE7FB510}"/>
                 </a:ext>
               </a:extLst>
             </p:cNvPr>
@@ -19176,10 +19776,10 @@
       </p:grpSp>
       <p:sp>
         <p:nvSpPr>
-          <p:cNvPr id="29" name="!!Anchor_Source_Footer">
+          <p:cNvPr id="29" name="!!Anchor_Source_Footer!!">
             <a:extLst>
               <a:ext uri="{FF2B5EF4-FFF2-40B4-BE49-F238E27FC236}">
-                <a16:creationId xmlns:a16="http://schemas.microsoft.com/office/drawing/2014/main" id="{2468F4F5-4666-976F-BE35-E6033C329B98}"/>
+                <a16:creationId xmlns:a16="http://schemas.microsoft.com/office/drawing/2014/main" id="{DF873326-F06D-69FD-8793-2A641F5811A9}"/>
               </a:ext>
             </a:extLst>
           </p:cNvPr>
@@ -19223,7 +19823,7 @@
     </p:spTree>
     <p:extLst>
       <p:ext uri="{BB962C8B-B14F-4D97-AF65-F5344CB8AC3E}">
-        <p14:creationId xmlns:p14="http://schemas.microsoft.com/office/powerpoint/2010/main" val="4129739005"/>
+        <p14:creationId xmlns:p14="http://schemas.microsoft.com/office/powerpoint/2010/main" val="1380649135"/>
       </p:ext>
     </p:extLst>
   </p:cSld>
@@ -19254,6 +19854,9 @@
                     <p:cTn id="3" fill="hold">
                       <p:stCondLst>
                         <p:cond delay="indefinite"/>
+                        <p:cond evt="onBegin" delay="0">
+                          <p:tn val="2"/>
+                        </p:cond>
                       </p:stCondLst>
                       <p:childTnLst>
                         <p:par>
@@ -19263,9 +19866,9 @@
                             </p:stCondLst>
                             <p:childTnLst>
                               <p:par>
-                                <p:cTn id="5" presetID="2" presetClass="entr" presetSubtype="4" accel="50000" decel="50000" fill="hold" nodeType="clickEffect">
+                                <p:cTn id="5" presetID="2" presetClass="entr" presetSubtype="1" accel="50000" decel="50000" fill="hold" nodeType="withEffect">
                                   <p:stCondLst>
-                                    <p:cond delay="0"/>
+                                    <p:cond delay="120"/>
                                   </p:stCondLst>
                                   <p:childTnLst>
                                     <p:set>
@@ -19288,7 +19891,7 @@
                                     </p:set>
                                     <p:anim calcmode="lin" valueType="num">
                                       <p:cBhvr additive="base">
-                                        <p:cTn id="7" dur="450" fill="hold"/>
+                                        <p:cTn id="7" dur="500" fill="hold"/>
                                         <p:tgtEl>
                                           <p:spTgt spid="16"/>
                                         </p:tgtEl>
@@ -19311,7 +19914,7 @@
                                     </p:anim>
                                     <p:anim calcmode="lin" valueType="num">
                                       <p:cBhvr additive="base">
-                                        <p:cTn id="8" dur="450" fill="hold"/>
+                                        <p:cTn id="8" dur="500" fill="hold"/>
                                         <p:tgtEl>
                                           <p:spTgt spid="16"/>
                                         </p:tgtEl>
@@ -19322,7 +19925,7 @@
                                       <p:tavLst>
                                         <p:tav tm="0">
                                           <p:val>
-                                            <p:strVal val="1+#ppt_h/2"/>
+                                            <p:strVal val="0-#ppt_h/2"/>
                                           </p:val>
                                         </p:tav>
                                         <p:tav tm="100000">
@@ -19335,33 +19938,15 @@
                                   </p:childTnLst>
                                 </p:cTn>
                               </p:par>
-                            </p:childTnLst>
-                          </p:cTn>
-                        </p:par>
-                      </p:childTnLst>
-                    </p:cTn>
-                  </p:par>
-                  <p:par>
-                    <p:cTn id="9" fill="hold">
-                      <p:stCondLst>
-                        <p:cond delay="indefinite"/>
-                      </p:stCondLst>
-                      <p:childTnLst>
-                        <p:par>
-                          <p:cTn id="10" fill="hold">
-                            <p:stCondLst>
-                              <p:cond delay="0"/>
-                            </p:stCondLst>
-                            <p:childTnLst>
                               <p:par>
-                                <p:cTn id="11" presetID="2" presetClass="entr" presetSubtype="4" accel="50000" decel="50000" fill="hold" nodeType="clickEffect">
+                                <p:cTn id="9" presetID="2" presetClass="entr" presetSubtype="1" accel="50000" decel="50000" fill="hold" nodeType="withEffect">
                                   <p:stCondLst>
-                                    <p:cond delay="0"/>
+                                    <p:cond delay="240"/>
                                   </p:stCondLst>
                                   <p:childTnLst>
                                     <p:set>
                                       <p:cBhvr>
-                                        <p:cTn id="12" dur="1" fill="hold">
+                                        <p:cTn id="10" dur="1" fill="hold">
                                           <p:stCondLst>
                                             <p:cond delay="0"/>
                                           </p:stCondLst>
@@ -19379,7 +19964,7 @@
                                     </p:set>
                                     <p:anim calcmode="lin" valueType="num">
                                       <p:cBhvr additive="base">
-                                        <p:cTn id="13" dur="450" fill="hold"/>
+                                        <p:cTn id="11" dur="500" fill="hold"/>
                                         <p:tgtEl>
                                           <p:spTgt spid="22"/>
                                         </p:tgtEl>
@@ -19402,7 +19987,7 @@
                                     </p:anim>
                                     <p:anim calcmode="lin" valueType="num">
                                       <p:cBhvr additive="base">
-                                        <p:cTn id="14" dur="450" fill="hold"/>
+                                        <p:cTn id="12" dur="500" fill="hold"/>
                                         <p:tgtEl>
                                           <p:spTgt spid="22"/>
                                         </p:tgtEl>
@@ -19413,7 +19998,7 @@
                                       <p:tavLst>
                                         <p:tav tm="0">
                                           <p:val>
-                                            <p:strVal val="1+#ppt_h/2"/>
+                                            <p:strVal val="0-#ppt_h/2"/>
                                           </p:val>
                                         </p:tav>
                                         <p:tav tm="100000">
@@ -19426,33 +20011,15 @@
                                   </p:childTnLst>
                                 </p:cTn>
                               </p:par>
-                            </p:childTnLst>
-                          </p:cTn>
-                        </p:par>
-                      </p:childTnLst>
-                    </p:cTn>
-                  </p:par>
-                  <p:par>
-                    <p:cTn id="15" fill="hold">
-                      <p:stCondLst>
-                        <p:cond delay="indefinite"/>
-                      </p:stCondLst>
-                      <p:childTnLst>
-                        <p:par>
-                          <p:cTn id="16" fill="hold">
-                            <p:stCondLst>
-                              <p:cond delay="0"/>
-                            </p:stCondLst>
-                            <p:childTnLst>
                               <p:par>
-                                <p:cTn id="17" presetID="2" presetClass="entr" presetSubtype="4" accel="50000" decel="50000" fill="hold" nodeType="clickEffect">
+                                <p:cTn id="13" presetID="2" presetClass="entr" presetSubtype="1" accel="50000" decel="50000" fill="hold" nodeType="withEffect">
                                   <p:stCondLst>
-                                    <p:cond delay="0"/>
+                                    <p:cond delay="360"/>
                                   </p:stCondLst>
                                   <p:childTnLst>
                                     <p:set>
                                       <p:cBhvr>
-                                        <p:cTn id="18" dur="1" fill="hold">
+                                        <p:cTn id="14" dur="1" fill="hold">
                                           <p:stCondLst>
                                             <p:cond delay="0"/>
                                           </p:stCondLst>
@@ -19470,7 +20037,7 @@
                                     </p:set>
                                     <p:anim calcmode="lin" valueType="num">
                                       <p:cBhvr additive="base">
-                                        <p:cTn id="19" dur="450" fill="hold"/>
+                                        <p:cTn id="15" dur="500" fill="hold"/>
                                         <p:tgtEl>
                                           <p:spTgt spid="28"/>
                                         </p:tgtEl>
@@ -19493,7 +20060,7 @@
                                     </p:anim>
                                     <p:anim calcmode="lin" valueType="num">
                                       <p:cBhvr additive="base">
-                                        <p:cTn id="20" dur="450" fill="hold"/>
+                                        <p:cTn id="16" dur="500" fill="hold"/>
                                         <p:tgtEl>
                                           <p:spTgt spid="28"/>
                                         </p:tgtEl>
@@ -19504,7 +20071,7 @@
                                       <p:tavLst>
                                         <p:tav tm="0">
                                           <p:val>
-                                            <p:strVal val="1+#ppt_h/2"/>
+                                            <p:strVal val="0-#ppt_h/2"/>
                                           </p:val>
                                         </p:tav>
                                         <p:tav tm="100000">

--- a/Du An/A Tuan Dan So/Bai 1. Nhap mon DSH - Light.pptx
+++ b/Du An/A Tuan Dan So/Bai 1. Nhap mon DSH - Light.pptx
@@ -142,7 +142,7 @@
           <p:cNvPr id="2" name="Title 1">
             <a:extLst>
               <a:ext uri="{FF2B5EF4-FFF2-40B4-BE49-F238E27FC236}">
-                <a16:creationId xmlns:a16="http://schemas.microsoft.com/office/drawing/2014/main" id="{792371E5-A925-BD7B-8F1C-4129482B1324}"/>
+                <a16:creationId xmlns:a16="http://schemas.microsoft.com/office/drawing/2014/main" id="{115D13B5-33B6-708F-7BDD-EFCE399AA481}"/>
               </a:ext>
             </a:extLst>
           </p:cNvPr>
@@ -179,7 +179,7 @@
           <p:cNvPr id="3" name="Subtitle 2">
             <a:extLst>
               <a:ext uri="{FF2B5EF4-FFF2-40B4-BE49-F238E27FC236}">
-                <a16:creationId xmlns:a16="http://schemas.microsoft.com/office/drawing/2014/main" id="{A125B9E2-19D3-8FDD-572C-7A327C02AB95}"/>
+                <a16:creationId xmlns:a16="http://schemas.microsoft.com/office/drawing/2014/main" id="{05F036FE-8E89-1C61-D1B0-08642D9CAEC8}"/>
               </a:ext>
             </a:extLst>
           </p:cNvPr>
@@ -249,7 +249,7 @@
           <p:cNvPr id="4" name="Date Placeholder 3">
             <a:extLst>
               <a:ext uri="{FF2B5EF4-FFF2-40B4-BE49-F238E27FC236}">
-                <a16:creationId xmlns:a16="http://schemas.microsoft.com/office/drawing/2014/main" id="{67B06FD4-FE46-B616-10DE-28C50CF7F846}"/>
+                <a16:creationId xmlns:a16="http://schemas.microsoft.com/office/drawing/2014/main" id="{5CD9739E-BF4B-D2C4-0D2B-F248B03960BD}"/>
               </a:ext>
             </a:extLst>
           </p:cNvPr>
@@ -265,7 +265,7 @@
           <a:bodyPr/>
           <a:lstStyle/>
           <a:p>
-            <a:fld id="{F614FA87-28C6-4ACF-86AE-679368991B93}" type="datetimeFigureOut">
+            <a:fld id="{A21F267D-4694-477B-A38C-A875D4734ADC}" type="datetimeFigureOut">
               <a:rPr lang="en-US" smtClean="0"/>
               <a:t>9/18/2026</a:t>
             </a:fld>
@@ -278,7 +278,7 @@
           <p:cNvPr id="5" name="Footer Placeholder 4">
             <a:extLst>
               <a:ext uri="{FF2B5EF4-FFF2-40B4-BE49-F238E27FC236}">
-                <a16:creationId xmlns:a16="http://schemas.microsoft.com/office/drawing/2014/main" id="{FD316FDB-206D-8095-2021-0ECFEE531846}"/>
+                <a16:creationId xmlns:a16="http://schemas.microsoft.com/office/drawing/2014/main" id="{599775C5-4B8F-2B96-4705-23C784C37609}"/>
               </a:ext>
             </a:extLst>
           </p:cNvPr>
@@ -303,7 +303,7 @@
           <p:cNvPr id="6" name="Slide Number Placeholder 5">
             <a:extLst>
               <a:ext uri="{FF2B5EF4-FFF2-40B4-BE49-F238E27FC236}">
-                <a16:creationId xmlns:a16="http://schemas.microsoft.com/office/drawing/2014/main" id="{D750BAD0-B564-666E-ED0D-F7F0C4C111E8}"/>
+                <a16:creationId xmlns:a16="http://schemas.microsoft.com/office/drawing/2014/main" id="{C68296CE-3C0B-CBC2-F62E-874E863C02DC}"/>
               </a:ext>
             </a:extLst>
           </p:cNvPr>
@@ -319,7 +319,7 @@
           <a:bodyPr/>
           <a:lstStyle/>
           <a:p>
-            <a:fld id="{478463AA-DF53-4948-AF28-EAEE1C209794}" type="slidenum">
+            <a:fld id="{D0A81B16-9128-4BF1-8F9E-9AD7E04BD758}" type="slidenum">
               <a:rPr lang="en-US" smtClean="0"/>
               <a:t>‹#›</a:t>
             </a:fld>
@@ -330,7 +330,7 @@
     </p:spTree>
     <p:extLst>
       <p:ext uri="{BB962C8B-B14F-4D97-AF65-F5344CB8AC3E}">
-        <p14:creationId xmlns:p14="http://schemas.microsoft.com/office/powerpoint/2010/main" val="4074666989"/>
+        <p14:creationId xmlns:p14="http://schemas.microsoft.com/office/powerpoint/2010/main" val="1071047020"/>
       </p:ext>
     </p:extLst>
   </p:cSld>
@@ -362,7 +362,7 @@
           <p:cNvPr id="2" name="Title 1">
             <a:extLst>
               <a:ext uri="{FF2B5EF4-FFF2-40B4-BE49-F238E27FC236}">
-                <a16:creationId xmlns:a16="http://schemas.microsoft.com/office/drawing/2014/main" id="{BF37A08A-BA9C-7C03-7C1D-9A889DE05068}"/>
+                <a16:creationId xmlns:a16="http://schemas.microsoft.com/office/drawing/2014/main" id="{D50CCA84-7C70-F2E5-3D8D-2765EF997B5A}"/>
               </a:ext>
             </a:extLst>
           </p:cNvPr>
@@ -390,7 +390,7 @@
           <p:cNvPr id="3" name="Vertical Text Placeholder 2">
             <a:extLst>
               <a:ext uri="{FF2B5EF4-FFF2-40B4-BE49-F238E27FC236}">
-                <a16:creationId xmlns:a16="http://schemas.microsoft.com/office/drawing/2014/main" id="{9C7E5182-2EB9-9BA7-7DD2-B3BA73C18F8A}"/>
+                <a16:creationId xmlns:a16="http://schemas.microsoft.com/office/drawing/2014/main" id="{B02ADBE2-72C8-095A-8E20-57828F69279D}"/>
               </a:ext>
             </a:extLst>
           </p:cNvPr>
@@ -447,7 +447,7 @@
           <p:cNvPr id="4" name="Date Placeholder 3">
             <a:extLst>
               <a:ext uri="{FF2B5EF4-FFF2-40B4-BE49-F238E27FC236}">
-                <a16:creationId xmlns:a16="http://schemas.microsoft.com/office/drawing/2014/main" id="{3086442E-4D5E-E3A5-E944-AACBD4CBFABD}"/>
+                <a16:creationId xmlns:a16="http://schemas.microsoft.com/office/drawing/2014/main" id="{90B2BDE5-D290-2105-C039-0A65BA6D361E}"/>
               </a:ext>
             </a:extLst>
           </p:cNvPr>
@@ -463,7 +463,7 @@
           <a:bodyPr/>
           <a:lstStyle/>
           <a:p>
-            <a:fld id="{F614FA87-28C6-4ACF-86AE-679368991B93}" type="datetimeFigureOut">
+            <a:fld id="{A21F267D-4694-477B-A38C-A875D4734ADC}" type="datetimeFigureOut">
               <a:rPr lang="en-US" smtClean="0"/>
               <a:t>9/18/2026</a:t>
             </a:fld>
@@ -476,7 +476,7 @@
           <p:cNvPr id="5" name="Footer Placeholder 4">
             <a:extLst>
               <a:ext uri="{FF2B5EF4-FFF2-40B4-BE49-F238E27FC236}">
-                <a16:creationId xmlns:a16="http://schemas.microsoft.com/office/drawing/2014/main" id="{03A9197E-0A27-6F79-B002-A57FF54152D8}"/>
+                <a16:creationId xmlns:a16="http://schemas.microsoft.com/office/drawing/2014/main" id="{4535670E-7FA7-51FE-E6D0-55894573E48B}"/>
               </a:ext>
             </a:extLst>
           </p:cNvPr>
@@ -501,7 +501,7 @@
           <p:cNvPr id="6" name="Slide Number Placeholder 5">
             <a:extLst>
               <a:ext uri="{FF2B5EF4-FFF2-40B4-BE49-F238E27FC236}">
-                <a16:creationId xmlns:a16="http://schemas.microsoft.com/office/drawing/2014/main" id="{949EB915-9C60-3813-78E5-5E3750185E74}"/>
+                <a16:creationId xmlns:a16="http://schemas.microsoft.com/office/drawing/2014/main" id="{864C5348-FCDB-566F-30E6-749398730AA9}"/>
               </a:ext>
             </a:extLst>
           </p:cNvPr>
@@ -517,7 +517,7 @@
           <a:bodyPr/>
           <a:lstStyle/>
           <a:p>
-            <a:fld id="{478463AA-DF53-4948-AF28-EAEE1C209794}" type="slidenum">
+            <a:fld id="{D0A81B16-9128-4BF1-8F9E-9AD7E04BD758}" type="slidenum">
               <a:rPr lang="en-US" smtClean="0"/>
               <a:t>‹#›</a:t>
             </a:fld>
@@ -528,7 +528,7 @@
     </p:spTree>
     <p:extLst>
       <p:ext uri="{BB962C8B-B14F-4D97-AF65-F5344CB8AC3E}">
-        <p14:creationId xmlns:p14="http://schemas.microsoft.com/office/powerpoint/2010/main" val="3598986447"/>
+        <p14:creationId xmlns:p14="http://schemas.microsoft.com/office/powerpoint/2010/main" val="1201611384"/>
       </p:ext>
     </p:extLst>
   </p:cSld>
@@ -560,7 +560,7 @@
           <p:cNvPr id="2" name="Vertical Title 1">
             <a:extLst>
               <a:ext uri="{FF2B5EF4-FFF2-40B4-BE49-F238E27FC236}">
-                <a16:creationId xmlns:a16="http://schemas.microsoft.com/office/drawing/2014/main" id="{446C58CE-3C89-F514-54B4-F77C3FB48C7D}"/>
+                <a16:creationId xmlns:a16="http://schemas.microsoft.com/office/drawing/2014/main" id="{77E315EA-89BD-BBC7-0E8C-404D31627CAC}"/>
               </a:ext>
             </a:extLst>
           </p:cNvPr>
@@ -593,7 +593,7 @@
           <p:cNvPr id="3" name="Vertical Text Placeholder 2">
             <a:extLst>
               <a:ext uri="{FF2B5EF4-FFF2-40B4-BE49-F238E27FC236}">
-                <a16:creationId xmlns:a16="http://schemas.microsoft.com/office/drawing/2014/main" id="{6AABBFD7-13C9-44DA-E139-E80D3035AC27}"/>
+                <a16:creationId xmlns:a16="http://schemas.microsoft.com/office/drawing/2014/main" id="{17277FB9-5E6A-1E9C-7125-61C9260A42D3}"/>
               </a:ext>
             </a:extLst>
           </p:cNvPr>
@@ -655,7 +655,7 @@
           <p:cNvPr id="4" name="Date Placeholder 3">
             <a:extLst>
               <a:ext uri="{FF2B5EF4-FFF2-40B4-BE49-F238E27FC236}">
-                <a16:creationId xmlns:a16="http://schemas.microsoft.com/office/drawing/2014/main" id="{84D64BD9-55F2-88FC-6C1E-43D79D8877F6}"/>
+                <a16:creationId xmlns:a16="http://schemas.microsoft.com/office/drawing/2014/main" id="{0E034BC4-8471-BE8F-E5DC-39584968F4DD}"/>
               </a:ext>
             </a:extLst>
           </p:cNvPr>
@@ -671,7 +671,7 @@
           <a:bodyPr/>
           <a:lstStyle/>
           <a:p>
-            <a:fld id="{F614FA87-28C6-4ACF-86AE-679368991B93}" type="datetimeFigureOut">
+            <a:fld id="{A21F267D-4694-477B-A38C-A875D4734ADC}" type="datetimeFigureOut">
               <a:rPr lang="en-US" smtClean="0"/>
               <a:t>9/18/2026</a:t>
             </a:fld>
@@ -684,7 +684,7 @@
           <p:cNvPr id="5" name="Footer Placeholder 4">
             <a:extLst>
               <a:ext uri="{FF2B5EF4-FFF2-40B4-BE49-F238E27FC236}">
-                <a16:creationId xmlns:a16="http://schemas.microsoft.com/office/drawing/2014/main" id="{19B22649-6317-CFB9-34FB-AF0B348E071F}"/>
+                <a16:creationId xmlns:a16="http://schemas.microsoft.com/office/drawing/2014/main" id="{2C28277A-D046-5A23-F977-A7C6AC47A599}"/>
               </a:ext>
             </a:extLst>
           </p:cNvPr>
@@ -709,7 +709,7 @@
           <p:cNvPr id="6" name="Slide Number Placeholder 5">
             <a:extLst>
               <a:ext uri="{FF2B5EF4-FFF2-40B4-BE49-F238E27FC236}">
-                <a16:creationId xmlns:a16="http://schemas.microsoft.com/office/drawing/2014/main" id="{154D7610-71C6-B655-9322-F3D272815F43}"/>
+                <a16:creationId xmlns:a16="http://schemas.microsoft.com/office/drawing/2014/main" id="{6B156F17-48B6-EE79-8505-9181C72D5326}"/>
               </a:ext>
             </a:extLst>
           </p:cNvPr>
@@ -725,7 +725,7 @@
           <a:bodyPr/>
           <a:lstStyle/>
           <a:p>
-            <a:fld id="{478463AA-DF53-4948-AF28-EAEE1C209794}" type="slidenum">
+            <a:fld id="{D0A81B16-9128-4BF1-8F9E-9AD7E04BD758}" type="slidenum">
               <a:rPr lang="en-US" smtClean="0"/>
               <a:t>‹#›</a:t>
             </a:fld>
@@ -736,7 +736,7 @@
     </p:spTree>
     <p:extLst>
       <p:ext uri="{BB962C8B-B14F-4D97-AF65-F5344CB8AC3E}">
-        <p14:creationId xmlns:p14="http://schemas.microsoft.com/office/powerpoint/2010/main" val="1396256139"/>
+        <p14:creationId xmlns:p14="http://schemas.microsoft.com/office/powerpoint/2010/main" val="2173519987"/>
       </p:ext>
     </p:extLst>
   </p:cSld>
@@ -768,7 +768,7 @@
           <p:cNvPr id="2" name="Title 1">
             <a:extLst>
               <a:ext uri="{FF2B5EF4-FFF2-40B4-BE49-F238E27FC236}">
-                <a16:creationId xmlns:a16="http://schemas.microsoft.com/office/drawing/2014/main" id="{FE387F97-2C04-00F0-68FF-22520703909E}"/>
+                <a16:creationId xmlns:a16="http://schemas.microsoft.com/office/drawing/2014/main" id="{86655416-6E7E-2882-CEDF-0A58F7EF95F4}"/>
               </a:ext>
             </a:extLst>
           </p:cNvPr>
@@ -796,7 +796,7 @@
           <p:cNvPr id="3" name="Content Placeholder 2">
             <a:extLst>
               <a:ext uri="{FF2B5EF4-FFF2-40B4-BE49-F238E27FC236}">
-                <a16:creationId xmlns:a16="http://schemas.microsoft.com/office/drawing/2014/main" id="{CB36A552-3597-3409-481B-D33B884B024F}"/>
+                <a16:creationId xmlns:a16="http://schemas.microsoft.com/office/drawing/2014/main" id="{6FC53833-55E0-BFDA-069F-2EB347D2FB2B}"/>
               </a:ext>
             </a:extLst>
           </p:cNvPr>
@@ -853,7 +853,7 @@
           <p:cNvPr id="4" name="Date Placeholder 3">
             <a:extLst>
               <a:ext uri="{FF2B5EF4-FFF2-40B4-BE49-F238E27FC236}">
-                <a16:creationId xmlns:a16="http://schemas.microsoft.com/office/drawing/2014/main" id="{0EAC7EE1-959E-42DA-E0F3-5FB35F42370C}"/>
+                <a16:creationId xmlns:a16="http://schemas.microsoft.com/office/drawing/2014/main" id="{CDE78DE6-8CEC-EEEA-06EB-EA465402BFE8}"/>
               </a:ext>
             </a:extLst>
           </p:cNvPr>
@@ -869,7 +869,7 @@
           <a:bodyPr/>
           <a:lstStyle/>
           <a:p>
-            <a:fld id="{F614FA87-28C6-4ACF-86AE-679368991B93}" type="datetimeFigureOut">
+            <a:fld id="{A21F267D-4694-477B-A38C-A875D4734ADC}" type="datetimeFigureOut">
               <a:rPr lang="en-US" smtClean="0"/>
               <a:t>9/18/2026</a:t>
             </a:fld>
@@ -882,7 +882,7 @@
           <p:cNvPr id="5" name="Footer Placeholder 4">
             <a:extLst>
               <a:ext uri="{FF2B5EF4-FFF2-40B4-BE49-F238E27FC236}">
-                <a16:creationId xmlns:a16="http://schemas.microsoft.com/office/drawing/2014/main" id="{0C73BCD9-7017-9566-3B55-97613449DA5B}"/>
+                <a16:creationId xmlns:a16="http://schemas.microsoft.com/office/drawing/2014/main" id="{69597056-ADE3-F079-6A64-3DE02E81F7DC}"/>
               </a:ext>
             </a:extLst>
           </p:cNvPr>
@@ -907,7 +907,7 @@
           <p:cNvPr id="6" name="Slide Number Placeholder 5">
             <a:extLst>
               <a:ext uri="{FF2B5EF4-FFF2-40B4-BE49-F238E27FC236}">
-                <a16:creationId xmlns:a16="http://schemas.microsoft.com/office/drawing/2014/main" id="{9E834D4F-7BC7-B8E5-89F4-3DA03FE475D3}"/>
+                <a16:creationId xmlns:a16="http://schemas.microsoft.com/office/drawing/2014/main" id="{651E8E35-510C-70EC-1351-EA6C6279EF35}"/>
               </a:ext>
             </a:extLst>
           </p:cNvPr>
@@ -923,7 +923,7 @@
           <a:bodyPr/>
           <a:lstStyle/>
           <a:p>
-            <a:fld id="{478463AA-DF53-4948-AF28-EAEE1C209794}" type="slidenum">
+            <a:fld id="{D0A81B16-9128-4BF1-8F9E-9AD7E04BD758}" type="slidenum">
               <a:rPr lang="en-US" smtClean="0"/>
               <a:t>‹#›</a:t>
             </a:fld>
@@ -934,7 +934,7 @@
     </p:spTree>
     <p:extLst>
       <p:ext uri="{BB962C8B-B14F-4D97-AF65-F5344CB8AC3E}">
-        <p14:creationId xmlns:p14="http://schemas.microsoft.com/office/powerpoint/2010/main" val="1391743402"/>
+        <p14:creationId xmlns:p14="http://schemas.microsoft.com/office/powerpoint/2010/main" val="2915854101"/>
       </p:ext>
     </p:extLst>
   </p:cSld>
@@ -966,7 +966,7 @@
           <p:cNvPr id="2" name="Title 1">
             <a:extLst>
               <a:ext uri="{FF2B5EF4-FFF2-40B4-BE49-F238E27FC236}">
-                <a16:creationId xmlns:a16="http://schemas.microsoft.com/office/drawing/2014/main" id="{60D19BCC-CEBD-3E9B-48F8-93D59400F71F}"/>
+                <a16:creationId xmlns:a16="http://schemas.microsoft.com/office/drawing/2014/main" id="{5BB849FB-EF89-7064-595E-5620EFCAA57C}"/>
               </a:ext>
             </a:extLst>
           </p:cNvPr>
@@ -1003,7 +1003,7 @@
           <p:cNvPr id="3" name="Text Placeholder 2">
             <a:extLst>
               <a:ext uri="{FF2B5EF4-FFF2-40B4-BE49-F238E27FC236}">
-                <a16:creationId xmlns:a16="http://schemas.microsoft.com/office/drawing/2014/main" id="{55A36C3B-24C2-1F62-A275-BC0C0294FC9C}"/>
+                <a16:creationId xmlns:a16="http://schemas.microsoft.com/office/drawing/2014/main" id="{A9D34285-7D2E-782C-A810-0BBAE6348DDC}"/>
               </a:ext>
             </a:extLst>
           </p:cNvPr>
@@ -1128,7 +1128,7 @@
           <p:cNvPr id="4" name="Date Placeholder 3">
             <a:extLst>
               <a:ext uri="{FF2B5EF4-FFF2-40B4-BE49-F238E27FC236}">
-                <a16:creationId xmlns:a16="http://schemas.microsoft.com/office/drawing/2014/main" id="{92822DDD-A8B1-1FD0-3232-B8118AC719D4}"/>
+                <a16:creationId xmlns:a16="http://schemas.microsoft.com/office/drawing/2014/main" id="{D002153F-45F0-3901-2CFC-79676BA3CE9C}"/>
               </a:ext>
             </a:extLst>
           </p:cNvPr>
@@ -1144,7 +1144,7 @@
           <a:bodyPr/>
           <a:lstStyle/>
           <a:p>
-            <a:fld id="{F614FA87-28C6-4ACF-86AE-679368991B93}" type="datetimeFigureOut">
+            <a:fld id="{A21F267D-4694-477B-A38C-A875D4734ADC}" type="datetimeFigureOut">
               <a:rPr lang="en-US" smtClean="0"/>
               <a:t>9/18/2026</a:t>
             </a:fld>
@@ -1157,7 +1157,7 @@
           <p:cNvPr id="5" name="Footer Placeholder 4">
             <a:extLst>
               <a:ext uri="{FF2B5EF4-FFF2-40B4-BE49-F238E27FC236}">
-                <a16:creationId xmlns:a16="http://schemas.microsoft.com/office/drawing/2014/main" id="{4856777F-0F17-AEC6-81B0-D9070243C4C2}"/>
+                <a16:creationId xmlns:a16="http://schemas.microsoft.com/office/drawing/2014/main" id="{38D9720C-8861-F743-5DE5-0F65F6B48583}"/>
               </a:ext>
             </a:extLst>
           </p:cNvPr>
@@ -1182,7 +1182,7 @@
           <p:cNvPr id="6" name="Slide Number Placeholder 5">
             <a:extLst>
               <a:ext uri="{FF2B5EF4-FFF2-40B4-BE49-F238E27FC236}">
-                <a16:creationId xmlns:a16="http://schemas.microsoft.com/office/drawing/2014/main" id="{9FB41D66-5BC9-7489-77D8-7A27E9C55125}"/>
+                <a16:creationId xmlns:a16="http://schemas.microsoft.com/office/drawing/2014/main" id="{6EA39B63-446B-16AB-EB8C-E35799FDD602}"/>
               </a:ext>
             </a:extLst>
           </p:cNvPr>
@@ -1198,7 +1198,7 @@
           <a:bodyPr/>
           <a:lstStyle/>
           <a:p>
-            <a:fld id="{478463AA-DF53-4948-AF28-EAEE1C209794}" type="slidenum">
+            <a:fld id="{D0A81B16-9128-4BF1-8F9E-9AD7E04BD758}" type="slidenum">
               <a:rPr lang="en-US" smtClean="0"/>
               <a:t>‹#›</a:t>
             </a:fld>
@@ -1209,7 +1209,7 @@
     </p:spTree>
     <p:extLst>
       <p:ext uri="{BB962C8B-B14F-4D97-AF65-F5344CB8AC3E}">
-        <p14:creationId xmlns:p14="http://schemas.microsoft.com/office/powerpoint/2010/main" val="2012030100"/>
+        <p14:creationId xmlns:p14="http://schemas.microsoft.com/office/powerpoint/2010/main" val="2732924932"/>
       </p:ext>
     </p:extLst>
   </p:cSld>
@@ -1241,7 +1241,7 @@
           <p:cNvPr id="2" name="Title 1">
             <a:extLst>
               <a:ext uri="{FF2B5EF4-FFF2-40B4-BE49-F238E27FC236}">
-                <a16:creationId xmlns:a16="http://schemas.microsoft.com/office/drawing/2014/main" id="{3DA00272-EC90-05ED-3D0D-6E591C7F7BFE}"/>
+                <a16:creationId xmlns:a16="http://schemas.microsoft.com/office/drawing/2014/main" id="{84F02DBA-0874-4259-44BD-E6DC6D712FD1}"/>
               </a:ext>
             </a:extLst>
           </p:cNvPr>
@@ -1269,7 +1269,7 @@
           <p:cNvPr id="3" name="Content Placeholder 2">
             <a:extLst>
               <a:ext uri="{FF2B5EF4-FFF2-40B4-BE49-F238E27FC236}">
-                <a16:creationId xmlns:a16="http://schemas.microsoft.com/office/drawing/2014/main" id="{F99F71CE-E7B3-A080-D11A-015140BE8257}"/>
+                <a16:creationId xmlns:a16="http://schemas.microsoft.com/office/drawing/2014/main" id="{CB9C20B8-E9B9-EB19-2C7C-03EF58EBD885}"/>
               </a:ext>
             </a:extLst>
           </p:cNvPr>
@@ -1331,7 +1331,7 @@
           <p:cNvPr id="4" name="Content Placeholder 3">
             <a:extLst>
               <a:ext uri="{FF2B5EF4-FFF2-40B4-BE49-F238E27FC236}">
-                <a16:creationId xmlns:a16="http://schemas.microsoft.com/office/drawing/2014/main" id="{0891E964-E473-F7F2-B6A3-733A558542E2}"/>
+                <a16:creationId xmlns:a16="http://schemas.microsoft.com/office/drawing/2014/main" id="{6CFD852B-F64C-31E4-532B-0AE1804C69D4}"/>
               </a:ext>
             </a:extLst>
           </p:cNvPr>
@@ -1393,7 +1393,7 @@
           <p:cNvPr id="5" name="Date Placeholder 4">
             <a:extLst>
               <a:ext uri="{FF2B5EF4-FFF2-40B4-BE49-F238E27FC236}">
-                <a16:creationId xmlns:a16="http://schemas.microsoft.com/office/drawing/2014/main" id="{32361A8B-172F-F43D-CEEB-C4194C1172F3}"/>
+                <a16:creationId xmlns:a16="http://schemas.microsoft.com/office/drawing/2014/main" id="{E4DF6EDD-41AA-56E1-987D-4AC20ABA5121}"/>
               </a:ext>
             </a:extLst>
           </p:cNvPr>
@@ -1409,7 +1409,7 @@
           <a:bodyPr/>
           <a:lstStyle/>
           <a:p>
-            <a:fld id="{F614FA87-28C6-4ACF-86AE-679368991B93}" type="datetimeFigureOut">
+            <a:fld id="{A21F267D-4694-477B-A38C-A875D4734ADC}" type="datetimeFigureOut">
               <a:rPr lang="en-US" smtClean="0"/>
               <a:t>9/18/2026</a:t>
             </a:fld>
@@ -1422,7 +1422,7 @@
           <p:cNvPr id="6" name="Footer Placeholder 5">
             <a:extLst>
               <a:ext uri="{FF2B5EF4-FFF2-40B4-BE49-F238E27FC236}">
-                <a16:creationId xmlns:a16="http://schemas.microsoft.com/office/drawing/2014/main" id="{C12476DA-D7C3-CE43-BC74-130ABC8002FA}"/>
+                <a16:creationId xmlns:a16="http://schemas.microsoft.com/office/drawing/2014/main" id="{EC6D44C2-BEDA-130F-A171-9F6C85A586D5}"/>
               </a:ext>
             </a:extLst>
           </p:cNvPr>
@@ -1447,7 +1447,7 @@
           <p:cNvPr id="7" name="Slide Number Placeholder 6">
             <a:extLst>
               <a:ext uri="{FF2B5EF4-FFF2-40B4-BE49-F238E27FC236}">
-                <a16:creationId xmlns:a16="http://schemas.microsoft.com/office/drawing/2014/main" id="{292CF837-E0D4-46E2-BFB8-130CB699B330}"/>
+                <a16:creationId xmlns:a16="http://schemas.microsoft.com/office/drawing/2014/main" id="{012F06EC-BA29-0E41-BE0C-772012387295}"/>
               </a:ext>
             </a:extLst>
           </p:cNvPr>
@@ -1463,7 +1463,7 @@
           <a:bodyPr/>
           <a:lstStyle/>
           <a:p>
-            <a:fld id="{478463AA-DF53-4948-AF28-EAEE1C209794}" type="slidenum">
+            <a:fld id="{D0A81B16-9128-4BF1-8F9E-9AD7E04BD758}" type="slidenum">
               <a:rPr lang="en-US" smtClean="0"/>
               <a:t>‹#›</a:t>
             </a:fld>
@@ -1474,7 +1474,7 @@
     </p:spTree>
     <p:extLst>
       <p:ext uri="{BB962C8B-B14F-4D97-AF65-F5344CB8AC3E}">
-        <p14:creationId xmlns:p14="http://schemas.microsoft.com/office/powerpoint/2010/main" val="1995289972"/>
+        <p14:creationId xmlns:p14="http://schemas.microsoft.com/office/powerpoint/2010/main" val="276350184"/>
       </p:ext>
     </p:extLst>
   </p:cSld>
@@ -1506,7 +1506,7 @@
           <p:cNvPr id="2" name="Title 1">
             <a:extLst>
               <a:ext uri="{FF2B5EF4-FFF2-40B4-BE49-F238E27FC236}">
-                <a16:creationId xmlns:a16="http://schemas.microsoft.com/office/drawing/2014/main" id="{C8492356-EAF6-B2B0-88CC-A343FB9C2883}"/>
+                <a16:creationId xmlns:a16="http://schemas.microsoft.com/office/drawing/2014/main" id="{53FED578-3AF0-B560-BDBA-B13AA53E02E9}"/>
               </a:ext>
             </a:extLst>
           </p:cNvPr>
@@ -1539,7 +1539,7 @@
           <p:cNvPr id="3" name="Text Placeholder 2">
             <a:extLst>
               <a:ext uri="{FF2B5EF4-FFF2-40B4-BE49-F238E27FC236}">
-                <a16:creationId xmlns:a16="http://schemas.microsoft.com/office/drawing/2014/main" id="{08911745-23BA-9387-4FB1-B0F276406E1D}"/>
+                <a16:creationId xmlns:a16="http://schemas.microsoft.com/office/drawing/2014/main" id="{0C43193F-3518-3C40-382C-C3548194F309}"/>
               </a:ext>
             </a:extLst>
           </p:cNvPr>
@@ -1610,7 +1610,7 @@
           <p:cNvPr id="4" name="Content Placeholder 3">
             <a:extLst>
               <a:ext uri="{FF2B5EF4-FFF2-40B4-BE49-F238E27FC236}">
-                <a16:creationId xmlns:a16="http://schemas.microsoft.com/office/drawing/2014/main" id="{2425B788-EC57-D35B-95DB-A19A5369B069}"/>
+                <a16:creationId xmlns:a16="http://schemas.microsoft.com/office/drawing/2014/main" id="{CCEBBEED-E89A-FF66-9F1C-E38E79FB4CD4}"/>
               </a:ext>
             </a:extLst>
           </p:cNvPr>
@@ -1672,7 +1672,7 @@
           <p:cNvPr id="5" name="Text Placeholder 4">
             <a:extLst>
               <a:ext uri="{FF2B5EF4-FFF2-40B4-BE49-F238E27FC236}">
-                <a16:creationId xmlns:a16="http://schemas.microsoft.com/office/drawing/2014/main" id="{8BD052C5-79E5-ED87-8497-5FEC26040393}"/>
+                <a16:creationId xmlns:a16="http://schemas.microsoft.com/office/drawing/2014/main" id="{B5013A4D-70A3-0E50-B155-A8751926D727}"/>
               </a:ext>
             </a:extLst>
           </p:cNvPr>
@@ -1743,7 +1743,7 @@
           <p:cNvPr id="6" name="Content Placeholder 5">
             <a:extLst>
               <a:ext uri="{FF2B5EF4-FFF2-40B4-BE49-F238E27FC236}">
-                <a16:creationId xmlns:a16="http://schemas.microsoft.com/office/drawing/2014/main" id="{54A5696A-4EA7-5BBB-385D-FED12958EA02}"/>
+                <a16:creationId xmlns:a16="http://schemas.microsoft.com/office/drawing/2014/main" id="{C13F09A6-5058-1D43-8396-1D6BF3413763}"/>
               </a:ext>
             </a:extLst>
           </p:cNvPr>
@@ -1805,7 +1805,7 @@
           <p:cNvPr id="7" name="Date Placeholder 6">
             <a:extLst>
               <a:ext uri="{FF2B5EF4-FFF2-40B4-BE49-F238E27FC236}">
-                <a16:creationId xmlns:a16="http://schemas.microsoft.com/office/drawing/2014/main" id="{9B99281D-9B08-A31F-56BF-0CD791813375}"/>
+                <a16:creationId xmlns:a16="http://schemas.microsoft.com/office/drawing/2014/main" id="{7120829B-2A5D-730C-E9D3-69C454682034}"/>
               </a:ext>
             </a:extLst>
           </p:cNvPr>
@@ -1821,7 +1821,7 @@
           <a:bodyPr/>
           <a:lstStyle/>
           <a:p>
-            <a:fld id="{F614FA87-28C6-4ACF-86AE-679368991B93}" type="datetimeFigureOut">
+            <a:fld id="{A21F267D-4694-477B-A38C-A875D4734ADC}" type="datetimeFigureOut">
               <a:rPr lang="en-US" smtClean="0"/>
               <a:t>9/18/2026</a:t>
             </a:fld>
@@ -1834,7 +1834,7 @@
           <p:cNvPr id="8" name="Footer Placeholder 7">
             <a:extLst>
               <a:ext uri="{FF2B5EF4-FFF2-40B4-BE49-F238E27FC236}">
-                <a16:creationId xmlns:a16="http://schemas.microsoft.com/office/drawing/2014/main" id="{63C2B048-E237-8795-B0F6-CAC98283541F}"/>
+                <a16:creationId xmlns:a16="http://schemas.microsoft.com/office/drawing/2014/main" id="{588F5394-327B-D39C-0342-4386B66C13E7}"/>
               </a:ext>
             </a:extLst>
           </p:cNvPr>
@@ -1859,7 +1859,7 @@
           <p:cNvPr id="9" name="Slide Number Placeholder 8">
             <a:extLst>
               <a:ext uri="{FF2B5EF4-FFF2-40B4-BE49-F238E27FC236}">
-                <a16:creationId xmlns:a16="http://schemas.microsoft.com/office/drawing/2014/main" id="{C9427F36-F454-1D87-4EB9-99248D3083FC}"/>
+                <a16:creationId xmlns:a16="http://schemas.microsoft.com/office/drawing/2014/main" id="{E31119F6-F1CF-A527-6BB8-F8FEBE1ADAD9}"/>
               </a:ext>
             </a:extLst>
           </p:cNvPr>
@@ -1875,7 +1875,7 @@
           <a:bodyPr/>
           <a:lstStyle/>
           <a:p>
-            <a:fld id="{478463AA-DF53-4948-AF28-EAEE1C209794}" type="slidenum">
+            <a:fld id="{D0A81B16-9128-4BF1-8F9E-9AD7E04BD758}" type="slidenum">
               <a:rPr lang="en-US" smtClean="0"/>
               <a:t>‹#›</a:t>
             </a:fld>
@@ -1886,7 +1886,7 @@
     </p:spTree>
     <p:extLst>
       <p:ext uri="{BB962C8B-B14F-4D97-AF65-F5344CB8AC3E}">
-        <p14:creationId xmlns:p14="http://schemas.microsoft.com/office/powerpoint/2010/main" val="1126305823"/>
+        <p14:creationId xmlns:p14="http://schemas.microsoft.com/office/powerpoint/2010/main" val="1796976680"/>
       </p:ext>
     </p:extLst>
   </p:cSld>
@@ -1918,7 +1918,7 @@
           <p:cNvPr id="2" name="Title 1">
             <a:extLst>
               <a:ext uri="{FF2B5EF4-FFF2-40B4-BE49-F238E27FC236}">
-                <a16:creationId xmlns:a16="http://schemas.microsoft.com/office/drawing/2014/main" id="{E0270136-BFA5-A2FE-0C90-87BE6E77CB69}"/>
+                <a16:creationId xmlns:a16="http://schemas.microsoft.com/office/drawing/2014/main" id="{3F915558-5B8E-E0DE-CA14-14331923EA80}"/>
               </a:ext>
             </a:extLst>
           </p:cNvPr>
@@ -1946,7 +1946,7 @@
           <p:cNvPr id="3" name="Date Placeholder 2">
             <a:extLst>
               <a:ext uri="{FF2B5EF4-FFF2-40B4-BE49-F238E27FC236}">
-                <a16:creationId xmlns:a16="http://schemas.microsoft.com/office/drawing/2014/main" id="{40A95AB2-164A-0229-E408-135A4CA04A34}"/>
+                <a16:creationId xmlns:a16="http://schemas.microsoft.com/office/drawing/2014/main" id="{5B2F3F98-0C19-3711-43EA-B3FC47FE363F}"/>
               </a:ext>
             </a:extLst>
           </p:cNvPr>
@@ -1962,7 +1962,7 @@
           <a:bodyPr/>
           <a:lstStyle/>
           <a:p>
-            <a:fld id="{F614FA87-28C6-4ACF-86AE-679368991B93}" type="datetimeFigureOut">
+            <a:fld id="{A21F267D-4694-477B-A38C-A875D4734ADC}" type="datetimeFigureOut">
               <a:rPr lang="en-US" smtClean="0"/>
               <a:t>9/18/2026</a:t>
             </a:fld>
@@ -1975,7 +1975,7 @@
           <p:cNvPr id="4" name="Footer Placeholder 3">
             <a:extLst>
               <a:ext uri="{FF2B5EF4-FFF2-40B4-BE49-F238E27FC236}">
-                <a16:creationId xmlns:a16="http://schemas.microsoft.com/office/drawing/2014/main" id="{A1510F5A-1481-EFC8-435C-1DBEE6A3E04B}"/>
+                <a16:creationId xmlns:a16="http://schemas.microsoft.com/office/drawing/2014/main" id="{2DE2A855-FE0D-280C-3E45-2DDF7720F4B7}"/>
               </a:ext>
             </a:extLst>
           </p:cNvPr>
@@ -2000,7 +2000,7 @@
           <p:cNvPr id="5" name="Slide Number Placeholder 4">
             <a:extLst>
               <a:ext uri="{FF2B5EF4-FFF2-40B4-BE49-F238E27FC236}">
-                <a16:creationId xmlns:a16="http://schemas.microsoft.com/office/drawing/2014/main" id="{99FE0285-6F5C-7E69-6A33-96EDA57397AE}"/>
+                <a16:creationId xmlns:a16="http://schemas.microsoft.com/office/drawing/2014/main" id="{91B6BF62-E06F-C312-9C69-B9B841DBB1E9}"/>
               </a:ext>
             </a:extLst>
           </p:cNvPr>
@@ -2016,7 +2016,7 @@
           <a:bodyPr/>
           <a:lstStyle/>
           <a:p>
-            <a:fld id="{478463AA-DF53-4948-AF28-EAEE1C209794}" type="slidenum">
+            <a:fld id="{D0A81B16-9128-4BF1-8F9E-9AD7E04BD758}" type="slidenum">
               <a:rPr lang="en-US" smtClean="0"/>
               <a:t>‹#›</a:t>
             </a:fld>
@@ -2027,7 +2027,7 @@
     </p:spTree>
     <p:extLst>
       <p:ext uri="{BB962C8B-B14F-4D97-AF65-F5344CB8AC3E}">
-        <p14:creationId xmlns:p14="http://schemas.microsoft.com/office/powerpoint/2010/main" val="3645919553"/>
+        <p14:creationId xmlns:p14="http://schemas.microsoft.com/office/powerpoint/2010/main" val="2945515552"/>
       </p:ext>
     </p:extLst>
   </p:cSld>
@@ -2059,7 +2059,7 @@
           <p:cNvPr id="2" name="Date Placeholder 1">
             <a:extLst>
               <a:ext uri="{FF2B5EF4-FFF2-40B4-BE49-F238E27FC236}">
-                <a16:creationId xmlns:a16="http://schemas.microsoft.com/office/drawing/2014/main" id="{DF4BCDCE-089F-5025-58E8-D63212C55F49}"/>
+                <a16:creationId xmlns:a16="http://schemas.microsoft.com/office/drawing/2014/main" id="{F3FE4197-265D-4774-62C0-7D0DA0746781}"/>
               </a:ext>
             </a:extLst>
           </p:cNvPr>
@@ -2075,7 +2075,7 @@
           <a:bodyPr/>
           <a:lstStyle/>
           <a:p>
-            <a:fld id="{F614FA87-28C6-4ACF-86AE-679368991B93}" type="datetimeFigureOut">
+            <a:fld id="{A21F267D-4694-477B-A38C-A875D4734ADC}" type="datetimeFigureOut">
               <a:rPr lang="en-US" smtClean="0"/>
               <a:t>9/18/2026</a:t>
             </a:fld>
@@ -2088,7 +2088,7 @@
           <p:cNvPr id="3" name="Footer Placeholder 2">
             <a:extLst>
               <a:ext uri="{FF2B5EF4-FFF2-40B4-BE49-F238E27FC236}">
-                <a16:creationId xmlns:a16="http://schemas.microsoft.com/office/drawing/2014/main" id="{A678A3DC-DF36-8D5D-BFD5-E43D472D4E47}"/>
+                <a16:creationId xmlns:a16="http://schemas.microsoft.com/office/drawing/2014/main" id="{32C20B1B-187A-C82D-396F-760A61D0CAA0}"/>
               </a:ext>
             </a:extLst>
           </p:cNvPr>
@@ -2113,7 +2113,7 @@
           <p:cNvPr id="4" name="Slide Number Placeholder 3">
             <a:extLst>
               <a:ext uri="{FF2B5EF4-FFF2-40B4-BE49-F238E27FC236}">
-                <a16:creationId xmlns:a16="http://schemas.microsoft.com/office/drawing/2014/main" id="{FF37914D-B297-03AB-4EF1-3BB03428AD9D}"/>
+                <a16:creationId xmlns:a16="http://schemas.microsoft.com/office/drawing/2014/main" id="{090E4484-034B-7FF5-9A59-548EF9782AFA}"/>
               </a:ext>
             </a:extLst>
           </p:cNvPr>
@@ -2129,7 +2129,7 @@
           <a:bodyPr/>
           <a:lstStyle/>
           <a:p>
-            <a:fld id="{478463AA-DF53-4948-AF28-EAEE1C209794}" type="slidenum">
+            <a:fld id="{D0A81B16-9128-4BF1-8F9E-9AD7E04BD758}" type="slidenum">
               <a:rPr lang="en-US" smtClean="0"/>
               <a:t>‹#›</a:t>
             </a:fld>
@@ -2140,7 +2140,7 @@
     </p:spTree>
     <p:extLst>
       <p:ext uri="{BB962C8B-B14F-4D97-AF65-F5344CB8AC3E}">
-        <p14:creationId xmlns:p14="http://schemas.microsoft.com/office/powerpoint/2010/main" val="2551536194"/>
+        <p14:creationId xmlns:p14="http://schemas.microsoft.com/office/powerpoint/2010/main" val="3388953496"/>
       </p:ext>
     </p:extLst>
   </p:cSld>
@@ -2172,7 +2172,7 @@
           <p:cNvPr id="2" name="Title 1">
             <a:extLst>
               <a:ext uri="{FF2B5EF4-FFF2-40B4-BE49-F238E27FC236}">
-                <a16:creationId xmlns:a16="http://schemas.microsoft.com/office/drawing/2014/main" id="{E7E0E80E-39E3-9E4D-6C0A-5146BBCA9024}"/>
+                <a16:creationId xmlns:a16="http://schemas.microsoft.com/office/drawing/2014/main" id="{BF222899-9897-9029-6B7F-DFC1F0195236}"/>
               </a:ext>
             </a:extLst>
           </p:cNvPr>
@@ -2209,7 +2209,7 @@
           <p:cNvPr id="3" name="Content Placeholder 2">
             <a:extLst>
               <a:ext uri="{FF2B5EF4-FFF2-40B4-BE49-F238E27FC236}">
-                <a16:creationId xmlns:a16="http://schemas.microsoft.com/office/drawing/2014/main" id="{39723BC9-DC8E-8704-83B1-7ACB40FEEFE5}"/>
+                <a16:creationId xmlns:a16="http://schemas.microsoft.com/office/drawing/2014/main" id="{CBB55E26-27CF-4493-E85B-E52B8487671E}"/>
               </a:ext>
             </a:extLst>
           </p:cNvPr>
@@ -2299,7 +2299,7 @@
           <p:cNvPr id="4" name="Text Placeholder 3">
             <a:extLst>
               <a:ext uri="{FF2B5EF4-FFF2-40B4-BE49-F238E27FC236}">
-                <a16:creationId xmlns:a16="http://schemas.microsoft.com/office/drawing/2014/main" id="{6569E9F5-7DD7-C89C-8B11-5173D5B06175}"/>
+                <a16:creationId xmlns:a16="http://schemas.microsoft.com/office/drawing/2014/main" id="{0C493EE2-4A1B-36DF-3D3A-B8C263161EDD}"/>
               </a:ext>
             </a:extLst>
           </p:cNvPr>
@@ -2370,7 +2370,7 @@
           <p:cNvPr id="5" name="Date Placeholder 4">
             <a:extLst>
               <a:ext uri="{FF2B5EF4-FFF2-40B4-BE49-F238E27FC236}">
-                <a16:creationId xmlns:a16="http://schemas.microsoft.com/office/drawing/2014/main" id="{7093F808-5437-793E-0939-A1DF7D86EB51}"/>
+                <a16:creationId xmlns:a16="http://schemas.microsoft.com/office/drawing/2014/main" id="{BF6A6954-DE4E-03B3-B875-9FEAB4967C27}"/>
               </a:ext>
             </a:extLst>
           </p:cNvPr>
@@ -2386,7 +2386,7 @@
           <a:bodyPr/>
           <a:lstStyle/>
           <a:p>
-            <a:fld id="{F614FA87-28C6-4ACF-86AE-679368991B93}" type="datetimeFigureOut">
+            <a:fld id="{A21F267D-4694-477B-A38C-A875D4734ADC}" type="datetimeFigureOut">
               <a:rPr lang="en-US" smtClean="0"/>
               <a:t>9/18/2026</a:t>
             </a:fld>
@@ -2399,7 +2399,7 @@
           <p:cNvPr id="6" name="Footer Placeholder 5">
             <a:extLst>
               <a:ext uri="{FF2B5EF4-FFF2-40B4-BE49-F238E27FC236}">
-                <a16:creationId xmlns:a16="http://schemas.microsoft.com/office/drawing/2014/main" id="{E66BDB55-DEFB-496E-1BB3-FC37DB326393}"/>
+                <a16:creationId xmlns:a16="http://schemas.microsoft.com/office/drawing/2014/main" id="{C85EAF85-7348-EA71-0404-6D44C87B5760}"/>
               </a:ext>
             </a:extLst>
           </p:cNvPr>
@@ -2424,7 +2424,7 @@
           <p:cNvPr id="7" name="Slide Number Placeholder 6">
             <a:extLst>
               <a:ext uri="{FF2B5EF4-FFF2-40B4-BE49-F238E27FC236}">
-                <a16:creationId xmlns:a16="http://schemas.microsoft.com/office/drawing/2014/main" id="{99D816BD-E08B-9077-8C43-B42F526BB215}"/>
+                <a16:creationId xmlns:a16="http://schemas.microsoft.com/office/drawing/2014/main" id="{0DB73215-ECEC-E4FD-4797-E73ACFD9788D}"/>
               </a:ext>
             </a:extLst>
           </p:cNvPr>
@@ -2440,7 +2440,7 @@
           <a:bodyPr/>
           <a:lstStyle/>
           <a:p>
-            <a:fld id="{478463AA-DF53-4948-AF28-EAEE1C209794}" type="slidenum">
+            <a:fld id="{D0A81B16-9128-4BF1-8F9E-9AD7E04BD758}" type="slidenum">
               <a:rPr lang="en-US" smtClean="0"/>
               <a:t>‹#›</a:t>
             </a:fld>
@@ -2451,7 +2451,7 @@
     </p:spTree>
     <p:extLst>
       <p:ext uri="{BB962C8B-B14F-4D97-AF65-F5344CB8AC3E}">
-        <p14:creationId xmlns:p14="http://schemas.microsoft.com/office/powerpoint/2010/main" val="3066894262"/>
+        <p14:creationId xmlns:p14="http://schemas.microsoft.com/office/powerpoint/2010/main" val="1489338120"/>
       </p:ext>
     </p:extLst>
   </p:cSld>
@@ -2483,7 +2483,7 @@
           <p:cNvPr id="2" name="Title 1">
             <a:extLst>
               <a:ext uri="{FF2B5EF4-FFF2-40B4-BE49-F238E27FC236}">
-                <a16:creationId xmlns:a16="http://schemas.microsoft.com/office/drawing/2014/main" id="{8DCE1922-2E80-6E5E-42B5-C87A1163366D}"/>
+                <a16:creationId xmlns:a16="http://schemas.microsoft.com/office/drawing/2014/main" id="{875C82CD-91CE-033A-7B02-B39D01ED311A}"/>
               </a:ext>
             </a:extLst>
           </p:cNvPr>
@@ -2520,7 +2520,7 @@
           <p:cNvPr id="3" name="Picture Placeholder 2">
             <a:extLst>
               <a:ext uri="{FF2B5EF4-FFF2-40B4-BE49-F238E27FC236}">
-                <a16:creationId xmlns:a16="http://schemas.microsoft.com/office/drawing/2014/main" id="{070CF053-B643-FEDE-1EA4-6312C4108203}"/>
+                <a16:creationId xmlns:a16="http://schemas.microsoft.com/office/drawing/2014/main" id="{A6BD26FA-EDE4-EDDA-DE91-8D48F1CA1FFA}"/>
               </a:ext>
             </a:extLst>
           </p:cNvPr>
@@ -2587,7 +2587,7 @@
           <p:cNvPr id="4" name="Text Placeholder 3">
             <a:extLst>
               <a:ext uri="{FF2B5EF4-FFF2-40B4-BE49-F238E27FC236}">
-                <a16:creationId xmlns:a16="http://schemas.microsoft.com/office/drawing/2014/main" id="{EE5767B4-77C5-F80B-2DE3-92035195F7E3}"/>
+                <a16:creationId xmlns:a16="http://schemas.microsoft.com/office/drawing/2014/main" id="{6338230C-8EA9-28BA-E64B-04E6406A9B29}"/>
               </a:ext>
             </a:extLst>
           </p:cNvPr>
@@ -2658,7 +2658,7 @@
           <p:cNvPr id="5" name="Date Placeholder 4">
             <a:extLst>
               <a:ext uri="{FF2B5EF4-FFF2-40B4-BE49-F238E27FC236}">
-                <a16:creationId xmlns:a16="http://schemas.microsoft.com/office/drawing/2014/main" id="{17246B03-2D09-31E1-F1D8-15D74EEFD799}"/>
+                <a16:creationId xmlns:a16="http://schemas.microsoft.com/office/drawing/2014/main" id="{80BE7B7F-CC59-8D06-A219-03A01364EC5D}"/>
               </a:ext>
             </a:extLst>
           </p:cNvPr>
@@ -2674,7 +2674,7 @@
           <a:bodyPr/>
           <a:lstStyle/>
           <a:p>
-            <a:fld id="{F614FA87-28C6-4ACF-86AE-679368991B93}" type="datetimeFigureOut">
+            <a:fld id="{A21F267D-4694-477B-A38C-A875D4734ADC}" type="datetimeFigureOut">
               <a:rPr lang="en-US" smtClean="0"/>
               <a:t>9/18/2026</a:t>
             </a:fld>
@@ -2687,7 +2687,7 @@
           <p:cNvPr id="6" name="Footer Placeholder 5">
             <a:extLst>
               <a:ext uri="{FF2B5EF4-FFF2-40B4-BE49-F238E27FC236}">
-                <a16:creationId xmlns:a16="http://schemas.microsoft.com/office/drawing/2014/main" id="{A2B0F50A-EBF1-7ED6-DA50-AB989CC87E30}"/>
+                <a16:creationId xmlns:a16="http://schemas.microsoft.com/office/drawing/2014/main" id="{D5EFC5D2-01FC-C2BC-28E7-3D788DBC128E}"/>
               </a:ext>
             </a:extLst>
           </p:cNvPr>
@@ -2712,7 +2712,7 @@
           <p:cNvPr id="7" name="Slide Number Placeholder 6">
             <a:extLst>
               <a:ext uri="{FF2B5EF4-FFF2-40B4-BE49-F238E27FC236}">
-                <a16:creationId xmlns:a16="http://schemas.microsoft.com/office/drawing/2014/main" id="{A8C7D219-DD9B-E4F6-7D1B-C526E4B3B746}"/>
+                <a16:creationId xmlns:a16="http://schemas.microsoft.com/office/drawing/2014/main" id="{4EA5FFCD-586B-B8CF-951A-FDC4019C842B}"/>
               </a:ext>
             </a:extLst>
           </p:cNvPr>
@@ -2728,7 +2728,7 @@
           <a:bodyPr/>
           <a:lstStyle/>
           <a:p>
-            <a:fld id="{478463AA-DF53-4948-AF28-EAEE1C209794}" type="slidenum">
+            <a:fld id="{D0A81B16-9128-4BF1-8F9E-9AD7E04BD758}" type="slidenum">
               <a:rPr lang="en-US" smtClean="0"/>
               <a:t>‹#›</a:t>
             </a:fld>
@@ -2739,7 +2739,7 @@
     </p:spTree>
     <p:extLst>
       <p:ext uri="{BB962C8B-B14F-4D97-AF65-F5344CB8AC3E}">
-        <p14:creationId xmlns:p14="http://schemas.microsoft.com/office/powerpoint/2010/main" val="3593177009"/>
+        <p14:creationId xmlns:p14="http://schemas.microsoft.com/office/powerpoint/2010/main" val="3870669309"/>
       </p:ext>
     </p:extLst>
   </p:cSld>
@@ -2776,7 +2776,7 @@
           <p:cNvPr id="2" name="Title Placeholder 1">
             <a:extLst>
               <a:ext uri="{FF2B5EF4-FFF2-40B4-BE49-F238E27FC236}">
-                <a16:creationId xmlns:a16="http://schemas.microsoft.com/office/drawing/2014/main" id="{6EBE9E48-AD69-215A-2E9F-311FCEDCEFDD}"/>
+                <a16:creationId xmlns:a16="http://schemas.microsoft.com/office/drawing/2014/main" id="{DFA6C610-286D-97B9-2FD1-EAD9E25F3733}"/>
               </a:ext>
             </a:extLst>
           </p:cNvPr>
@@ -2814,7 +2814,7 @@
           <p:cNvPr id="3" name="Text Placeholder 2">
             <a:extLst>
               <a:ext uri="{FF2B5EF4-FFF2-40B4-BE49-F238E27FC236}">
-                <a16:creationId xmlns:a16="http://schemas.microsoft.com/office/drawing/2014/main" id="{7E826673-8CBF-9EAE-497E-162E392BC1DA}"/>
+                <a16:creationId xmlns:a16="http://schemas.microsoft.com/office/drawing/2014/main" id="{9F8BEC48-0C8A-F9D2-2DD3-A2F07D964886}"/>
               </a:ext>
             </a:extLst>
           </p:cNvPr>
@@ -2881,7 +2881,7 @@
           <p:cNvPr id="4" name="Date Placeholder 3">
             <a:extLst>
               <a:ext uri="{FF2B5EF4-FFF2-40B4-BE49-F238E27FC236}">
-                <a16:creationId xmlns:a16="http://schemas.microsoft.com/office/drawing/2014/main" id="{71CC67BC-D3F3-28D9-3E71-59F49AF2525A}"/>
+                <a16:creationId xmlns:a16="http://schemas.microsoft.com/office/drawing/2014/main" id="{4FEA1DF4-4972-5920-436E-24896A90E8D7}"/>
               </a:ext>
             </a:extLst>
           </p:cNvPr>
@@ -2915,7 +2915,7 @@
             </a:lvl1pPr>
           </a:lstStyle>
           <a:p>
-            <a:fld id="{F614FA87-28C6-4ACF-86AE-679368991B93}" type="datetimeFigureOut">
+            <a:fld id="{A21F267D-4694-477B-A38C-A875D4734ADC}" type="datetimeFigureOut">
               <a:rPr lang="en-US" smtClean="0"/>
               <a:t>9/18/2026</a:t>
             </a:fld>
@@ -2928,7 +2928,7 @@
           <p:cNvPr id="5" name="Footer Placeholder 4">
             <a:extLst>
               <a:ext uri="{FF2B5EF4-FFF2-40B4-BE49-F238E27FC236}">
-                <a16:creationId xmlns:a16="http://schemas.microsoft.com/office/drawing/2014/main" id="{D75FB09C-539C-AB08-4CDF-035B26EC0E52}"/>
+                <a16:creationId xmlns:a16="http://schemas.microsoft.com/office/drawing/2014/main" id="{06401C15-7C6A-7746-F17E-B9786D7F5851}"/>
               </a:ext>
             </a:extLst>
           </p:cNvPr>
@@ -2971,7 +2971,7 @@
           <p:cNvPr id="6" name="Slide Number Placeholder 5">
             <a:extLst>
               <a:ext uri="{FF2B5EF4-FFF2-40B4-BE49-F238E27FC236}">
-                <a16:creationId xmlns:a16="http://schemas.microsoft.com/office/drawing/2014/main" id="{E4AC0FA8-1AFB-CDA5-E35C-3BB3CE3FC582}"/>
+                <a16:creationId xmlns:a16="http://schemas.microsoft.com/office/drawing/2014/main" id="{CA1ECA3F-1BF7-2F50-4A3E-2546753FF98D}"/>
               </a:ext>
             </a:extLst>
           </p:cNvPr>
@@ -3005,7 +3005,7 @@
             </a:lvl1pPr>
           </a:lstStyle>
           <a:p>
-            <a:fld id="{478463AA-DF53-4948-AF28-EAEE1C209794}" type="slidenum">
+            <a:fld id="{D0A81B16-9128-4BF1-8F9E-9AD7E04BD758}" type="slidenum">
               <a:rPr lang="en-US" smtClean="0"/>
               <a:t>‹#›</a:t>
             </a:fld>
@@ -3016,7 +3016,7 @@
     </p:spTree>
     <p:extLst>
       <p:ext uri="{BB962C8B-B14F-4D97-AF65-F5344CB8AC3E}">
-        <p14:creationId xmlns:p14="http://schemas.microsoft.com/office/powerpoint/2010/main" val="1243736478"/>
+        <p14:creationId xmlns:p14="http://schemas.microsoft.com/office/powerpoint/2010/main" val="2537538734"/>
       </p:ext>
     </p:extLst>
   </p:cSld>
@@ -3347,7 +3347,7 @@
           <p:cNvPr id="2" name="Rectangle 1">
             <a:extLst>
               <a:ext uri="{FF2B5EF4-FFF2-40B4-BE49-F238E27FC236}">
-                <a16:creationId xmlns:a16="http://schemas.microsoft.com/office/drawing/2014/main" id="{035FD054-A763-97CB-2129-E2D39CB20ED3}"/>
+                <a16:creationId xmlns:a16="http://schemas.microsoft.com/office/drawing/2014/main" id="{794D218A-A63E-DD6B-DC13-F25BACB5B916}"/>
               </a:ext>
             </a:extLst>
           </p:cNvPr>
@@ -3415,7 +3415,7 @@
           <p:cNvPr id="3" name="TextBox 2">
             <a:extLst>
               <a:ext uri="{FF2B5EF4-FFF2-40B4-BE49-F238E27FC236}">
-                <a16:creationId xmlns:a16="http://schemas.microsoft.com/office/drawing/2014/main" id="{3A17C459-CB79-B277-09C5-FEB560F20CDE}"/>
+                <a16:creationId xmlns:a16="http://schemas.microsoft.com/office/drawing/2014/main" id="{5ED0A632-E25B-67B4-0FB7-C411AFA1750F}"/>
               </a:ext>
             </a:extLst>
           </p:cNvPr>
@@ -3461,7 +3461,7 @@
           <p:cNvPr id="4" name="TextBox 3">
             <a:extLst>
               <a:ext uri="{FF2B5EF4-FFF2-40B4-BE49-F238E27FC236}">
-                <a16:creationId xmlns:a16="http://schemas.microsoft.com/office/drawing/2014/main" id="{25AFA51D-4EC8-9137-5BA7-97C853495FCE}"/>
+                <a16:creationId xmlns:a16="http://schemas.microsoft.com/office/drawing/2014/main" id="{04BC29A7-3669-F9C4-1E93-C71D51116E37}"/>
               </a:ext>
             </a:extLst>
           </p:cNvPr>
@@ -3501,7 +3501,7 @@
           <p:cNvPr id="5" name="TextBox 4">
             <a:extLst>
               <a:ext uri="{FF2B5EF4-FFF2-40B4-BE49-F238E27FC236}">
-                <a16:creationId xmlns:a16="http://schemas.microsoft.com/office/drawing/2014/main" id="{27820F8A-1B18-5A1A-3B11-0642FABACEB7}"/>
+                <a16:creationId xmlns:a16="http://schemas.microsoft.com/office/drawing/2014/main" id="{9B9E68AD-83A7-1DF8-95A5-18AAC987E239}"/>
               </a:ext>
             </a:extLst>
           </p:cNvPr>
@@ -3547,7 +3547,7 @@
           <p:cNvPr id="7" name="!!Stage_Hero_Container!!">
             <a:extLst>
               <a:ext uri="{FF2B5EF4-FFF2-40B4-BE49-F238E27FC236}">
-                <a16:creationId xmlns:a16="http://schemas.microsoft.com/office/drawing/2014/main" id="{6F92C81B-22EF-B5F9-C24A-FC3CCEEE4F07}"/>
+                <a16:creationId xmlns:a16="http://schemas.microsoft.com/office/drawing/2014/main" id="{6F448804-066B-14FF-B3E1-CDED1A936061}"/>
               </a:ext>
             </a:extLst>
           </p:cNvPr>
@@ -3586,7 +3586,7 @@
     </p:spTree>
     <p:extLst>
       <p:ext uri="{BB962C8B-B14F-4D97-AF65-F5344CB8AC3E}">
-        <p14:creationId xmlns:p14="http://schemas.microsoft.com/office/powerpoint/2010/main" val="965931642"/>
+        <p14:creationId xmlns:p14="http://schemas.microsoft.com/office/powerpoint/2010/main" val="1652228845"/>
       </p:ext>
     </p:extLst>
   </p:cSld>
@@ -3724,7 +3724,7 @@
           <p:cNvPr id="2" name="!!Anchor_Kicker_Rail!!">
             <a:extLst>
               <a:ext uri="{FF2B5EF4-FFF2-40B4-BE49-F238E27FC236}">
-                <a16:creationId xmlns:a16="http://schemas.microsoft.com/office/drawing/2014/main" id="{60AD5971-F17C-5F15-1339-810EDD7FFD34}"/>
+                <a16:creationId xmlns:a16="http://schemas.microsoft.com/office/drawing/2014/main" id="{E0CD76FB-AA75-E2CC-567F-F849C35640B0}"/>
               </a:ext>
             </a:extLst>
           </p:cNvPr>
@@ -3764,7 +3764,7 @@
           <p:cNvPr id="3" name="!!Anchor_Slide_Tracker!!">
             <a:extLst>
               <a:ext uri="{FF2B5EF4-FFF2-40B4-BE49-F238E27FC236}">
-                <a16:creationId xmlns:a16="http://schemas.microsoft.com/office/drawing/2014/main" id="{E1B01C02-78A2-BC93-3771-0F631DCB6F44}"/>
+                <a16:creationId xmlns:a16="http://schemas.microsoft.com/office/drawing/2014/main" id="{AE009E46-FA94-1023-872F-D7BB921074A2}"/>
               </a:ext>
             </a:extLst>
           </p:cNvPr>
@@ -3805,7 +3805,7 @@
           <p:cNvPr id="4" name="!!Anchor_Assertion_Title!!">
             <a:extLst>
               <a:ext uri="{FF2B5EF4-FFF2-40B4-BE49-F238E27FC236}">
-                <a16:creationId xmlns:a16="http://schemas.microsoft.com/office/drawing/2014/main" id="{CEC08025-5806-49ED-1701-C4243ED1405E}"/>
+                <a16:creationId xmlns:a16="http://schemas.microsoft.com/office/drawing/2014/main" id="{8AFD1398-F51C-99A0-8F63-CB32C3583BBA}"/>
               </a:ext>
             </a:extLst>
           </p:cNvPr>
@@ -3851,7 +3851,7 @@
           <p:cNvPr id="12" name="!!Stage_Hero_Container!!">
             <a:extLst>
               <a:ext uri="{FF2B5EF4-FFF2-40B4-BE49-F238E27FC236}">
-                <a16:creationId xmlns:a16="http://schemas.microsoft.com/office/drawing/2014/main" id="{0EC20494-83C0-691D-C12D-629C1A221A9B}"/>
+                <a16:creationId xmlns:a16="http://schemas.microsoft.com/office/drawing/2014/main" id="{535A761E-5C8C-ABC5-B0AD-D32F5798EE53}"/>
               </a:ext>
             </a:extLst>
           </p:cNvPr>
@@ -3871,7 +3871,7 @@
             <p:cNvPr id="6" name="Picture 5">
               <a:extLst>
                 <a:ext uri="{FF2B5EF4-FFF2-40B4-BE49-F238E27FC236}">
-                  <a16:creationId xmlns:a16="http://schemas.microsoft.com/office/drawing/2014/main" id="{FB63699E-3CE2-6772-958E-E34A6DEA712E}"/>
+                  <a16:creationId xmlns:a16="http://schemas.microsoft.com/office/drawing/2014/main" id="{8A7DE4DC-80EB-2708-D891-595D6D6E7351}"/>
                 </a:ext>
               </a:extLst>
             </p:cNvPr>
@@ -3912,7 +3912,7 @@
             <p:cNvPr id="7" name="Rectangle: Rounded Corners 6">
               <a:extLst>
                 <a:ext uri="{FF2B5EF4-FFF2-40B4-BE49-F238E27FC236}">
-                  <a16:creationId xmlns:a16="http://schemas.microsoft.com/office/drawing/2014/main" id="{EE5AF805-FD2D-2485-D12C-69A8F674EA71}"/>
+                  <a16:creationId xmlns:a16="http://schemas.microsoft.com/office/drawing/2014/main" id="{E6D86683-F9DA-E19A-BA3D-A5F52F2ABCDB}"/>
                 </a:ext>
               </a:extLst>
             </p:cNvPr>
@@ -3966,7 +3966,7 @@
             <p:cNvPr id="8" name="Oval 7">
               <a:extLst>
                 <a:ext uri="{FF2B5EF4-FFF2-40B4-BE49-F238E27FC236}">
-                  <a16:creationId xmlns:a16="http://schemas.microsoft.com/office/drawing/2014/main" id="{789F180F-A17A-5FA8-832D-AF783822B28F}"/>
+                  <a16:creationId xmlns:a16="http://schemas.microsoft.com/office/drawing/2014/main" id="{036EA02A-2E96-807D-4748-8B581DD40B58}"/>
                 </a:ext>
               </a:extLst>
             </p:cNvPr>
@@ -4034,7 +4034,7 @@
             <p:cNvPr id="10" name="Graphic 9">
               <a:extLst>
                 <a:ext uri="{FF2B5EF4-FFF2-40B4-BE49-F238E27FC236}">
-                  <a16:creationId xmlns:a16="http://schemas.microsoft.com/office/drawing/2014/main" id="{E1B7C8B8-016E-C164-8A1A-3DE3F5A7D002}"/>
+                  <a16:creationId xmlns:a16="http://schemas.microsoft.com/office/drawing/2014/main" id="{86250D30-8371-4779-25CD-791937C824B1}"/>
                 </a:ext>
               </a:extLst>
             </p:cNvPr>
@@ -4070,7 +4070,7 @@
             <p:cNvPr id="11" name="TextBox 10">
               <a:extLst>
                 <a:ext uri="{FF2B5EF4-FFF2-40B4-BE49-F238E27FC236}">
-                  <a16:creationId xmlns:a16="http://schemas.microsoft.com/office/drawing/2014/main" id="{AC4C1317-3A3B-EFF6-490F-CA29DF6DC0CD}"/>
+                  <a16:creationId xmlns:a16="http://schemas.microsoft.com/office/drawing/2014/main" id="{00D21D2F-875E-F702-A1F9-1149F75BCF95}"/>
                 </a:ext>
               </a:extLst>
             </p:cNvPr>
@@ -4135,7 +4135,7 @@
           <p:cNvPr id="18" name="!!Stage_Sub_Card_1!!">
             <a:extLst>
               <a:ext uri="{FF2B5EF4-FFF2-40B4-BE49-F238E27FC236}">
-                <a16:creationId xmlns:a16="http://schemas.microsoft.com/office/drawing/2014/main" id="{111C2D26-CDF4-128F-F351-CE5C14D39BD5}"/>
+                <a16:creationId xmlns:a16="http://schemas.microsoft.com/office/drawing/2014/main" id="{74529AC1-81FE-CA8B-51F6-B209889FF23F}"/>
               </a:ext>
             </a:extLst>
           </p:cNvPr>
@@ -4155,7 +4155,7 @@
             <p:cNvPr id="13" name="Rectangle: Rounded Corners 12">
               <a:extLst>
                 <a:ext uri="{FF2B5EF4-FFF2-40B4-BE49-F238E27FC236}">
-                  <a16:creationId xmlns:a16="http://schemas.microsoft.com/office/drawing/2014/main" id="{87692954-4E6B-19E9-DDAC-F09F1EF7DC89}"/>
+                  <a16:creationId xmlns:a16="http://schemas.microsoft.com/office/drawing/2014/main" id="{1BD38AF9-A2EC-710E-DCA9-572F376697AC}"/>
                 </a:ext>
               </a:extLst>
             </p:cNvPr>
@@ -4209,7 +4209,7 @@
             <p:cNvPr id="14" name="Oval 13">
               <a:extLst>
                 <a:ext uri="{FF2B5EF4-FFF2-40B4-BE49-F238E27FC236}">
-                  <a16:creationId xmlns:a16="http://schemas.microsoft.com/office/drawing/2014/main" id="{C7D073EC-6C4F-C127-7233-116580C5A6B0}"/>
+                  <a16:creationId xmlns:a16="http://schemas.microsoft.com/office/drawing/2014/main" id="{0D503FD0-4B51-4E13-ED57-4683FD09E10A}"/>
                 </a:ext>
               </a:extLst>
             </p:cNvPr>
@@ -4277,7 +4277,7 @@
             <p:cNvPr id="16" name="Graphic 15">
               <a:extLst>
                 <a:ext uri="{FF2B5EF4-FFF2-40B4-BE49-F238E27FC236}">
-                  <a16:creationId xmlns:a16="http://schemas.microsoft.com/office/drawing/2014/main" id="{7D4540F1-969D-8CB3-16C3-CCBB71088CF4}"/>
+                  <a16:creationId xmlns:a16="http://schemas.microsoft.com/office/drawing/2014/main" id="{F5FB63E6-887C-8B2F-8DA3-04E7FBA54DC5}"/>
                 </a:ext>
               </a:extLst>
             </p:cNvPr>
@@ -4313,7 +4313,7 @@
             <p:cNvPr id="17" name="TextBox 16">
               <a:extLst>
                 <a:ext uri="{FF2B5EF4-FFF2-40B4-BE49-F238E27FC236}">
-                  <a16:creationId xmlns:a16="http://schemas.microsoft.com/office/drawing/2014/main" id="{51C96BB6-F3A7-80B3-32E5-BDEAD9BCBEDC}"/>
+                  <a16:creationId xmlns:a16="http://schemas.microsoft.com/office/drawing/2014/main" id="{75BC6D07-071B-BC83-F78C-50124E3F2D90}"/>
                 </a:ext>
               </a:extLst>
             </p:cNvPr>
@@ -4375,7 +4375,7 @@
           <p:cNvPr id="24" name="!!Stage_Sub_Card_2!!">
             <a:extLst>
               <a:ext uri="{FF2B5EF4-FFF2-40B4-BE49-F238E27FC236}">
-                <a16:creationId xmlns:a16="http://schemas.microsoft.com/office/drawing/2014/main" id="{23AFD80D-550E-1B9F-93F8-F9E0FCC61B6C}"/>
+                <a16:creationId xmlns:a16="http://schemas.microsoft.com/office/drawing/2014/main" id="{8C245BDB-409A-17EE-50CF-2CD98650E1D0}"/>
               </a:ext>
             </a:extLst>
           </p:cNvPr>
@@ -4395,7 +4395,7 @@
             <p:cNvPr id="19" name="Rectangle: Rounded Corners 18">
               <a:extLst>
                 <a:ext uri="{FF2B5EF4-FFF2-40B4-BE49-F238E27FC236}">
-                  <a16:creationId xmlns:a16="http://schemas.microsoft.com/office/drawing/2014/main" id="{3FA1F263-8250-D4EF-B7F4-83CE81A700F6}"/>
+                  <a16:creationId xmlns:a16="http://schemas.microsoft.com/office/drawing/2014/main" id="{9708CF0E-FB03-9116-B58E-956169B0AD86}"/>
                 </a:ext>
               </a:extLst>
             </p:cNvPr>
@@ -4449,7 +4449,7 @@
             <p:cNvPr id="20" name="Oval 19">
               <a:extLst>
                 <a:ext uri="{FF2B5EF4-FFF2-40B4-BE49-F238E27FC236}">
-                  <a16:creationId xmlns:a16="http://schemas.microsoft.com/office/drawing/2014/main" id="{085D0CFE-E4C9-C543-1C7B-AEDA6756F2F9}"/>
+                  <a16:creationId xmlns:a16="http://schemas.microsoft.com/office/drawing/2014/main" id="{2F63811E-6210-B039-1694-FA87D41FD84E}"/>
                 </a:ext>
               </a:extLst>
             </p:cNvPr>
@@ -4517,7 +4517,7 @@
             <p:cNvPr id="22" name="Graphic 21">
               <a:extLst>
                 <a:ext uri="{FF2B5EF4-FFF2-40B4-BE49-F238E27FC236}">
-                  <a16:creationId xmlns:a16="http://schemas.microsoft.com/office/drawing/2014/main" id="{B5DE43AE-9374-717E-5176-5294818F6064}"/>
+                  <a16:creationId xmlns:a16="http://schemas.microsoft.com/office/drawing/2014/main" id="{07FB2515-7B17-C69B-7723-09C841659E00}"/>
                 </a:ext>
               </a:extLst>
             </p:cNvPr>
@@ -4553,7 +4553,7 @@
             <p:cNvPr id="23" name="TextBox 22">
               <a:extLst>
                 <a:ext uri="{FF2B5EF4-FFF2-40B4-BE49-F238E27FC236}">
-                  <a16:creationId xmlns:a16="http://schemas.microsoft.com/office/drawing/2014/main" id="{DC5EA1D5-AD7A-19B1-8EDC-DBDB568FBD33}"/>
+                  <a16:creationId xmlns:a16="http://schemas.microsoft.com/office/drawing/2014/main" id="{229BA214-5ABD-CAAC-E133-654FFF422F74}"/>
                 </a:ext>
               </a:extLst>
             </p:cNvPr>
@@ -4615,7 +4615,7 @@
           <p:cNvPr id="30" name="!!Stage_Sub_Card_3!!">
             <a:extLst>
               <a:ext uri="{FF2B5EF4-FFF2-40B4-BE49-F238E27FC236}">
-                <a16:creationId xmlns:a16="http://schemas.microsoft.com/office/drawing/2014/main" id="{DFF4A035-10F7-8C21-98B9-C2516EF5ED0B}"/>
+                <a16:creationId xmlns:a16="http://schemas.microsoft.com/office/drawing/2014/main" id="{EC1FCBFA-6124-2951-5D20-725F009E908A}"/>
               </a:ext>
             </a:extLst>
           </p:cNvPr>
@@ -4635,7 +4635,7 @@
             <p:cNvPr id="25" name="Rectangle: Rounded Corners 24">
               <a:extLst>
                 <a:ext uri="{FF2B5EF4-FFF2-40B4-BE49-F238E27FC236}">
-                  <a16:creationId xmlns:a16="http://schemas.microsoft.com/office/drawing/2014/main" id="{56BD2B8B-5ECF-CDB9-4779-E159B76FA664}"/>
+                  <a16:creationId xmlns:a16="http://schemas.microsoft.com/office/drawing/2014/main" id="{D43B9A88-3472-2419-385F-579EF9ED1E02}"/>
                 </a:ext>
               </a:extLst>
             </p:cNvPr>
@@ -4689,7 +4689,7 @@
             <p:cNvPr id="26" name="Oval 25">
               <a:extLst>
                 <a:ext uri="{FF2B5EF4-FFF2-40B4-BE49-F238E27FC236}">
-                  <a16:creationId xmlns:a16="http://schemas.microsoft.com/office/drawing/2014/main" id="{2CD0B22E-1E79-42BB-0B41-784BAF447C6F}"/>
+                  <a16:creationId xmlns:a16="http://schemas.microsoft.com/office/drawing/2014/main" id="{40BAC1F1-41C1-6BBE-472F-71FE2780FFA2}"/>
                 </a:ext>
               </a:extLst>
             </p:cNvPr>
@@ -4757,7 +4757,7 @@
             <p:cNvPr id="28" name="Graphic 27">
               <a:extLst>
                 <a:ext uri="{FF2B5EF4-FFF2-40B4-BE49-F238E27FC236}">
-                  <a16:creationId xmlns:a16="http://schemas.microsoft.com/office/drawing/2014/main" id="{13B58888-826D-9C83-77DF-777266DB060B}"/>
+                  <a16:creationId xmlns:a16="http://schemas.microsoft.com/office/drawing/2014/main" id="{D1300CB6-9E14-85F0-1604-35B9EE694F10}"/>
                 </a:ext>
               </a:extLst>
             </p:cNvPr>
@@ -4793,7 +4793,7 @@
             <p:cNvPr id="29" name="TextBox 28">
               <a:extLst>
                 <a:ext uri="{FF2B5EF4-FFF2-40B4-BE49-F238E27FC236}">
-                  <a16:creationId xmlns:a16="http://schemas.microsoft.com/office/drawing/2014/main" id="{71154149-A9D3-851A-3C5D-66C839C3E212}"/>
+                  <a16:creationId xmlns:a16="http://schemas.microsoft.com/office/drawing/2014/main" id="{93640421-1E84-3A11-16A0-21679920CFC8}"/>
                 </a:ext>
               </a:extLst>
             </p:cNvPr>
@@ -4855,7 +4855,7 @@
           <p:cNvPr id="31" name="!!Anchor_Source_Footer!!">
             <a:extLst>
               <a:ext uri="{FF2B5EF4-FFF2-40B4-BE49-F238E27FC236}">
-                <a16:creationId xmlns:a16="http://schemas.microsoft.com/office/drawing/2014/main" id="{8691AB60-223F-8245-F3E6-84D3F4B02778}"/>
+                <a16:creationId xmlns:a16="http://schemas.microsoft.com/office/drawing/2014/main" id="{5C99C22A-1A1A-F1F8-9F7C-BE073ECCF2ED}"/>
               </a:ext>
             </a:extLst>
           </p:cNvPr>
@@ -4893,7 +4893,7 @@
     </p:spTree>
     <p:extLst>
       <p:ext uri="{BB962C8B-B14F-4D97-AF65-F5344CB8AC3E}">
-        <p14:creationId xmlns:p14="http://schemas.microsoft.com/office/powerpoint/2010/main" val="1073221241"/>
+        <p14:creationId xmlns:p14="http://schemas.microsoft.com/office/powerpoint/2010/main" val="4246538919"/>
       </p:ext>
     </p:extLst>
   </p:cSld>
@@ -4924,9 +4924,6 @@
                     <p:cTn id="3" fill="hold">
                       <p:stCondLst>
                         <p:cond delay="indefinite"/>
-                        <p:cond evt="onBegin" delay="0">
-                          <p:tn val="2"/>
-                        </p:cond>
                       </p:stCondLst>
                       <p:childTnLst>
                         <p:par>
@@ -4936,9 +4933,9 @@
                             </p:stCondLst>
                             <p:childTnLst>
                               <p:par>
-                                <p:cTn id="5" presetID="2" presetClass="entr" presetSubtype="1" accel="50000" decel="50000" fill="hold" nodeType="withEffect">
+                                <p:cTn id="5" presetID="2" presetClass="entr" presetSubtype="1" accel="50000" decel="50000" fill="hold" nodeType="clickEffect">
                                   <p:stCondLst>
-                                    <p:cond delay="120"/>
+                                    <p:cond delay="0"/>
                                   </p:stCondLst>
                                   <p:childTnLst>
                                     <p:set>
@@ -5008,15 +5005,33 @@
                                   </p:childTnLst>
                                 </p:cTn>
                               </p:par>
+                            </p:childTnLst>
+                          </p:cTn>
+                        </p:par>
+                      </p:childTnLst>
+                    </p:cTn>
+                  </p:par>
+                  <p:par>
+                    <p:cTn id="9" fill="hold">
+                      <p:stCondLst>
+                        <p:cond delay="indefinite"/>
+                      </p:stCondLst>
+                      <p:childTnLst>
+                        <p:par>
+                          <p:cTn id="10" fill="hold">
+                            <p:stCondLst>
+                              <p:cond delay="0"/>
+                            </p:stCondLst>
+                            <p:childTnLst>
                               <p:par>
-                                <p:cTn id="9" presetID="2" presetClass="entr" presetSubtype="1" accel="50000" decel="50000" fill="hold" nodeType="withEffect">
+                                <p:cTn id="11" presetID="2" presetClass="entr" presetSubtype="1" accel="50000" decel="50000" fill="hold" nodeType="clickEffect">
                                   <p:stCondLst>
-                                    <p:cond delay="240"/>
+                                    <p:cond delay="0"/>
                                   </p:stCondLst>
                                   <p:childTnLst>
                                     <p:set>
                                       <p:cBhvr>
-                                        <p:cTn id="10" dur="1" fill="hold">
+                                        <p:cTn id="12" dur="1" fill="hold">
                                           <p:stCondLst>
                                             <p:cond delay="0"/>
                                           </p:stCondLst>
@@ -5034,7 +5049,7 @@
                                     </p:set>
                                     <p:anim calcmode="lin" valueType="num">
                                       <p:cBhvr additive="base">
-                                        <p:cTn id="11" dur="500" fill="hold"/>
+                                        <p:cTn id="13" dur="500" fill="hold"/>
                                         <p:tgtEl>
                                           <p:spTgt spid="24"/>
                                         </p:tgtEl>
@@ -5057,7 +5072,7 @@
                                     </p:anim>
                                     <p:anim calcmode="lin" valueType="num">
                                       <p:cBhvr additive="base">
-                                        <p:cTn id="12" dur="500" fill="hold"/>
+                                        <p:cTn id="14" dur="500" fill="hold"/>
                                         <p:tgtEl>
                                           <p:spTgt spid="24"/>
                                         </p:tgtEl>
@@ -5081,15 +5096,33 @@
                                   </p:childTnLst>
                                 </p:cTn>
                               </p:par>
+                            </p:childTnLst>
+                          </p:cTn>
+                        </p:par>
+                      </p:childTnLst>
+                    </p:cTn>
+                  </p:par>
+                  <p:par>
+                    <p:cTn id="15" fill="hold">
+                      <p:stCondLst>
+                        <p:cond delay="indefinite"/>
+                      </p:stCondLst>
+                      <p:childTnLst>
+                        <p:par>
+                          <p:cTn id="16" fill="hold">
+                            <p:stCondLst>
+                              <p:cond delay="0"/>
+                            </p:stCondLst>
+                            <p:childTnLst>
                               <p:par>
-                                <p:cTn id="13" presetID="2" presetClass="entr" presetSubtype="1" accel="50000" decel="50000" fill="hold" nodeType="withEffect">
+                                <p:cTn id="17" presetID="2" presetClass="entr" presetSubtype="1" accel="50000" decel="50000" fill="hold" nodeType="clickEffect">
                                   <p:stCondLst>
-                                    <p:cond delay="360"/>
+                                    <p:cond delay="0"/>
                                   </p:stCondLst>
                                   <p:childTnLst>
                                     <p:set>
                                       <p:cBhvr>
-                                        <p:cTn id="14" dur="1" fill="hold">
+                                        <p:cTn id="18" dur="1" fill="hold">
                                           <p:stCondLst>
                                             <p:cond delay="0"/>
                                           </p:stCondLst>
@@ -5107,7 +5140,7 @@
                                     </p:set>
                                     <p:anim calcmode="lin" valueType="num">
                                       <p:cBhvr additive="base">
-                                        <p:cTn id="15" dur="500" fill="hold"/>
+                                        <p:cTn id="19" dur="500" fill="hold"/>
                                         <p:tgtEl>
                                           <p:spTgt spid="30"/>
                                         </p:tgtEl>
@@ -5130,7 +5163,7 @@
                                     </p:anim>
                                     <p:anim calcmode="lin" valueType="num">
                                       <p:cBhvr additive="base">
-                                        <p:cTn id="16" dur="500" fill="hold"/>
+                                        <p:cTn id="20" dur="500" fill="hold"/>
                                         <p:tgtEl>
                                           <p:spTgt spid="30"/>
                                         </p:tgtEl>
@@ -5215,7 +5248,7 @@
           <p:cNvPr id="2" name="!!Anchor_Kicker_Rail!!">
             <a:extLst>
               <a:ext uri="{FF2B5EF4-FFF2-40B4-BE49-F238E27FC236}">
-                <a16:creationId xmlns:a16="http://schemas.microsoft.com/office/drawing/2014/main" id="{F5A3EB39-97D9-37D7-E4C7-FDE637F849FC}"/>
+                <a16:creationId xmlns:a16="http://schemas.microsoft.com/office/drawing/2014/main" id="{3FA7733F-5A21-22AB-F16B-48C6B9C55376}"/>
               </a:ext>
             </a:extLst>
           </p:cNvPr>
@@ -5255,7 +5288,7 @@
           <p:cNvPr id="3" name="!!Anchor_Slide_Tracker!!">
             <a:extLst>
               <a:ext uri="{FF2B5EF4-FFF2-40B4-BE49-F238E27FC236}">
-                <a16:creationId xmlns:a16="http://schemas.microsoft.com/office/drawing/2014/main" id="{B4BAFA8F-07CD-5A2F-8897-E1EB11042CB3}"/>
+                <a16:creationId xmlns:a16="http://schemas.microsoft.com/office/drawing/2014/main" id="{3A446ABC-FDA1-8D7A-2F8A-6789B30B1A86}"/>
               </a:ext>
             </a:extLst>
           </p:cNvPr>
@@ -5296,7 +5329,7 @@
           <p:cNvPr id="4" name="!!Anchor_Assertion_Title!!">
             <a:extLst>
               <a:ext uri="{FF2B5EF4-FFF2-40B4-BE49-F238E27FC236}">
-                <a16:creationId xmlns:a16="http://schemas.microsoft.com/office/drawing/2014/main" id="{C6DA1BCE-7AC1-9D13-39E1-F2200DDB04B7}"/>
+                <a16:creationId xmlns:a16="http://schemas.microsoft.com/office/drawing/2014/main" id="{8C8FAD69-A566-1B70-DB3D-22B254B0AE19}"/>
               </a:ext>
             </a:extLst>
           </p:cNvPr>
@@ -5336,7 +5369,7 @@
           <p:cNvPr id="6" name="!!Stage_Hero_Container!!">
             <a:extLst>
               <a:ext uri="{FF2B5EF4-FFF2-40B4-BE49-F238E27FC236}">
-                <a16:creationId xmlns:a16="http://schemas.microsoft.com/office/drawing/2014/main" id="{5A2791F6-7FD6-7522-9B4E-0660FBD20D5F}"/>
+                <a16:creationId xmlns:a16="http://schemas.microsoft.com/office/drawing/2014/main" id="{7E94B335-01D9-3481-DDC2-141862060DA1}"/>
               </a:ext>
             </a:extLst>
           </p:cNvPr>
@@ -5377,7 +5410,7 @@
           <p:cNvPr id="12" name="!!Stage_Sub_Card_1!!">
             <a:extLst>
               <a:ext uri="{FF2B5EF4-FFF2-40B4-BE49-F238E27FC236}">
-                <a16:creationId xmlns:a16="http://schemas.microsoft.com/office/drawing/2014/main" id="{1A66A98A-E82C-A36C-26EF-9A48356D84E6}"/>
+                <a16:creationId xmlns:a16="http://schemas.microsoft.com/office/drawing/2014/main" id="{120B867B-246C-EF94-909D-80AFB6CFE1B6}"/>
               </a:ext>
             </a:extLst>
           </p:cNvPr>
@@ -5397,7 +5430,7 @@
             <p:cNvPr id="7" name="Rectangle: Rounded Corners 6">
               <a:extLst>
                 <a:ext uri="{FF2B5EF4-FFF2-40B4-BE49-F238E27FC236}">
-                  <a16:creationId xmlns:a16="http://schemas.microsoft.com/office/drawing/2014/main" id="{7C1DCABD-65EA-0C90-A96D-50A5C7823EF3}"/>
+                  <a16:creationId xmlns:a16="http://schemas.microsoft.com/office/drawing/2014/main" id="{01E1611D-199F-1C17-42FF-7CE3F9CEC525}"/>
                 </a:ext>
               </a:extLst>
             </p:cNvPr>
@@ -5451,7 +5484,7 @@
             <p:cNvPr id="8" name="Oval 7">
               <a:extLst>
                 <a:ext uri="{FF2B5EF4-FFF2-40B4-BE49-F238E27FC236}">
-                  <a16:creationId xmlns:a16="http://schemas.microsoft.com/office/drawing/2014/main" id="{F2F385A8-58EF-A4BF-FD23-9D7FFB045DDD}"/>
+                  <a16:creationId xmlns:a16="http://schemas.microsoft.com/office/drawing/2014/main" id="{6E4FB1F1-7EE7-14E6-4F04-E7CF8A6A9AF1}"/>
                 </a:ext>
               </a:extLst>
             </p:cNvPr>
@@ -5519,7 +5552,7 @@
             <p:cNvPr id="10" name="Graphic 9">
               <a:extLst>
                 <a:ext uri="{FF2B5EF4-FFF2-40B4-BE49-F238E27FC236}">
-                  <a16:creationId xmlns:a16="http://schemas.microsoft.com/office/drawing/2014/main" id="{6B7EA861-9665-F991-6D9E-9962488B49B7}"/>
+                  <a16:creationId xmlns:a16="http://schemas.microsoft.com/office/drawing/2014/main" id="{F5CE426C-3233-AC35-5118-27CB7DCB054C}"/>
                 </a:ext>
               </a:extLst>
             </p:cNvPr>
@@ -5555,7 +5588,7 @@
             <p:cNvPr id="11" name="TextBox 10">
               <a:extLst>
                 <a:ext uri="{FF2B5EF4-FFF2-40B4-BE49-F238E27FC236}">
-                  <a16:creationId xmlns:a16="http://schemas.microsoft.com/office/drawing/2014/main" id="{D782B56E-447B-B695-B3DB-15E9D3FA76DA}"/>
+                  <a16:creationId xmlns:a16="http://schemas.microsoft.com/office/drawing/2014/main" id="{7DCE646A-DEE4-94BD-3E5B-56F83DF19111}"/>
                 </a:ext>
               </a:extLst>
             </p:cNvPr>
@@ -5617,7 +5650,7 @@
           <p:cNvPr id="18" name="!!Stage_Sub_Card_2!!">
             <a:extLst>
               <a:ext uri="{FF2B5EF4-FFF2-40B4-BE49-F238E27FC236}">
-                <a16:creationId xmlns:a16="http://schemas.microsoft.com/office/drawing/2014/main" id="{48E30B83-4900-7710-DE36-F410C772D736}"/>
+                <a16:creationId xmlns:a16="http://schemas.microsoft.com/office/drawing/2014/main" id="{78F3AEA3-76E9-EAD5-96E3-1FA22C412EC6}"/>
               </a:ext>
             </a:extLst>
           </p:cNvPr>
@@ -5637,7 +5670,7 @@
             <p:cNvPr id="13" name="Rectangle: Rounded Corners 12">
               <a:extLst>
                 <a:ext uri="{FF2B5EF4-FFF2-40B4-BE49-F238E27FC236}">
-                  <a16:creationId xmlns:a16="http://schemas.microsoft.com/office/drawing/2014/main" id="{CD638C7F-F2D7-237A-DEE7-C66A8E58786B}"/>
+                  <a16:creationId xmlns:a16="http://schemas.microsoft.com/office/drawing/2014/main" id="{BFF59917-5BAA-275E-32E9-6035B1CE0D84}"/>
                 </a:ext>
               </a:extLst>
             </p:cNvPr>
@@ -5691,7 +5724,7 @@
             <p:cNvPr id="14" name="Oval 13">
               <a:extLst>
                 <a:ext uri="{FF2B5EF4-FFF2-40B4-BE49-F238E27FC236}">
-                  <a16:creationId xmlns:a16="http://schemas.microsoft.com/office/drawing/2014/main" id="{8990E480-3A66-6BA4-7B2F-2C8247FDBC61}"/>
+                  <a16:creationId xmlns:a16="http://schemas.microsoft.com/office/drawing/2014/main" id="{4D4AAB7C-073F-29B4-3B7B-CCBE1D59DBCC}"/>
                 </a:ext>
               </a:extLst>
             </p:cNvPr>
@@ -5759,7 +5792,7 @@
             <p:cNvPr id="16" name="Graphic 15">
               <a:extLst>
                 <a:ext uri="{FF2B5EF4-FFF2-40B4-BE49-F238E27FC236}">
-                  <a16:creationId xmlns:a16="http://schemas.microsoft.com/office/drawing/2014/main" id="{A89D0157-3E78-FF4C-FBED-2FFFC9CA5099}"/>
+                  <a16:creationId xmlns:a16="http://schemas.microsoft.com/office/drawing/2014/main" id="{5022D82F-4A9A-319C-1D48-AC6FD16AC56A}"/>
                 </a:ext>
               </a:extLst>
             </p:cNvPr>
@@ -5795,7 +5828,7 @@
             <p:cNvPr id="17" name="TextBox 16">
               <a:extLst>
                 <a:ext uri="{FF2B5EF4-FFF2-40B4-BE49-F238E27FC236}">
-                  <a16:creationId xmlns:a16="http://schemas.microsoft.com/office/drawing/2014/main" id="{C15BC5DE-A5CA-1E7C-25C9-51D30FCFA243}"/>
+                  <a16:creationId xmlns:a16="http://schemas.microsoft.com/office/drawing/2014/main" id="{8FE6B092-F3CE-80B7-22C4-F97F780722D7}"/>
                 </a:ext>
               </a:extLst>
             </p:cNvPr>
@@ -5857,7 +5890,7 @@
           <p:cNvPr id="24" name="!!Stage_Sub_Card_3!!">
             <a:extLst>
               <a:ext uri="{FF2B5EF4-FFF2-40B4-BE49-F238E27FC236}">
-                <a16:creationId xmlns:a16="http://schemas.microsoft.com/office/drawing/2014/main" id="{D307EC52-4BB4-CF5C-D910-34FD4585993E}"/>
+                <a16:creationId xmlns:a16="http://schemas.microsoft.com/office/drawing/2014/main" id="{A84785BE-1694-2E4E-EF31-BF630E6D2FC6}"/>
               </a:ext>
             </a:extLst>
           </p:cNvPr>
@@ -5877,7 +5910,7 @@
             <p:cNvPr id="19" name="Rectangle: Rounded Corners 18">
               <a:extLst>
                 <a:ext uri="{FF2B5EF4-FFF2-40B4-BE49-F238E27FC236}">
-                  <a16:creationId xmlns:a16="http://schemas.microsoft.com/office/drawing/2014/main" id="{305A21FA-FE1E-EFB4-9766-6A549CCB801B}"/>
+                  <a16:creationId xmlns:a16="http://schemas.microsoft.com/office/drawing/2014/main" id="{BBDE1734-873F-88E5-115E-738DB3377C66}"/>
                 </a:ext>
               </a:extLst>
             </p:cNvPr>
@@ -5931,7 +5964,7 @@
             <p:cNvPr id="20" name="Oval 19">
               <a:extLst>
                 <a:ext uri="{FF2B5EF4-FFF2-40B4-BE49-F238E27FC236}">
-                  <a16:creationId xmlns:a16="http://schemas.microsoft.com/office/drawing/2014/main" id="{9CE70A87-1D26-880D-C958-980EBDDA154E}"/>
+                  <a16:creationId xmlns:a16="http://schemas.microsoft.com/office/drawing/2014/main" id="{5D3C055F-E092-D501-4BC2-F1DF3B3CE11A}"/>
                 </a:ext>
               </a:extLst>
             </p:cNvPr>
@@ -5999,7 +6032,7 @@
             <p:cNvPr id="22" name="Graphic 21">
               <a:extLst>
                 <a:ext uri="{FF2B5EF4-FFF2-40B4-BE49-F238E27FC236}">
-                  <a16:creationId xmlns:a16="http://schemas.microsoft.com/office/drawing/2014/main" id="{7C1C6D9A-ED27-02E4-50D2-8081355E6BE1}"/>
+                  <a16:creationId xmlns:a16="http://schemas.microsoft.com/office/drawing/2014/main" id="{1707B928-9079-C03B-5E0E-43BEADF8C3DF}"/>
                 </a:ext>
               </a:extLst>
             </p:cNvPr>
@@ -6035,7 +6068,7 @@
             <p:cNvPr id="23" name="TextBox 22">
               <a:extLst>
                 <a:ext uri="{FF2B5EF4-FFF2-40B4-BE49-F238E27FC236}">
-                  <a16:creationId xmlns:a16="http://schemas.microsoft.com/office/drawing/2014/main" id="{FF3DF165-7801-3CBB-4C46-2EE3036EEBAA}"/>
+                  <a16:creationId xmlns:a16="http://schemas.microsoft.com/office/drawing/2014/main" id="{67DD6130-9D03-7861-31EC-0A9984DFB487}"/>
                 </a:ext>
               </a:extLst>
             </p:cNvPr>
@@ -6097,7 +6130,7 @@
           <p:cNvPr id="25" name="!!Anchor_Source_Footer!!">
             <a:extLst>
               <a:ext uri="{FF2B5EF4-FFF2-40B4-BE49-F238E27FC236}">
-                <a16:creationId xmlns:a16="http://schemas.microsoft.com/office/drawing/2014/main" id="{7A65FD57-7CA3-EDDD-922B-6C0C854D05A2}"/>
+                <a16:creationId xmlns:a16="http://schemas.microsoft.com/office/drawing/2014/main" id="{0320AE4B-CC95-D644-C6AC-0F4D3BE37669}"/>
               </a:ext>
             </a:extLst>
           </p:cNvPr>
@@ -6135,7 +6168,7 @@
     </p:spTree>
     <p:extLst>
       <p:ext uri="{BB962C8B-B14F-4D97-AF65-F5344CB8AC3E}">
-        <p14:creationId xmlns:p14="http://schemas.microsoft.com/office/powerpoint/2010/main" val="2572032486"/>
+        <p14:creationId xmlns:p14="http://schemas.microsoft.com/office/powerpoint/2010/main" val="1714151813"/>
       </p:ext>
     </p:extLst>
   </p:cSld>
@@ -6166,9 +6199,6 @@
                     <p:cTn id="3" fill="hold">
                       <p:stCondLst>
                         <p:cond delay="indefinite"/>
-                        <p:cond evt="onBegin" delay="0">
-                          <p:tn val="2"/>
-                        </p:cond>
                       </p:stCondLst>
                       <p:childTnLst>
                         <p:par>
@@ -6178,9 +6208,9 @@
                             </p:stCondLst>
                             <p:childTnLst>
                               <p:par>
-                                <p:cTn id="5" presetID="2" presetClass="entr" presetSubtype="1" accel="50000" decel="50000" fill="hold" nodeType="withEffect">
+                                <p:cTn id="5" presetID="2" presetClass="entr" presetSubtype="1" accel="50000" decel="50000" fill="hold" nodeType="clickEffect">
                                   <p:stCondLst>
-                                    <p:cond delay="120"/>
+                                    <p:cond delay="0"/>
                                   </p:stCondLst>
                                   <p:childTnLst>
                                     <p:set>
@@ -6250,15 +6280,33 @@
                                   </p:childTnLst>
                                 </p:cTn>
                               </p:par>
+                            </p:childTnLst>
+                          </p:cTn>
+                        </p:par>
+                      </p:childTnLst>
+                    </p:cTn>
+                  </p:par>
+                  <p:par>
+                    <p:cTn id="9" fill="hold">
+                      <p:stCondLst>
+                        <p:cond delay="indefinite"/>
+                      </p:stCondLst>
+                      <p:childTnLst>
+                        <p:par>
+                          <p:cTn id="10" fill="hold">
+                            <p:stCondLst>
+                              <p:cond delay="0"/>
+                            </p:stCondLst>
+                            <p:childTnLst>
                               <p:par>
-                                <p:cTn id="9" presetID="2" presetClass="entr" presetSubtype="1" accel="50000" decel="50000" fill="hold" nodeType="withEffect">
+                                <p:cTn id="11" presetID="2" presetClass="entr" presetSubtype="1" accel="50000" decel="50000" fill="hold" nodeType="clickEffect">
                                   <p:stCondLst>
-                                    <p:cond delay="240"/>
+                                    <p:cond delay="0"/>
                                   </p:stCondLst>
                                   <p:childTnLst>
                                     <p:set>
                                       <p:cBhvr>
-                                        <p:cTn id="10" dur="1" fill="hold">
+                                        <p:cTn id="12" dur="1" fill="hold">
                                           <p:stCondLst>
                                             <p:cond delay="0"/>
                                           </p:stCondLst>
@@ -6276,7 +6324,7 @@
                                     </p:set>
                                     <p:anim calcmode="lin" valueType="num">
                                       <p:cBhvr additive="base">
-                                        <p:cTn id="11" dur="500" fill="hold"/>
+                                        <p:cTn id="13" dur="500" fill="hold"/>
                                         <p:tgtEl>
                                           <p:spTgt spid="18"/>
                                         </p:tgtEl>
@@ -6299,7 +6347,7 @@
                                     </p:anim>
                                     <p:anim calcmode="lin" valueType="num">
                                       <p:cBhvr additive="base">
-                                        <p:cTn id="12" dur="500" fill="hold"/>
+                                        <p:cTn id="14" dur="500" fill="hold"/>
                                         <p:tgtEl>
                                           <p:spTgt spid="18"/>
                                         </p:tgtEl>
@@ -6323,15 +6371,33 @@
                                   </p:childTnLst>
                                 </p:cTn>
                               </p:par>
+                            </p:childTnLst>
+                          </p:cTn>
+                        </p:par>
+                      </p:childTnLst>
+                    </p:cTn>
+                  </p:par>
+                  <p:par>
+                    <p:cTn id="15" fill="hold">
+                      <p:stCondLst>
+                        <p:cond delay="indefinite"/>
+                      </p:stCondLst>
+                      <p:childTnLst>
+                        <p:par>
+                          <p:cTn id="16" fill="hold">
+                            <p:stCondLst>
+                              <p:cond delay="0"/>
+                            </p:stCondLst>
+                            <p:childTnLst>
                               <p:par>
-                                <p:cTn id="13" presetID="2" presetClass="entr" presetSubtype="1" accel="50000" decel="50000" fill="hold" nodeType="withEffect">
+                                <p:cTn id="17" presetID="2" presetClass="entr" presetSubtype="1" accel="50000" decel="50000" fill="hold" nodeType="clickEffect">
                                   <p:stCondLst>
-                                    <p:cond delay="360"/>
+                                    <p:cond delay="0"/>
                                   </p:stCondLst>
                                   <p:childTnLst>
                                     <p:set>
                                       <p:cBhvr>
-                                        <p:cTn id="14" dur="1" fill="hold">
+                                        <p:cTn id="18" dur="1" fill="hold">
                                           <p:stCondLst>
                                             <p:cond delay="0"/>
                                           </p:stCondLst>
@@ -6349,7 +6415,7 @@
                                     </p:set>
                                     <p:anim calcmode="lin" valueType="num">
                                       <p:cBhvr additive="base">
-                                        <p:cTn id="15" dur="500" fill="hold"/>
+                                        <p:cTn id="19" dur="500" fill="hold"/>
                                         <p:tgtEl>
                                           <p:spTgt spid="24"/>
                                         </p:tgtEl>
@@ -6372,7 +6438,7 @@
                                     </p:anim>
                                     <p:anim calcmode="lin" valueType="num">
                                       <p:cBhvr additive="base">
-                                        <p:cTn id="16" dur="500" fill="hold"/>
+                                        <p:cTn id="20" dur="500" fill="hold"/>
                                         <p:tgtEl>
                                           <p:spTgt spid="24"/>
                                         </p:tgtEl>
@@ -6457,7 +6523,7 @@
           <p:cNvPr id="2" name="!!Anchor_Kicker_Rail!!">
             <a:extLst>
               <a:ext uri="{FF2B5EF4-FFF2-40B4-BE49-F238E27FC236}">
-                <a16:creationId xmlns:a16="http://schemas.microsoft.com/office/drawing/2014/main" id="{543F9D54-9829-E89A-C582-D405ED799587}"/>
+                <a16:creationId xmlns:a16="http://schemas.microsoft.com/office/drawing/2014/main" id="{4791E312-68CA-C7C3-5BD5-F62C932322B3}"/>
               </a:ext>
             </a:extLst>
           </p:cNvPr>
@@ -6497,7 +6563,7 @@
           <p:cNvPr id="3" name="!!Anchor_Slide_Tracker!!">
             <a:extLst>
               <a:ext uri="{FF2B5EF4-FFF2-40B4-BE49-F238E27FC236}">
-                <a16:creationId xmlns:a16="http://schemas.microsoft.com/office/drawing/2014/main" id="{CDE9DDFD-4106-A54E-DDDA-61151B527B79}"/>
+                <a16:creationId xmlns:a16="http://schemas.microsoft.com/office/drawing/2014/main" id="{BD950FB5-39EA-6374-F85D-A0A52665644A}"/>
               </a:ext>
             </a:extLst>
           </p:cNvPr>
@@ -6538,7 +6604,7 @@
           <p:cNvPr id="4" name="!!Anchor_Assertion_Title!!">
             <a:extLst>
               <a:ext uri="{FF2B5EF4-FFF2-40B4-BE49-F238E27FC236}">
-                <a16:creationId xmlns:a16="http://schemas.microsoft.com/office/drawing/2014/main" id="{14E37F78-576F-A552-A5EA-35B707FC08B6}"/>
+                <a16:creationId xmlns:a16="http://schemas.microsoft.com/office/drawing/2014/main" id="{B2A2BE63-7D60-D8B6-AD23-3EA9487C3760}"/>
               </a:ext>
             </a:extLst>
           </p:cNvPr>
@@ -6584,7 +6650,7 @@
           <p:cNvPr id="12" name="!!Stage_Hero_Container!!">
             <a:extLst>
               <a:ext uri="{FF2B5EF4-FFF2-40B4-BE49-F238E27FC236}">
-                <a16:creationId xmlns:a16="http://schemas.microsoft.com/office/drawing/2014/main" id="{E9D7B87F-84DB-3141-3720-574681038F8D}"/>
+                <a16:creationId xmlns:a16="http://schemas.microsoft.com/office/drawing/2014/main" id="{078D569A-7E53-1000-DEFE-12980C0E675F}"/>
               </a:ext>
             </a:extLst>
           </p:cNvPr>
@@ -6604,7 +6670,7 @@
             <p:cNvPr id="6" name="Picture 5">
               <a:extLst>
                 <a:ext uri="{FF2B5EF4-FFF2-40B4-BE49-F238E27FC236}">
-                  <a16:creationId xmlns:a16="http://schemas.microsoft.com/office/drawing/2014/main" id="{CA90A017-BA05-A0C0-A36F-98D9CFFEA1CB}"/>
+                  <a16:creationId xmlns:a16="http://schemas.microsoft.com/office/drawing/2014/main" id="{B6FC7E07-0503-CF62-252F-2CBFE4175562}"/>
                 </a:ext>
               </a:extLst>
             </p:cNvPr>
@@ -6645,7 +6711,7 @@
             <p:cNvPr id="7" name="Rectangle: Rounded Corners 6">
               <a:extLst>
                 <a:ext uri="{FF2B5EF4-FFF2-40B4-BE49-F238E27FC236}">
-                  <a16:creationId xmlns:a16="http://schemas.microsoft.com/office/drawing/2014/main" id="{52CF6785-F80B-28AA-C583-15EED581B2AC}"/>
+                  <a16:creationId xmlns:a16="http://schemas.microsoft.com/office/drawing/2014/main" id="{D2A90BE0-6476-5127-3C43-4AF4BB0B9F24}"/>
                 </a:ext>
               </a:extLst>
             </p:cNvPr>
@@ -6699,7 +6765,7 @@
             <p:cNvPr id="8" name="Oval 7">
               <a:extLst>
                 <a:ext uri="{FF2B5EF4-FFF2-40B4-BE49-F238E27FC236}">
-                  <a16:creationId xmlns:a16="http://schemas.microsoft.com/office/drawing/2014/main" id="{8AE98967-10EA-E6F5-45E0-FE2A8F05F8AD}"/>
+                  <a16:creationId xmlns:a16="http://schemas.microsoft.com/office/drawing/2014/main" id="{9D744311-CBAF-E427-B619-5A5EF753B422}"/>
                 </a:ext>
               </a:extLst>
             </p:cNvPr>
@@ -6767,7 +6833,7 @@
             <p:cNvPr id="10" name="Graphic 9">
               <a:extLst>
                 <a:ext uri="{FF2B5EF4-FFF2-40B4-BE49-F238E27FC236}">
-                  <a16:creationId xmlns:a16="http://schemas.microsoft.com/office/drawing/2014/main" id="{49DD3AD4-4F32-99C4-2984-8D7DCC62D273}"/>
+                  <a16:creationId xmlns:a16="http://schemas.microsoft.com/office/drawing/2014/main" id="{CD4C4E14-16D8-BDF9-7BCF-238B8DABCD1F}"/>
                 </a:ext>
               </a:extLst>
             </p:cNvPr>
@@ -6803,7 +6869,7 @@
             <p:cNvPr id="11" name="TextBox 10">
               <a:extLst>
                 <a:ext uri="{FF2B5EF4-FFF2-40B4-BE49-F238E27FC236}">
-                  <a16:creationId xmlns:a16="http://schemas.microsoft.com/office/drawing/2014/main" id="{831E8687-D4D5-596B-27DE-EA5F4703D30D}"/>
+                  <a16:creationId xmlns:a16="http://schemas.microsoft.com/office/drawing/2014/main" id="{C14F1163-CCEE-7CE6-91E8-10632EC61D6C}"/>
                 </a:ext>
               </a:extLst>
             </p:cNvPr>
@@ -6868,7 +6934,7 @@
           <p:cNvPr id="18" name="!!Stage_Sub_Card_1!!">
             <a:extLst>
               <a:ext uri="{FF2B5EF4-FFF2-40B4-BE49-F238E27FC236}">
-                <a16:creationId xmlns:a16="http://schemas.microsoft.com/office/drawing/2014/main" id="{46522EA2-1610-762B-F8BF-56AC57A58044}"/>
+                <a16:creationId xmlns:a16="http://schemas.microsoft.com/office/drawing/2014/main" id="{85B5FD7E-2916-A4C2-E48F-C62F80DF222D}"/>
               </a:ext>
             </a:extLst>
           </p:cNvPr>
@@ -6888,7 +6954,7 @@
             <p:cNvPr id="13" name="Rectangle: Rounded Corners 12">
               <a:extLst>
                 <a:ext uri="{FF2B5EF4-FFF2-40B4-BE49-F238E27FC236}">
-                  <a16:creationId xmlns:a16="http://schemas.microsoft.com/office/drawing/2014/main" id="{F59019C4-B343-044B-62E3-8D60456C71CF}"/>
+                  <a16:creationId xmlns:a16="http://schemas.microsoft.com/office/drawing/2014/main" id="{8D40B827-4DCC-B15B-27F6-3EAD4A7976ED}"/>
                 </a:ext>
               </a:extLst>
             </p:cNvPr>
@@ -6942,7 +7008,7 @@
             <p:cNvPr id="14" name="Oval 13">
               <a:extLst>
                 <a:ext uri="{FF2B5EF4-FFF2-40B4-BE49-F238E27FC236}">
-                  <a16:creationId xmlns:a16="http://schemas.microsoft.com/office/drawing/2014/main" id="{A61F4EDC-81FE-B3CE-2798-EC36BAC52D4F}"/>
+                  <a16:creationId xmlns:a16="http://schemas.microsoft.com/office/drawing/2014/main" id="{2A463B94-1128-3A8E-8CF9-309EB7DCB7AA}"/>
                 </a:ext>
               </a:extLst>
             </p:cNvPr>
@@ -7010,7 +7076,7 @@
             <p:cNvPr id="16" name="Graphic 15">
               <a:extLst>
                 <a:ext uri="{FF2B5EF4-FFF2-40B4-BE49-F238E27FC236}">
-                  <a16:creationId xmlns:a16="http://schemas.microsoft.com/office/drawing/2014/main" id="{DB9FA089-6CB4-A7A2-51FA-1C61ACE607AD}"/>
+                  <a16:creationId xmlns:a16="http://schemas.microsoft.com/office/drawing/2014/main" id="{DB04B009-D890-2430-F9D0-146207B7B553}"/>
                 </a:ext>
               </a:extLst>
             </p:cNvPr>
@@ -7046,7 +7112,7 @@
             <p:cNvPr id="17" name="TextBox 16">
               <a:extLst>
                 <a:ext uri="{FF2B5EF4-FFF2-40B4-BE49-F238E27FC236}">
-                  <a16:creationId xmlns:a16="http://schemas.microsoft.com/office/drawing/2014/main" id="{ADF79B9E-DF97-9CDE-E1FE-990ED4A37005}"/>
+                  <a16:creationId xmlns:a16="http://schemas.microsoft.com/office/drawing/2014/main" id="{300E581D-17E4-438E-5789-A05EC2FA4EF9}"/>
                 </a:ext>
               </a:extLst>
             </p:cNvPr>
@@ -7108,7 +7174,7 @@
           <p:cNvPr id="24" name="!!Stage_Sub_Card_2!!">
             <a:extLst>
               <a:ext uri="{FF2B5EF4-FFF2-40B4-BE49-F238E27FC236}">
-                <a16:creationId xmlns:a16="http://schemas.microsoft.com/office/drawing/2014/main" id="{B71E94BD-D25F-2A4B-A145-F2BDF453AC59}"/>
+                <a16:creationId xmlns:a16="http://schemas.microsoft.com/office/drawing/2014/main" id="{38F01E1F-ABEE-089A-6DE4-80A98FFDF93C}"/>
               </a:ext>
             </a:extLst>
           </p:cNvPr>
@@ -7128,7 +7194,7 @@
             <p:cNvPr id="19" name="Rectangle: Rounded Corners 18">
               <a:extLst>
                 <a:ext uri="{FF2B5EF4-FFF2-40B4-BE49-F238E27FC236}">
-                  <a16:creationId xmlns:a16="http://schemas.microsoft.com/office/drawing/2014/main" id="{4566DB66-6E8B-0F23-A17A-A0AF6E477DBB}"/>
+                  <a16:creationId xmlns:a16="http://schemas.microsoft.com/office/drawing/2014/main" id="{320ADE7F-D19E-BC52-9241-E8A31A2A693B}"/>
                 </a:ext>
               </a:extLst>
             </p:cNvPr>
@@ -7182,7 +7248,7 @@
             <p:cNvPr id="20" name="Oval 19">
               <a:extLst>
                 <a:ext uri="{FF2B5EF4-FFF2-40B4-BE49-F238E27FC236}">
-                  <a16:creationId xmlns:a16="http://schemas.microsoft.com/office/drawing/2014/main" id="{2A47C12B-5434-E8AA-EF3A-4090005AD59D}"/>
+                  <a16:creationId xmlns:a16="http://schemas.microsoft.com/office/drawing/2014/main" id="{03B977B4-C15E-A888-72F0-E21542205D97}"/>
                 </a:ext>
               </a:extLst>
             </p:cNvPr>
@@ -7250,7 +7316,7 @@
             <p:cNvPr id="22" name="Graphic 21">
               <a:extLst>
                 <a:ext uri="{FF2B5EF4-FFF2-40B4-BE49-F238E27FC236}">
-                  <a16:creationId xmlns:a16="http://schemas.microsoft.com/office/drawing/2014/main" id="{F9C48CE1-36A6-F221-5B68-D664062760D9}"/>
+                  <a16:creationId xmlns:a16="http://schemas.microsoft.com/office/drawing/2014/main" id="{4B57F923-DFDC-306C-D8E4-3041EFF26D91}"/>
                 </a:ext>
               </a:extLst>
             </p:cNvPr>
@@ -7286,7 +7352,7 @@
             <p:cNvPr id="23" name="TextBox 22">
               <a:extLst>
                 <a:ext uri="{FF2B5EF4-FFF2-40B4-BE49-F238E27FC236}">
-                  <a16:creationId xmlns:a16="http://schemas.microsoft.com/office/drawing/2014/main" id="{D638676A-0970-171B-90C0-71CC36420F05}"/>
+                  <a16:creationId xmlns:a16="http://schemas.microsoft.com/office/drawing/2014/main" id="{8F02656E-4EB1-A3B6-5B85-7411373CE794}"/>
                 </a:ext>
               </a:extLst>
             </p:cNvPr>
@@ -7348,7 +7414,7 @@
           <p:cNvPr id="30" name="!!Stage_Sub_Card_3!!">
             <a:extLst>
               <a:ext uri="{FF2B5EF4-FFF2-40B4-BE49-F238E27FC236}">
-                <a16:creationId xmlns:a16="http://schemas.microsoft.com/office/drawing/2014/main" id="{F07DEA0B-C52A-DEAE-983C-0A02877D2345}"/>
+                <a16:creationId xmlns:a16="http://schemas.microsoft.com/office/drawing/2014/main" id="{71B9579F-E732-076F-2D92-4DA1496E86EF}"/>
               </a:ext>
             </a:extLst>
           </p:cNvPr>
@@ -7368,7 +7434,7 @@
             <p:cNvPr id="25" name="Rectangle: Rounded Corners 24">
               <a:extLst>
                 <a:ext uri="{FF2B5EF4-FFF2-40B4-BE49-F238E27FC236}">
-                  <a16:creationId xmlns:a16="http://schemas.microsoft.com/office/drawing/2014/main" id="{2ED63E75-8498-6FDE-8372-FB2E4EE0ED08}"/>
+                  <a16:creationId xmlns:a16="http://schemas.microsoft.com/office/drawing/2014/main" id="{1DD25B84-6A3A-3D9B-4943-652D1326F20F}"/>
                 </a:ext>
               </a:extLst>
             </p:cNvPr>
@@ -7422,7 +7488,7 @@
             <p:cNvPr id="26" name="Oval 25">
               <a:extLst>
                 <a:ext uri="{FF2B5EF4-FFF2-40B4-BE49-F238E27FC236}">
-                  <a16:creationId xmlns:a16="http://schemas.microsoft.com/office/drawing/2014/main" id="{BEC1CB6B-0CA3-AC16-E5AD-180CA7354D61}"/>
+                  <a16:creationId xmlns:a16="http://schemas.microsoft.com/office/drawing/2014/main" id="{0280E85B-4A6E-853E-1F6B-CF09191B5B87}"/>
                 </a:ext>
               </a:extLst>
             </p:cNvPr>
@@ -7490,7 +7556,7 @@
             <p:cNvPr id="28" name="Graphic 27">
               <a:extLst>
                 <a:ext uri="{FF2B5EF4-FFF2-40B4-BE49-F238E27FC236}">
-                  <a16:creationId xmlns:a16="http://schemas.microsoft.com/office/drawing/2014/main" id="{D1B306BF-93F3-A9CE-D3BF-A2970D65F32F}"/>
+                  <a16:creationId xmlns:a16="http://schemas.microsoft.com/office/drawing/2014/main" id="{1ADDAAC7-D471-4292-7072-B43A2A80FBF9}"/>
                 </a:ext>
               </a:extLst>
             </p:cNvPr>
@@ -7526,7 +7592,7 @@
             <p:cNvPr id="29" name="TextBox 28">
               <a:extLst>
                 <a:ext uri="{FF2B5EF4-FFF2-40B4-BE49-F238E27FC236}">
-                  <a16:creationId xmlns:a16="http://schemas.microsoft.com/office/drawing/2014/main" id="{72F8AEE1-A117-827E-3069-02770A8BFBD2}"/>
+                  <a16:creationId xmlns:a16="http://schemas.microsoft.com/office/drawing/2014/main" id="{6227DF08-C9C6-A039-820B-6143310D97BA}"/>
                 </a:ext>
               </a:extLst>
             </p:cNvPr>
@@ -7588,7 +7654,7 @@
           <p:cNvPr id="31" name="!!Anchor_Source_Footer!!">
             <a:extLst>
               <a:ext uri="{FF2B5EF4-FFF2-40B4-BE49-F238E27FC236}">
-                <a16:creationId xmlns:a16="http://schemas.microsoft.com/office/drawing/2014/main" id="{80A06C57-56C5-E093-9FC6-158A38D84967}"/>
+                <a16:creationId xmlns:a16="http://schemas.microsoft.com/office/drawing/2014/main" id="{28FCBC89-ADC4-D10A-4880-13550DE7093B}"/>
               </a:ext>
             </a:extLst>
           </p:cNvPr>
@@ -7626,7 +7692,7 @@
     </p:spTree>
     <p:extLst>
       <p:ext uri="{BB962C8B-B14F-4D97-AF65-F5344CB8AC3E}">
-        <p14:creationId xmlns:p14="http://schemas.microsoft.com/office/powerpoint/2010/main" val="2969960488"/>
+        <p14:creationId xmlns:p14="http://schemas.microsoft.com/office/powerpoint/2010/main" val="2009609875"/>
       </p:ext>
     </p:extLst>
   </p:cSld>
@@ -7657,9 +7723,6 @@
                     <p:cTn id="3" fill="hold">
                       <p:stCondLst>
                         <p:cond delay="indefinite"/>
-                        <p:cond evt="onBegin" delay="0">
-                          <p:tn val="2"/>
-                        </p:cond>
                       </p:stCondLst>
                       <p:childTnLst>
                         <p:par>
@@ -7669,9 +7732,9 @@
                             </p:stCondLst>
                             <p:childTnLst>
                               <p:par>
-                                <p:cTn id="5" presetID="2" presetClass="entr" presetSubtype="1" accel="50000" decel="50000" fill="hold" nodeType="withEffect">
+                                <p:cTn id="5" presetID="2" presetClass="entr" presetSubtype="1" accel="50000" decel="50000" fill="hold" nodeType="clickEffect">
                                   <p:stCondLst>
-                                    <p:cond delay="120"/>
+                                    <p:cond delay="0"/>
                                   </p:stCondLst>
                                   <p:childTnLst>
                                     <p:set>
@@ -7741,15 +7804,33 @@
                                   </p:childTnLst>
                                 </p:cTn>
                               </p:par>
+                            </p:childTnLst>
+                          </p:cTn>
+                        </p:par>
+                      </p:childTnLst>
+                    </p:cTn>
+                  </p:par>
+                  <p:par>
+                    <p:cTn id="9" fill="hold">
+                      <p:stCondLst>
+                        <p:cond delay="indefinite"/>
+                      </p:stCondLst>
+                      <p:childTnLst>
+                        <p:par>
+                          <p:cTn id="10" fill="hold">
+                            <p:stCondLst>
+                              <p:cond delay="0"/>
+                            </p:stCondLst>
+                            <p:childTnLst>
                               <p:par>
-                                <p:cTn id="9" presetID="2" presetClass="entr" presetSubtype="1" accel="50000" decel="50000" fill="hold" nodeType="withEffect">
+                                <p:cTn id="11" presetID="2" presetClass="entr" presetSubtype="1" accel="50000" decel="50000" fill="hold" nodeType="clickEffect">
                                   <p:stCondLst>
-                                    <p:cond delay="240"/>
+                                    <p:cond delay="0"/>
                                   </p:stCondLst>
                                   <p:childTnLst>
                                     <p:set>
                                       <p:cBhvr>
-                                        <p:cTn id="10" dur="1" fill="hold">
+                                        <p:cTn id="12" dur="1" fill="hold">
                                           <p:stCondLst>
                                             <p:cond delay="0"/>
                                           </p:stCondLst>
@@ -7767,7 +7848,7 @@
                                     </p:set>
                                     <p:anim calcmode="lin" valueType="num">
                                       <p:cBhvr additive="base">
-                                        <p:cTn id="11" dur="500" fill="hold"/>
+                                        <p:cTn id="13" dur="500" fill="hold"/>
                                         <p:tgtEl>
                                           <p:spTgt spid="24"/>
                                         </p:tgtEl>
@@ -7790,7 +7871,7 @@
                                     </p:anim>
                                     <p:anim calcmode="lin" valueType="num">
                                       <p:cBhvr additive="base">
-                                        <p:cTn id="12" dur="500" fill="hold"/>
+                                        <p:cTn id="14" dur="500" fill="hold"/>
                                         <p:tgtEl>
                                           <p:spTgt spid="24"/>
                                         </p:tgtEl>
@@ -7814,15 +7895,33 @@
                                   </p:childTnLst>
                                 </p:cTn>
                               </p:par>
+                            </p:childTnLst>
+                          </p:cTn>
+                        </p:par>
+                      </p:childTnLst>
+                    </p:cTn>
+                  </p:par>
+                  <p:par>
+                    <p:cTn id="15" fill="hold">
+                      <p:stCondLst>
+                        <p:cond delay="indefinite"/>
+                      </p:stCondLst>
+                      <p:childTnLst>
+                        <p:par>
+                          <p:cTn id="16" fill="hold">
+                            <p:stCondLst>
+                              <p:cond delay="0"/>
+                            </p:stCondLst>
+                            <p:childTnLst>
                               <p:par>
-                                <p:cTn id="13" presetID="2" presetClass="entr" presetSubtype="1" accel="50000" decel="50000" fill="hold" nodeType="withEffect">
+                                <p:cTn id="17" presetID="2" presetClass="entr" presetSubtype="1" accel="50000" decel="50000" fill="hold" nodeType="clickEffect">
                                   <p:stCondLst>
-                                    <p:cond delay="360"/>
+                                    <p:cond delay="0"/>
                                   </p:stCondLst>
                                   <p:childTnLst>
                                     <p:set>
                                       <p:cBhvr>
-                                        <p:cTn id="14" dur="1" fill="hold">
+                                        <p:cTn id="18" dur="1" fill="hold">
                                           <p:stCondLst>
                                             <p:cond delay="0"/>
                                           </p:stCondLst>
@@ -7840,7 +7939,7 @@
                                     </p:set>
                                     <p:anim calcmode="lin" valueType="num">
                                       <p:cBhvr additive="base">
-                                        <p:cTn id="15" dur="500" fill="hold"/>
+                                        <p:cTn id="19" dur="500" fill="hold"/>
                                         <p:tgtEl>
                                           <p:spTgt spid="30"/>
                                         </p:tgtEl>
@@ -7863,7 +7962,7 @@
                                     </p:anim>
                                     <p:anim calcmode="lin" valueType="num">
                                       <p:cBhvr additive="base">
-                                        <p:cTn id="16" dur="500" fill="hold"/>
+                                        <p:cTn id="20" dur="500" fill="hold"/>
                                         <p:tgtEl>
                                           <p:spTgt spid="30"/>
                                         </p:tgtEl>
@@ -7948,7 +8047,7 @@
           <p:cNvPr id="2" name="!!Anchor_Kicker_Rail!!">
             <a:extLst>
               <a:ext uri="{FF2B5EF4-FFF2-40B4-BE49-F238E27FC236}">
-                <a16:creationId xmlns:a16="http://schemas.microsoft.com/office/drawing/2014/main" id="{4F816118-585E-6D8F-B0F4-DE89250F4B5A}"/>
+                <a16:creationId xmlns:a16="http://schemas.microsoft.com/office/drawing/2014/main" id="{E38C3A5E-B0B1-3B99-AE0F-88FF428A644C}"/>
               </a:ext>
             </a:extLst>
           </p:cNvPr>
@@ -7988,7 +8087,7 @@
           <p:cNvPr id="3" name="!!Anchor_Slide_Tracker!!">
             <a:extLst>
               <a:ext uri="{FF2B5EF4-FFF2-40B4-BE49-F238E27FC236}">
-                <a16:creationId xmlns:a16="http://schemas.microsoft.com/office/drawing/2014/main" id="{DE9427CE-5EDE-00AF-6601-04A8922D6784}"/>
+                <a16:creationId xmlns:a16="http://schemas.microsoft.com/office/drawing/2014/main" id="{64D88156-F8ED-5D68-7FE7-E4E580B8C74B}"/>
               </a:ext>
             </a:extLst>
           </p:cNvPr>
@@ -8029,7 +8128,7 @@
           <p:cNvPr id="4" name="!!Anchor_Assertion_Title!!">
             <a:extLst>
               <a:ext uri="{FF2B5EF4-FFF2-40B4-BE49-F238E27FC236}">
-                <a16:creationId xmlns:a16="http://schemas.microsoft.com/office/drawing/2014/main" id="{CA1CFBAA-3C8E-7CB9-1519-2CF40BD75A77}"/>
+                <a16:creationId xmlns:a16="http://schemas.microsoft.com/office/drawing/2014/main" id="{6CC326A9-D869-A27D-5E40-7D878268A8E4}"/>
               </a:ext>
             </a:extLst>
           </p:cNvPr>
@@ -8075,7 +8174,7 @@
           <p:cNvPr id="10" name="!!Stage_Hero_Container!!">
             <a:extLst>
               <a:ext uri="{FF2B5EF4-FFF2-40B4-BE49-F238E27FC236}">
-                <a16:creationId xmlns:a16="http://schemas.microsoft.com/office/drawing/2014/main" id="{C626A628-17E6-31F6-D61D-A376B3B73589}"/>
+                <a16:creationId xmlns:a16="http://schemas.microsoft.com/office/drawing/2014/main" id="{3E2E0038-6BD2-C899-EE5C-F91117267E3B}"/>
               </a:ext>
             </a:extLst>
           </p:cNvPr>
@@ -8095,7 +8194,7 @@
             <p:cNvPr id="5" name="Rectangle: Rounded Corners 4">
               <a:extLst>
                 <a:ext uri="{FF2B5EF4-FFF2-40B4-BE49-F238E27FC236}">
-                  <a16:creationId xmlns:a16="http://schemas.microsoft.com/office/drawing/2014/main" id="{2A81C354-E2AE-EDCC-845C-9F32271C27F2}"/>
+                  <a16:creationId xmlns:a16="http://schemas.microsoft.com/office/drawing/2014/main" id="{A535F262-1FBD-AEDF-0C84-74795810926E}"/>
                 </a:ext>
               </a:extLst>
             </p:cNvPr>
@@ -8149,7 +8248,7 @@
             <p:cNvPr id="6" name="Rectangle 5">
               <a:extLst>
                 <a:ext uri="{FF2B5EF4-FFF2-40B4-BE49-F238E27FC236}">
-                  <a16:creationId xmlns:a16="http://schemas.microsoft.com/office/drawing/2014/main" id="{D0334F1B-DC89-5783-694F-D485B32F7D4C}"/>
+                  <a16:creationId xmlns:a16="http://schemas.microsoft.com/office/drawing/2014/main" id="{EA2C1657-A6D6-7FA8-31BB-E2FF910F64EC}"/>
                 </a:ext>
               </a:extLst>
             </p:cNvPr>
@@ -8225,7 +8324,7 @@
             <p:cNvPr id="8" name="Graphic 7">
               <a:extLst>
                 <a:ext uri="{FF2B5EF4-FFF2-40B4-BE49-F238E27FC236}">
-                  <a16:creationId xmlns:a16="http://schemas.microsoft.com/office/drawing/2014/main" id="{455E47AD-D743-3FBC-59CF-487EBB5F35AE}"/>
+                  <a16:creationId xmlns:a16="http://schemas.microsoft.com/office/drawing/2014/main" id="{40B02832-B822-90D4-7472-51D2C16AFF1B}"/>
                 </a:ext>
               </a:extLst>
             </p:cNvPr>
@@ -8261,7 +8360,7 @@
             <p:cNvPr id="9" name="TextBox 8">
               <a:extLst>
                 <a:ext uri="{FF2B5EF4-FFF2-40B4-BE49-F238E27FC236}">
-                  <a16:creationId xmlns:a16="http://schemas.microsoft.com/office/drawing/2014/main" id="{93DC116D-BB73-0355-0244-39A7FBE10732}"/>
+                  <a16:creationId xmlns:a16="http://schemas.microsoft.com/office/drawing/2014/main" id="{DD2B3FA1-4CA1-5436-28B8-24C1326F4639}"/>
                 </a:ext>
               </a:extLst>
             </p:cNvPr>
@@ -8323,7 +8422,7 @@
           <p:cNvPr id="16" name="!!Stage_Sub_Card_1!!">
             <a:extLst>
               <a:ext uri="{FF2B5EF4-FFF2-40B4-BE49-F238E27FC236}">
-                <a16:creationId xmlns:a16="http://schemas.microsoft.com/office/drawing/2014/main" id="{46B88FD9-400D-9409-DBCE-F4CCC446811D}"/>
+                <a16:creationId xmlns:a16="http://schemas.microsoft.com/office/drawing/2014/main" id="{409CACF4-1A3F-1251-D4A1-4F96FD690AB7}"/>
               </a:ext>
             </a:extLst>
           </p:cNvPr>
@@ -8343,7 +8442,7 @@
             <p:cNvPr id="11" name="Rectangle: Rounded Corners 10">
               <a:extLst>
                 <a:ext uri="{FF2B5EF4-FFF2-40B4-BE49-F238E27FC236}">
-                  <a16:creationId xmlns:a16="http://schemas.microsoft.com/office/drawing/2014/main" id="{8E1C9FFD-6EA4-9BBD-C5FA-1E0D31AF76B3}"/>
+                  <a16:creationId xmlns:a16="http://schemas.microsoft.com/office/drawing/2014/main" id="{78BFD5EB-DEEF-8C15-4514-BE6979C60EEB}"/>
                 </a:ext>
               </a:extLst>
             </p:cNvPr>
@@ -8397,7 +8496,7 @@
             <p:cNvPr id="12" name="Rectangle 11">
               <a:extLst>
                 <a:ext uri="{FF2B5EF4-FFF2-40B4-BE49-F238E27FC236}">
-                  <a16:creationId xmlns:a16="http://schemas.microsoft.com/office/drawing/2014/main" id="{87A98429-FCF9-3FC0-8AC0-31579D8DDE2B}"/>
+                  <a16:creationId xmlns:a16="http://schemas.microsoft.com/office/drawing/2014/main" id="{30855E70-6E79-F297-5D5F-45A0786B321A}"/>
                 </a:ext>
               </a:extLst>
             </p:cNvPr>
@@ -8473,7 +8572,7 @@
             <p:cNvPr id="14" name="Graphic 13">
               <a:extLst>
                 <a:ext uri="{FF2B5EF4-FFF2-40B4-BE49-F238E27FC236}">
-                  <a16:creationId xmlns:a16="http://schemas.microsoft.com/office/drawing/2014/main" id="{243F606E-C3DD-6291-6FB0-F268402D686D}"/>
+                  <a16:creationId xmlns:a16="http://schemas.microsoft.com/office/drawing/2014/main" id="{7B2453A5-806C-D1E7-1BDA-0490FA3E9395}"/>
                 </a:ext>
               </a:extLst>
             </p:cNvPr>
@@ -8509,7 +8608,7 @@
             <p:cNvPr id="15" name="TextBox 14">
               <a:extLst>
                 <a:ext uri="{FF2B5EF4-FFF2-40B4-BE49-F238E27FC236}">
-                  <a16:creationId xmlns:a16="http://schemas.microsoft.com/office/drawing/2014/main" id="{7C4D7A21-458E-19C7-C4F2-EEAFF4C94896}"/>
+                  <a16:creationId xmlns:a16="http://schemas.microsoft.com/office/drawing/2014/main" id="{5B8ABAF2-F1D7-3204-3262-08BA8715E4C9}"/>
                 </a:ext>
               </a:extLst>
             </p:cNvPr>
@@ -8571,7 +8670,7 @@
           <p:cNvPr id="22" name="!!Stage_Sub_Card_2!!">
             <a:extLst>
               <a:ext uri="{FF2B5EF4-FFF2-40B4-BE49-F238E27FC236}">
-                <a16:creationId xmlns:a16="http://schemas.microsoft.com/office/drawing/2014/main" id="{ED38527C-1925-7DFF-3699-E5402DA4A5FA}"/>
+                <a16:creationId xmlns:a16="http://schemas.microsoft.com/office/drawing/2014/main" id="{E303382C-2B19-60DB-D049-22BB13A312F2}"/>
               </a:ext>
             </a:extLst>
           </p:cNvPr>
@@ -8591,7 +8690,7 @@
             <p:cNvPr id="17" name="Rectangle: Rounded Corners 16">
               <a:extLst>
                 <a:ext uri="{FF2B5EF4-FFF2-40B4-BE49-F238E27FC236}">
-                  <a16:creationId xmlns:a16="http://schemas.microsoft.com/office/drawing/2014/main" id="{216649BE-3D03-B475-35BB-EA9C35BC6BD8}"/>
+                  <a16:creationId xmlns:a16="http://schemas.microsoft.com/office/drawing/2014/main" id="{0AA339A3-CDB8-E6DD-106C-5E84B608BE26}"/>
                 </a:ext>
               </a:extLst>
             </p:cNvPr>
@@ -8645,7 +8744,7 @@
             <p:cNvPr id="18" name="Rectangle 17">
               <a:extLst>
                 <a:ext uri="{FF2B5EF4-FFF2-40B4-BE49-F238E27FC236}">
-                  <a16:creationId xmlns:a16="http://schemas.microsoft.com/office/drawing/2014/main" id="{E9D31CD6-5BF3-219F-1880-F9E517C7CC8A}"/>
+                  <a16:creationId xmlns:a16="http://schemas.microsoft.com/office/drawing/2014/main" id="{32E76C71-28AF-F3EA-7EAD-7E0D9EB43FA1}"/>
                 </a:ext>
               </a:extLst>
             </p:cNvPr>
@@ -8721,7 +8820,7 @@
             <p:cNvPr id="20" name="Graphic 19">
               <a:extLst>
                 <a:ext uri="{FF2B5EF4-FFF2-40B4-BE49-F238E27FC236}">
-                  <a16:creationId xmlns:a16="http://schemas.microsoft.com/office/drawing/2014/main" id="{A38B9CA3-DF2C-F893-139B-36133A5D46D3}"/>
+                  <a16:creationId xmlns:a16="http://schemas.microsoft.com/office/drawing/2014/main" id="{B9A31CCC-3856-08E8-EA5F-5F001BD72651}"/>
                 </a:ext>
               </a:extLst>
             </p:cNvPr>
@@ -8757,7 +8856,7 @@
             <p:cNvPr id="21" name="TextBox 20">
               <a:extLst>
                 <a:ext uri="{FF2B5EF4-FFF2-40B4-BE49-F238E27FC236}">
-                  <a16:creationId xmlns:a16="http://schemas.microsoft.com/office/drawing/2014/main" id="{09A26B5B-707E-B59F-1958-4833BE912E75}"/>
+                  <a16:creationId xmlns:a16="http://schemas.microsoft.com/office/drawing/2014/main" id="{75F86E6F-7900-ED75-521A-00E31E29BDE9}"/>
                 </a:ext>
               </a:extLst>
             </p:cNvPr>
@@ -8819,7 +8918,7 @@
           <p:cNvPr id="23" name="!!Anchor_Source_Footer!!">
             <a:extLst>
               <a:ext uri="{FF2B5EF4-FFF2-40B4-BE49-F238E27FC236}">
-                <a16:creationId xmlns:a16="http://schemas.microsoft.com/office/drawing/2014/main" id="{0DAAEFC7-5E3D-01FB-BEF2-2B20F27F96E2}"/>
+                <a16:creationId xmlns:a16="http://schemas.microsoft.com/office/drawing/2014/main" id="{354FA0F5-74AD-1C48-2363-D1CDDF19B93B}"/>
               </a:ext>
             </a:extLst>
           </p:cNvPr>
@@ -8863,7 +8962,7 @@
     </p:spTree>
     <p:extLst>
       <p:ext uri="{BB962C8B-B14F-4D97-AF65-F5344CB8AC3E}">
-        <p14:creationId xmlns:p14="http://schemas.microsoft.com/office/powerpoint/2010/main" val="2754030505"/>
+        <p14:creationId xmlns:p14="http://schemas.microsoft.com/office/powerpoint/2010/main" val="3217610325"/>
       </p:ext>
     </p:extLst>
   </p:cSld>
@@ -8894,9 +8993,6 @@
                     <p:cTn id="3" fill="hold">
                       <p:stCondLst>
                         <p:cond delay="indefinite"/>
-                        <p:cond evt="onBegin" delay="0">
-                          <p:tn val="2"/>
-                        </p:cond>
                       </p:stCondLst>
                       <p:childTnLst>
                         <p:par>
@@ -8906,9 +9002,9 @@
                             </p:stCondLst>
                             <p:childTnLst>
                               <p:par>
-                                <p:cTn id="5" presetID="2" presetClass="entr" presetSubtype="1" accel="50000" decel="50000" fill="hold" nodeType="withEffect">
+                                <p:cTn id="5" presetID="2" presetClass="entr" presetSubtype="1" accel="50000" decel="50000" fill="hold" nodeType="clickEffect">
                                   <p:stCondLst>
-                                    <p:cond delay="120"/>
+                                    <p:cond delay="0"/>
                                   </p:stCondLst>
                                   <p:childTnLst>
                                     <p:set>
@@ -8978,15 +9074,33 @@
                                   </p:childTnLst>
                                 </p:cTn>
                               </p:par>
+                            </p:childTnLst>
+                          </p:cTn>
+                        </p:par>
+                      </p:childTnLst>
+                    </p:cTn>
+                  </p:par>
+                  <p:par>
+                    <p:cTn id="9" fill="hold">
+                      <p:stCondLst>
+                        <p:cond delay="indefinite"/>
+                      </p:stCondLst>
+                      <p:childTnLst>
+                        <p:par>
+                          <p:cTn id="10" fill="hold">
+                            <p:stCondLst>
+                              <p:cond delay="0"/>
+                            </p:stCondLst>
+                            <p:childTnLst>
                               <p:par>
-                                <p:cTn id="9" presetID="2" presetClass="entr" presetSubtype="1" accel="50000" decel="50000" fill="hold" nodeType="withEffect">
+                                <p:cTn id="11" presetID="2" presetClass="entr" presetSubtype="1" accel="50000" decel="50000" fill="hold" nodeType="clickEffect">
                                   <p:stCondLst>
-                                    <p:cond delay="240"/>
+                                    <p:cond delay="0"/>
                                   </p:stCondLst>
                                   <p:childTnLst>
                                     <p:set>
                                       <p:cBhvr>
-                                        <p:cTn id="10" dur="1" fill="hold">
+                                        <p:cTn id="12" dur="1" fill="hold">
                                           <p:stCondLst>
                                             <p:cond delay="0"/>
                                           </p:stCondLst>
@@ -9004,7 +9118,7 @@
                                     </p:set>
                                     <p:anim calcmode="lin" valueType="num">
                                       <p:cBhvr additive="base">
-                                        <p:cTn id="11" dur="500" fill="hold"/>
+                                        <p:cTn id="13" dur="500" fill="hold"/>
                                         <p:tgtEl>
                                           <p:spTgt spid="22"/>
                                         </p:tgtEl>
@@ -9027,7 +9141,7 @@
                                     </p:anim>
                                     <p:anim calcmode="lin" valueType="num">
                                       <p:cBhvr additive="base">
-                                        <p:cTn id="12" dur="500" fill="hold"/>
+                                        <p:cTn id="14" dur="500" fill="hold"/>
                                         <p:tgtEl>
                                           <p:spTgt spid="22"/>
                                         </p:tgtEl>
@@ -9112,7 +9226,7 @@
           <p:cNvPr id="2" name="!!Anchor_Kicker_Rail!!">
             <a:extLst>
               <a:ext uri="{FF2B5EF4-FFF2-40B4-BE49-F238E27FC236}">
-                <a16:creationId xmlns:a16="http://schemas.microsoft.com/office/drawing/2014/main" id="{752599C4-0531-F865-C5E4-8ED94B24B1B7}"/>
+                <a16:creationId xmlns:a16="http://schemas.microsoft.com/office/drawing/2014/main" id="{8F489C77-C1E7-6212-6262-38702296C16E}"/>
               </a:ext>
             </a:extLst>
           </p:cNvPr>
@@ -9152,7 +9266,7 @@
           <p:cNvPr id="3" name="!!Anchor_Slide_Tracker!!">
             <a:extLst>
               <a:ext uri="{FF2B5EF4-FFF2-40B4-BE49-F238E27FC236}">
-                <a16:creationId xmlns:a16="http://schemas.microsoft.com/office/drawing/2014/main" id="{2BC639AE-6935-76DD-1B3F-21785055038F}"/>
+                <a16:creationId xmlns:a16="http://schemas.microsoft.com/office/drawing/2014/main" id="{B9D5064B-B7FA-3554-A80F-B6370BDA2617}"/>
               </a:ext>
             </a:extLst>
           </p:cNvPr>
@@ -9193,7 +9307,7 @@
           <p:cNvPr id="4" name="!!Anchor_Assertion_Title!!">
             <a:extLst>
               <a:ext uri="{FF2B5EF4-FFF2-40B4-BE49-F238E27FC236}">
-                <a16:creationId xmlns:a16="http://schemas.microsoft.com/office/drawing/2014/main" id="{3F90580F-787C-C1BB-3B20-0C10C9240AC2}"/>
+                <a16:creationId xmlns:a16="http://schemas.microsoft.com/office/drawing/2014/main" id="{C02AA1F3-740A-AB9F-D892-3BE288C996DC}"/>
               </a:ext>
             </a:extLst>
           </p:cNvPr>
@@ -9233,7 +9347,7 @@
           <p:cNvPr id="11" name="!!Stage_Hero_Container!!">
             <a:extLst>
               <a:ext uri="{FF2B5EF4-FFF2-40B4-BE49-F238E27FC236}">
-                <a16:creationId xmlns:a16="http://schemas.microsoft.com/office/drawing/2014/main" id="{3CF32946-FB45-0E93-4316-0C47BCB11C05}"/>
+                <a16:creationId xmlns:a16="http://schemas.microsoft.com/office/drawing/2014/main" id="{6F77258A-C746-2565-BA4C-34726DC2B597}"/>
               </a:ext>
             </a:extLst>
           </p:cNvPr>
@@ -9253,7 +9367,7 @@
             <p:cNvPr id="5" name="Rectangle: Rounded Corners 4">
               <a:extLst>
                 <a:ext uri="{FF2B5EF4-FFF2-40B4-BE49-F238E27FC236}">
-                  <a16:creationId xmlns:a16="http://schemas.microsoft.com/office/drawing/2014/main" id="{F0B8C882-7214-6E4D-AA60-33F17DBBE4F7}"/>
+                  <a16:creationId xmlns:a16="http://schemas.microsoft.com/office/drawing/2014/main" id="{3DF55940-2286-8C01-788A-D1E186E4909E}"/>
                 </a:ext>
               </a:extLst>
             </p:cNvPr>
@@ -9307,7 +9421,7 @@
             <p:cNvPr id="6" name="Rectangle 5">
               <a:extLst>
                 <a:ext uri="{FF2B5EF4-FFF2-40B4-BE49-F238E27FC236}">
-                  <a16:creationId xmlns:a16="http://schemas.microsoft.com/office/drawing/2014/main" id="{D2B73E19-92AA-2372-8509-0B969A1FE066}"/>
+                  <a16:creationId xmlns:a16="http://schemas.microsoft.com/office/drawing/2014/main" id="{11B7BA63-BD56-22DB-AA69-52D2EE659241}"/>
                 </a:ext>
               </a:extLst>
             </p:cNvPr>
@@ -9375,7 +9489,7 @@
             <p:cNvPr id="7" name="Oval 6">
               <a:extLst>
                 <a:ext uri="{FF2B5EF4-FFF2-40B4-BE49-F238E27FC236}">
-                  <a16:creationId xmlns:a16="http://schemas.microsoft.com/office/drawing/2014/main" id="{C7D99346-7708-B932-D183-01A7B6A163E8}"/>
+                  <a16:creationId xmlns:a16="http://schemas.microsoft.com/office/drawing/2014/main" id="{76976906-04D9-CFA9-E136-44D6962E134B}"/>
                 </a:ext>
               </a:extLst>
             </p:cNvPr>
@@ -9443,7 +9557,7 @@
             <p:cNvPr id="9" name="Graphic 8">
               <a:extLst>
                 <a:ext uri="{FF2B5EF4-FFF2-40B4-BE49-F238E27FC236}">
-                  <a16:creationId xmlns:a16="http://schemas.microsoft.com/office/drawing/2014/main" id="{D097A22E-6C31-0A0D-E79D-C1BA7802092B}"/>
+                  <a16:creationId xmlns:a16="http://schemas.microsoft.com/office/drawing/2014/main" id="{713567AC-116F-12E3-0D40-25A2BB32A24A}"/>
                 </a:ext>
               </a:extLst>
             </p:cNvPr>
@@ -9479,7 +9593,7 @@
             <p:cNvPr id="10" name="TextBox 9">
               <a:extLst>
                 <a:ext uri="{FF2B5EF4-FFF2-40B4-BE49-F238E27FC236}">
-                  <a16:creationId xmlns:a16="http://schemas.microsoft.com/office/drawing/2014/main" id="{BE48060B-62EE-4C06-7553-35086D3AF9CE}"/>
+                  <a16:creationId xmlns:a16="http://schemas.microsoft.com/office/drawing/2014/main" id="{CA3B6621-7861-419E-E475-BFEF46088C25}"/>
                 </a:ext>
               </a:extLst>
             </p:cNvPr>
@@ -9544,7 +9658,7 @@
           <p:cNvPr id="18" name="!!Stage_Sub_Card_1!!">
             <a:extLst>
               <a:ext uri="{FF2B5EF4-FFF2-40B4-BE49-F238E27FC236}">
-                <a16:creationId xmlns:a16="http://schemas.microsoft.com/office/drawing/2014/main" id="{B5BFC683-CACD-608F-AC6D-1083DF05A9A0}"/>
+                <a16:creationId xmlns:a16="http://schemas.microsoft.com/office/drawing/2014/main" id="{F7B347EC-6F07-A349-00D7-1B4406886872}"/>
               </a:ext>
             </a:extLst>
           </p:cNvPr>
@@ -9564,7 +9678,7 @@
             <p:cNvPr id="12" name="Rectangle: Rounded Corners 11">
               <a:extLst>
                 <a:ext uri="{FF2B5EF4-FFF2-40B4-BE49-F238E27FC236}">
-                  <a16:creationId xmlns:a16="http://schemas.microsoft.com/office/drawing/2014/main" id="{FC8CF425-E35F-BEA9-20A2-A131691F3358}"/>
+                  <a16:creationId xmlns:a16="http://schemas.microsoft.com/office/drawing/2014/main" id="{1AD7EF36-FBD8-816F-08FD-B5CCC72A812D}"/>
                 </a:ext>
               </a:extLst>
             </p:cNvPr>
@@ -9618,7 +9732,7 @@
             <p:cNvPr id="13" name="Rectangle 12">
               <a:extLst>
                 <a:ext uri="{FF2B5EF4-FFF2-40B4-BE49-F238E27FC236}">
-                  <a16:creationId xmlns:a16="http://schemas.microsoft.com/office/drawing/2014/main" id="{7BF12823-3601-04FD-A2D1-D3ACF422F954}"/>
+                  <a16:creationId xmlns:a16="http://schemas.microsoft.com/office/drawing/2014/main" id="{ACF6D7CD-1CA6-CD26-12C4-4D1AFC1723EB}"/>
                 </a:ext>
               </a:extLst>
             </p:cNvPr>
@@ -9686,7 +9800,7 @@
             <p:cNvPr id="14" name="Oval 13">
               <a:extLst>
                 <a:ext uri="{FF2B5EF4-FFF2-40B4-BE49-F238E27FC236}">
-                  <a16:creationId xmlns:a16="http://schemas.microsoft.com/office/drawing/2014/main" id="{7DC519ED-C8EC-0346-FDD6-819E699746F1}"/>
+                  <a16:creationId xmlns:a16="http://schemas.microsoft.com/office/drawing/2014/main" id="{1837ECA0-4FCE-7BBA-8F4D-35586E9803FA}"/>
                 </a:ext>
               </a:extLst>
             </p:cNvPr>
@@ -9754,7 +9868,7 @@
             <p:cNvPr id="16" name="Graphic 15">
               <a:extLst>
                 <a:ext uri="{FF2B5EF4-FFF2-40B4-BE49-F238E27FC236}">
-                  <a16:creationId xmlns:a16="http://schemas.microsoft.com/office/drawing/2014/main" id="{B55220EB-D4CF-9CF6-07E1-3A22C3F78F3F}"/>
+                  <a16:creationId xmlns:a16="http://schemas.microsoft.com/office/drawing/2014/main" id="{619028CE-800F-0F1B-D1C6-08A25BCDAE8C}"/>
                 </a:ext>
               </a:extLst>
             </p:cNvPr>
@@ -9790,7 +9904,7 @@
             <p:cNvPr id="17" name="TextBox 16">
               <a:extLst>
                 <a:ext uri="{FF2B5EF4-FFF2-40B4-BE49-F238E27FC236}">
-                  <a16:creationId xmlns:a16="http://schemas.microsoft.com/office/drawing/2014/main" id="{1A73A41C-57BD-9313-972A-847B60986B95}"/>
+                  <a16:creationId xmlns:a16="http://schemas.microsoft.com/office/drawing/2014/main" id="{6F8AF267-255E-58C5-5B9D-AEAD00B81AC3}"/>
                 </a:ext>
               </a:extLst>
             </p:cNvPr>
@@ -9849,7 +9963,7 @@
           <p:cNvPr id="25" name="!!Stage_Sub_Card_2!!">
             <a:extLst>
               <a:ext uri="{FF2B5EF4-FFF2-40B4-BE49-F238E27FC236}">
-                <a16:creationId xmlns:a16="http://schemas.microsoft.com/office/drawing/2014/main" id="{7F71641B-B1EC-6EA4-5032-71D4C16FFB27}"/>
+                <a16:creationId xmlns:a16="http://schemas.microsoft.com/office/drawing/2014/main" id="{31F757FE-26AD-0859-B63C-D835C078EDF7}"/>
               </a:ext>
             </a:extLst>
           </p:cNvPr>
@@ -9869,7 +9983,7 @@
             <p:cNvPr id="19" name="Rectangle: Rounded Corners 18">
               <a:extLst>
                 <a:ext uri="{FF2B5EF4-FFF2-40B4-BE49-F238E27FC236}">
-                  <a16:creationId xmlns:a16="http://schemas.microsoft.com/office/drawing/2014/main" id="{2C71BC9A-B5D9-AA9D-4354-CF4F5F7A5D13}"/>
+                  <a16:creationId xmlns:a16="http://schemas.microsoft.com/office/drawing/2014/main" id="{38501882-E595-D904-D52E-4F092B47E16F}"/>
                 </a:ext>
               </a:extLst>
             </p:cNvPr>
@@ -9923,7 +10037,7 @@
             <p:cNvPr id="20" name="Rectangle 19">
               <a:extLst>
                 <a:ext uri="{FF2B5EF4-FFF2-40B4-BE49-F238E27FC236}">
-                  <a16:creationId xmlns:a16="http://schemas.microsoft.com/office/drawing/2014/main" id="{6F68E89B-BBF7-1CE6-6671-D672E3570605}"/>
+                  <a16:creationId xmlns:a16="http://schemas.microsoft.com/office/drawing/2014/main" id="{C9B3E192-A652-2EAB-4123-35CDA0469971}"/>
                 </a:ext>
               </a:extLst>
             </p:cNvPr>
@@ -9991,7 +10105,7 @@
             <p:cNvPr id="21" name="Oval 20">
               <a:extLst>
                 <a:ext uri="{FF2B5EF4-FFF2-40B4-BE49-F238E27FC236}">
-                  <a16:creationId xmlns:a16="http://schemas.microsoft.com/office/drawing/2014/main" id="{B8BFD861-5EF5-DF26-329D-8713EA9C003A}"/>
+                  <a16:creationId xmlns:a16="http://schemas.microsoft.com/office/drawing/2014/main" id="{C7FC696B-DC81-D279-D124-4250E2B38231}"/>
                 </a:ext>
               </a:extLst>
             </p:cNvPr>
@@ -10059,7 +10173,7 @@
             <p:cNvPr id="23" name="Graphic 22">
               <a:extLst>
                 <a:ext uri="{FF2B5EF4-FFF2-40B4-BE49-F238E27FC236}">
-                  <a16:creationId xmlns:a16="http://schemas.microsoft.com/office/drawing/2014/main" id="{19C43779-BF3B-1B10-500B-CB1F7FA5EE81}"/>
+                  <a16:creationId xmlns:a16="http://schemas.microsoft.com/office/drawing/2014/main" id="{B9F97A00-C695-A797-B0BC-05828F2BE96D}"/>
                 </a:ext>
               </a:extLst>
             </p:cNvPr>
@@ -10095,7 +10209,7 @@
             <p:cNvPr id="24" name="TextBox 23">
               <a:extLst>
                 <a:ext uri="{FF2B5EF4-FFF2-40B4-BE49-F238E27FC236}">
-                  <a16:creationId xmlns:a16="http://schemas.microsoft.com/office/drawing/2014/main" id="{9CE8B4AE-F40C-3F0E-D8BE-3D7B5B67F3F9}"/>
+                  <a16:creationId xmlns:a16="http://schemas.microsoft.com/office/drawing/2014/main" id="{4FF2D14C-EA8F-0C29-37D8-8ECF16E22F44}"/>
                 </a:ext>
               </a:extLst>
             </p:cNvPr>
@@ -10160,7 +10274,7 @@
           <p:cNvPr id="26" name="!!Anchor_Source_Footer!!">
             <a:extLst>
               <a:ext uri="{FF2B5EF4-FFF2-40B4-BE49-F238E27FC236}">
-                <a16:creationId xmlns:a16="http://schemas.microsoft.com/office/drawing/2014/main" id="{53C3EC5A-6825-47CB-FEC0-3647B3E5A2D8}"/>
+                <a16:creationId xmlns:a16="http://schemas.microsoft.com/office/drawing/2014/main" id="{FB925EB6-D248-EA1F-5D73-1FA38F86E3AE}"/>
               </a:ext>
             </a:extLst>
           </p:cNvPr>
@@ -10198,7 +10312,7 @@
     </p:spTree>
     <p:extLst>
       <p:ext uri="{BB962C8B-B14F-4D97-AF65-F5344CB8AC3E}">
-        <p14:creationId xmlns:p14="http://schemas.microsoft.com/office/powerpoint/2010/main" val="2261277981"/>
+        <p14:creationId xmlns:p14="http://schemas.microsoft.com/office/powerpoint/2010/main" val="4273697079"/>
       </p:ext>
     </p:extLst>
   </p:cSld>
@@ -10229,9 +10343,6 @@
                     <p:cTn id="3" fill="hold">
                       <p:stCondLst>
                         <p:cond delay="indefinite"/>
-                        <p:cond evt="onBegin" delay="0">
-                          <p:tn val="2"/>
-                        </p:cond>
                       </p:stCondLst>
                       <p:childTnLst>
                         <p:par>
@@ -10241,9 +10352,9 @@
                             </p:stCondLst>
                             <p:childTnLst>
                               <p:par>
-                                <p:cTn id="5" presetID="2" presetClass="entr" presetSubtype="1" accel="50000" decel="50000" fill="hold" nodeType="withEffect">
+                                <p:cTn id="5" presetID="2" presetClass="entr" presetSubtype="1" accel="50000" decel="50000" fill="hold" nodeType="clickEffect">
                                   <p:stCondLst>
-                                    <p:cond delay="140"/>
+                                    <p:cond delay="0"/>
                                   </p:stCondLst>
                                   <p:childTnLst>
                                     <p:set>
@@ -10313,15 +10424,33 @@
                                   </p:childTnLst>
                                 </p:cTn>
                               </p:par>
+                            </p:childTnLst>
+                          </p:cTn>
+                        </p:par>
+                      </p:childTnLst>
+                    </p:cTn>
+                  </p:par>
+                  <p:par>
+                    <p:cTn id="9" fill="hold">
+                      <p:stCondLst>
+                        <p:cond delay="indefinite"/>
+                      </p:stCondLst>
+                      <p:childTnLst>
+                        <p:par>
+                          <p:cTn id="10" fill="hold">
+                            <p:stCondLst>
+                              <p:cond delay="0"/>
+                            </p:stCondLst>
+                            <p:childTnLst>
                               <p:par>
-                                <p:cTn id="9" presetID="2" presetClass="entr" presetSubtype="1" accel="50000" decel="50000" fill="hold" nodeType="withEffect">
+                                <p:cTn id="11" presetID="2" presetClass="entr" presetSubtype="1" accel="50000" decel="50000" fill="hold" nodeType="clickEffect">
                                   <p:stCondLst>
-                                    <p:cond delay="280"/>
+                                    <p:cond delay="0"/>
                                   </p:stCondLst>
                                   <p:childTnLst>
                                     <p:set>
                                       <p:cBhvr>
-                                        <p:cTn id="10" dur="1" fill="hold">
+                                        <p:cTn id="12" dur="1" fill="hold">
                                           <p:stCondLst>
                                             <p:cond delay="0"/>
                                           </p:stCondLst>
@@ -10339,7 +10468,7 @@
                                     </p:set>
                                     <p:anim calcmode="lin" valueType="num">
                                       <p:cBhvr additive="base">
-                                        <p:cTn id="11" dur="500" fill="hold"/>
+                                        <p:cTn id="13" dur="500" fill="hold"/>
                                         <p:tgtEl>
                                           <p:spTgt spid="25"/>
                                         </p:tgtEl>
@@ -10362,7 +10491,7 @@
                                     </p:anim>
                                     <p:anim calcmode="lin" valueType="num">
                                       <p:cBhvr additive="base">
-                                        <p:cTn id="12" dur="500" fill="hold"/>
+                                        <p:cTn id="14" dur="500" fill="hold"/>
                                         <p:tgtEl>
                                           <p:spTgt spid="25"/>
                                         </p:tgtEl>
@@ -10447,7 +10576,7 @@
           <p:cNvPr id="2" name="!!Anchor_Kicker_Rail!!">
             <a:extLst>
               <a:ext uri="{FF2B5EF4-FFF2-40B4-BE49-F238E27FC236}">
-                <a16:creationId xmlns:a16="http://schemas.microsoft.com/office/drawing/2014/main" id="{AFE38A01-C9D7-E4F8-C605-153E9534B0EC}"/>
+                <a16:creationId xmlns:a16="http://schemas.microsoft.com/office/drawing/2014/main" id="{32D5CDC7-092C-E100-8316-54B42C09F10D}"/>
               </a:ext>
             </a:extLst>
           </p:cNvPr>
@@ -10487,7 +10616,7 @@
           <p:cNvPr id="3" name="!!Anchor_Slide_Tracker!!">
             <a:extLst>
               <a:ext uri="{FF2B5EF4-FFF2-40B4-BE49-F238E27FC236}">
-                <a16:creationId xmlns:a16="http://schemas.microsoft.com/office/drawing/2014/main" id="{8F052F6C-2BA2-13BA-8CDE-53619D59DC9C}"/>
+                <a16:creationId xmlns:a16="http://schemas.microsoft.com/office/drawing/2014/main" id="{8BCC78A4-7EAA-342A-A3E1-72A00AF4920A}"/>
               </a:ext>
             </a:extLst>
           </p:cNvPr>
@@ -10528,7 +10657,7 @@
           <p:cNvPr id="4" name="!!Anchor_Assertion_Title!!">
             <a:extLst>
               <a:ext uri="{FF2B5EF4-FFF2-40B4-BE49-F238E27FC236}">
-                <a16:creationId xmlns:a16="http://schemas.microsoft.com/office/drawing/2014/main" id="{A94A16BA-207E-AFD2-4AD5-55F0C6AF10A2}"/>
+                <a16:creationId xmlns:a16="http://schemas.microsoft.com/office/drawing/2014/main" id="{49BEB404-1BEA-E4CA-7F7E-FA2E213186F1}"/>
               </a:ext>
             </a:extLst>
           </p:cNvPr>
@@ -10574,7 +10703,7 @@
           <p:cNvPr id="11" name="!!Stage_Hero_Container!!">
             <a:extLst>
               <a:ext uri="{FF2B5EF4-FFF2-40B4-BE49-F238E27FC236}">
-                <a16:creationId xmlns:a16="http://schemas.microsoft.com/office/drawing/2014/main" id="{EAAC5C0C-E42C-0911-4226-7E7FC9F80A09}"/>
+                <a16:creationId xmlns:a16="http://schemas.microsoft.com/office/drawing/2014/main" id="{B912AFAF-DA24-17C1-3F17-19D507DFD0F3}"/>
               </a:ext>
             </a:extLst>
           </p:cNvPr>
@@ -10594,7 +10723,7 @@
             <p:cNvPr id="5" name="Rectangle: Rounded Corners 4">
               <a:extLst>
                 <a:ext uri="{FF2B5EF4-FFF2-40B4-BE49-F238E27FC236}">
-                  <a16:creationId xmlns:a16="http://schemas.microsoft.com/office/drawing/2014/main" id="{E0CED5C3-0104-DBE3-D55C-0A7155DDBEC9}"/>
+                  <a16:creationId xmlns:a16="http://schemas.microsoft.com/office/drawing/2014/main" id="{FC51FE93-8700-95B6-B4BC-B8F1D1B51381}"/>
                 </a:ext>
               </a:extLst>
             </p:cNvPr>
@@ -10648,7 +10777,7 @@
             <p:cNvPr id="6" name="Rectangle: Rounded Corners 5">
               <a:extLst>
                 <a:ext uri="{FF2B5EF4-FFF2-40B4-BE49-F238E27FC236}">
-                  <a16:creationId xmlns:a16="http://schemas.microsoft.com/office/drawing/2014/main" id="{B0B277D2-415C-52FF-AB14-3F7A11A936F0}"/>
+                  <a16:creationId xmlns:a16="http://schemas.microsoft.com/office/drawing/2014/main" id="{0B755C5F-220E-246C-1092-AF22B60CCDB1}"/>
                 </a:ext>
               </a:extLst>
             </p:cNvPr>
@@ -10724,7 +10853,7 @@
             <p:cNvPr id="7" name="Oval 6">
               <a:extLst>
                 <a:ext uri="{FF2B5EF4-FFF2-40B4-BE49-F238E27FC236}">
-                  <a16:creationId xmlns:a16="http://schemas.microsoft.com/office/drawing/2014/main" id="{A5B78129-7697-6667-80D4-09853D491037}"/>
+                  <a16:creationId xmlns:a16="http://schemas.microsoft.com/office/drawing/2014/main" id="{6ADD03E5-B0B3-570B-5ABB-30D5CE482309}"/>
                 </a:ext>
               </a:extLst>
             </p:cNvPr>
@@ -10792,7 +10921,7 @@
             <p:cNvPr id="9" name="Graphic 8">
               <a:extLst>
                 <a:ext uri="{FF2B5EF4-FFF2-40B4-BE49-F238E27FC236}">
-                  <a16:creationId xmlns:a16="http://schemas.microsoft.com/office/drawing/2014/main" id="{36883DAF-E76E-5651-B9B9-941671D030E5}"/>
+                  <a16:creationId xmlns:a16="http://schemas.microsoft.com/office/drawing/2014/main" id="{4F670EEC-3AE6-B686-B706-AA1B4E331B97}"/>
                 </a:ext>
               </a:extLst>
             </p:cNvPr>
@@ -10828,7 +10957,7 @@
             <p:cNvPr id="10" name="TextBox 9">
               <a:extLst>
                 <a:ext uri="{FF2B5EF4-FFF2-40B4-BE49-F238E27FC236}">
-                  <a16:creationId xmlns:a16="http://schemas.microsoft.com/office/drawing/2014/main" id="{A85728D1-EEBE-CFE3-8263-BAB820DD82B6}"/>
+                  <a16:creationId xmlns:a16="http://schemas.microsoft.com/office/drawing/2014/main" id="{C01BEE7A-88D6-0D22-D54E-C74C9560A23F}"/>
                 </a:ext>
               </a:extLst>
             </p:cNvPr>
@@ -10893,7 +11022,7 @@
           <p:cNvPr id="18" name="!!Stage_Sub_Card_1!!">
             <a:extLst>
               <a:ext uri="{FF2B5EF4-FFF2-40B4-BE49-F238E27FC236}">
-                <a16:creationId xmlns:a16="http://schemas.microsoft.com/office/drawing/2014/main" id="{9F6851B8-A388-241B-A333-529D5D98CCA9}"/>
+                <a16:creationId xmlns:a16="http://schemas.microsoft.com/office/drawing/2014/main" id="{28666421-C58B-6E9F-EEC4-4A619A82587B}"/>
               </a:ext>
             </a:extLst>
           </p:cNvPr>
@@ -10913,7 +11042,7 @@
             <p:cNvPr id="12" name="Rectangle: Rounded Corners 11">
               <a:extLst>
                 <a:ext uri="{FF2B5EF4-FFF2-40B4-BE49-F238E27FC236}">
-                  <a16:creationId xmlns:a16="http://schemas.microsoft.com/office/drawing/2014/main" id="{10DD7905-1AE3-2C30-B555-DF340ECDAA13}"/>
+                  <a16:creationId xmlns:a16="http://schemas.microsoft.com/office/drawing/2014/main" id="{20047492-4F1A-E9AA-6E4C-F905B1A8DC2B}"/>
                 </a:ext>
               </a:extLst>
             </p:cNvPr>
@@ -10967,7 +11096,7 @@
             <p:cNvPr id="13" name="Rectangle: Rounded Corners 12">
               <a:extLst>
                 <a:ext uri="{FF2B5EF4-FFF2-40B4-BE49-F238E27FC236}">
-                  <a16:creationId xmlns:a16="http://schemas.microsoft.com/office/drawing/2014/main" id="{B96FA1B0-4254-807D-BF58-665ED30D4511}"/>
+                  <a16:creationId xmlns:a16="http://schemas.microsoft.com/office/drawing/2014/main" id="{E1DF6C6D-CAEF-7B11-BA13-424901E7C720}"/>
                 </a:ext>
               </a:extLst>
             </p:cNvPr>
@@ -11043,7 +11172,7 @@
             <p:cNvPr id="14" name="Oval 13">
               <a:extLst>
                 <a:ext uri="{FF2B5EF4-FFF2-40B4-BE49-F238E27FC236}">
-                  <a16:creationId xmlns:a16="http://schemas.microsoft.com/office/drawing/2014/main" id="{A176F49C-C20C-B463-4368-96930915BD60}"/>
+                  <a16:creationId xmlns:a16="http://schemas.microsoft.com/office/drawing/2014/main" id="{1FB9D2F0-5DDC-8291-5179-80981CB7B1D7}"/>
                 </a:ext>
               </a:extLst>
             </p:cNvPr>
@@ -11111,7 +11240,7 @@
             <p:cNvPr id="16" name="Graphic 15">
               <a:extLst>
                 <a:ext uri="{FF2B5EF4-FFF2-40B4-BE49-F238E27FC236}">
-                  <a16:creationId xmlns:a16="http://schemas.microsoft.com/office/drawing/2014/main" id="{59D9B0E0-0501-BB6E-4B0A-C59AC7C3890E}"/>
+                  <a16:creationId xmlns:a16="http://schemas.microsoft.com/office/drawing/2014/main" id="{4761BFAD-EB3F-8FE3-92D5-F826935BEEC9}"/>
                 </a:ext>
               </a:extLst>
             </p:cNvPr>
@@ -11147,7 +11276,7 @@
             <p:cNvPr id="17" name="TextBox 16">
               <a:extLst>
                 <a:ext uri="{FF2B5EF4-FFF2-40B4-BE49-F238E27FC236}">
-                  <a16:creationId xmlns:a16="http://schemas.microsoft.com/office/drawing/2014/main" id="{664D4E60-3F59-A2B7-ECD8-415A14EA1CE3}"/>
+                  <a16:creationId xmlns:a16="http://schemas.microsoft.com/office/drawing/2014/main" id="{FAEDC4B1-80A6-F5BF-2BB2-379E41FAD503}"/>
                 </a:ext>
               </a:extLst>
             </p:cNvPr>
@@ -11209,7 +11338,7 @@
           <p:cNvPr id="25" name="!!Stage_Sub_Card_2!!">
             <a:extLst>
               <a:ext uri="{FF2B5EF4-FFF2-40B4-BE49-F238E27FC236}">
-                <a16:creationId xmlns:a16="http://schemas.microsoft.com/office/drawing/2014/main" id="{B1B29CEB-5BBD-0A0A-4B44-F8FD99C7AD5C}"/>
+                <a16:creationId xmlns:a16="http://schemas.microsoft.com/office/drawing/2014/main" id="{3CAB5C7F-1266-18F9-44FB-4C86E0BE9F68}"/>
               </a:ext>
             </a:extLst>
           </p:cNvPr>
@@ -11229,7 +11358,7 @@
             <p:cNvPr id="19" name="Rectangle: Rounded Corners 18">
               <a:extLst>
                 <a:ext uri="{FF2B5EF4-FFF2-40B4-BE49-F238E27FC236}">
-                  <a16:creationId xmlns:a16="http://schemas.microsoft.com/office/drawing/2014/main" id="{C0DB2BE9-6502-353F-FAFE-52CC3C79ECEB}"/>
+                  <a16:creationId xmlns:a16="http://schemas.microsoft.com/office/drawing/2014/main" id="{3BEED33D-1DB3-E54E-8998-3C8C2E65EB05}"/>
                 </a:ext>
               </a:extLst>
             </p:cNvPr>
@@ -11283,7 +11412,7 @@
             <p:cNvPr id="20" name="Rectangle: Rounded Corners 19">
               <a:extLst>
                 <a:ext uri="{FF2B5EF4-FFF2-40B4-BE49-F238E27FC236}">
-                  <a16:creationId xmlns:a16="http://schemas.microsoft.com/office/drawing/2014/main" id="{8FCBB64C-41D0-5F09-DA17-E1DB18A55084}"/>
+                  <a16:creationId xmlns:a16="http://schemas.microsoft.com/office/drawing/2014/main" id="{B355AB8E-0F04-EFBB-0066-278BC16D77F2}"/>
                 </a:ext>
               </a:extLst>
             </p:cNvPr>
@@ -11359,7 +11488,7 @@
             <p:cNvPr id="21" name="Oval 20">
               <a:extLst>
                 <a:ext uri="{FF2B5EF4-FFF2-40B4-BE49-F238E27FC236}">
-                  <a16:creationId xmlns:a16="http://schemas.microsoft.com/office/drawing/2014/main" id="{738AABBC-03B5-99D4-8D3A-6F5C11619D42}"/>
+                  <a16:creationId xmlns:a16="http://schemas.microsoft.com/office/drawing/2014/main" id="{7A897BBA-408E-01BA-196B-80CECEC65262}"/>
                 </a:ext>
               </a:extLst>
             </p:cNvPr>
@@ -11427,7 +11556,7 @@
             <p:cNvPr id="23" name="Graphic 22">
               <a:extLst>
                 <a:ext uri="{FF2B5EF4-FFF2-40B4-BE49-F238E27FC236}">
-                  <a16:creationId xmlns:a16="http://schemas.microsoft.com/office/drawing/2014/main" id="{527D27C8-CA4F-46D2-D502-01158FF6452D}"/>
+                  <a16:creationId xmlns:a16="http://schemas.microsoft.com/office/drawing/2014/main" id="{F1119E9A-2768-E391-A491-B4B03FD42FD6}"/>
                 </a:ext>
               </a:extLst>
             </p:cNvPr>
@@ -11463,7 +11592,7 @@
             <p:cNvPr id="24" name="TextBox 23">
               <a:extLst>
                 <a:ext uri="{FF2B5EF4-FFF2-40B4-BE49-F238E27FC236}">
-                  <a16:creationId xmlns:a16="http://schemas.microsoft.com/office/drawing/2014/main" id="{6BA11974-1193-3F2E-F8A7-988F3A55C9F2}"/>
+                  <a16:creationId xmlns:a16="http://schemas.microsoft.com/office/drawing/2014/main" id="{46C085B3-FD00-D16C-AEEF-F8F25D65342F}"/>
                 </a:ext>
               </a:extLst>
             </p:cNvPr>
@@ -11525,7 +11654,7 @@
           <p:cNvPr id="26" name="!!Anchor_Source_Footer!!">
             <a:extLst>
               <a:ext uri="{FF2B5EF4-FFF2-40B4-BE49-F238E27FC236}">
-                <a16:creationId xmlns:a16="http://schemas.microsoft.com/office/drawing/2014/main" id="{B2E1587D-7A33-35BD-8CFE-35522CCCFD0C}"/>
+                <a16:creationId xmlns:a16="http://schemas.microsoft.com/office/drawing/2014/main" id="{32B0C1E4-0886-4D52-49D2-4D75BD36DC13}"/>
               </a:ext>
             </a:extLst>
           </p:cNvPr>
@@ -11563,7 +11692,7 @@
     </p:spTree>
     <p:extLst>
       <p:ext uri="{BB962C8B-B14F-4D97-AF65-F5344CB8AC3E}">
-        <p14:creationId xmlns:p14="http://schemas.microsoft.com/office/powerpoint/2010/main" val="1212921369"/>
+        <p14:creationId xmlns:p14="http://schemas.microsoft.com/office/powerpoint/2010/main" val="3745982890"/>
       </p:ext>
     </p:extLst>
   </p:cSld>
@@ -11594,9 +11723,6 @@
                     <p:cTn id="3" fill="hold">
                       <p:stCondLst>
                         <p:cond delay="indefinite"/>
-                        <p:cond evt="onBegin" delay="0">
-                          <p:tn val="2"/>
-                        </p:cond>
                       </p:stCondLst>
                       <p:childTnLst>
                         <p:par>
@@ -11606,9 +11732,9 @@
                             </p:stCondLst>
                             <p:childTnLst>
                               <p:par>
-                                <p:cTn id="5" presetID="2" presetClass="entr" presetSubtype="1" accel="50000" decel="50000" fill="hold" nodeType="withEffect">
+                                <p:cTn id="5" presetID="2" presetClass="entr" presetSubtype="1" accel="50000" decel="50000" fill="hold" nodeType="clickEffect">
                                   <p:stCondLst>
-                                    <p:cond delay="120"/>
+                                    <p:cond delay="0"/>
                                   </p:stCondLst>
                                   <p:childTnLst>
                                     <p:set>
@@ -11678,15 +11804,33 @@
                                   </p:childTnLst>
                                 </p:cTn>
                               </p:par>
+                            </p:childTnLst>
+                          </p:cTn>
+                        </p:par>
+                      </p:childTnLst>
+                    </p:cTn>
+                  </p:par>
+                  <p:par>
+                    <p:cTn id="9" fill="hold">
+                      <p:stCondLst>
+                        <p:cond delay="indefinite"/>
+                      </p:stCondLst>
+                      <p:childTnLst>
+                        <p:par>
+                          <p:cTn id="10" fill="hold">
+                            <p:stCondLst>
+                              <p:cond delay="0"/>
+                            </p:stCondLst>
+                            <p:childTnLst>
                               <p:par>
-                                <p:cTn id="9" presetID="2" presetClass="entr" presetSubtype="1" accel="50000" decel="50000" fill="hold" nodeType="withEffect">
+                                <p:cTn id="11" presetID="2" presetClass="entr" presetSubtype="1" accel="50000" decel="50000" fill="hold" nodeType="clickEffect">
                                   <p:stCondLst>
-                                    <p:cond delay="240"/>
+                                    <p:cond delay="0"/>
                                   </p:stCondLst>
                                   <p:childTnLst>
                                     <p:set>
                                       <p:cBhvr>
-                                        <p:cTn id="10" dur="1" fill="hold">
+                                        <p:cTn id="12" dur="1" fill="hold">
                                           <p:stCondLst>
                                             <p:cond delay="0"/>
                                           </p:stCondLst>
@@ -11704,7 +11848,7 @@
                                     </p:set>
                                     <p:anim calcmode="lin" valueType="num">
                                       <p:cBhvr additive="base">
-                                        <p:cTn id="11" dur="500" fill="hold"/>
+                                        <p:cTn id="13" dur="500" fill="hold"/>
                                         <p:tgtEl>
                                           <p:spTgt spid="25"/>
                                         </p:tgtEl>
@@ -11727,7 +11871,7 @@
                                     </p:anim>
                                     <p:anim calcmode="lin" valueType="num">
                                       <p:cBhvr additive="base">
-                                        <p:cTn id="12" dur="500" fill="hold"/>
+                                        <p:cTn id="14" dur="500" fill="hold"/>
                                         <p:tgtEl>
                                           <p:spTgt spid="25"/>
                                         </p:tgtEl>
@@ -11812,7 +11956,7 @@
           <p:cNvPr id="2" name="!!Anchor_Kicker_Rail!!">
             <a:extLst>
               <a:ext uri="{FF2B5EF4-FFF2-40B4-BE49-F238E27FC236}">
-                <a16:creationId xmlns:a16="http://schemas.microsoft.com/office/drawing/2014/main" id="{EB0FD61A-E263-81BE-CE3F-6899A8A7F1AE}"/>
+                <a16:creationId xmlns:a16="http://schemas.microsoft.com/office/drawing/2014/main" id="{D5FF6174-1AA6-FF61-EA87-58DF88EAA38F}"/>
               </a:ext>
             </a:extLst>
           </p:cNvPr>
@@ -11852,7 +11996,7 @@
           <p:cNvPr id="3" name="!!Anchor_Slide_Tracker!!">
             <a:extLst>
               <a:ext uri="{FF2B5EF4-FFF2-40B4-BE49-F238E27FC236}">
-                <a16:creationId xmlns:a16="http://schemas.microsoft.com/office/drawing/2014/main" id="{3EFFCEBA-48D3-8AAE-E441-6FC732EA2D7D}"/>
+                <a16:creationId xmlns:a16="http://schemas.microsoft.com/office/drawing/2014/main" id="{337B2984-C29C-B25F-F7AD-53E326FD66BD}"/>
               </a:ext>
             </a:extLst>
           </p:cNvPr>
@@ -11893,7 +12037,7 @@
           <p:cNvPr id="4" name="!!Anchor_Assertion_Title!!">
             <a:extLst>
               <a:ext uri="{FF2B5EF4-FFF2-40B4-BE49-F238E27FC236}">
-                <a16:creationId xmlns:a16="http://schemas.microsoft.com/office/drawing/2014/main" id="{B25C0810-41B7-B573-8C83-CD39B41887FC}"/>
+                <a16:creationId xmlns:a16="http://schemas.microsoft.com/office/drawing/2014/main" id="{59FA35C1-C3F8-659C-5D9E-D88A1CCBC1D9}"/>
               </a:ext>
             </a:extLst>
           </p:cNvPr>
@@ -11933,7 +12077,7 @@
           <p:cNvPr id="12" name="!!Stage_Hero_Container!!">
             <a:extLst>
               <a:ext uri="{FF2B5EF4-FFF2-40B4-BE49-F238E27FC236}">
-                <a16:creationId xmlns:a16="http://schemas.microsoft.com/office/drawing/2014/main" id="{A5E5A5B5-43D5-8EAF-4BAF-68878AAE8896}"/>
+                <a16:creationId xmlns:a16="http://schemas.microsoft.com/office/drawing/2014/main" id="{13B93A45-3744-3F23-12E7-42DD7B6056A3}"/>
               </a:ext>
             </a:extLst>
           </p:cNvPr>
@@ -11953,7 +12097,7 @@
             <p:cNvPr id="6" name="Picture 5">
               <a:extLst>
                 <a:ext uri="{FF2B5EF4-FFF2-40B4-BE49-F238E27FC236}">
-                  <a16:creationId xmlns:a16="http://schemas.microsoft.com/office/drawing/2014/main" id="{B6E09E81-73EF-7F99-EA4D-5194E2F72AD7}"/>
+                  <a16:creationId xmlns:a16="http://schemas.microsoft.com/office/drawing/2014/main" id="{D7AB06E8-C812-53B7-A19A-B03A468872A1}"/>
                 </a:ext>
               </a:extLst>
             </p:cNvPr>
@@ -11994,7 +12138,7 @@
             <p:cNvPr id="7" name="Rectangle: Rounded Corners 6">
               <a:extLst>
                 <a:ext uri="{FF2B5EF4-FFF2-40B4-BE49-F238E27FC236}">
-                  <a16:creationId xmlns:a16="http://schemas.microsoft.com/office/drawing/2014/main" id="{02E87B72-FD3E-4A74-2BB1-1A39BB905F93}"/>
+                  <a16:creationId xmlns:a16="http://schemas.microsoft.com/office/drawing/2014/main" id="{B9EA0D43-E4FE-6537-F09A-C18409BC2C01}"/>
                 </a:ext>
               </a:extLst>
             </p:cNvPr>
@@ -12048,7 +12192,7 @@
             <p:cNvPr id="8" name="Oval 7">
               <a:extLst>
                 <a:ext uri="{FF2B5EF4-FFF2-40B4-BE49-F238E27FC236}">
-                  <a16:creationId xmlns:a16="http://schemas.microsoft.com/office/drawing/2014/main" id="{60293951-E203-C692-E23E-40C5EFA78D37}"/>
+                  <a16:creationId xmlns:a16="http://schemas.microsoft.com/office/drawing/2014/main" id="{A8CEDA93-CFCE-4CFE-FA48-F0E2B0D070BF}"/>
                 </a:ext>
               </a:extLst>
             </p:cNvPr>
@@ -12116,7 +12260,7 @@
             <p:cNvPr id="10" name="Graphic 9">
               <a:extLst>
                 <a:ext uri="{FF2B5EF4-FFF2-40B4-BE49-F238E27FC236}">
-                  <a16:creationId xmlns:a16="http://schemas.microsoft.com/office/drawing/2014/main" id="{D0995919-5BFE-E9A2-A47D-0759C2493224}"/>
+                  <a16:creationId xmlns:a16="http://schemas.microsoft.com/office/drawing/2014/main" id="{1B1CE604-4A94-7C4A-13BA-22998174373A}"/>
                 </a:ext>
               </a:extLst>
             </p:cNvPr>
@@ -12152,7 +12296,7 @@
             <p:cNvPr id="11" name="TextBox 10">
               <a:extLst>
                 <a:ext uri="{FF2B5EF4-FFF2-40B4-BE49-F238E27FC236}">
-                  <a16:creationId xmlns:a16="http://schemas.microsoft.com/office/drawing/2014/main" id="{6C9073C2-9117-F642-3C06-1609CA7BBC88}"/>
+                  <a16:creationId xmlns:a16="http://schemas.microsoft.com/office/drawing/2014/main" id="{33C22AAA-F6A9-31FD-4CDF-3AFB2551C995}"/>
                 </a:ext>
               </a:extLst>
             </p:cNvPr>
@@ -12211,7 +12355,7 @@
           <p:cNvPr id="18" name="!!Stage_Sub_Card_1!!">
             <a:extLst>
               <a:ext uri="{FF2B5EF4-FFF2-40B4-BE49-F238E27FC236}">
-                <a16:creationId xmlns:a16="http://schemas.microsoft.com/office/drawing/2014/main" id="{0D66A7AB-4D4C-245C-51B1-B995507E65A8}"/>
+                <a16:creationId xmlns:a16="http://schemas.microsoft.com/office/drawing/2014/main" id="{D413A16F-3007-6C49-2241-B7D3847C3840}"/>
               </a:ext>
             </a:extLst>
           </p:cNvPr>
@@ -12231,7 +12375,7 @@
             <p:cNvPr id="13" name="Rectangle: Rounded Corners 12">
               <a:extLst>
                 <a:ext uri="{FF2B5EF4-FFF2-40B4-BE49-F238E27FC236}">
-                  <a16:creationId xmlns:a16="http://schemas.microsoft.com/office/drawing/2014/main" id="{D6FF2767-FDD5-19B3-4AE7-BC774B6B0586}"/>
+                  <a16:creationId xmlns:a16="http://schemas.microsoft.com/office/drawing/2014/main" id="{749C4B67-A4F9-EE1F-1DF6-383E71618741}"/>
                 </a:ext>
               </a:extLst>
             </p:cNvPr>
@@ -12285,7 +12429,7 @@
             <p:cNvPr id="14" name="Oval 13">
               <a:extLst>
                 <a:ext uri="{FF2B5EF4-FFF2-40B4-BE49-F238E27FC236}">
-                  <a16:creationId xmlns:a16="http://schemas.microsoft.com/office/drawing/2014/main" id="{7A509492-F893-1F1E-1F58-70D2A703CFA6}"/>
+                  <a16:creationId xmlns:a16="http://schemas.microsoft.com/office/drawing/2014/main" id="{48C432AF-D0E2-980A-B25F-D785150882B7}"/>
                 </a:ext>
               </a:extLst>
             </p:cNvPr>
@@ -12353,7 +12497,7 @@
             <p:cNvPr id="16" name="Graphic 15">
               <a:extLst>
                 <a:ext uri="{FF2B5EF4-FFF2-40B4-BE49-F238E27FC236}">
-                  <a16:creationId xmlns:a16="http://schemas.microsoft.com/office/drawing/2014/main" id="{F0235734-3C1C-2812-CFA9-B866D32E9EE1}"/>
+                  <a16:creationId xmlns:a16="http://schemas.microsoft.com/office/drawing/2014/main" id="{72481D90-D9B6-296F-B209-297728D39536}"/>
                 </a:ext>
               </a:extLst>
             </p:cNvPr>
@@ -12389,7 +12533,7 @@
             <p:cNvPr id="17" name="TextBox 16">
               <a:extLst>
                 <a:ext uri="{FF2B5EF4-FFF2-40B4-BE49-F238E27FC236}">
-                  <a16:creationId xmlns:a16="http://schemas.microsoft.com/office/drawing/2014/main" id="{EBE89BAB-2A68-E32B-8C18-09CDDC38037B}"/>
+                  <a16:creationId xmlns:a16="http://schemas.microsoft.com/office/drawing/2014/main" id="{A4EE698A-64C6-BE25-2790-021A41BC47EB}"/>
                 </a:ext>
               </a:extLst>
             </p:cNvPr>
@@ -12451,7 +12595,7 @@
           <p:cNvPr id="24" name="!!Stage_Sub_Card_2!!">
             <a:extLst>
               <a:ext uri="{FF2B5EF4-FFF2-40B4-BE49-F238E27FC236}">
-                <a16:creationId xmlns:a16="http://schemas.microsoft.com/office/drawing/2014/main" id="{A648FF81-5C48-6FC5-A6E8-AE8802D4BEB6}"/>
+                <a16:creationId xmlns:a16="http://schemas.microsoft.com/office/drawing/2014/main" id="{EA9BC9CC-EDCB-13C3-2A81-F40BEB17DF11}"/>
               </a:ext>
             </a:extLst>
           </p:cNvPr>
@@ -12471,7 +12615,7 @@
             <p:cNvPr id="19" name="Rectangle: Rounded Corners 18">
               <a:extLst>
                 <a:ext uri="{FF2B5EF4-FFF2-40B4-BE49-F238E27FC236}">
-                  <a16:creationId xmlns:a16="http://schemas.microsoft.com/office/drawing/2014/main" id="{F429FD9E-59A6-4D80-D02C-194036E75547}"/>
+                  <a16:creationId xmlns:a16="http://schemas.microsoft.com/office/drawing/2014/main" id="{7B2ECA36-CC11-FE92-1AE4-A29330D5FAEF}"/>
                 </a:ext>
               </a:extLst>
             </p:cNvPr>
@@ -12525,7 +12669,7 @@
             <p:cNvPr id="20" name="Oval 19">
               <a:extLst>
                 <a:ext uri="{FF2B5EF4-FFF2-40B4-BE49-F238E27FC236}">
-                  <a16:creationId xmlns:a16="http://schemas.microsoft.com/office/drawing/2014/main" id="{54B99899-E02F-B06A-7F50-2F3BBDC564E6}"/>
+                  <a16:creationId xmlns:a16="http://schemas.microsoft.com/office/drawing/2014/main" id="{EFC70EAA-F3E0-313C-D69A-4C2ECF7EFA3D}"/>
                 </a:ext>
               </a:extLst>
             </p:cNvPr>
@@ -12593,7 +12737,7 @@
             <p:cNvPr id="22" name="Graphic 21">
               <a:extLst>
                 <a:ext uri="{FF2B5EF4-FFF2-40B4-BE49-F238E27FC236}">
-                  <a16:creationId xmlns:a16="http://schemas.microsoft.com/office/drawing/2014/main" id="{B65FD7EA-8C01-1D69-F4C9-42EE4154566E}"/>
+                  <a16:creationId xmlns:a16="http://schemas.microsoft.com/office/drawing/2014/main" id="{91850806-1A7B-B11C-67DA-F18AC9EC6896}"/>
                 </a:ext>
               </a:extLst>
             </p:cNvPr>
@@ -12629,7 +12773,7 @@
             <p:cNvPr id="23" name="TextBox 22">
               <a:extLst>
                 <a:ext uri="{FF2B5EF4-FFF2-40B4-BE49-F238E27FC236}">
-                  <a16:creationId xmlns:a16="http://schemas.microsoft.com/office/drawing/2014/main" id="{40D18C99-F175-27B1-7313-6259D4380985}"/>
+                  <a16:creationId xmlns:a16="http://schemas.microsoft.com/office/drawing/2014/main" id="{B5E4FA83-7879-96D4-2ADE-00E32E8C8502}"/>
                 </a:ext>
               </a:extLst>
             </p:cNvPr>
@@ -12685,7 +12829,7 @@
           <p:cNvPr id="25" name="!!Anchor_Source_Footer!!">
             <a:extLst>
               <a:ext uri="{FF2B5EF4-FFF2-40B4-BE49-F238E27FC236}">
-                <a16:creationId xmlns:a16="http://schemas.microsoft.com/office/drawing/2014/main" id="{1CD5EFA6-FBEE-4500-1E36-A4C5F8B03569}"/>
+                <a16:creationId xmlns:a16="http://schemas.microsoft.com/office/drawing/2014/main" id="{68C83308-9E1A-9BDE-920A-435176C7747B}"/>
               </a:ext>
             </a:extLst>
           </p:cNvPr>
@@ -12729,7 +12873,7 @@
     </p:spTree>
     <p:extLst>
       <p:ext uri="{BB962C8B-B14F-4D97-AF65-F5344CB8AC3E}">
-        <p14:creationId xmlns:p14="http://schemas.microsoft.com/office/powerpoint/2010/main" val="3498282192"/>
+        <p14:creationId xmlns:p14="http://schemas.microsoft.com/office/powerpoint/2010/main" val="3919180640"/>
       </p:ext>
     </p:extLst>
   </p:cSld>
@@ -12760,9 +12904,6 @@
                     <p:cTn id="3" fill="hold">
                       <p:stCondLst>
                         <p:cond delay="indefinite"/>
-                        <p:cond evt="onBegin" delay="0">
-                          <p:tn val="2"/>
-                        </p:cond>
                       </p:stCondLst>
                       <p:childTnLst>
                         <p:par>
@@ -12772,9 +12913,9 @@
                             </p:stCondLst>
                             <p:childTnLst>
                               <p:par>
-                                <p:cTn id="5" presetID="2" presetClass="entr" presetSubtype="1" accel="50000" decel="50000" fill="hold" nodeType="withEffect">
+                                <p:cTn id="5" presetID="2" presetClass="entr" presetSubtype="1" accel="50000" decel="50000" fill="hold" nodeType="clickEffect">
                                   <p:stCondLst>
-                                    <p:cond delay="120"/>
+                                    <p:cond delay="0"/>
                                   </p:stCondLst>
                                   <p:childTnLst>
                                     <p:set>
@@ -12844,15 +12985,33 @@
                                   </p:childTnLst>
                                 </p:cTn>
                               </p:par>
+                            </p:childTnLst>
+                          </p:cTn>
+                        </p:par>
+                      </p:childTnLst>
+                    </p:cTn>
+                  </p:par>
+                  <p:par>
+                    <p:cTn id="9" fill="hold">
+                      <p:stCondLst>
+                        <p:cond delay="indefinite"/>
+                      </p:stCondLst>
+                      <p:childTnLst>
+                        <p:par>
+                          <p:cTn id="10" fill="hold">
+                            <p:stCondLst>
+                              <p:cond delay="0"/>
+                            </p:stCondLst>
+                            <p:childTnLst>
                               <p:par>
-                                <p:cTn id="9" presetID="2" presetClass="entr" presetSubtype="1" accel="50000" decel="50000" fill="hold" nodeType="withEffect">
+                                <p:cTn id="11" presetID="2" presetClass="entr" presetSubtype="1" accel="50000" decel="50000" fill="hold" nodeType="clickEffect">
                                   <p:stCondLst>
-                                    <p:cond delay="240"/>
+                                    <p:cond delay="0"/>
                                   </p:stCondLst>
                                   <p:childTnLst>
                                     <p:set>
                                       <p:cBhvr>
-                                        <p:cTn id="10" dur="1" fill="hold">
+                                        <p:cTn id="12" dur="1" fill="hold">
                                           <p:stCondLst>
                                             <p:cond delay="0"/>
                                           </p:stCondLst>
@@ -12870,7 +13029,7 @@
                                     </p:set>
                                     <p:anim calcmode="lin" valueType="num">
                                       <p:cBhvr additive="base">
-                                        <p:cTn id="11" dur="500" fill="hold"/>
+                                        <p:cTn id="13" dur="500" fill="hold"/>
                                         <p:tgtEl>
                                           <p:spTgt spid="24"/>
                                         </p:tgtEl>
@@ -12893,7 +13052,7 @@
                                     </p:anim>
                                     <p:anim calcmode="lin" valueType="num">
                                       <p:cBhvr additive="base">
-                                        <p:cTn id="12" dur="500" fill="hold"/>
+                                        <p:cTn id="14" dur="500" fill="hold"/>
                                         <p:tgtEl>
                                           <p:spTgt spid="24"/>
                                         </p:tgtEl>
@@ -12978,7 +13137,7 @@
           <p:cNvPr id="2" name="!!Anchor_Kicker_Rail!!">
             <a:extLst>
               <a:ext uri="{FF2B5EF4-FFF2-40B4-BE49-F238E27FC236}">
-                <a16:creationId xmlns:a16="http://schemas.microsoft.com/office/drawing/2014/main" id="{A2ED8C56-97C7-C785-1243-9FE567B00657}"/>
+                <a16:creationId xmlns:a16="http://schemas.microsoft.com/office/drawing/2014/main" id="{96435574-2C2C-509A-67F0-04DD51D4CAA5}"/>
               </a:ext>
             </a:extLst>
           </p:cNvPr>
@@ -13018,7 +13177,7 @@
           <p:cNvPr id="3" name="!!Anchor_Slide_Tracker!!">
             <a:extLst>
               <a:ext uri="{FF2B5EF4-FFF2-40B4-BE49-F238E27FC236}">
-                <a16:creationId xmlns:a16="http://schemas.microsoft.com/office/drawing/2014/main" id="{B510B665-1B1F-6045-5103-D7022FE23FD5}"/>
+                <a16:creationId xmlns:a16="http://schemas.microsoft.com/office/drawing/2014/main" id="{E435F761-A7B3-54E5-0C27-DA0E5BD1F200}"/>
               </a:ext>
             </a:extLst>
           </p:cNvPr>
@@ -13059,7 +13218,7 @@
           <p:cNvPr id="4" name="!!Anchor_Assertion_Title!!">
             <a:extLst>
               <a:ext uri="{FF2B5EF4-FFF2-40B4-BE49-F238E27FC236}">
-                <a16:creationId xmlns:a16="http://schemas.microsoft.com/office/drawing/2014/main" id="{2BA9E453-235D-A76F-8853-D33A8B64F2DF}"/>
+                <a16:creationId xmlns:a16="http://schemas.microsoft.com/office/drawing/2014/main" id="{76DF1C89-288C-35CC-08F6-6D79774CCE90}"/>
               </a:ext>
             </a:extLst>
           </p:cNvPr>
@@ -13105,7 +13264,7 @@
           <p:cNvPr id="11" name="!!Stage_Hero_Container!!">
             <a:extLst>
               <a:ext uri="{FF2B5EF4-FFF2-40B4-BE49-F238E27FC236}">
-                <a16:creationId xmlns:a16="http://schemas.microsoft.com/office/drawing/2014/main" id="{2A91862C-F7EA-62BB-3B2A-538DD83062E7}"/>
+                <a16:creationId xmlns:a16="http://schemas.microsoft.com/office/drawing/2014/main" id="{28EE5186-5769-A4B1-5F03-FE2ECAC5F125}"/>
               </a:ext>
             </a:extLst>
           </p:cNvPr>
@@ -13125,7 +13284,7 @@
             <p:cNvPr id="5" name="Rectangle: Rounded Corners 4">
               <a:extLst>
                 <a:ext uri="{FF2B5EF4-FFF2-40B4-BE49-F238E27FC236}">
-                  <a16:creationId xmlns:a16="http://schemas.microsoft.com/office/drawing/2014/main" id="{303EF69F-0557-CB2A-501E-E67B4AD54DA4}"/>
+                  <a16:creationId xmlns:a16="http://schemas.microsoft.com/office/drawing/2014/main" id="{E4C873CA-1DC9-D365-DFA6-EB511A8CC2F3}"/>
                 </a:ext>
               </a:extLst>
             </p:cNvPr>
@@ -13179,7 +13338,7 @@
             <p:cNvPr id="6" name="Rectangle: Rounded Corners 5">
               <a:extLst>
                 <a:ext uri="{FF2B5EF4-FFF2-40B4-BE49-F238E27FC236}">
-                  <a16:creationId xmlns:a16="http://schemas.microsoft.com/office/drawing/2014/main" id="{446DCEBF-C189-C2BD-EE2A-B9222E6689D3}"/>
+                  <a16:creationId xmlns:a16="http://schemas.microsoft.com/office/drawing/2014/main" id="{44B3CC7B-9949-C9B7-21EA-49F3CE550329}"/>
                 </a:ext>
               </a:extLst>
             </p:cNvPr>
@@ -13255,7 +13414,7 @@
             <p:cNvPr id="7" name="Oval 6">
               <a:extLst>
                 <a:ext uri="{FF2B5EF4-FFF2-40B4-BE49-F238E27FC236}">
-                  <a16:creationId xmlns:a16="http://schemas.microsoft.com/office/drawing/2014/main" id="{28C34F2C-D5CF-3AC7-823D-D257E3105155}"/>
+                  <a16:creationId xmlns:a16="http://schemas.microsoft.com/office/drawing/2014/main" id="{81435777-DA23-21DC-6EFB-B4C965E19B01}"/>
                 </a:ext>
               </a:extLst>
             </p:cNvPr>
@@ -13323,7 +13482,7 @@
             <p:cNvPr id="9" name="Graphic 8">
               <a:extLst>
                 <a:ext uri="{FF2B5EF4-FFF2-40B4-BE49-F238E27FC236}">
-                  <a16:creationId xmlns:a16="http://schemas.microsoft.com/office/drawing/2014/main" id="{B5248F78-5CFC-45B3-1AEA-E7A1A73183E4}"/>
+                  <a16:creationId xmlns:a16="http://schemas.microsoft.com/office/drawing/2014/main" id="{83AF78E1-CCA8-B742-9DAB-66F0040A3ACD}"/>
                 </a:ext>
               </a:extLst>
             </p:cNvPr>
@@ -13359,7 +13518,7 @@
             <p:cNvPr id="10" name="TextBox 9">
               <a:extLst>
                 <a:ext uri="{FF2B5EF4-FFF2-40B4-BE49-F238E27FC236}">
-                  <a16:creationId xmlns:a16="http://schemas.microsoft.com/office/drawing/2014/main" id="{9BBC41FC-54A4-6BCF-E871-153CCC11A45B}"/>
+                  <a16:creationId xmlns:a16="http://schemas.microsoft.com/office/drawing/2014/main" id="{F013E221-6CE5-AF57-D3BE-473628F9C8FF}"/>
                 </a:ext>
               </a:extLst>
             </p:cNvPr>
@@ -13424,7 +13583,7 @@
           <p:cNvPr id="18" name="!!Stage_Sub_Card_1!!">
             <a:extLst>
               <a:ext uri="{FF2B5EF4-FFF2-40B4-BE49-F238E27FC236}">
-                <a16:creationId xmlns:a16="http://schemas.microsoft.com/office/drawing/2014/main" id="{0C926480-5957-429A-891D-F328C01965EC}"/>
+                <a16:creationId xmlns:a16="http://schemas.microsoft.com/office/drawing/2014/main" id="{0F85C06B-EF13-E5A5-594D-DBAA23DD343B}"/>
               </a:ext>
             </a:extLst>
           </p:cNvPr>
@@ -13444,7 +13603,7 @@
             <p:cNvPr id="12" name="Rectangle: Rounded Corners 11">
               <a:extLst>
                 <a:ext uri="{FF2B5EF4-FFF2-40B4-BE49-F238E27FC236}">
-                  <a16:creationId xmlns:a16="http://schemas.microsoft.com/office/drawing/2014/main" id="{3BD9493E-928F-09DA-A154-313EADA8C563}"/>
+                  <a16:creationId xmlns:a16="http://schemas.microsoft.com/office/drawing/2014/main" id="{033DEC08-0866-CD5B-F952-9A1ABCEDCDA3}"/>
                 </a:ext>
               </a:extLst>
             </p:cNvPr>
@@ -13498,7 +13657,7 @@
             <p:cNvPr id="13" name="Rectangle: Rounded Corners 12">
               <a:extLst>
                 <a:ext uri="{FF2B5EF4-FFF2-40B4-BE49-F238E27FC236}">
-                  <a16:creationId xmlns:a16="http://schemas.microsoft.com/office/drawing/2014/main" id="{CF49B27C-1955-BAEF-7FC4-C55BB04B841D}"/>
+                  <a16:creationId xmlns:a16="http://schemas.microsoft.com/office/drawing/2014/main" id="{C7608070-4A87-D2D6-736B-B931480E4EEB}"/>
                 </a:ext>
               </a:extLst>
             </p:cNvPr>
@@ -13580,7 +13739,7 @@
             <p:cNvPr id="14" name="Oval 13">
               <a:extLst>
                 <a:ext uri="{FF2B5EF4-FFF2-40B4-BE49-F238E27FC236}">
-                  <a16:creationId xmlns:a16="http://schemas.microsoft.com/office/drawing/2014/main" id="{7F1A3F46-11CC-21D7-BA17-3FCDC07D4972}"/>
+                  <a16:creationId xmlns:a16="http://schemas.microsoft.com/office/drawing/2014/main" id="{8080CC58-1229-7F30-23C5-EB88BA3149B8}"/>
                 </a:ext>
               </a:extLst>
             </p:cNvPr>
@@ -13648,7 +13807,7 @@
             <p:cNvPr id="16" name="Graphic 15">
               <a:extLst>
                 <a:ext uri="{FF2B5EF4-FFF2-40B4-BE49-F238E27FC236}">
-                  <a16:creationId xmlns:a16="http://schemas.microsoft.com/office/drawing/2014/main" id="{D50FBDBD-37E0-F806-2FCF-223E4E223574}"/>
+                  <a16:creationId xmlns:a16="http://schemas.microsoft.com/office/drawing/2014/main" id="{63F160E2-3216-638C-8F1A-4732A941A9F4}"/>
                 </a:ext>
               </a:extLst>
             </p:cNvPr>
@@ -13684,7 +13843,7 @@
             <p:cNvPr id="17" name="TextBox 16">
               <a:extLst>
                 <a:ext uri="{FF2B5EF4-FFF2-40B4-BE49-F238E27FC236}">
-                  <a16:creationId xmlns:a16="http://schemas.microsoft.com/office/drawing/2014/main" id="{77C803A7-8526-3D73-E206-BE6EDF6C33EF}"/>
+                  <a16:creationId xmlns:a16="http://schemas.microsoft.com/office/drawing/2014/main" id="{797ABFA7-A901-41BC-F32D-F1274F668519}"/>
                 </a:ext>
               </a:extLst>
             </p:cNvPr>
@@ -13749,7 +13908,7 @@
           <p:cNvPr id="19" name="!!Anchor_Source_Footer!!">
             <a:extLst>
               <a:ext uri="{FF2B5EF4-FFF2-40B4-BE49-F238E27FC236}">
-                <a16:creationId xmlns:a16="http://schemas.microsoft.com/office/drawing/2014/main" id="{5BC65AEF-0BA2-1436-A051-03F9DA31EC67}"/>
+                <a16:creationId xmlns:a16="http://schemas.microsoft.com/office/drawing/2014/main" id="{9FFE18AC-AE8B-DEC5-85A1-822DC2B0346B}"/>
               </a:ext>
             </a:extLst>
           </p:cNvPr>
@@ -13787,7 +13946,7 @@
     </p:spTree>
     <p:extLst>
       <p:ext uri="{BB962C8B-B14F-4D97-AF65-F5344CB8AC3E}">
-        <p14:creationId xmlns:p14="http://schemas.microsoft.com/office/powerpoint/2010/main" val="3429066258"/>
+        <p14:creationId xmlns:p14="http://schemas.microsoft.com/office/powerpoint/2010/main" val="4074603920"/>
       </p:ext>
     </p:extLst>
   </p:cSld>
@@ -13818,9 +13977,6 @@
                     <p:cTn id="3" fill="hold">
                       <p:stCondLst>
                         <p:cond delay="indefinite"/>
-                        <p:cond evt="onBegin" delay="0">
-                          <p:tn val="2"/>
-                        </p:cond>
                       </p:stCondLst>
                       <p:childTnLst>
                         <p:par>
@@ -13830,9 +13986,9 @@
                             </p:stCondLst>
                             <p:childTnLst>
                               <p:par>
-                                <p:cTn id="5" presetID="2" presetClass="entr" presetSubtype="1" accel="50000" decel="50000" fill="hold" nodeType="withEffect">
+                                <p:cTn id="5" presetID="2" presetClass="entr" presetSubtype="1" accel="50000" decel="50000" fill="hold" nodeType="clickEffect">
                                   <p:stCondLst>
-                                    <p:cond delay="180"/>
+                                    <p:cond delay="0"/>
                                   </p:stCondLst>
                                   <p:childTnLst>
                                     <p:set>
@@ -13963,7 +14119,7 @@
           <p:cNvPr id="2" name="!!Anchor_Kicker_Rail!!">
             <a:extLst>
               <a:ext uri="{FF2B5EF4-FFF2-40B4-BE49-F238E27FC236}">
-                <a16:creationId xmlns:a16="http://schemas.microsoft.com/office/drawing/2014/main" id="{A201434D-AB95-E25F-76F2-FFE5678303CF}"/>
+                <a16:creationId xmlns:a16="http://schemas.microsoft.com/office/drawing/2014/main" id="{AE4CF16D-CF3A-D530-5F6B-6418C4BFF047}"/>
               </a:ext>
             </a:extLst>
           </p:cNvPr>
@@ -14003,7 +14159,7 @@
           <p:cNvPr id="3" name="!!Anchor_Slide_Tracker!!">
             <a:extLst>
               <a:ext uri="{FF2B5EF4-FFF2-40B4-BE49-F238E27FC236}">
-                <a16:creationId xmlns:a16="http://schemas.microsoft.com/office/drawing/2014/main" id="{3ECC6B5A-51B1-E788-969F-741F4E14E3C6}"/>
+                <a16:creationId xmlns:a16="http://schemas.microsoft.com/office/drawing/2014/main" id="{38B01E89-9671-7FFA-18CE-116887A8457F}"/>
               </a:ext>
             </a:extLst>
           </p:cNvPr>
@@ -14044,7 +14200,7 @@
           <p:cNvPr id="4" name="!!Anchor_Assertion_Title!!">
             <a:extLst>
               <a:ext uri="{FF2B5EF4-FFF2-40B4-BE49-F238E27FC236}">
-                <a16:creationId xmlns:a16="http://schemas.microsoft.com/office/drawing/2014/main" id="{3B83A4D9-224B-921C-C356-E6A9A83E3026}"/>
+                <a16:creationId xmlns:a16="http://schemas.microsoft.com/office/drawing/2014/main" id="{EACEFDDA-30AB-985D-303B-52CFCC3F2402}"/>
               </a:ext>
             </a:extLst>
           </p:cNvPr>
@@ -14084,7 +14240,7 @@
           <p:cNvPr id="11" name="!!Stage_Hero_Container!!">
             <a:extLst>
               <a:ext uri="{FF2B5EF4-FFF2-40B4-BE49-F238E27FC236}">
-                <a16:creationId xmlns:a16="http://schemas.microsoft.com/office/drawing/2014/main" id="{673CE430-6A1D-032F-1A31-389C7F46D434}"/>
+                <a16:creationId xmlns:a16="http://schemas.microsoft.com/office/drawing/2014/main" id="{64466E92-216E-4A0E-4451-E3D5A75BA0E2}"/>
               </a:ext>
             </a:extLst>
           </p:cNvPr>
@@ -14104,7 +14260,7 @@
             <p:cNvPr id="5" name="Rectangle: Rounded Corners 4">
               <a:extLst>
                 <a:ext uri="{FF2B5EF4-FFF2-40B4-BE49-F238E27FC236}">
-                  <a16:creationId xmlns:a16="http://schemas.microsoft.com/office/drawing/2014/main" id="{8A78A52A-A4C5-57DD-688E-92A463170916}"/>
+                  <a16:creationId xmlns:a16="http://schemas.microsoft.com/office/drawing/2014/main" id="{E29302BD-E45D-605F-761E-9124118BE9C9}"/>
                 </a:ext>
               </a:extLst>
             </p:cNvPr>
@@ -14158,7 +14314,7 @@
             <p:cNvPr id="6" name="Rectangle: Rounded Corners 5">
               <a:extLst>
                 <a:ext uri="{FF2B5EF4-FFF2-40B4-BE49-F238E27FC236}">
-                  <a16:creationId xmlns:a16="http://schemas.microsoft.com/office/drawing/2014/main" id="{30E5CD2A-02EF-C9B8-7460-4705F21AF299}"/>
+                  <a16:creationId xmlns:a16="http://schemas.microsoft.com/office/drawing/2014/main" id="{11067234-28D9-15D5-3B6D-CF7E5AC687F5}"/>
                 </a:ext>
               </a:extLst>
             </p:cNvPr>
@@ -14234,7 +14390,7 @@
             <p:cNvPr id="7" name="Oval 6">
               <a:extLst>
                 <a:ext uri="{FF2B5EF4-FFF2-40B4-BE49-F238E27FC236}">
-                  <a16:creationId xmlns:a16="http://schemas.microsoft.com/office/drawing/2014/main" id="{81433C63-4C8B-6033-0A5E-2CEA130734A3}"/>
+                  <a16:creationId xmlns:a16="http://schemas.microsoft.com/office/drawing/2014/main" id="{80B02D59-2A06-D130-B09E-4364A92184E5}"/>
                 </a:ext>
               </a:extLst>
             </p:cNvPr>
@@ -14302,7 +14458,7 @@
             <p:cNvPr id="9" name="Graphic 8">
               <a:extLst>
                 <a:ext uri="{FF2B5EF4-FFF2-40B4-BE49-F238E27FC236}">
-                  <a16:creationId xmlns:a16="http://schemas.microsoft.com/office/drawing/2014/main" id="{B8EC03CB-6D05-73B0-9D7D-447F3EEB453C}"/>
+                  <a16:creationId xmlns:a16="http://schemas.microsoft.com/office/drawing/2014/main" id="{3F8C412E-F05B-8857-5B92-6909FF0AECB9}"/>
                 </a:ext>
               </a:extLst>
             </p:cNvPr>
@@ -14338,7 +14494,7 @@
             <p:cNvPr id="10" name="TextBox 9">
               <a:extLst>
                 <a:ext uri="{FF2B5EF4-FFF2-40B4-BE49-F238E27FC236}">
-                  <a16:creationId xmlns:a16="http://schemas.microsoft.com/office/drawing/2014/main" id="{70BFE57C-C8CD-7FAF-0D5F-690FBC7BCCD1}"/>
+                  <a16:creationId xmlns:a16="http://schemas.microsoft.com/office/drawing/2014/main" id="{2F981EA6-A29D-494D-5C5B-A0EE27781EAF}"/>
                 </a:ext>
               </a:extLst>
             </p:cNvPr>
@@ -14403,7 +14559,7 @@
           <p:cNvPr id="18" name="!!Stage_Sub_Card_1!!">
             <a:extLst>
               <a:ext uri="{FF2B5EF4-FFF2-40B4-BE49-F238E27FC236}">
-                <a16:creationId xmlns:a16="http://schemas.microsoft.com/office/drawing/2014/main" id="{7B023FBC-BE94-1CA9-7302-6A7A38C152B1}"/>
+                <a16:creationId xmlns:a16="http://schemas.microsoft.com/office/drawing/2014/main" id="{406205C1-2E84-53D0-6A8F-7662CA891EE9}"/>
               </a:ext>
             </a:extLst>
           </p:cNvPr>
@@ -14423,7 +14579,7 @@
             <p:cNvPr id="12" name="Rectangle: Rounded Corners 11">
               <a:extLst>
                 <a:ext uri="{FF2B5EF4-FFF2-40B4-BE49-F238E27FC236}">
-                  <a16:creationId xmlns:a16="http://schemas.microsoft.com/office/drawing/2014/main" id="{C809FBEC-77D2-84AA-0C89-9CC958288542}"/>
+                  <a16:creationId xmlns:a16="http://schemas.microsoft.com/office/drawing/2014/main" id="{B5A544C0-440F-E4B5-E274-B05E39B6F1B4}"/>
                 </a:ext>
               </a:extLst>
             </p:cNvPr>
@@ -14477,7 +14633,7 @@
             <p:cNvPr id="13" name="Rectangle: Rounded Corners 12">
               <a:extLst>
                 <a:ext uri="{FF2B5EF4-FFF2-40B4-BE49-F238E27FC236}">
-                  <a16:creationId xmlns:a16="http://schemas.microsoft.com/office/drawing/2014/main" id="{A6F9A0CC-88F4-8AE1-B32B-C95C9AD6755D}"/>
+                  <a16:creationId xmlns:a16="http://schemas.microsoft.com/office/drawing/2014/main" id="{6AF23721-1612-B551-1659-A8F04AC84344}"/>
                 </a:ext>
               </a:extLst>
             </p:cNvPr>
@@ -14559,7 +14715,7 @@
             <p:cNvPr id="14" name="Oval 13">
               <a:extLst>
                 <a:ext uri="{FF2B5EF4-FFF2-40B4-BE49-F238E27FC236}">
-                  <a16:creationId xmlns:a16="http://schemas.microsoft.com/office/drawing/2014/main" id="{DF669A5A-94BA-6E02-4708-67FCBAABBE27}"/>
+                  <a16:creationId xmlns:a16="http://schemas.microsoft.com/office/drawing/2014/main" id="{340A67D2-14AC-B1C4-B5EC-26B808E1B625}"/>
                 </a:ext>
               </a:extLst>
             </p:cNvPr>
@@ -14627,7 +14783,7 @@
             <p:cNvPr id="16" name="Graphic 15">
               <a:extLst>
                 <a:ext uri="{FF2B5EF4-FFF2-40B4-BE49-F238E27FC236}">
-                  <a16:creationId xmlns:a16="http://schemas.microsoft.com/office/drawing/2014/main" id="{1DC4E1E6-8806-1075-723D-A654E998E99B}"/>
+                  <a16:creationId xmlns:a16="http://schemas.microsoft.com/office/drawing/2014/main" id="{945BD1A4-CB7A-02FD-BBC0-C819470E3A9C}"/>
                 </a:ext>
               </a:extLst>
             </p:cNvPr>
@@ -14663,7 +14819,7 @@
             <p:cNvPr id="17" name="TextBox 16">
               <a:extLst>
                 <a:ext uri="{FF2B5EF4-FFF2-40B4-BE49-F238E27FC236}">
-                  <a16:creationId xmlns:a16="http://schemas.microsoft.com/office/drawing/2014/main" id="{BF1EEBEC-AEB1-0FBC-E77E-43FB1B2FD703}"/>
+                  <a16:creationId xmlns:a16="http://schemas.microsoft.com/office/drawing/2014/main" id="{408868C5-C935-F553-A16B-E51A892A3F12}"/>
                 </a:ext>
               </a:extLst>
             </p:cNvPr>
@@ -14728,7 +14884,7 @@
           <p:cNvPr id="19" name="!!Anchor_Source_Footer!!">
             <a:extLst>
               <a:ext uri="{FF2B5EF4-FFF2-40B4-BE49-F238E27FC236}">
-                <a16:creationId xmlns:a16="http://schemas.microsoft.com/office/drawing/2014/main" id="{3A7EB222-F35E-049C-039D-F57B05D09605}"/>
+                <a16:creationId xmlns:a16="http://schemas.microsoft.com/office/drawing/2014/main" id="{D9E6CB8F-D18B-AE05-3762-76C596FC578F}"/>
               </a:ext>
             </a:extLst>
           </p:cNvPr>
@@ -14772,7 +14928,7 @@
     </p:spTree>
     <p:extLst>
       <p:ext uri="{BB962C8B-B14F-4D97-AF65-F5344CB8AC3E}">
-        <p14:creationId xmlns:p14="http://schemas.microsoft.com/office/powerpoint/2010/main" val="2212783729"/>
+        <p14:creationId xmlns:p14="http://schemas.microsoft.com/office/powerpoint/2010/main" val="4259838472"/>
       </p:ext>
     </p:extLst>
   </p:cSld>
@@ -14803,9 +14959,6 @@
                     <p:cTn id="3" fill="hold">
                       <p:stCondLst>
                         <p:cond delay="indefinite"/>
-                        <p:cond evt="onBegin" delay="0">
-                          <p:tn val="2"/>
-                        </p:cond>
                       </p:stCondLst>
                       <p:childTnLst>
                         <p:par>
@@ -14815,9 +14968,9 @@
                             </p:stCondLst>
                             <p:childTnLst>
                               <p:par>
-                                <p:cTn id="5" presetID="2" presetClass="entr" presetSubtype="1" accel="50000" decel="50000" fill="hold" nodeType="withEffect">
+                                <p:cTn id="5" presetID="2" presetClass="entr" presetSubtype="1" accel="50000" decel="50000" fill="hold" nodeType="clickEffect">
                                   <p:stCondLst>
-                                    <p:cond delay="180"/>
+                                    <p:cond delay="0"/>
                                   </p:stCondLst>
                                   <p:childTnLst>
                                     <p:set>
@@ -14948,7 +15101,7 @@
           <p:cNvPr id="2" name="!!Anchor_Kicker_Rail!!">
             <a:extLst>
               <a:ext uri="{FF2B5EF4-FFF2-40B4-BE49-F238E27FC236}">
-                <a16:creationId xmlns:a16="http://schemas.microsoft.com/office/drawing/2014/main" id="{5C422F7F-2351-9CDA-19C7-B7177A4F305C}"/>
+                <a16:creationId xmlns:a16="http://schemas.microsoft.com/office/drawing/2014/main" id="{2207DC62-DB12-E7EB-27B8-E9F688B55B98}"/>
               </a:ext>
             </a:extLst>
           </p:cNvPr>
@@ -14988,7 +15141,7 @@
           <p:cNvPr id="3" name="!!Anchor_Slide_Tracker!!">
             <a:extLst>
               <a:ext uri="{FF2B5EF4-FFF2-40B4-BE49-F238E27FC236}">
-                <a16:creationId xmlns:a16="http://schemas.microsoft.com/office/drawing/2014/main" id="{6477CFB9-6E58-F50C-D20D-33535795DD89}"/>
+                <a16:creationId xmlns:a16="http://schemas.microsoft.com/office/drawing/2014/main" id="{012CE20B-D7B6-8B45-A427-B2025B4F882C}"/>
               </a:ext>
             </a:extLst>
           </p:cNvPr>
@@ -15029,7 +15182,7 @@
           <p:cNvPr id="4" name="!!Anchor_Assertion_Title!!">
             <a:extLst>
               <a:ext uri="{FF2B5EF4-FFF2-40B4-BE49-F238E27FC236}">
-                <a16:creationId xmlns:a16="http://schemas.microsoft.com/office/drawing/2014/main" id="{A25782AB-DF50-3EA4-6774-D2C813CC78D5}"/>
+                <a16:creationId xmlns:a16="http://schemas.microsoft.com/office/drawing/2014/main" id="{DF6AEDB2-2ED7-B7F8-5DB6-F40FAE2A8C5F}"/>
               </a:ext>
             </a:extLst>
           </p:cNvPr>
@@ -15075,7 +15228,7 @@
           <p:cNvPr id="6" name="!!Stage_Hero_Container!!">
             <a:extLst>
               <a:ext uri="{FF2B5EF4-FFF2-40B4-BE49-F238E27FC236}">
-                <a16:creationId xmlns:a16="http://schemas.microsoft.com/office/drawing/2014/main" id="{51EE78F5-84E8-8D58-5B38-ECE24C73CAFD}"/>
+                <a16:creationId xmlns:a16="http://schemas.microsoft.com/office/drawing/2014/main" id="{5F90E6AA-A062-71B7-14E5-186FE4287833}"/>
               </a:ext>
             </a:extLst>
           </p:cNvPr>
@@ -15116,7 +15269,7 @@
           <p:cNvPr id="12" name="!!Stage_Sub_Card_1!!">
             <a:extLst>
               <a:ext uri="{FF2B5EF4-FFF2-40B4-BE49-F238E27FC236}">
-                <a16:creationId xmlns:a16="http://schemas.microsoft.com/office/drawing/2014/main" id="{21221062-BBCA-9622-2DF9-CC06BBF1643F}"/>
+                <a16:creationId xmlns:a16="http://schemas.microsoft.com/office/drawing/2014/main" id="{217B369C-8B9F-A576-3FFA-89AC2DC1BE3C}"/>
               </a:ext>
             </a:extLst>
           </p:cNvPr>
@@ -15136,7 +15289,7 @@
             <p:cNvPr id="7" name="Rectangle: Rounded Corners 6">
               <a:extLst>
                 <a:ext uri="{FF2B5EF4-FFF2-40B4-BE49-F238E27FC236}">
-                  <a16:creationId xmlns:a16="http://schemas.microsoft.com/office/drawing/2014/main" id="{73BC5CF1-A01D-580B-57BE-242C32A6F02D}"/>
+                  <a16:creationId xmlns:a16="http://schemas.microsoft.com/office/drawing/2014/main" id="{BFF3F1DF-73FE-A48A-B948-9F39D2B05132}"/>
                 </a:ext>
               </a:extLst>
             </p:cNvPr>
@@ -15190,7 +15343,7 @@
             <p:cNvPr id="8" name="Oval 7">
               <a:extLst>
                 <a:ext uri="{FF2B5EF4-FFF2-40B4-BE49-F238E27FC236}">
-                  <a16:creationId xmlns:a16="http://schemas.microsoft.com/office/drawing/2014/main" id="{CF6DE051-1E14-BEA2-5B6E-1232178A2705}"/>
+                  <a16:creationId xmlns:a16="http://schemas.microsoft.com/office/drawing/2014/main" id="{4BD66FAD-E65C-EB1C-A460-44471A3679A9}"/>
                 </a:ext>
               </a:extLst>
             </p:cNvPr>
@@ -15258,7 +15411,7 @@
             <p:cNvPr id="10" name="Graphic 9">
               <a:extLst>
                 <a:ext uri="{FF2B5EF4-FFF2-40B4-BE49-F238E27FC236}">
-                  <a16:creationId xmlns:a16="http://schemas.microsoft.com/office/drawing/2014/main" id="{71034395-3964-FBA5-62A1-39F27CB90503}"/>
+                  <a16:creationId xmlns:a16="http://schemas.microsoft.com/office/drawing/2014/main" id="{B895F1EC-BBBE-AD2D-5913-3E6F5FB6E991}"/>
                 </a:ext>
               </a:extLst>
             </p:cNvPr>
@@ -15294,7 +15447,7 @@
             <p:cNvPr id="11" name="TextBox 10">
               <a:extLst>
                 <a:ext uri="{FF2B5EF4-FFF2-40B4-BE49-F238E27FC236}">
-                  <a16:creationId xmlns:a16="http://schemas.microsoft.com/office/drawing/2014/main" id="{62B7DBDE-C7B7-F6F0-355F-9C759D3E7F16}"/>
+                  <a16:creationId xmlns:a16="http://schemas.microsoft.com/office/drawing/2014/main" id="{839AED3C-9CF3-017A-564B-52A713687F16}"/>
                 </a:ext>
               </a:extLst>
             </p:cNvPr>
@@ -15356,7 +15509,7 @@
           <p:cNvPr id="18" name="!!Stage_Sub_Card_2!!">
             <a:extLst>
               <a:ext uri="{FF2B5EF4-FFF2-40B4-BE49-F238E27FC236}">
-                <a16:creationId xmlns:a16="http://schemas.microsoft.com/office/drawing/2014/main" id="{F8558EF8-3D2A-9A7B-4C33-744EE1496596}"/>
+                <a16:creationId xmlns:a16="http://schemas.microsoft.com/office/drawing/2014/main" id="{1A5C7ABC-5594-96CB-1C7C-1C0DD1E36A0C}"/>
               </a:ext>
             </a:extLst>
           </p:cNvPr>
@@ -15376,7 +15529,7 @@
             <p:cNvPr id="13" name="Rectangle: Rounded Corners 12">
               <a:extLst>
                 <a:ext uri="{FF2B5EF4-FFF2-40B4-BE49-F238E27FC236}">
-                  <a16:creationId xmlns:a16="http://schemas.microsoft.com/office/drawing/2014/main" id="{8F7A1392-982F-309E-46A5-138093E9E0C4}"/>
+                  <a16:creationId xmlns:a16="http://schemas.microsoft.com/office/drawing/2014/main" id="{A5BF6FE5-9DFC-7EFB-32CE-4509D3E39E4F}"/>
                 </a:ext>
               </a:extLst>
             </p:cNvPr>
@@ -15430,7 +15583,7 @@
             <p:cNvPr id="14" name="Oval 13">
               <a:extLst>
                 <a:ext uri="{FF2B5EF4-FFF2-40B4-BE49-F238E27FC236}">
-                  <a16:creationId xmlns:a16="http://schemas.microsoft.com/office/drawing/2014/main" id="{AE66A157-43D2-6FD9-FB10-481D9C65791E}"/>
+                  <a16:creationId xmlns:a16="http://schemas.microsoft.com/office/drawing/2014/main" id="{DFDAF51D-1AE7-7B5B-F7F2-A8EACA1201B5}"/>
                 </a:ext>
               </a:extLst>
             </p:cNvPr>
@@ -15498,7 +15651,7 @@
             <p:cNvPr id="16" name="Graphic 15">
               <a:extLst>
                 <a:ext uri="{FF2B5EF4-FFF2-40B4-BE49-F238E27FC236}">
-                  <a16:creationId xmlns:a16="http://schemas.microsoft.com/office/drawing/2014/main" id="{63DF23B1-D4DB-C794-4926-A7529017D629}"/>
+                  <a16:creationId xmlns:a16="http://schemas.microsoft.com/office/drawing/2014/main" id="{6320F415-DF3C-0F67-1A55-D3676864E13C}"/>
                 </a:ext>
               </a:extLst>
             </p:cNvPr>
@@ -15534,7 +15687,7 @@
             <p:cNvPr id="17" name="TextBox 16">
               <a:extLst>
                 <a:ext uri="{FF2B5EF4-FFF2-40B4-BE49-F238E27FC236}">
-                  <a16:creationId xmlns:a16="http://schemas.microsoft.com/office/drawing/2014/main" id="{84CE0A43-0122-88C7-8DC7-3FEBAF5CEDA6}"/>
+                  <a16:creationId xmlns:a16="http://schemas.microsoft.com/office/drawing/2014/main" id="{BBF07962-D549-73BA-9E22-021F00254730}"/>
                 </a:ext>
               </a:extLst>
             </p:cNvPr>
@@ -15596,7 +15749,7 @@
           <p:cNvPr id="24" name="!!Stage_Sub_Card_3!!">
             <a:extLst>
               <a:ext uri="{FF2B5EF4-FFF2-40B4-BE49-F238E27FC236}">
-                <a16:creationId xmlns:a16="http://schemas.microsoft.com/office/drawing/2014/main" id="{EB2A18B3-9D16-80D5-EC02-D1B54680FDE6}"/>
+                <a16:creationId xmlns:a16="http://schemas.microsoft.com/office/drawing/2014/main" id="{FD295A5C-7868-790A-45DA-CC5E8F9818E1}"/>
               </a:ext>
             </a:extLst>
           </p:cNvPr>
@@ -15616,7 +15769,7 @@
             <p:cNvPr id="19" name="Rectangle: Rounded Corners 18">
               <a:extLst>
                 <a:ext uri="{FF2B5EF4-FFF2-40B4-BE49-F238E27FC236}">
-                  <a16:creationId xmlns:a16="http://schemas.microsoft.com/office/drawing/2014/main" id="{19987377-AF14-6940-5A47-F6BBFA486904}"/>
+                  <a16:creationId xmlns:a16="http://schemas.microsoft.com/office/drawing/2014/main" id="{13F67E65-222B-84C6-95B0-081CA5A07FF2}"/>
                 </a:ext>
               </a:extLst>
             </p:cNvPr>
@@ -15670,7 +15823,7 @@
             <p:cNvPr id="20" name="Oval 19">
               <a:extLst>
                 <a:ext uri="{FF2B5EF4-FFF2-40B4-BE49-F238E27FC236}">
-                  <a16:creationId xmlns:a16="http://schemas.microsoft.com/office/drawing/2014/main" id="{F697C851-4FA9-0117-44C7-9C11B4D9C17D}"/>
+                  <a16:creationId xmlns:a16="http://schemas.microsoft.com/office/drawing/2014/main" id="{3578A4DE-59AA-8708-F053-86DA9F563349}"/>
                 </a:ext>
               </a:extLst>
             </p:cNvPr>
@@ -15738,7 +15891,7 @@
             <p:cNvPr id="22" name="Graphic 21">
               <a:extLst>
                 <a:ext uri="{FF2B5EF4-FFF2-40B4-BE49-F238E27FC236}">
-                  <a16:creationId xmlns:a16="http://schemas.microsoft.com/office/drawing/2014/main" id="{83884859-9EE0-B1B6-7EFF-868AB5C74876}"/>
+                  <a16:creationId xmlns:a16="http://schemas.microsoft.com/office/drawing/2014/main" id="{4D2C79CC-FD61-4C77-8255-515413A76749}"/>
                 </a:ext>
               </a:extLst>
             </p:cNvPr>
@@ -15774,7 +15927,7 @@
             <p:cNvPr id="23" name="TextBox 22">
               <a:extLst>
                 <a:ext uri="{FF2B5EF4-FFF2-40B4-BE49-F238E27FC236}">
-                  <a16:creationId xmlns:a16="http://schemas.microsoft.com/office/drawing/2014/main" id="{78639213-D7A8-89B8-A2B3-565613B7F170}"/>
+                  <a16:creationId xmlns:a16="http://schemas.microsoft.com/office/drawing/2014/main" id="{DBE25984-78D7-5311-833B-BC287DC8BF52}"/>
                 </a:ext>
               </a:extLst>
             </p:cNvPr>
@@ -15836,7 +15989,7 @@
           <p:cNvPr id="25" name="!!Anchor_Source_Footer!!">
             <a:extLst>
               <a:ext uri="{FF2B5EF4-FFF2-40B4-BE49-F238E27FC236}">
-                <a16:creationId xmlns:a16="http://schemas.microsoft.com/office/drawing/2014/main" id="{0ECF1BC8-9767-B6F0-B5EF-583E3B8E24C8}"/>
+                <a16:creationId xmlns:a16="http://schemas.microsoft.com/office/drawing/2014/main" id="{F74D658C-C9CD-6722-1527-83820049610C}"/>
               </a:ext>
             </a:extLst>
           </p:cNvPr>
@@ -15874,7 +16027,7 @@
     </p:spTree>
     <p:extLst>
       <p:ext uri="{BB962C8B-B14F-4D97-AF65-F5344CB8AC3E}">
-        <p14:creationId xmlns:p14="http://schemas.microsoft.com/office/powerpoint/2010/main" val="727589070"/>
+        <p14:creationId xmlns:p14="http://schemas.microsoft.com/office/powerpoint/2010/main" val="1735886701"/>
       </p:ext>
     </p:extLst>
   </p:cSld>
@@ -15905,9 +16058,6 @@
                     <p:cTn id="3" fill="hold">
                       <p:stCondLst>
                         <p:cond delay="indefinite"/>
-                        <p:cond evt="onBegin" delay="0">
-                          <p:tn val="2"/>
-                        </p:cond>
                       </p:stCondLst>
                       <p:childTnLst>
                         <p:par>
@@ -15917,9 +16067,9 @@
                             </p:stCondLst>
                             <p:childTnLst>
                               <p:par>
-                                <p:cTn id="5" presetID="2" presetClass="entr" presetSubtype="1" accel="50000" decel="50000" fill="hold" nodeType="withEffect">
+                                <p:cTn id="5" presetID="2" presetClass="entr" presetSubtype="1" accel="50000" decel="50000" fill="hold" nodeType="clickEffect">
                                   <p:stCondLst>
-                                    <p:cond delay="120"/>
+                                    <p:cond delay="0"/>
                                   </p:stCondLst>
                                   <p:childTnLst>
                                     <p:set>
@@ -15989,15 +16139,33 @@
                                   </p:childTnLst>
                                 </p:cTn>
                               </p:par>
+                            </p:childTnLst>
+                          </p:cTn>
+                        </p:par>
+                      </p:childTnLst>
+                    </p:cTn>
+                  </p:par>
+                  <p:par>
+                    <p:cTn id="9" fill="hold">
+                      <p:stCondLst>
+                        <p:cond delay="indefinite"/>
+                      </p:stCondLst>
+                      <p:childTnLst>
+                        <p:par>
+                          <p:cTn id="10" fill="hold">
+                            <p:stCondLst>
+                              <p:cond delay="0"/>
+                            </p:stCondLst>
+                            <p:childTnLst>
                               <p:par>
-                                <p:cTn id="9" presetID="2" presetClass="entr" presetSubtype="1" accel="50000" decel="50000" fill="hold" nodeType="withEffect">
+                                <p:cTn id="11" presetID="2" presetClass="entr" presetSubtype="1" accel="50000" decel="50000" fill="hold" nodeType="clickEffect">
                                   <p:stCondLst>
-                                    <p:cond delay="240"/>
+                                    <p:cond delay="0"/>
                                   </p:stCondLst>
                                   <p:childTnLst>
                                     <p:set>
                                       <p:cBhvr>
-                                        <p:cTn id="10" dur="1" fill="hold">
+                                        <p:cTn id="12" dur="1" fill="hold">
                                           <p:stCondLst>
                                             <p:cond delay="0"/>
                                           </p:stCondLst>
@@ -16015,7 +16183,7 @@
                                     </p:set>
                                     <p:anim calcmode="lin" valueType="num">
                                       <p:cBhvr additive="base">
-                                        <p:cTn id="11" dur="500" fill="hold"/>
+                                        <p:cTn id="13" dur="500" fill="hold"/>
                                         <p:tgtEl>
                                           <p:spTgt spid="18"/>
                                         </p:tgtEl>
@@ -16038,7 +16206,7 @@
                                     </p:anim>
                                     <p:anim calcmode="lin" valueType="num">
                                       <p:cBhvr additive="base">
-                                        <p:cTn id="12" dur="500" fill="hold"/>
+                                        <p:cTn id="14" dur="500" fill="hold"/>
                                         <p:tgtEl>
                                           <p:spTgt spid="18"/>
                                         </p:tgtEl>
@@ -16062,15 +16230,33 @@
                                   </p:childTnLst>
                                 </p:cTn>
                               </p:par>
+                            </p:childTnLst>
+                          </p:cTn>
+                        </p:par>
+                      </p:childTnLst>
+                    </p:cTn>
+                  </p:par>
+                  <p:par>
+                    <p:cTn id="15" fill="hold">
+                      <p:stCondLst>
+                        <p:cond delay="indefinite"/>
+                      </p:stCondLst>
+                      <p:childTnLst>
+                        <p:par>
+                          <p:cTn id="16" fill="hold">
+                            <p:stCondLst>
+                              <p:cond delay="0"/>
+                            </p:stCondLst>
+                            <p:childTnLst>
                               <p:par>
-                                <p:cTn id="13" presetID="2" presetClass="entr" presetSubtype="1" accel="50000" decel="50000" fill="hold" nodeType="withEffect">
+                                <p:cTn id="17" presetID="2" presetClass="entr" presetSubtype="1" accel="50000" decel="50000" fill="hold" nodeType="clickEffect">
                                   <p:stCondLst>
-                                    <p:cond delay="360"/>
+                                    <p:cond delay="0"/>
                                   </p:stCondLst>
                                   <p:childTnLst>
                                     <p:set>
                                       <p:cBhvr>
-                                        <p:cTn id="14" dur="1" fill="hold">
+                                        <p:cTn id="18" dur="1" fill="hold">
                                           <p:stCondLst>
                                             <p:cond delay="0"/>
                                           </p:stCondLst>
@@ -16088,7 +16274,7 @@
                                     </p:set>
                                     <p:anim calcmode="lin" valueType="num">
                                       <p:cBhvr additive="base">
-                                        <p:cTn id="15" dur="500" fill="hold"/>
+                                        <p:cTn id="19" dur="500" fill="hold"/>
                                         <p:tgtEl>
                                           <p:spTgt spid="24"/>
                                         </p:tgtEl>
@@ -16111,7 +16297,7 @@
                                     </p:anim>
                                     <p:anim calcmode="lin" valueType="num">
                                       <p:cBhvr additive="base">
-                                        <p:cTn id="16" dur="500" fill="hold"/>
+                                        <p:cTn id="20" dur="500" fill="hold"/>
                                         <p:tgtEl>
                                           <p:spTgt spid="24"/>
                                         </p:tgtEl>
@@ -16196,7 +16382,7 @@
           <p:cNvPr id="2" name="!!Anchor_Kicker_Rail!!">
             <a:extLst>
               <a:ext uri="{FF2B5EF4-FFF2-40B4-BE49-F238E27FC236}">
-                <a16:creationId xmlns:a16="http://schemas.microsoft.com/office/drawing/2014/main" id="{3F40826C-1258-CCA4-FD2D-FC7A0E9D3A16}"/>
+                <a16:creationId xmlns:a16="http://schemas.microsoft.com/office/drawing/2014/main" id="{9F6A5948-A457-BCF9-0169-26FB779CAA03}"/>
               </a:ext>
             </a:extLst>
           </p:cNvPr>
@@ -16236,7 +16422,7 @@
           <p:cNvPr id="3" name="!!Anchor_Slide_Tracker!!">
             <a:extLst>
               <a:ext uri="{FF2B5EF4-FFF2-40B4-BE49-F238E27FC236}">
-                <a16:creationId xmlns:a16="http://schemas.microsoft.com/office/drawing/2014/main" id="{585D37E6-FCCE-0C48-F429-71D06E85C371}"/>
+                <a16:creationId xmlns:a16="http://schemas.microsoft.com/office/drawing/2014/main" id="{234C5526-E148-D38E-9661-964BC33B84D7}"/>
               </a:ext>
             </a:extLst>
           </p:cNvPr>
@@ -16277,7 +16463,7 @@
           <p:cNvPr id="4" name="!!Anchor_Assertion_Title!!">
             <a:extLst>
               <a:ext uri="{FF2B5EF4-FFF2-40B4-BE49-F238E27FC236}">
-                <a16:creationId xmlns:a16="http://schemas.microsoft.com/office/drawing/2014/main" id="{8909E02D-F370-ACD2-B3BE-A3CD67F011D1}"/>
+                <a16:creationId xmlns:a16="http://schemas.microsoft.com/office/drawing/2014/main" id="{33564169-F1CA-BDA4-2E82-F31496C7D318}"/>
               </a:ext>
             </a:extLst>
           </p:cNvPr>
@@ -16317,7 +16503,7 @@
           <p:cNvPr id="11" name="!!Stage_Hero_Container!!">
             <a:extLst>
               <a:ext uri="{FF2B5EF4-FFF2-40B4-BE49-F238E27FC236}">
-                <a16:creationId xmlns:a16="http://schemas.microsoft.com/office/drawing/2014/main" id="{ED99FEDD-D9C0-1301-B4B3-DEC89CF4C035}"/>
+                <a16:creationId xmlns:a16="http://schemas.microsoft.com/office/drawing/2014/main" id="{B4C81EA7-812E-1B62-5341-F0F2468F86AF}"/>
               </a:ext>
             </a:extLst>
           </p:cNvPr>
@@ -16337,7 +16523,7 @@
             <p:cNvPr id="5" name="Rectangle: Rounded Corners 4">
               <a:extLst>
                 <a:ext uri="{FF2B5EF4-FFF2-40B4-BE49-F238E27FC236}">
-                  <a16:creationId xmlns:a16="http://schemas.microsoft.com/office/drawing/2014/main" id="{8E8A863E-881E-16FB-7504-698A706133C8}"/>
+                  <a16:creationId xmlns:a16="http://schemas.microsoft.com/office/drawing/2014/main" id="{60284D40-7D3F-F9C9-6A40-3D5BBAD30979}"/>
                 </a:ext>
               </a:extLst>
             </p:cNvPr>
@@ -16391,7 +16577,7 @@
             <p:cNvPr id="6" name="Rectangle: Rounded Corners 5">
               <a:extLst>
                 <a:ext uri="{FF2B5EF4-FFF2-40B4-BE49-F238E27FC236}">
-                  <a16:creationId xmlns:a16="http://schemas.microsoft.com/office/drawing/2014/main" id="{C09C633D-9A1C-23A2-F478-ABF5DCCAC09F}"/>
+                  <a16:creationId xmlns:a16="http://schemas.microsoft.com/office/drawing/2014/main" id="{6AD8802B-0CF9-1421-EF63-CFA07C9C4A55}"/>
                 </a:ext>
               </a:extLst>
             </p:cNvPr>
@@ -16467,7 +16653,7 @@
             <p:cNvPr id="7" name="Oval 6">
               <a:extLst>
                 <a:ext uri="{FF2B5EF4-FFF2-40B4-BE49-F238E27FC236}">
-                  <a16:creationId xmlns:a16="http://schemas.microsoft.com/office/drawing/2014/main" id="{56A206DE-22F3-8233-02DD-6424553E29FB}"/>
+                  <a16:creationId xmlns:a16="http://schemas.microsoft.com/office/drawing/2014/main" id="{6980B4DF-53CC-BA89-449E-2C5C033AB99F}"/>
                 </a:ext>
               </a:extLst>
             </p:cNvPr>
@@ -16535,7 +16721,7 @@
             <p:cNvPr id="9" name="Graphic 8">
               <a:extLst>
                 <a:ext uri="{FF2B5EF4-FFF2-40B4-BE49-F238E27FC236}">
-                  <a16:creationId xmlns:a16="http://schemas.microsoft.com/office/drawing/2014/main" id="{CEEE11F0-CF1B-2D2E-B8E5-009D20F79BAE}"/>
+                  <a16:creationId xmlns:a16="http://schemas.microsoft.com/office/drawing/2014/main" id="{450CCED7-481E-87AD-3692-18622D983652}"/>
                 </a:ext>
               </a:extLst>
             </p:cNvPr>
@@ -16571,7 +16757,7 @@
             <p:cNvPr id="10" name="TextBox 9">
               <a:extLst>
                 <a:ext uri="{FF2B5EF4-FFF2-40B4-BE49-F238E27FC236}">
-                  <a16:creationId xmlns:a16="http://schemas.microsoft.com/office/drawing/2014/main" id="{5E2925FA-0629-9397-DCA8-1A6F79E1EA49}"/>
+                  <a16:creationId xmlns:a16="http://schemas.microsoft.com/office/drawing/2014/main" id="{09DBADCF-1DB0-108B-4A22-8CBFECE9257A}"/>
                 </a:ext>
               </a:extLst>
             </p:cNvPr>
@@ -16636,7 +16822,7 @@
           <p:cNvPr id="18" name="!!Stage_Sub_Card_1!!">
             <a:extLst>
               <a:ext uri="{FF2B5EF4-FFF2-40B4-BE49-F238E27FC236}">
-                <a16:creationId xmlns:a16="http://schemas.microsoft.com/office/drawing/2014/main" id="{D4E1D673-5835-5517-2F35-2176BB28A34B}"/>
+                <a16:creationId xmlns:a16="http://schemas.microsoft.com/office/drawing/2014/main" id="{9642173F-C593-BEDA-CF6F-4D30EF02EEEE}"/>
               </a:ext>
             </a:extLst>
           </p:cNvPr>
@@ -16656,7 +16842,7 @@
             <p:cNvPr id="12" name="Rectangle: Rounded Corners 11">
               <a:extLst>
                 <a:ext uri="{FF2B5EF4-FFF2-40B4-BE49-F238E27FC236}">
-                  <a16:creationId xmlns:a16="http://schemas.microsoft.com/office/drawing/2014/main" id="{D0AEFB6E-DAC4-E52A-846C-1C3185737B0B}"/>
+                  <a16:creationId xmlns:a16="http://schemas.microsoft.com/office/drawing/2014/main" id="{C76E9014-AFC1-F502-FC08-984514FA7E9D}"/>
                 </a:ext>
               </a:extLst>
             </p:cNvPr>
@@ -16710,7 +16896,7 @@
             <p:cNvPr id="13" name="Rectangle: Rounded Corners 12">
               <a:extLst>
                 <a:ext uri="{FF2B5EF4-FFF2-40B4-BE49-F238E27FC236}">
-                  <a16:creationId xmlns:a16="http://schemas.microsoft.com/office/drawing/2014/main" id="{E5371014-F278-7160-5022-FFFBF3B7C0F3}"/>
+                  <a16:creationId xmlns:a16="http://schemas.microsoft.com/office/drawing/2014/main" id="{965F2B2F-EFA0-1E53-9A06-D42F9A0AB242}"/>
                 </a:ext>
               </a:extLst>
             </p:cNvPr>
@@ -16792,7 +16978,7 @@
             <p:cNvPr id="14" name="Oval 13">
               <a:extLst>
                 <a:ext uri="{FF2B5EF4-FFF2-40B4-BE49-F238E27FC236}">
-                  <a16:creationId xmlns:a16="http://schemas.microsoft.com/office/drawing/2014/main" id="{CC8099DD-2627-0152-1FD8-E4747B623697}"/>
+                  <a16:creationId xmlns:a16="http://schemas.microsoft.com/office/drawing/2014/main" id="{6B623D33-2825-FF17-88A7-36EBBABE61B8}"/>
                 </a:ext>
               </a:extLst>
             </p:cNvPr>
@@ -16860,7 +17046,7 @@
             <p:cNvPr id="16" name="Graphic 15">
               <a:extLst>
                 <a:ext uri="{FF2B5EF4-FFF2-40B4-BE49-F238E27FC236}">
-                  <a16:creationId xmlns:a16="http://schemas.microsoft.com/office/drawing/2014/main" id="{A65AF75F-CD91-4804-CF06-9B10542AAFE0}"/>
+                  <a16:creationId xmlns:a16="http://schemas.microsoft.com/office/drawing/2014/main" id="{3D0B5069-2648-549A-37F2-16821F2A2AF7}"/>
                 </a:ext>
               </a:extLst>
             </p:cNvPr>
@@ -16896,7 +17082,7 @@
             <p:cNvPr id="17" name="TextBox 16">
               <a:extLst>
                 <a:ext uri="{FF2B5EF4-FFF2-40B4-BE49-F238E27FC236}">
-                  <a16:creationId xmlns:a16="http://schemas.microsoft.com/office/drawing/2014/main" id="{6DEB3263-5A58-9854-4B6C-0C90EA8BEFB7}"/>
+                  <a16:creationId xmlns:a16="http://schemas.microsoft.com/office/drawing/2014/main" id="{D66A40CE-4CF0-9E2A-8A8E-BDC046998DEB}"/>
                 </a:ext>
               </a:extLst>
             </p:cNvPr>
@@ -16961,7 +17147,7 @@
           <p:cNvPr id="19" name="!!Anchor_Source_Footer!!">
             <a:extLst>
               <a:ext uri="{FF2B5EF4-FFF2-40B4-BE49-F238E27FC236}">
-                <a16:creationId xmlns:a16="http://schemas.microsoft.com/office/drawing/2014/main" id="{6C05DDAB-250A-AFEB-D1A6-6BBFEC9A1983}"/>
+                <a16:creationId xmlns:a16="http://schemas.microsoft.com/office/drawing/2014/main" id="{3A2BC156-6C11-432D-6904-C78C71566DCB}"/>
               </a:ext>
             </a:extLst>
           </p:cNvPr>
@@ -17005,7 +17191,7 @@
     </p:spTree>
     <p:extLst>
       <p:ext uri="{BB962C8B-B14F-4D97-AF65-F5344CB8AC3E}">
-        <p14:creationId xmlns:p14="http://schemas.microsoft.com/office/powerpoint/2010/main" val="2982302298"/>
+        <p14:creationId xmlns:p14="http://schemas.microsoft.com/office/powerpoint/2010/main" val="4214583276"/>
       </p:ext>
     </p:extLst>
   </p:cSld>
@@ -17036,9 +17222,6 @@
                     <p:cTn id="3" fill="hold">
                       <p:stCondLst>
                         <p:cond delay="indefinite"/>
-                        <p:cond evt="onBegin" delay="0">
-                          <p:tn val="2"/>
-                        </p:cond>
                       </p:stCondLst>
                       <p:childTnLst>
                         <p:par>
@@ -17048,9 +17231,9 @@
                             </p:stCondLst>
                             <p:childTnLst>
                               <p:par>
-                                <p:cTn id="5" presetID="2" presetClass="entr" presetSubtype="1" accel="50000" decel="50000" fill="hold" nodeType="withEffect">
+                                <p:cTn id="5" presetID="2" presetClass="entr" presetSubtype="1" accel="50000" decel="50000" fill="hold" nodeType="clickEffect">
                                   <p:stCondLst>
-                                    <p:cond delay="180"/>
+                                    <p:cond delay="0"/>
                                   </p:stCondLst>
                                   <p:childTnLst>
                                     <p:set>
@@ -17181,7 +17364,7 @@
           <p:cNvPr id="2" name="!!Anchor_Kicker_Rail!!">
             <a:extLst>
               <a:ext uri="{FF2B5EF4-FFF2-40B4-BE49-F238E27FC236}">
-                <a16:creationId xmlns:a16="http://schemas.microsoft.com/office/drawing/2014/main" id="{4ABFC8F4-3F35-A543-B7B4-4621F67A9BBB}"/>
+                <a16:creationId xmlns:a16="http://schemas.microsoft.com/office/drawing/2014/main" id="{A0F6AFD1-9086-56B3-D010-28D118905618}"/>
               </a:ext>
             </a:extLst>
           </p:cNvPr>
@@ -17221,7 +17404,7 @@
           <p:cNvPr id="3" name="!!Anchor_Slide_Tracker!!">
             <a:extLst>
               <a:ext uri="{FF2B5EF4-FFF2-40B4-BE49-F238E27FC236}">
-                <a16:creationId xmlns:a16="http://schemas.microsoft.com/office/drawing/2014/main" id="{B9CE0024-6216-542A-D912-6320EBF2D635}"/>
+                <a16:creationId xmlns:a16="http://schemas.microsoft.com/office/drawing/2014/main" id="{586E5B33-252D-36A7-BC62-11634EF5039E}"/>
               </a:ext>
             </a:extLst>
           </p:cNvPr>
@@ -17262,7 +17445,7 @@
           <p:cNvPr id="4" name="!!Anchor_Assertion_Title!!">
             <a:extLst>
               <a:ext uri="{FF2B5EF4-FFF2-40B4-BE49-F238E27FC236}">
-                <a16:creationId xmlns:a16="http://schemas.microsoft.com/office/drawing/2014/main" id="{65807AEB-E5D7-B7A6-AF7E-AE042E4598A2}"/>
+                <a16:creationId xmlns:a16="http://schemas.microsoft.com/office/drawing/2014/main" id="{3B63AA82-2DBF-430B-DD9C-5D8533C57353}"/>
               </a:ext>
             </a:extLst>
           </p:cNvPr>
@@ -17302,7 +17485,7 @@
           <p:cNvPr id="12" name="!!Stage_Hero_Container!!">
             <a:extLst>
               <a:ext uri="{FF2B5EF4-FFF2-40B4-BE49-F238E27FC236}">
-                <a16:creationId xmlns:a16="http://schemas.microsoft.com/office/drawing/2014/main" id="{D4A433D6-1E30-9E86-22F1-BE801BCDC838}"/>
+                <a16:creationId xmlns:a16="http://schemas.microsoft.com/office/drawing/2014/main" id="{7D9354CF-836E-320E-637A-22B327445C35}"/>
               </a:ext>
             </a:extLst>
           </p:cNvPr>
@@ -17322,7 +17505,7 @@
             <p:cNvPr id="6" name="Picture 5">
               <a:extLst>
                 <a:ext uri="{FF2B5EF4-FFF2-40B4-BE49-F238E27FC236}">
-                  <a16:creationId xmlns:a16="http://schemas.microsoft.com/office/drawing/2014/main" id="{B488BAC2-BD0F-869E-CCEC-A8C74BF2E5E2}"/>
+                  <a16:creationId xmlns:a16="http://schemas.microsoft.com/office/drawing/2014/main" id="{C5FF072A-D207-0467-B369-956E00C4CF5A}"/>
                 </a:ext>
               </a:extLst>
             </p:cNvPr>
@@ -17363,7 +17546,7 @@
             <p:cNvPr id="7" name="Rectangle: Rounded Corners 6">
               <a:extLst>
                 <a:ext uri="{FF2B5EF4-FFF2-40B4-BE49-F238E27FC236}">
-                  <a16:creationId xmlns:a16="http://schemas.microsoft.com/office/drawing/2014/main" id="{605ACB10-E55F-5102-34DC-B747344EE028}"/>
+                  <a16:creationId xmlns:a16="http://schemas.microsoft.com/office/drawing/2014/main" id="{C4B28398-568E-CC86-3E91-BBBC345AAD19}"/>
                 </a:ext>
               </a:extLst>
             </p:cNvPr>
@@ -17417,7 +17600,7 @@
             <p:cNvPr id="8" name="Oval 7">
               <a:extLst>
                 <a:ext uri="{FF2B5EF4-FFF2-40B4-BE49-F238E27FC236}">
-                  <a16:creationId xmlns:a16="http://schemas.microsoft.com/office/drawing/2014/main" id="{DAE8E66B-715E-4434-5FF6-3CB917395F8B}"/>
+                  <a16:creationId xmlns:a16="http://schemas.microsoft.com/office/drawing/2014/main" id="{1B71A947-914D-4917-46F5-5385146F6037}"/>
                 </a:ext>
               </a:extLst>
             </p:cNvPr>
@@ -17485,7 +17668,7 @@
             <p:cNvPr id="10" name="Graphic 9">
               <a:extLst>
                 <a:ext uri="{FF2B5EF4-FFF2-40B4-BE49-F238E27FC236}">
-                  <a16:creationId xmlns:a16="http://schemas.microsoft.com/office/drawing/2014/main" id="{C99BE26A-6E04-F9F7-779F-00D2F3C76C21}"/>
+                  <a16:creationId xmlns:a16="http://schemas.microsoft.com/office/drawing/2014/main" id="{CB945F1B-07E7-78BB-C123-579686598AFC}"/>
                 </a:ext>
               </a:extLst>
             </p:cNvPr>
@@ -17521,7 +17704,7 @@
             <p:cNvPr id="11" name="TextBox 10">
               <a:extLst>
                 <a:ext uri="{FF2B5EF4-FFF2-40B4-BE49-F238E27FC236}">
-                  <a16:creationId xmlns:a16="http://schemas.microsoft.com/office/drawing/2014/main" id="{29851723-C0AD-5BC8-18E1-E0EFC3C55634}"/>
+                  <a16:creationId xmlns:a16="http://schemas.microsoft.com/office/drawing/2014/main" id="{BBAC249E-221A-37A4-B298-7FFC2793A2B1}"/>
                 </a:ext>
               </a:extLst>
             </p:cNvPr>
@@ -17580,7 +17763,7 @@
           <p:cNvPr id="18" name="!!Stage_Sub_Card_1!!">
             <a:extLst>
               <a:ext uri="{FF2B5EF4-FFF2-40B4-BE49-F238E27FC236}">
-                <a16:creationId xmlns:a16="http://schemas.microsoft.com/office/drawing/2014/main" id="{1EF58B28-1086-714A-AF9D-BAB814B80986}"/>
+                <a16:creationId xmlns:a16="http://schemas.microsoft.com/office/drawing/2014/main" id="{9C4D2EB5-19EA-A720-92FF-DC88E69C218F}"/>
               </a:ext>
             </a:extLst>
           </p:cNvPr>
@@ -17600,7 +17783,7 @@
             <p:cNvPr id="13" name="Rectangle: Rounded Corners 12">
               <a:extLst>
                 <a:ext uri="{FF2B5EF4-FFF2-40B4-BE49-F238E27FC236}">
-                  <a16:creationId xmlns:a16="http://schemas.microsoft.com/office/drawing/2014/main" id="{384EE28A-E06F-DD27-8763-62D024493E68}"/>
+                  <a16:creationId xmlns:a16="http://schemas.microsoft.com/office/drawing/2014/main" id="{3C208314-EE89-1F5A-D2C3-32A927D42D0A}"/>
                 </a:ext>
               </a:extLst>
             </p:cNvPr>
@@ -17654,7 +17837,7 @@
             <p:cNvPr id="14" name="Oval 13">
               <a:extLst>
                 <a:ext uri="{FF2B5EF4-FFF2-40B4-BE49-F238E27FC236}">
-                  <a16:creationId xmlns:a16="http://schemas.microsoft.com/office/drawing/2014/main" id="{0BA186C9-61EA-4E8F-76E2-AAA08E9E72CA}"/>
+                  <a16:creationId xmlns:a16="http://schemas.microsoft.com/office/drawing/2014/main" id="{D7AA6915-0E7A-D0D0-678D-209A085F8E91}"/>
                 </a:ext>
               </a:extLst>
             </p:cNvPr>
@@ -17722,7 +17905,7 @@
             <p:cNvPr id="16" name="Graphic 15">
               <a:extLst>
                 <a:ext uri="{FF2B5EF4-FFF2-40B4-BE49-F238E27FC236}">
-                  <a16:creationId xmlns:a16="http://schemas.microsoft.com/office/drawing/2014/main" id="{3CD69753-4322-2708-BE87-46C7BFF23544}"/>
+                  <a16:creationId xmlns:a16="http://schemas.microsoft.com/office/drawing/2014/main" id="{147B38CB-77DF-FB6E-3B8E-6A07D944ECA6}"/>
                 </a:ext>
               </a:extLst>
             </p:cNvPr>
@@ -17758,7 +17941,7 @@
             <p:cNvPr id="17" name="TextBox 16">
               <a:extLst>
                 <a:ext uri="{FF2B5EF4-FFF2-40B4-BE49-F238E27FC236}">
-                  <a16:creationId xmlns:a16="http://schemas.microsoft.com/office/drawing/2014/main" id="{DE4C957D-8D9C-7A06-D2E7-EF566BA1CF5C}"/>
+                  <a16:creationId xmlns:a16="http://schemas.microsoft.com/office/drawing/2014/main" id="{4B1E6CE1-C3F5-F212-DAAB-CEF11D95172A}"/>
                 </a:ext>
               </a:extLst>
             </p:cNvPr>
@@ -17820,7 +18003,7 @@
           <p:cNvPr id="24" name="!!Stage_Sub_Card_2!!">
             <a:extLst>
               <a:ext uri="{FF2B5EF4-FFF2-40B4-BE49-F238E27FC236}">
-                <a16:creationId xmlns:a16="http://schemas.microsoft.com/office/drawing/2014/main" id="{37A400E1-CFDD-9FBC-B2CD-68C97AB63308}"/>
+                <a16:creationId xmlns:a16="http://schemas.microsoft.com/office/drawing/2014/main" id="{8C0725E2-7F2D-B428-8575-26EA1169844B}"/>
               </a:ext>
             </a:extLst>
           </p:cNvPr>
@@ -17840,7 +18023,7 @@
             <p:cNvPr id="19" name="Rectangle: Rounded Corners 18">
               <a:extLst>
                 <a:ext uri="{FF2B5EF4-FFF2-40B4-BE49-F238E27FC236}">
-                  <a16:creationId xmlns:a16="http://schemas.microsoft.com/office/drawing/2014/main" id="{2399331B-F3CF-8979-060B-FED87F51BCCA}"/>
+                  <a16:creationId xmlns:a16="http://schemas.microsoft.com/office/drawing/2014/main" id="{DAAD18AE-8917-06A0-2FD1-576A79624A94}"/>
                 </a:ext>
               </a:extLst>
             </p:cNvPr>
@@ -17894,7 +18077,7 @@
             <p:cNvPr id="20" name="Oval 19">
               <a:extLst>
                 <a:ext uri="{FF2B5EF4-FFF2-40B4-BE49-F238E27FC236}">
-                  <a16:creationId xmlns:a16="http://schemas.microsoft.com/office/drawing/2014/main" id="{ED8D3D52-1BF9-469D-3596-A42EC95F7DEA}"/>
+                  <a16:creationId xmlns:a16="http://schemas.microsoft.com/office/drawing/2014/main" id="{3D03010C-7291-FC8D-8075-A07BDA0A2C77}"/>
                 </a:ext>
               </a:extLst>
             </p:cNvPr>
@@ -17962,7 +18145,7 @@
             <p:cNvPr id="22" name="Graphic 21">
               <a:extLst>
                 <a:ext uri="{FF2B5EF4-FFF2-40B4-BE49-F238E27FC236}">
-                  <a16:creationId xmlns:a16="http://schemas.microsoft.com/office/drawing/2014/main" id="{20567024-642D-FAA2-189E-9C11704D7D77}"/>
+                  <a16:creationId xmlns:a16="http://schemas.microsoft.com/office/drawing/2014/main" id="{3F9FFD47-DBB4-1103-D1F4-188369214527}"/>
                 </a:ext>
               </a:extLst>
             </p:cNvPr>
@@ -17998,7 +18181,7 @@
             <p:cNvPr id="23" name="TextBox 22">
               <a:extLst>
                 <a:ext uri="{FF2B5EF4-FFF2-40B4-BE49-F238E27FC236}">
-                  <a16:creationId xmlns:a16="http://schemas.microsoft.com/office/drawing/2014/main" id="{2EC58A8E-2DC3-7EB7-31CB-65DF305238A4}"/>
+                  <a16:creationId xmlns:a16="http://schemas.microsoft.com/office/drawing/2014/main" id="{8E8B5290-7C69-6645-49A0-6F3C592977D4}"/>
                 </a:ext>
               </a:extLst>
             </p:cNvPr>
@@ -18060,7 +18243,7 @@
           <p:cNvPr id="30" name="!!Stage_Sub_Card_3!!">
             <a:extLst>
               <a:ext uri="{FF2B5EF4-FFF2-40B4-BE49-F238E27FC236}">
-                <a16:creationId xmlns:a16="http://schemas.microsoft.com/office/drawing/2014/main" id="{13A7338B-32B4-4EC6-C7C1-CFC6CCBF7B57}"/>
+                <a16:creationId xmlns:a16="http://schemas.microsoft.com/office/drawing/2014/main" id="{323936B9-B513-8EDD-8F0A-E172A141C49E}"/>
               </a:ext>
             </a:extLst>
           </p:cNvPr>
@@ -18080,7 +18263,7 @@
             <p:cNvPr id="25" name="Rectangle: Rounded Corners 24">
               <a:extLst>
                 <a:ext uri="{FF2B5EF4-FFF2-40B4-BE49-F238E27FC236}">
-                  <a16:creationId xmlns:a16="http://schemas.microsoft.com/office/drawing/2014/main" id="{7D9C1D89-8849-C639-E65C-9997D05F10E2}"/>
+                  <a16:creationId xmlns:a16="http://schemas.microsoft.com/office/drawing/2014/main" id="{41BE69B0-8D93-896A-FAD1-C98047439E65}"/>
                 </a:ext>
               </a:extLst>
             </p:cNvPr>
@@ -18134,7 +18317,7 @@
             <p:cNvPr id="26" name="Oval 25">
               <a:extLst>
                 <a:ext uri="{FF2B5EF4-FFF2-40B4-BE49-F238E27FC236}">
-                  <a16:creationId xmlns:a16="http://schemas.microsoft.com/office/drawing/2014/main" id="{8F68AE56-71D1-3323-58D9-C2A3CC74E885}"/>
+                  <a16:creationId xmlns:a16="http://schemas.microsoft.com/office/drawing/2014/main" id="{CDB15D71-0EC1-4942-6112-26D548ACBFA5}"/>
                 </a:ext>
               </a:extLst>
             </p:cNvPr>
@@ -18202,7 +18385,7 @@
             <p:cNvPr id="28" name="Graphic 27">
               <a:extLst>
                 <a:ext uri="{FF2B5EF4-FFF2-40B4-BE49-F238E27FC236}">
-                  <a16:creationId xmlns:a16="http://schemas.microsoft.com/office/drawing/2014/main" id="{61D0945B-04E0-EA20-D146-8BAF29A4E6C4}"/>
+                  <a16:creationId xmlns:a16="http://schemas.microsoft.com/office/drawing/2014/main" id="{79B012EF-B88A-517B-3367-BC78E1DD4ECD}"/>
                 </a:ext>
               </a:extLst>
             </p:cNvPr>
@@ -18238,7 +18421,7 @@
             <p:cNvPr id="29" name="TextBox 28">
               <a:extLst>
                 <a:ext uri="{FF2B5EF4-FFF2-40B4-BE49-F238E27FC236}">
-                  <a16:creationId xmlns:a16="http://schemas.microsoft.com/office/drawing/2014/main" id="{4BE2EB15-ED7A-FB35-FBA6-AFCD521F47D9}"/>
+                  <a16:creationId xmlns:a16="http://schemas.microsoft.com/office/drawing/2014/main" id="{D88F55FF-241D-DC9F-9E81-F8F52F1AB488}"/>
                 </a:ext>
               </a:extLst>
             </p:cNvPr>
@@ -18294,7 +18477,7 @@
           <p:cNvPr id="31" name="!!Anchor_Source_Footer!!">
             <a:extLst>
               <a:ext uri="{FF2B5EF4-FFF2-40B4-BE49-F238E27FC236}">
-                <a16:creationId xmlns:a16="http://schemas.microsoft.com/office/drawing/2014/main" id="{CA7C49B2-051C-D7B8-D131-D0E375130F58}"/>
+                <a16:creationId xmlns:a16="http://schemas.microsoft.com/office/drawing/2014/main" id="{07B61257-628E-F676-339D-60BBEE5103CD}"/>
               </a:ext>
             </a:extLst>
           </p:cNvPr>
@@ -18338,7 +18521,7 @@
     </p:spTree>
     <p:extLst>
       <p:ext uri="{BB962C8B-B14F-4D97-AF65-F5344CB8AC3E}">
-        <p14:creationId xmlns:p14="http://schemas.microsoft.com/office/powerpoint/2010/main" val="983236615"/>
+        <p14:creationId xmlns:p14="http://schemas.microsoft.com/office/powerpoint/2010/main" val="520600878"/>
       </p:ext>
     </p:extLst>
   </p:cSld>
@@ -18369,9 +18552,6 @@
                     <p:cTn id="3" fill="hold">
                       <p:stCondLst>
                         <p:cond delay="indefinite"/>
-                        <p:cond evt="onBegin" delay="0">
-                          <p:tn val="2"/>
-                        </p:cond>
                       </p:stCondLst>
                       <p:childTnLst>
                         <p:par>
@@ -18381,9 +18561,9 @@
                             </p:stCondLst>
                             <p:childTnLst>
                               <p:par>
-                                <p:cTn id="5" presetID="2" presetClass="entr" presetSubtype="1" accel="50000" decel="50000" fill="hold" nodeType="withEffect">
+                                <p:cTn id="5" presetID="2" presetClass="entr" presetSubtype="1" accel="50000" decel="50000" fill="hold" nodeType="clickEffect">
                                   <p:stCondLst>
-                                    <p:cond delay="120"/>
+                                    <p:cond delay="0"/>
                                   </p:stCondLst>
                                   <p:childTnLst>
                                     <p:set>
@@ -18453,15 +18633,33 @@
                                   </p:childTnLst>
                                 </p:cTn>
                               </p:par>
+                            </p:childTnLst>
+                          </p:cTn>
+                        </p:par>
+                      </p:childTnLst>
+                    </p:cTn>
+                  </p:par>
+                  <p:par>
+                    <p:cTn id="9" fill="hold">
+                      <p:stCondLst>
+                        <p:cond delay="indefinite"/>
+                      </p:stCondLst>
+                      <p:childTnLst>
+                        <p:par>
+                          <p:cTn id="10" fill="hold">
+                            <p:stCondLst>
+                              <p:cond delay="0"/>
+                            </p:stCondLst>
+                            <p:childTnLst>
                               <p:par>
-                                <p:cTn id="9" presetID="2" presetClass="entr" presetSubtype="1" accel="50000" decel="50000" fill="hold" nodeType="withEffect">
+                                <p:cTn id="11" presetID="2" presetClass="entr" presetSubtype="1" accel="50000" decel="50000" fill="hold" nodeType="clickEffect">
                                   <p:stCondLst>
-                                    <p:cond delay="240"/>
+                                    <p:cond delay="0"/>
                                   </p:stCondLst>
                                   <p:childTnLst>
                                     <p:set>
                                       <p:cBhvr>
-                                        <p:cTn id="10" dur="1" fill="hold">
+                                        <p:cTn id="12" dur="1" fill="hold">
                                           <p:stCondLst>
                                             <p:cond delay="0"/>
                                           </p:stCondLst>
@@ -18479,7 +18677,7 @@
                                     </p:set>
                                     <p:anim calcmode="lin" valueType="num">
                                       <p:cBhvr additive="base">
-                                        <p:cTn id="11" dur="500" fill="hold"/>
+                                        <p:cTn id="13" dur="500" fill="hold"/>
                                         <p:tgtEl>
                                           <p:spTgt spid="24"/>
                                         </p:tgtEl>
@@ -18502,7 +18700,7 @@
                                     </p:anim>
                                     <p:anim calcmode="lin" valueType="num">
                                       <p:cBhvr additive="base">
-                                        <p:cTn id="12" dur="500" fill="hold"/>
+                                        <p:cTn id="14" dur="500" fill="hold"/>
                                         <p:tgtEl>
                                           <p:spTgt spid="24"/>
                                         </p:tgtEl>
@@ -18526,15 +18724,33 @@
                                   </p:childTnLst>
                                 </p:cTn>
                               </p:par>
+                            </p:childTnLst>
+                          </p:cTn>
+                        </p:par>
+                      </p:childTnLst>
+                    </p:cTn>
+                  </p:par>
+                  <p:par>
+                    <p:cTn id="15" fill="hold">
+                      <p:stCondLst>
+                        <p:cond delay="indefinite"/>
+                      </p:stCondLst>
+                      <p:childTnLst>
+                        <p:par>
+                          <p:cTn id="16" fill="hold">
+                            <p:stCondLst>
+                              <p:cond delay="0"/>
+                            </p:stCondLst>
+                            <p:childTnLst>
                               <p:par>
-                                <p:cTn id="13" presetID="2" presetClass="entr" presetSubtype="1" accel="50000" decel="50000" fill="hold" nodeType="withEffect">
+                                <p:cTn id="17" presetID="2" presetClass="entr" presetSubtype="1" accel="50000" decel="50000" fill="hold" nodeType="clickEffect">
                                   <p:stCondLst>
-                                    <p:cond delay="360"/>
+                                    <p:cond delay="0"/>
                                   </p:stCondLst>
                                   <p:childTnLst>
                                     <p:set>
                                       <p:cBhvr>
-                                        <p:cTn id="14" dur="1" fill="hold">
+                                        <p:cTn id="18" dur="1" fill="hold">
                                           <p:stCondLst>
                                             <p:cond delay="0"/>
                                           </p:stCondLst>
@@ -18552,7 +18768,7 @@
                                     </p:set>
                                     <p:anim calcmode="lin" valueType="num">
                                       <p:cBhvr additive="base">
-                                        <p:cTn id="15" dur="500" fill="hold"/>
+                                        <p:cTn id="19" dur="500" fill="hold"/>
                                         <p:tgtEl>
                                           <p:spTgt spid="30"/>
                                         </p:tgtEl>
@@ -18575,7 +18791,7 @@
                                     </p:anim>
                                     <p:anim calcmode="lin" valueType="num">
                                       <p:cBhvr additive="base">
-                                        <p:cTn id="16" dur="500" fill="hold"/>
+                                        <p:cTn id="20" dur="500" fill="hold"/>
                                         <p:tgtEl>
                                           <p:spTgt spid="30"/>
                                         </p:tgtEl>
@@ -18660,7 +18876,7 @@
           <p:cNvPr id="2" name="!!Anchor_Kicker_Rail!!">
             <a:extLst>
               <a:ext uri="{FF2B5EF4-FFF2-40B4-BE49-F238E27FC236}">
-                <a16:creationId xmlns:a16="http://schemas.microsoft.com/office/drawing/2014/main" id="{13BF99E5-A179-86C6-96EA-B36A5134443E}"/>
+                <a16:creationId xmlns:a16="http://schemas.microsoft.com/office/drawing/2014/main" id="{5BB0C99D-DA78-6617-A018-32EE9A058429}"/>
               </a:ext>
             </a:extLst>
           </p:cNvPr>
@@ -18706,7 +18922,7 @@
           <p:cNvPr id="3" name="!!Anchor_Slide_Tracker!!">
             <a:extLst>
               <a:ext uri="{FF2B5EF4-FFF2-40B4-BE49-F238E27FC236}">
-                <a16:creationId xmlns:a16="http://schemas.microsoft.com/office/drawing/2014/main" id="{CC9324B0-49B5-CF86-B939-FDB038B62DD7}"/>
+                <a16:creationId xmlns:a16="http://schemas.microsoft.com/office/drawing/2014/main" id="{97DA5AF8-9BF2-6178-7890-E854F17F4B35}"/>
               </a:ext>
             </a:extLst>
           </p:cNvPr>
@@ -18747,7 +18963,7 @@
           <p:cNvPr id="4" name="!!Anchor_Assertion_Title!!">
             <a:extLst>
               <a:ext uri="{FF2B5EF4-FFF2-40B4-BE49-F238E27FC236}">
-                <a16:creationId xmlns:a16="http://schemas.microsoft.com/office/drawing/2014/main" id="{306A52FC-5E1D-2F99-E904-656361443D2B}"/>
+                <a16:creationId xmlns:a16="http://schemas.microsoft.com/office/drawing/2014/main" id="{BE10AA99-AE93-8815-FD9C-820BFE7643ED}"/>
               </a:ext>
             </a:extLst>
           </p:cNvPr>
@@ -18793,7 +19009,7 @@
           <p:cNvPr id="10" name="!!Stage_Hero_Container!!">
             <a:extLst>
               <a:ext uri="{FF2B5EF4-FFF2-40B4-BE49-F238E27FC236}">
-                <a16:creationId xmlns:a16="http://schemas.microsoft.com/office/drawing/2014/main" id="{94ED0B1A-79D7-8AD5-F845-C74562F80D76}"/>
+                <a16:creationId xmlns:a16="http://schemas.microsoft.com/office/drawing/2014/main" id="{43A32882-E4C9-10BE-71F2-05B7FE2AF63B}"/>
               </a:ext>
             </a:extLst>
           </p:cNvPr>
@@ -18813,7 +19029,7 @@
             <p:cNvPr id="5" name="Rectangle: Rounded Corners 4">
               <a:extLst>
                 <a:ext uri="{FF2B5EF4-FFF2-40B4-BE49-F238E27FC236}">
-                  <a16:creationId xmlns:a16="http://schemas.microsoft.com/office/drawing/2014/main" id="{9B6C95FB-DC54-A7FD-E53A-A0C5A88FD845}"/>
+                  <a16:creationId xmlns:a16="http://schemas.microsoft.com/office/drawing/2014/main" id="{124F8DAB-483B-354A-39A9-EFBC0BA1AB4C}"/>
                 </a:ext>
               </a:extLst>
             </p:cNvPr>
@@ -18867,7 +19083,7 @@
             <p:cNvPr id="6" name="Rectangle 5">
               <a:extLst>
                 <a:ext uri="{FF2B5EF4-FFF2-40B4-BE49-F238E27FC236}">
-                  <a16:creationId xmlns:a16="http://schemas.microsoft.com/office/drawing/2014/main" id="{E135E8B6-E7EC-7901-379A-C0B57D6C22A9}"/>
+                  <a16:creationId xmlns:a16="http://schemas.microsoft.com/office/drawing/2014/main" id="{509D6B50-457F-1004-6774-D98E97AB9ACB}"/>
                 </a:ext>
               </a:extLst>
             </p:cNvPr>
@@ -18943,7 +19159,7 @@
             <p:cNvPr id="8" name="Graphic 7">
               <a:extLst>
                 <a:ext uri="{FF2B5EF4-FFF2-40B4-BE49-F238E27FC236}">
-                  <a16:creationId xmlns:a16="http://schemas.microsoft.com/office/drawing/2014/main" id="{60859D90-1B39-8435-1530-4038770A1C80}"/>
+                  <a16:creationId xmlns:a16="http://schemas.microsoft.com/office/drawing/2014/main" id="{B22EA46E-DD14-C336-1D31-234027E3C6B6}"/>
                 </a:ext>
               </a:extLst>
             </p:cNvPr>
@@ -18979,7 +19195,7 @@
             <p:cNvPr id="9" name="TextBox 8">
               <a:extLst>
                 <a:ext uri="{FF2B5EF4-FFF2-40B4-BE49-F238E27FC236}">
-                  <a16:creationId xmlns:a16="http://schemas.microsoft.com/office/drawing/2014/main" id="{33FEE8E0-B4B8-2977-98D9-A8633C40715F}"/>
+                  <a16:creationId xmlns:a16="http://schemas.microsoft.com/office/drawing/2014/main" id="{45797DEB-90B3-B581-480C-6BD58E61ECD3}"/>
                 </a:ext>
               </a:extLst>
             </p:cNvPr>
@@ -19035,7 +19251,7 @@
           <p:cNvPr id="16" name="!!Stage_Sub_Card_1!!">
             <a:extLst>
               <a:ext uri="{FF2B5EF4-FFF2-40B4-BE49-F238E27FC236}">
-                <a16:creationId xmlns:a16="http://schemas.microsoft.com/office/drawing/2014/main" id="{13991D1A-0E1F-7DE2-9AAF-AB5E8CE23818}"/>
+                <a16:creationId xmlns:a16="http://schemas.microsoft.com/office/drawing/2014/main" id="{AA414CCB-3E66-4607-3B38-A902C154166D}"/>
               </a:ext>
             </a:extLst>
           </p:cNvPr>
@@ -19055,7 +19271,7 @@
             <p:cNvPr id="11" name="Rectangle: Rounded Corners 10">
               <a:extLst>
                 <a:ext uri="{FF2B5EF4-FFF2-40B4-BE49-F238E27FC236}">
-                  <a16:creationId xmlns:a16="http://schemas.microsoft.com/office/drawing/2014/main" id="{BB50430D-1123-0130-0777-378075B9B7E4}"/>
+                  <a16:creationId xmlns:a16="http://schemas.microsoft.com/office/drawing/2014/main" id="{2CC91B47-7FDB-69D0-C4C8-04EC91719B7D}"/>
                 </a:ext>
               </a:extLst>
             </p:cNvPr>
@@ -19109,7 +19325,7 @@
             <p:cNvPr id="12" name="Rectangle 11">
               <a:extLst>
                 <a:ext uri="{FF2B5EF4-FFF2-40B4-BE49-F238E27FC236}">
-                  <a16:creationId xmlns:a16="http://schemas.microsoft.com/office/drawing/2014/main" id="{75807E8A-9889-03E0-D732-2331210B2C25}"/>
+                  <a16:creationId xmlns:a16="http://schemas.microsoft.com/office/drawing/2014/main" id="{645B8491-7AF9-6A38-6734-D2AE53E3A505}"/>
                 </a:ext>
               </a:extLst>
             </p:cNvPr>
@@ -19185,7 +19401,7 @@
             <p:cNvPr id="14" name="Graphic 13">
               <a:extLst>
                 <a:ext uri="{FF2B5EF4-FFF2-40B4-BE49-F238E27FC236}">
-                  <a16:creationId xmlns:a16="http://schemas.microsoft.com/office/drawing/2014/main" id="{02FDC026-D957-027E-F85F-F58E53C08E72}"/>
+                  <a16:creationId xmlns:a16="http://schemas.microsoft.com/office/drawing/2014/main" id="{5B81AED1-18F2-FC08-362A-45F8C24329E5}"/>
                 </a:ext>
               </a:extLst>
             </p:cNvPr>
@@ -19221,7 +19437,7 @@
             <p:cNvPr id="15" name="TextBox 14">
               <a:extLst>
                 <a:ext uri="{FF2B5EF4-FFF2-40B4-BE49-F238E27FC236}">
-                  <a16:creationId xmlns:a16="http://schemas.microsoft.com/office/drawing/2014/main" id="{698B7067-78F5-E422-C86A-00AB67D5E7F8}"/>
+                  <a16:creationId xmlns:a16="http://schemas.microsoft.com/office/drawing/2014/main" id="{73685F24-47AB-FD41-F598-6893F0007E58}"/>
                 </a:ext>
               </a:extLst>
             </p:cNvPr>
@@ -19283,7 +19499,7 @@
           <p:cNvPr id="22" name="!!Stage_Sub_Card_2!!">
             <a:extLst>
               <a:ext uri="{FF2B5EF4-FFF2-40B4-BE49-F238E27FC236}">
-                <a16:creationId xmlns:a16="http://schemas.microsoft.com/office/drawing/2014/main" id="{61EAFEF5-DDB0-A315-F65F-C4320BF284CD}"/>
+                <a16:creationId xmlns:a16="http://schemas.microsoft.com/office/drawing/2014/main" id="{7136451D-2455-C172-A1B0-6D9B85C8C338}"/>
               </a:ext>
             </a:extLst>
           </p:cNvPr>
@@ -19303,7 +19519,7 @@
             <p:cNvPr id="17" name="Rectangle: Rounded Corners 16">
               <a:extLst>
                 <a:ext uri="{FF2B5EF4-FFF2-40B4-BE49-F238E27FC236}">
-                  <a16:creationId xmlns:a16="http://schemas.microsoft.com/office/drawing/2014/main" id="{CF3BD3C9-B534-0716-C09D-AB6B671F97A1}"/>
+                  <a16:creationId xmlns:a16="http://schemas.microsoft.com/office/drawing/2014/main" id="{B04209D4-78D8-72DF-04C6-A9FBA83E56AF}"/>
                 </a:ext>
               </a:extLst>
             </p:cNvPr>
@@ -19357,7 +19573,7 @@
             <p:cNvPr id="18" name="Rectangle 17">
               <a:extLst>
                 <a:ext uri="{FF2B5EF4-FFF2-40B4-BE49-F238E27FC236}">
-                  <a16:creationId xmlns:a16="http://schemas.microsoft.com/office/drawing/2014/main" id="{4181A4FF-B861-17BD-25A4-2914A99076E0}"/>
+                  <a16:creationId xmlns:a16="http://schemas.microsoft.com/office/drawing/2014/main" id="{C7D4196B-0150-2504-D3E1-047E1A7E1259}"/>
                 </a:ext>
               </a:extLst>
             </p:cNvPr>
@@ -19433,7 +19649,7 @@
             <p:cNvPr id="20" name="Graphic 19">
               <a:extLst>
                 <a:ext uri="{FF2B5EF4-FFF2-40B4-BE49-F238E27FC236}">
-                  <a16:creationId xmlns:a16="http://schemas.microsoft.com/office/drawing/2014/main" id="{EF74C505-E927-26E9-A084-C78DB7F92E0B}"/>
+                  <a16:creationId xmlns:a16="http://schemas.microsoft.com/office/drawing/2014/main" id="{385402B2-E6B2-30BF-0218-0F8352CD6C53}"/>
                 </a:ext>
               </a:extLst>
             </p:cNvPr>
@@ -19469,7 +19685,7 @@
             <p:cNvPr id="21" name="TextBox 20">
               <a:extLst>
                 <a:ext uri="{FF2B5EF4-FFF2-40B4-BE49-F238E27FC236}">
-                  <a16:creationId xmlns:a16="http://schemas.microsoft.com/office/drawing/2014/main" id="{DFA4A437-1C36-BC12-0428-8D4EB18FBCF4}"/>
+                  <a16:creationId xmlns:a16="http://schemas.microsoft.com/office/drawing/2014/main" id="{937F4F7B-735A-D990-8E1C-992FF5F56FA5}"/>
                 </a:ext>
               </a:extLst>
             </p:cNvPr>
@@ -19531,7 +19747,7 @@
           <p:cNvPr id="28" name="!!Stage_Sub_Card_3!!">
             <a:extLst>
               <a:ext uri="{FF2B5EF4-FFF2-40B4-BE49-F238E27FC236}">
-                <a16:creationId xmlns:a16="http://schemas.microsoft.com/office/drawing/2014/main" id="{F77DD759-A5E5-564E-EE72-37F9AD5BAE05}"/>
+                <a16:creationId xmlns:a16="http://schemas.microsoft.com/office/drawing/2014/main" id="{359E10ED-43E3-CBBB-CE6D-73452972231D}"/>
               </a:ext>
             </a:extLst>
           </p:cNvPr>
@@ -19551,7 +19767,7 @@
             <p:cNvPr id="23" name="Rectangle: Rounded Corners 22">
               <a:extLst>
                 <a:ext uri="{FF2B5EF4-FFF2-40B4-BE49-F238E27FC236}">
-                  <a16:creationId xmlns:a16="http://schemas.microsoft.com/office/drawing/2014/main" id="{709AA026-B1D3-1418-2CFA-A0D83120C268}"/>
+                  <a16:creationId xmlns:a16="http://schemas.microsoft.com/office/drawing/2014/main" id="{10F9CC3D-0072-5465-E7FF-A43F60D0BCBA}"/>
                 </a:ext>
               </a:extLst>
             </p:cNvPr>
@@ -19605,7 +19821,7 @@
             <p:cNvPr id="24" name="Rectangle 23">
               <a:extLst>
                 <a:ext uri="{FF2B5EF4-FFF2-40B4-BE49-F238E27FC236}">
-                  <a16:creationId xmlns:a16="http://schemas.microsoft.com/office/drawing/2014/main" id="{201F8DAA-108E-3F37-7706-63781D3F21FB}"/>
+                  <a16:creationId xmlns:a16="http://schemas.microsoft.com/office/drawing/2014/main" id="{108A5B07-330C-2CB1-D6F4-53D37FEE648C}"/>
                 </a:ext>
               </a:extLst>
             </p:cNvPr>
@@ -19681,7 +19897,7 @@
             <p:cNvPr id="26" name="Graphic 25">
               <a:extLst>
                 <a:ext uri="{FF2B5EF4-FFF2-40B4-BE49-F238E27FC236}">
-                  <a16:creationId xmlns:a16="http://schemas.microsoft.com/office/drawing/2014/main" id="{F59079F1-5F79-D11C-78FA-16FB3389C049}"/>
+                  <a16:creationId xmlns:a16="http://schemas.microsoft.com/office/drawing/2014/main" id="{B65E3319-39AA-7E9B-CFAB-648E1EF4755A}"/>
                 </a:ext>
               </a:extLst>
             </p:cNvPr>
@@ -19717,7 +19933,7 @@
             <p:cNvPr id="27" name="TextBox 26">
               <a:extLst>
                 <a:ext uri="{FF2B5EF4-FFF2-40B4-BE49-F238E27FC236}">
-                  <a16:creationId xmlns:a16="http://schemas.microsoft.com/office/drawing/2014/main" id="{9075DAC2-737A-B692-7E2A-DCD5EE7FB510}"/>
+                  <a16:creationId xmlns:a16="http://schemas.microsoft.com/office/drawing/2014/main" id="{AB604DDA-796C-3220-62FF-A0A2F24D0913}"/>
                 </a:ext>
               </a:extLst>
             </p:cNvPr>
@@ -19779,7 +19995,7 @@
           <p:cNvPr id="29" name="!!Anchor_Source_Footer!!">
             <a:extLst>
               <a:ext uri="{FF2B5EF4-FFF2-40B4-BE49-F238E27FC236}">
-                <a16:creationId xmlns:a16="http://schemas.microsoft.com/office/drawing/2014/main" id="{DF873326-F06D-69FD-8793-2A641F5811A9}"/>
+                <a16:creationId xmlns:a16="http://schemas.microsoft.com/office/drawing/2014/main" id="{BE645885-CF22-61FE-D8DE-02728C6A3C07}"/>
               </a:ext>
             </a:extLst>
           </p:cNvPr>
@@ -19823,7 +20039,7 @@
     </p:spTree>
     <p:extLst>
       <p:ext uri="{BB962C8B-B14F-4D97-AF65-F5344CB8AC3E}">
-        <p14:creationId xmlns:p14="http://schemas.microsoft.com/office/powerpoint/2010/main" val="1380649135"/>
+        <p14:creationId xmlns:p14="http://schemas.microsoft.com/office/powerpoint/2010/main" val="2132421302"/>
       </p:ext>
     </p:extLst>
   </p:cSld>
@@ -19854,9 +20070,6 @@
                     <p:cTn id="3" fill="hold">
                       <p:stCondLst>
                         <p:cond delay="indefinite"/>
-                        <p:cond evt="onBegin" delay="0">
-                          <p:tn val="2"/>
-                        </p:cond>
                       </p:stCondLst>
                       <p:childTnLst>
                         <p:par>
@@ -19866,9 +20079,9 @@
                             </p:stCondLst>
                             <p:childTnLst>
                               <p:par>
-                                <p:cTn id="5" presetID="2" presetClass="entr" presetSubtype="1" accel="50000" decel="50000" fill="hold" nodeType="withEffect">
+                                <p:cTn id="5" presetID="2" presetClass="entr" presetSubtype="1" accel="50000" decel="50000" fill="hold" nodeType="clickEffect">
                                   <p:stCondLst>
-                                    <p:cond delay="120"/>
+                                    <p:cond delay="0"/>
                                   </p:stCondLst>
                                   <p:childTnLst>
                                     <p:set>
@@ -19938,15 +20151,33 @@
                                   </p:childTnLst>
                                 </p:cTn>
                               </p:par>
+                            </p:childTnLst>
+                          </p:cTn>
+                        </p:par>
+                      </p:childTnLst>
+                    </p:cTn>
+                  </p:par>
+                  <p:par>
+                    <p:cTn id="9" fill="hold">
+                      <p:stCondLst>
+                        <p:cond delay="indefinite"/>
+                      </p:stCondLst>
+                      <p:childTnLst>
+                        <p:par>
+                          <p:cTn id="10" fill="hold">
+                            <p:stCondLst>
+                              <p:cond delay="0"/>
+                            </p:stCondLst>
+                            <p:childTnLst>
                               <p:par>
-                                <p:cTn id="9" presetID="2" presetClass="entr" presetSubtype="1" accel="50000" decel="50000" fill="hold" nodeType="withEffect">
+                                <p:cTn id="11" presetID="2" presetClass="entr" presetSubtype="1" accel="50000" decel="50000" fill="hold" nodeType="clickEffect">
                                   <p:stCondLst>
-                                    <p:cond delay="240"/>
+                                    <p:cond delay="0"/>
                                   </p:stCondLst>
                                   <p:childTnLst>
                                     <p:set>
                                       <p:cBhvr>
-                                        <p:cTn id="10" dur="1" fill="hold">
+                                        <p:cTn id="12" dur="1" fill="hold">
                                           <p:stCondLst>
                                             <p:cond delay="0"/>
                                           </p:stCondLst>
@@ -19964,7 +20195,7 @@
                                     </p:set>
                                     <p:anim calcmode="lin" valueType="num">
                                       <p:cBhvr additive="base">
-                                        <p:cTn id="11" dur="500" fill="hold"/>
+                                        <p:cTn id="13" dur="500" fill="hold"/>
                                         <p:tgtEl>
                                           <p:spTgt spid="22"/>
                                         </p:tgtEl>
@@ -19987,7 +20218,7 @@
                                     </p:anim>
                                     <p:anim calcmode="lin" valueType="num">
                                       <p:cBhvr additive="base">
-                                        <p:cTn id="12" dur="500" fill="hold"/>
+                                        <p:cTn id="14" dur="500" fill="hold"/>
                                         <p:tgtEl>
                                           <p:spTgt spid="22"/>
                                         </p:tgtEl>
@@ -20011,15 +20242,33 @@
                                   </p:childTnLst>
                                 </p:cTn>
                               </p:par>
+                            </p:childTnLst>
+                          </p:cTn>
+                        </p:par>
+                      </p:childTnLst>
+                    </p:cTn>
+                  </p:par>
+                  <p:par>
+                    <p:cTn id="15" fill="hold">
+                      <p:stCondLst>
+                        <p:cond delay="indefinite"/>
+                      </p:stCondLst>
+                      <p:childTnLst>
+                        <p:par>
+                          <p:cTn id="16" fill="hold">
+                            <p:stCondLst>
+                              <p:cond delay="0"/>
+                            </p:stCondLst>
+                            <p:childTnLst>
                               <p:par>
-                                <p:cTn id="13" presetID="2" presetClass="entr" presetSubtype="1" accel="50000" decel="50000" fill="hold" nodeType="withEffect">
+                                <p:cTn id="17" presetID="2" presetClass="entr" presetSubtype="1" accel="50000" decel="50000" fill="hold" nodeType="clickEffect">
                                   <p:stCondLst>
-                                    <p:cond delay="360"/>
+                                    <p:cond delay="0"/>
                                   </p:stCondLst>
                                   <p:childTnLst>
                                     <p:set>
                                       <p:cBhvr>
-                                        <p:cTn id="14" dur="1" fill="hold">
+                                        <p:cTn id="18" dur="1" fill="hold">
                                           <p:stCondLst>
                                             <p:cond delay="0"/>
                                           </p:stCondLst>
@@ -20037,7 +20286,7 @@
                                     </p:set>
                                     <p:anim calcmode="lin" valueType="num">
                                       <p:cBhvr additive="base">
-                                        <p:cTn id="15" dur="500" fill="hold"/>
+                                        <p:cTn id="19" dur="500" fill="hold"/>
                                         <p:tgtEl>
                                           <p:spTgt spid="28"/>
                                         </p:tgtEl>
@@ -20060,7 +20309,7 @@
                                     </p:anim>
                                     <p:anim calcmode="lin" valueType="num">
                                       <p:cBhvr additive="base">
-                                        <p:cTn id="16" dur="500" fill="hold"/>
+                                        <p:cTn id="20" dur="500" fill="hold"/>
                                         <p:tgtEl>
                                           <p:spTgt spid="28"/>
                                         </p:tgtEl>
